--- a/chateau_in_the_woods/Chateau_in_the_Woods_IC_Presentation.pptx
+++ b/chateau_in_the_woods/Chateau_in_the_Woods_IC_Presentation.pptx
@@ -249,25 +249,25 @@
                 <c:ptCount val="7"/>
                 <c:lvl>
                   <c:pt idx="0">
-                    <c:v>$11.5mm</c:v>
+                    <c:v>$10.5mm</c:v>
                   </c:pt>
                   <c:pt idx="1">
-                    <c:v>$12.0mm</c:v>
+                    <c:v>$11.0mm</c:v>
                   </c:pt>
                   <c:pt idx="2">
-                    <c:v>$12.25mm</c:v>
+                    <c:v>$11.25mm</c:v>
                   </c:pt>
                   <c:pt idx="3">
-                    <c:v>$12.75mm</c:v>
+                    <c:v>$11.75mm</c:v>
                   </c:pt>
                   <c:pt idx="4">
+                    <c:v>$12.5mm</c:v>
+                  </c:pt>
+                  <c:pt idx="5">
                     <c:v>$13.25mm</c:v>
                   </c:pt>
-                  <c:pt idx="5">
+                  <c:pt idx="6">
                     <c:v>$14.2mm</c:v>
-                  </c:pt>
-                  <c:pt idx="6">
-                    <c:v>$14.75mm</c:v>
                   </c:pt>
                 </c:lvl>
               </c:multiLvlStrCache>
@@ -280,25 +280,25 @@
                 <c:formatCode>General</c:formatCode>
                 <c:ptCount val="7"/>
                 <c:pt idx="0">
-                  <c:v>0.166</c:v>
+                  <c:v>0.172</c:v>
                 </c:pt>
                 <c:pt idx="1">
-                  <c:v>0.147</c:v>
+                  <c:v>0.152</c:v>
                 </c:pt>
                 <c:pt idx="2">
-                  <c:v>0.138</c:v>
+                  <c:v>0.142</c:v>
                 </c:pt>
                 <c:pt idx="3">
-                  <c:v>0.12</c:v>
+                  <c:v>0.123</c:v>
                 </c:pt>
                 <c:pt idx="4">
-                  <c:v>0.101</c:v>
+                  <c:v>0.094</c:v>
                 </c:pt>
                 <c:pt idx="5">
-                  <c:v>0.067</c:v>
+                  <c:v>0.065</c:v>
                 </c:pt>
                 <c:pt idx="6">
-                  <c:v>0.049</c:v>
+                  <c:v>0.031</c:v>
                 </c:pt>
               </c:numCache>
             </c:numRef>
@@ -837,7 +837,7 @@
           <a:p>
             <a:r>
               <a:rPr lang="en-US" dirty="0"/>
-              <a:t>Recommendation is conditional on basis, not on the business plan. The interior renovation earns 12.7% on cost; the constraint is the going-in price and the ~$1.06mm of deferred maintenance that carries no rent. Walk-away is $13.0mm, where the levered IRR falls to about 10%.</a:t>
+              <a:t>The base case is deliberately conservative on what we do not control — rent growth is set off actual 1Q-26 metro performance rather than a forecast, and the exit cap is held at 6.75%. It is confident on what we do control: the renovation premium, the ancillary income and expense management. To justify $14.2mm you would need roughly 4.0% annual rent growth AND a 6.25% exit cap simultaneously. Metro actual is 1.1%.</a:t>
             </a:r>
             <a:endParaRPr lang="en-US" dirty="0"/>
           </a:p>
@@ -925,7 +925,7 @@
           <a:p>
             <a:r>
               <a:rPr lang="en-US" dirty="0"/>
-              <a:t>If the seller holds at $14.2mm we pass. Two structures worth testing before walking: a tax escrow or price adjustment tied to the first post-closing Form 11A, and a seller credit for the identified immediate needs (sump pumps, patio drains, asphalt — about $190K).</a:t>
+              <a:t>Expect to lose this deal at $11.25mm; that is the right outcome. If the seller holds at $14.2mm we pass. Two structures worth testing before walking: a tax escrow or price adjustment tied to the first post-closing Form 11A, and a seller credit for the identified immediate needs (sump pumps, patio drains, asphalt — about $190K).</a:t>
             </a:r>
             <a:endParaRPr lang="en-US" dirty="0"/>
           </a:p>
@@ -1547,7 +1547,7 @@
                 <a:ea typeface="Calibri" pitchFamily="34" charset="-122"/>
                 <a:cs typeface="Calibri" pitchFamily="34" charset="-120"/>
               </a:rPr>
-              <a:t>Bid $12.25mm ($103,814/unit).</a:t>
+              <a:t>Bid $11.25mm ($95,339/unit).</a:t>
             </a:r>
             <a:endParaRPr lang="en-US" sz="1150" dirty="0"/>
           </a:p>
@@ -1564,7 +1564,7 @@
                 <a:ea typeface="Calibri" pitchFamily="34" charset="-122"/>
                 <a:cs typeface="Calibri" pitchFamily="34" charset="-120"/>
               </a:rPr>
-              <a:t>Hard walk above $13.0mm.</a:t>
+              <a:t>Hard walk above $12.0mm.</a:t>
             </a:r>
             <a:endParaRPr lang="en-US" sz="1150" dirty="0"/>
           </a:p>
@@ -1625,7 +1625,7 @@
                 <a:ea typeface="Cambria" pitchFamily="34" charset="-122"/>
                 <a:cs typeface="Cambria" pitchFamily="34" charset="-120"/>
               </a:rPr>
-              <a:t>$12.25mm</a:t>
+              <a:t>$11.25mm</a:t>
             </a:r>
             <a:endParaRPr lang="en-US" sz="2100" dirty="0"/>
           </a:p>
@@ -1703,7 +1703,7 @@
                 <a:ea typeface="Calibri" pitchFamily="34" charset="-122"/>
                 <a:cs typeface="Calibri" pitchFamily="34" charset="-120"/>
               </a:rPr>
-              <a:t>$103,814 per unit  ·  7.15% going-in cap</a:t>
+              <a:t>$95,339 per unit  ·  7.57% going-in cap</a:t>
             </a:r>
             <a:endParaRPr lang="en-US" sz="850" dirty="0"/>
           </a:p>
@@ -1764,7 +1764,7 @@
                 <a:ea typeface="Cambria" pitchFamily="34" charset="-122"/>
                 <a:cs typeface="Cambria" pitchFamily="34" charset="-120"/>
               </a:rPr>
-              <a:t>13.8% / 1.81x</a:t>
+              <a:t>14.2% / 1.83x</a:t>
             </a:r>
             <a:endParaRPr lang="en-US" sz="2100" dirty="0"/>
           </a:p>
@@ -1897,13 +1897,13 @@
             <a:r>
               <a:rPr lang="en-US" sz="2100" b="1" dirty="0">
                 <a:solidFill>
-                  <a:srgbClr val="C8811F"/>
+                  <a:srgbClr val="A32E22"/>
                 </a:solidFill>
                 <a:latin typeface="Cambria" pitchFamily="34" charset="0"/>
                 <a:ea typeface="Cambria" pitchFamily="34" charset="-122"/>
                 <a:cs typeface="Cambria" pitchFamily="34" charset="-120"/>
               </a:rPr>
-              <a:t>6.7% / 1.35x</a:t>
+              <a:t>3.1% / 1.15x</a:t>
             </a:r>
             <a:endParaRPr lang="en-US" sz="2100" dirty="0"/>
           </a:p>
@@ -2036,13 +2036,13 @@
             <a:r>
               <a:rPr lang="en-US" sz="2100" b="1" dirty="0">
                 <a:solidFill>
-                  <a:srgbClr val="97BC62"/>
+                  <a:srgbClr val="C8811F"/>
                 </a:solidFill>
                 <a:latin typeface="Cambria" pitchFamily="34" charset="0"/>
                 <a:ea typeface="Cambria" pitchFamily="34" charset="-122"/>
                 <a:cs typeface="Cambria" pitchFamily="34" charset="-120"/>
               </a:rPr>
-              <a:t>12.7%</a:t>
+              <a:t>1.1%</a:t>
             </a:r>
             <a:endParaRPr lang="en-US" sz="2100" dirty="0"/>
           </a:p>
@@ -2081,7 +2081,7 @@
                 <a:ea typeface="Calibri" pitchFamily="34" charset="-122"/>
                 <a:cs typeface="Calibri" pitchFamily="34" charset="-120"/>
               </a:rPr>
-              <a:t>Renovation return on cost</a:t>
+              <a:t>Metro rent growth, actual</a:t>
             </a:r>
             <a:endParaRPr lang="en-US" sz="1050" dirty="0"/>
           </a:p>
@@ -2120,7 +2120,7 @@
                 <a:ea typeface="Calibri" pitchFamily="34" charset="-122"/>
                 <a:cs typeface="Calibri" pitchFamily="34" charset="-120"/>
               </a:rPr>
-              <a:t>$15,754/unit  ·  $166/mo premium</a:t>
+              <a:t>Yardi Matrix 1Q-26  ·  T-3 rents flat</a:t>
             </a:r>
             <a:endParaRPr lang="en-US" sz="850" dirty="0"/>
           </a:p>
@@ -2173,8 +2173,8 @@
         </p:nvSpPr>
         <p:spPr>
           <a:xfrm>
-            <a:off x="502920" y="3493008"/>
-            <a:ext cx="5532120" cy="2880360"/>
+            <a:off x="502920" y="3474720"/>
+            <a:ext cx="5532120" cy="2926080"/>
           </a:xfrm>
           <a:prstGeom prst="rect">
             <a:avLst/>
@@ -2188,16 +2188,16 @@
           <a:p>
             <a:pPr marL="342900" indent="-342900">
               <a:lnSpc>
-                <a:spcPts val="1200"/>
+                <a:spcPts val="1120"/>
               </a:lnSpc>
               <a:spcAft>
-                <a:spcPts val="800"/>
+                <a:spcPts val="600"/>
               </a:spcAft>
               <a:buSzPct val="100000"/>
               <a:buChar char="▪"/>
             </a:pPr>
             <a:r>
-              <a:rPr lang="en-US" sz="950" dirty="0">
+              <a:rPr lang="en-US" sz="900" dirty="0">
                 <a:solidFill>
                   <a:srgbClr val="DFE6E0"/>
                 </a:solidFill>
@@ -2205,23 +2205,23 @@
                 <a:ea typeface="Calibri" pitchFamily="34" charset="-122"/>
                 <a:cs typeface="Calibri" pitchFamily="34" charset="-120"/>
               </a:rPr>
-              <a:t>118 units, built 1974, Northside Indianapolis. 96.6% occupied and every unit in classic condition. The plan: renovate all 118, add in-unit laundry to the 65 units without it, modernise the common areas — $3.07mm, $26,030 per unit.</a:t>
+              <a:t>118 units, built 1974, Northside Indianapolis. 96.6% occupied, all units classic. Renovate all 118, add in-unit laundry to the 65 without it, modernise the common areas — $3.07mm, $26,030/unit.</a:t>
             </a:r>
-            <a:endParaRPr lang="en-US" sz="950" dirty="0"/>
+            <a:endParaRPr lang="en-US" sz="900" dirty="0"/>
           </a:p>
           <a:p>
             <a:pPr marL="342900" indent="-342900">
               <a:lnSpc>
-                <a:spcPts val="1200"/>
+                <a:spcPts val="1120"/>
               </a:lnSpc>
               <a:spcAft>
-                <a:spcPts val="800"/>
+                <a:spcPts val="600"/>
               </a:spcAft>
               <a:buSzPct val="100000"/>
               <a:buChar char="▪"/>
             </a:pPr>
             <a:r>
-              <a:rPr lang="en-US" sz="950" dirty="0">
+              <a:rPr lang="en-US" sz="900" dirty="0">
                 <a:solidFill>
                   <a:srgbClr val="DFE6E0"/>
                 </a:solidFill>
@@ -2229,23 +2229,23 @@
                 <a:ea typeface="Calibri" pitchFamily="34" charset="-122"/>
                 <a:cs typeface="Calibri" pitchFamily="34" charset="-120"/>
               </a:rPr>
-              <a:t>The renovation works. $15,754/unit blended earns a $166/month premium — a 12.7% return on cost against a 6.75% exit; the laundry component alone earns 18%. Renovated rents of $1,250-$1,725 sit inside the comp set: Avalon Lake, same 1974 vintage, gets $1,655 on a 1,090 SF two-bedroom against our $1,250 Verdun.</a:t>
+              <a:t>The renovation works. $15,754/unit earns a $166/month premium, a 12.7% return on cost. Renovated rents average $1.29/SF against a $1,310 metro average asking rent — Chateau's units are far larger than market, so we underwrite below the metro average per foot.</a:t>
             </a:r>
-            <a:endParaRPr lang="en-US" sz="950" dirty="0"/>
+            <a:endParaRPr lang="en-US" sz="900" dirty="0"/>
           </a:p>
           <a:p>
             <a:pPr marL="342900" indent="-342900">
               <a:lnSpc>
-                <a:spcPts val="1200"/>
+                <a:spcPts val="1120"/>
               </a:lnSpc>
               <a:spcAft>
-                <a:spcPts val="800"/>
+                <a:spcPts val="600"/>
               </a:spcAft>
               <a:buSzPct val="100000"/>
               <a:buChar char="▪"/>
             </a:pPr>
             <a:r>
-              <a:rPr lang="en-US" sz="950" dirty="0">
+              <a:rPr lang="en-US" sz="900" dirty="0">
                 <a:solidFill>
                   <a:srgbClr val="DFE6E0"/>
                 </a:solidFill>
@@ -2253,23 +2253,23 @@
                 <a:ea typeface="Calibri" pitchFamily="34" charset="-122"/>
                 <a:cs typeface="Calibri" pitchFamily="34" charset="-120"/>
               </a:rPr>
-              <a:t>The price does not. Capitalised at exit, the whole $3.07mm plan nets $9,867 of value — the interior scope makes $1.07mm and $1.06mm of deferred maintenance gives all of it back. And the ask is struck on a forecast NOI that already embeds the loss-to-lease burn-off, the recovery to 95% occupancy and the ancillary income we would have to create ourselves.</a:t>
+              <a:t>But the market is not growing. Yardi Matrix 1Q-26: metro rents FLAT on a trailing-three-month basis, up just 1.1% year over year, and 2025 starts MORE THAN DOUBLED — delivering 2027-28, inside our hold, with Carmel taking over half of 2026 deliveries just north of us. We underwrite 1.5/2.0/2.5/3.0/3.0%, not a flat 3%.</a:t>
             </a:r>
-            <a:endParaRPr lang="en-US" sz="950" dirty="0"/>
+            <a:endParaRPr lang="en-US" sz="900" dirty="0"/>
           </a:p>
           <a:p>
             <a:pPr marL="342900" indent="-342900">
               <a:lnSpc>
-                <a:spcPts val="1200"/>
+                <a:spcPts val="1120"/>
               </a:lnSpc>
               <a:spcAft>
-                <a:spcPts val="800"/>
+                <a:spcPts val="600"/>
               </a:spcAft>
               <a:buSzPct val="100000"/>
               <a:buChar char="▪"/>
             </a:pPr>
             <a:r>
-              <a:rPr lang="en-US" sz="950" dirty="0">
+              <a:rPr lang="en-US" sz="900" dirty="0">
                 <a:solidFill>
                   <a:srgbClr val="DFE6E0"/>
                 </a:solidFill>
@@ -2277,9 +2277,33 @@
                 <a:ea typeface="Calibri" pitchFamily="34" charset="-122"/>
                 <a:cs typeface="Calibri" pitchFamily="34" charset="-120"/>
               </a:rPr>
-              <a:t>Recommendation: approve the plan and the capital. Bid $12.25mm, best and final $12.5mm, hard walk $13.0mm. Nothing here justifies stretching on basis.</a:t>
+              <a:t>At the ask it is value-destructive. $14.2mm buys a 6.00% going-in cap and a Year-5 yield on cost of 6.58% — 17 bps BELOW our exit cap. The whole $3.07mm plan nets minus $6,880: the interior scope creates $1.06mm, deferred maintenance takes it back.</a:t>
             </a:r>
-            <a:endParaRPr lang="en-US" sz="950" dirty="0"/>
+            <a:endParaRPr lang="en-US" sz="900" dirty="0"/>
+          </a:p>
+          <a:p>
+            <a:pPr marL="342900" indent="-342900">
+              <a:lnSpc>
+                <a:spcPts val="1120"/>
+              </a:lnSpc>
+              <a:spcAft>
+                <a:spcPts val="600"/>
+              </a:spcAft>
+              <a:buSzPct val="100000"/>
+              <a:buChar char="▪"/>
+            </a:pPr>
+            <a:r>
+              <a:rPr lang="en-US" sz="900" dirty="0">
+                <a:solidFill>
+                  <a:srgbClr val="DFE6E0"/>
+                </a:solidFill>
+                <a:latin typeface="Calibri" pitchFamily="34" charset="0"/>
+                <a:ea typeface="Calibri" pitchFamily="34" charset="-122"/>
+                <a:cs typeface="Calibri" pitchFamily="34" charset="-120"/>
+              </a:rPr>
+              <a:t>Bid $11.25mm, best and final $11.5mm, hard walk $12.0mm. We will probably lose — that is the correct outcome at these fundamentals.</a:t>
+            </a:r>
+            <a:endParaRPr lang="en-US" sz="900" dirty="0"/>
           </a:p>
         </p:txBody>
       </p:sp>
@@ -2456,7 +2480,7 @@
                           <a:ea typeface="Calibri" pitchFamily="34" charset="-122"/>
                           <a:cs typeface="Calibri" pitchFamily="34" charset="-120"/>
                         </a:rPr>
-                        <a:t>$12.25mm</a:t>
+                        <a:t>$11.25mm</a:t>
                       </a:r>
                       <a:endParaRPr lang="en-US" sz="1000" dirty="0">
                         <a:latin typeface="Calibri" charset="0"/>
@@ -2683,7 +2707,7 @@
                           <a:ea typeface="Calibri" pitchFamily="34" charset="-122"/>
                           <a:cs typeface="Calibri" pitchFamily="34" charset="-120"/>
                         </a:rPr>
-                        <a:t>$103,814</a:t>
+                        <a:t>$95,339</a:t>
                       </a:r>
                       <a:endParaRPr lang="en-US" sz="1000" dirty="0">
                         <a:latin typeface="Calibri" charset="0"/>
@@ -2889,7 +2913,7 @@
                           <a:ea typeface="Calibri" pitchFamily="34" charset="-122"/>
                           <a:cs typeface="Calibri" pitchFamily="34" charset="-120"/>
                         </a:rPr>
-                        <a:t>7.15%</a:t>
+                        <a:t>7.57%</a:t>
                       </a:r>
                       <a:endParaRPr lang="en-US" sz="1000" dirty="0">
                         <a:latin typeface="Calibri" charset="0"/>
@@ -2957,7 +2981,7 @@
                           <a:ea typeface="Calibri" pitchFamily="34" charset="-122"/>
                           <a:cs typeface="Calibri" pitchFamily="34" charset="-120"/>
                         </a:rPr>
-                        <a:t>6.17%</a:t>
+                        <a:t>6.00%</a:t>
                       </a:r>
                       <a:endParaRPr lang="en-US" sz="1000" dirty="0">
                         <a:latin typeface="Calibri" charset="0"/>
@@ -3095,7 +3119,7 @@
                           <a:ea typeface="Calibri" pitchFamily="34" charset="-122"/>
                           <a:cs typeface="Calibri" pitchFamily="34" charset="-120"/>
                         </a:rPr>
-                        <a:t>$129,843</a:t>
+                        <a:t>$121,369</a:t>
                       </a:r>
                       <a:endParaRPr lang="en-US" sz="1000" dirty="0">
                         <a:latin typeface="Calibri" charset="0"/>
@@ -3301,7 +3325,7 @@
                           <a:ea typeface="Calibri" pitchFamily="34" charset="-122"/>
                           <a:cs typeface="Calibri" pitchFamily="34" charset="-120"/>
                         </a:rPr>
-                        <a:t>$5.75mm</a:t>
+                        <a:t>$5.37mm</a:t>
                       </a:r>
                       <a:endParaRPr lang="en-US" sz="1000" dirty="0">
                         <a:latin typeface="Calibri" charset="0"/>
@@ -3369,7 +3393,7 @@
                           <a:ea typeface="Calibri" pitchFamily="34" charset="-122"/>
                           <a:cs typeface="Calibri" pitchFamily="34" charset="-120"/>
                         </a:rPr>
-                        <a:t>$6.74mm</a:t>
+                        <a:t>$7.04mm</a:t>
                       </a:r>
                       <a:endParaRPr lang="en-US" sz="1000" dirty="0">
                         <a:latin typeface="Calibri" charset="0"/>
@@ -3507,7 +3531,7 @@
                           <a:ea typeface="Calibri" pitchFamily="34" charset="-122"/>
                           <a:cs typeface="Calibri" pitchFamily="34" charset="-120"/>
                         </a:rPr>
-                        <a:t>$876K / $1,209K</a:t>
+                        <a:t>$852K / $1,137K</a:t>
                       </a:r>
                       <a:endParaRPr lang="en-US" sz="1000" dirty="0">
                         <a:latin typeface="Calibri" charset="0"/>
@@ -3575,7 +3599,7 @@
                           <a:ea typeface="Calibri" pitchFamily="34" charset="-122"/>
                           <a:cs typeface="Calibri" pitchFamily="34" charset="-120"/>
                         </a:rPr>
-                        <a:t>$876K / $1,209K</a:t>
+                        <a:t>$852K / $1,137K</a:t>
                       </a:r>
                       <a:endParaRPr lang="en-US" sz="1000" dirty="0">
                         <a:latin typeface="Calibri" charset="0"/>
@@ -3713,7 +3737,7 @@
                           <a:ea typeface="Calibri" pitchFamily="34" charset="-122"/>
                           <a:cs typeface="Calibri" pitchFamily="34" charset="-120"/>
                         </a:rPr>
-                        <a:t>+114 bps</a:t>
+                        <a:t>+119 bps</a:t>
                       </a:r>
                       <a:endParaRPr lang="en-US" sz="1000" dirty="0">
                         <a:latin typeface="Calibri" charset="0"/>
@@ -3781,7 +3805,7 @@
                           <a:ea typeface="Calibri" pitchFamily="34" charset="-122"/>
                           <a:cs typeface="Calibri" pitchFamily="34" charset="-120"/>
                         </a:rPr>
-                        <a:t>+25 bps</a:t>
+                        <a:t>(17) bps</a:t>
                       </a:r>
                       <a:endParaRPr lang="en-US" sz="1000" dirty="0">
                         <a:latin typeface="Calibri" charset="0"/>
@@ -3919,7 +3943,7 @@
                           <a:ea typeface="Calibri" pitchFamily="34" charset="-122"/>
                           <a:cs typeface="Calibri" pitchFamily="34" charset="-120"/>
                         </a:rPr>
-                        <a:t>8.0%</a:t>
+                        <a:t>8.2%</a:t>
                       </a:r>
                       <a:endParaRPr lang="en-US" sz="1000" dirty="0">
                         <a:latin typeface="Calibri" charset="0"/>
@@ -3987,7 +4011,7 @@
                           <a:ea typeface="Calibri" pitchFamily="34" charset="-122"/>
                           <a:cs typeface="Calibri" pitchFamily="34" charset="-120"/>
                         </a:rPr>
-                        <a:t>6.0%</a:t>
+                        <a:t>5.2%</a:t>
                       </a:r>
                       <a:endParaRPr lang="en-US" sz="1000" dirty="0">
                         <a:latin typeface="Calibri" charset="0"/>
@@ -4057,7 +4081,7 @@
                           <a:ea typeface="Calibri" pitchFamily="34" charset="-122"/>
                           <a:cs typeface="Calibri" pitchFamily="34" charset="-120"/>
                         </a:rPr>
-                        <a:t>Unlevered IRR</a:t>
+                        <a:t>Unlevered IRR / multiple</a:t>
                       </a:r>
                       <a:endParaRPr lang="en-US" sz="1000" dirty="0">
                         <a:latin typeface="Calibri" charset="0"/>
@@ -4125,7 +4149,7 @@
                           <a:ea typeface="Calibri" pitchFamily="34" charset="-122"/>
                           <a:cs typeface="Calibri" pitchFamily="34" charset="-120"/>
                         </a:rPr>
-                        <a:t>9.4%</a:t>
+                        <a:t>9.5% / 1.51x</a:t>
                       </a:r>
                       <a:endParaRPr lang="en-US" sz="1000" dirty="0">
                         <a:latin typeface="Calibri" charset="0"/>
@@ -4193,7 +4217,7 @@
                           <a:ea typeface="Calibri" pitchFamily="34" charset="-122"/>
                           <a:cs typeface="Calibri" pitchFamily="34" charset="-120"/>
                         </a:rPr>
-                        <a:t>6.5%</a:t>
+                        <a:t>5.1% / 1.25x</a:t>
                       </a:r>
                       <a:endParaRPr lang="en-US" sz="1000" dirty="0">
                         <a:latin typeface="Calibri" charset="0"/>
@@ -4331,7 +4355,7 @@
                           <a:ea typeface="Calibri" pitchFamily="34" charset="-122"/>
                           <a:cs typeface="Calibri" pitchFamily="34" charset="-120"/>
                         </a:rPr>
-                        <a:t>13.8%</a:t>
+                        <a:t>14.2%</a:t>
                       </a:r>
                       <a:endParaRPr lang="en-US" sz="1000" dirty="0">
                         <a:latin typeface="Calibri" charset="0"/>
@@ -4399,7 +4423,7 @@
                           <a:ea typeface="Calibri" pitchFamily="34" charset="-122"/>
                           <a:cs typeface="Calibri" pitchFamily="34" charset="-120"/>
                         </a:rPr>
-                        <a:t>6.7%</a:t>
+                        <a:t>3.1%</a:t>
                       </a:r>
                       <a:endParaRPr lang="en-US" sz="1000" dirty="0">
                         <a:latin typeface="Calibri" charset="0"/>
@@ -4537,7 +4561,7 @@
                           <a:ea typeface="Calibri" pitchFamily="34" charset="-122"/>
                           <a:cs typeface="Calibri" pitchFamily="34" charset="-120"/>
                         </a:rPr>
-                        <a:t>1.81x</a:t>
+                        <a:t>1.83x</a:t>
                       </a:r>
                       <a:endParaRPr lang="en-US" sz="1000" dirty="0">
                         <a:latin typeface="Calibri" charset="0"/>
@@ -4605,7 +4629,7 @@
                           <a:ea typeface="Calibri" pitchFamily="34" charset="-122"/>
                           <a:cs typeface="Calibri" pitchFamily="34" charset="-120"/>
                         </a:rPr>
-                        <a:t>1.35x</a:t>
+                        <a:t>1.15x</a:t>
                       </a:r>
                       <a:endParaRPr lang="en-US" sz="1000" dirty="0">
                         <a:latin typeface="Calibri" charset="0"/>
@@ -4669,8 +4693,8 @@
         </p:nvSpPr>
         <p:spPr>
           <a:xfrm>
-            <a:off x="457200" y="6455664"/>
-            <a:ext cx="11274552" cy="310896"/>
+            <a:off x="457200" y="6510528"/>
+            <a:ext cx="11274552" cy="219456"/>
           </a:xfrm>
           <a:prstGeom prst="rect">
             <a:avLst/>
@@ -4694,7 +4718,7 @@
                 <a:ea typeface="Calibri" pitchFamily="34" charset="-122"/>
                 <a:cs typeface="Calibri" pitchFamily="34" charset="-120"/>
               </a:rPr>
-              <a:t>Sources: rent roll 07/01/2026 · T-12 Feb-25 to Jan-26 · CBRE Offering Memorandum 09/10/2025. No purchase price was provided; $14.2mm is derived from the OM's stated 6.9% Year-1 cap rate on CBRE's $980,838 Acquisition Forecast NOI. Returns are net of a 65% loan-to-cost / 8.0% minimum debt yield facility at 5.85% interest-only.</a:t>
+              <a:t>Sources: rent roll 07/01/2026 · T-12 Feb-25 to Jan-26 · CBRE OM 09/10/2025 · Yardi Matrix Indianapolis 1Q-2026. No price was provided; $14.2mm is implied by the OM's 6.9% Year-1 cap rate on CBRE's $980,838 forecast NOI. Debt: 65% LTC / 8.0% min debt yield / 5.85% interest-only.</a:t>
             </a:r>
             <a:endParaRPr lang="en-US" sz="750" dirty="0"/>
           </a:p>
@@ -4994,7 +5018,7 @@
                 <a:ea typeface="Calibri" pitchFamily="34" charset="-122"/>
                 <a:cs typeface="Calibri" pitchFamily="34" charset="-120"/>
               </a:rPr>
-              <a:t>Rent headroom to the comp set.  </a:t>
+              <a:t>Rent headroom, priced conservatively.  </a:t>
             </a:r>
             <a:pPr indent="0" marL="0">
               <a:lnSpc>
@@ -5014,7 +5038,7 @@
                 <a:ea typeface="Calibri" pitchFamily="34" charset="-122"/>
                 <a:cs typeface="Calibri" pitchFamily="34" charset="-120"/>
               </a:rPr>
-              <a:t>Chateau's 2-bedrooms sit at $1.08/SF against a $1.28/SF submarket average. Avalon Lake (1974) gets $1,655 on 1,090 SF; our renovated Verdun is underwritten at $1,450.</a:t>
+              <a:t>Renovated rents average $1.29/SF against a $1,310 metro average asking rent — Chateau's units are far larger than market, so we underwrite below the metro average per foot. Avalon Lake (1974, nearby) gets $1,655 on 1,090 SF; our Verdun is $1,450.</a:t>
             </a:r>
             <a:endParaRPr lang="en-US" sz="900" dirty="0"/>
           </a:p>
@@ -5057,7 +5081,7 @@
                 <a:ea typeface="Calibri" pitchFamily="34" charset="-122"/>
                 <a:cs typeface="Calibri" pitchFamily="34" charset="-120"/>
               </a:rPr>
-              <a:t>The $49 technology fee is only ~60% penetrated, the $25 valet trash charge is not yet billed even though the property starts paying for it in Jan-26, and there is no pet rent at all — roughly $110K a year of run-rate.</a:t>
+              <a:t>The $49 technology fee is only ~60% penetrated, the $25 valet trash charge is not yet billed although the property starts paying for it in Jan-26, and there is no pet rent — ~$110K a year of run-rate.</a:t>
             </a:r>
             <a:endParaRPr lang="en-US" sz="900" dirty="0"/>
           </a:p>
@@ -5100,7 +5124,7 @@
                 <a:ea typeface="Calibri" pitchFamily="34" charset="-122"/>
                 <a:cs typeface="Calibri" pitchFamily="34" charset="-120"/>
               </a:rPr>
-              <a:t>2.2% loss to lease and 6.8% trailing physical vacancy against a 5.0% stabilised target.</a:t>
+              <a:t>2.2% loss to lease and 6.8% trailing physical vacancy against a 5.5% stabilised target.</a:t>
             </a:r>
             <a:endParaRPr lang="en-US" sz="900" dirty="0"/>
           </a:p>
@@ -5267,7 +5291,50 @@
                 <a:ea typeface="Calibri" pitchFamily="34" charset="-122"/>
                 <a:cs typeface="Calibri" pitchFamily="34" charset="-120"/>
               </a:rPr>
-              <a:t>At the ask we pay a 6.17% going-in cap and fund $26,030/unit of capital. About $1.06mm of that is deferred maintenance with no rent attached, consuming nearly all the value the renovation creates.</a:t>
+              <a:t>At the ask we pay a 6.00% going-in cap, fund $26,030/unit of capital, and reach a Year-5 yield on cost of 6.58% — below the 6.75% exit. The capital plan nets minus $6,880.</a:t>
+            </a:r>
+            <a:endParaRPr lang="en-US" sz="900" dirty="0"/>
+          </a:p>
+          <a:p>
+            <a:pPr indent="0" marL="0">
+              <a:lnSpc>
+                <a:spcPts val="1100"/>
+              </a:lnSpc>
+              <a:spcAft>
+                <a:spcPts val="600"/>
+              </a:spcAft>
+              <a:buNone/>
+            </a:pPr>
+            <a:r>
+              <a:rPr lang="en-US" sz="900" b="1" dirty="0">
+                <a:solidFill>
+                  <a:srgbClr val="A32E22"/>
+                </a:solidFill>
+                <a:latin typeface="Calibri" pitchFamily="34" charset="0"/>
+                <a:ea typeface="Calibri" pitchFamily="34" charset="-122"/>
+                <a:cs typeface="Calibri" pitchFamily="34" charset="-120"/>
+              </a:rPr>
+              <a:t>Rent growth and new supply.  </a:t>
+            </a:r>
+            <a:pPr indent="0" marL="0">
+              <a:lnSpc>
+                <a:spcPts val="1100"/>
+              </a:lnSpc>
+              <a:spcAft>
+                <a:spcPts val="600"/>
+              </a:spcAft>
+              <a:buNone/>
+            </a:pPr>
+            <a:r>
+              <a:rPr lang="en-US" sz="900" dirty="0">
+                <a:solidFill>
+                  <a:srgbClr val="3D4A43"/>
+                </a:solidFill>
+                <a:latin typeface="Calibri" pitchFamily="34" charset="0"/>
+                <a:ea typeface="Calibri" pitchFamily="34" charset="-122"/>
+                <a:cs typeface="Calibri" pitchFamily="34" charset="-120"/>
+              </a:rPr>
+              <a:t>Metro rents flat on a trailing-three-month basis, +1.1% year over year in 1Q-26, and 2025 starts more than doubled — delivering 2027-28, inside our hold, with Carmel taking over half of 2026 deliveries just north of us. Each 100 bps of rent growth is worth ~3 points of IRR.</a:t>
             </a:r>
             <a:endParaRPr lang="en-US" sz="900" dirty="0"/>
           </a:p>
@@ -5310,7 +5377,7 @@
                 <a:ea typeface="Calibri" pitchFamily="34" charset="-122"/>
                 <a:cs typeface="Calibri" pitchFamily="34" charset="-120"/>
               </a:rPr>
-              <a:t>Assessed value is $5.55mm against a $14.2mm price. The OM's own comp study shows AV averaging 69% of sale price and rising 6.2% a year post-trade. We step taxes $140K to $210K; a move to 69% of price adds ~$110K a year, about $1.6mm of value.</a:t>
+              <a:t>Assessed value $5.55mm against a $14.2mm price; the OM's comp study shows AV averaging 69% of sale price post-trade. We step taxes $140K to $210K — a move to 69% adds ~$110K a year, ~$1.6mm of value.</a:t>
             </a:r>
             <a:endParaRPr lang="en-US" sz="900" dirty="0"/>
           </a:p>
@@ -5353,7 +5420,7 @@
                 <a:ea typeface="Calibri" pitchFamily="34" charset="-122"/>
                 <a:cs typeface="Calibri" pitchFamily="34" charset="-120"/>
               </a:rPr>
-              <a:t>Nothing has been renovated to a current standard, so there is no in-place evidence. Every $25/month of premium is worth roughly 1.3 points of IRR.</a:t>
+              <a:t>Nothing has been renovated to a current standard. Every $25/month of premium is worth ~1.3 points of IRR. A leased mock-up before we go hard would settle it.</a:t>
             </a:r>
             <a:endParaRPr lang="en-US" sz="900" dirty="0"/>
           </a:p>
@@ -5376,7 +5443,7 @@
                 <a:ea typeface="Calibri" pitchFamily="34" charset="-122"/>
                 <a:cs typeface="Calibri" pitchFamily="34" charset="-120"/>
               </a:rPr>
-              <a:t>1974 physical risk.  </a:t>
+              <a:t>1974 physical risk and exit.  </a:t>
             </a:r>
             <a:pPr indent="0" marL="0">
               <a:lnSpc>
@@ -5396,93 +5463,7 @@
                 <a:ea typeface="Calibri" pitchFamily="34" charset="-122"/>
                 <a:cs typeface="Calibri" pitchFamily="34" charset="-120"/>
               </a:rPr>
-              <a:t>3.5 of 5 original rubber roofs, 37 below-grade units needing drains and 4 sump pumps, original aluminium sliders, and central gas water heaters — $29K replaced in two months of the T-12.</a:t>
-            </a:r>
-            <a:endParaRPr lang="en-US" sz="900" dirty="0"/>
-          </a:p>
-          <a:p>
-            <a:pPr indent="0" marL="0">
-              <a:lnSpc>
-                <a:spcPts val="1100"/>
-              </a:lnSpc>
-              <a:spcAft>
-                <a:spcPts val="600"/>
-              </a:spcAft>
-              <a:buNone/>
-            </a:pPr>
-            <a:r>
-              <a:rPr lang="en-US" sz="900" b="1" dirty="0">
-                <a:solidFill>
-                  <a:srgbClr val="A32E22"/>
-                </a:solidFill>
-                <a:latin typeface="Calibri" pitchFamily="34" charset="0"/>
-                <a:ea typeface="Calibri" pitchFamily="34" charset="-122"/>
-                <a:cs typeface="Calibri" pitchFamily="34" charset="-120"/>
-              </a:rPr>
-              <a:t>Resident credit quality.  </a:t>
-            </a:r>
-            <a:pPr indent="0" marL="0">
-              <a:lnSpc>
-                <a:spcPts val="1100"/>
-              </a:lnSpc>
-              <a:spcAft>
-                <a:spcPts val="600"/>
-              </a:spcAft>
-              <a:buNone/>
-            </a:pPr>
-            <a:r>
-              <a:rPr lang="en-US" sz="900" dirty="0">
-                <a:solidFill>
-                  <a:srgbClr val="3D4A43"/>
-                </a:solidFill>
-                <a:latin typeface="Calibri" pitchFamily="34" charset="0"/>
-                <a:ea typeface="Calibri" pitchFamily="34" charset="-122"/>
-                <a:cs typeface="Calibri" pitchFamily="34" charset="-120"/>
-              </a:rPr>
-              <a:t>4 units in eviction, 8 on notice, and gross write-offs accelerating to $5,670 in January 2026 alone.</a:t>
-            </a:r>
-            <a:endParaRPr lang="en-US" sz="900" dirty="0"/>
-          </a:p>
-          <a:p>
-            <a:pPr indent="0" marL="0">
-              <a:lnSpc>
-                <a:spcPts val="1100"/>
-              </a:lnSpc>
-              <a:spcAft>
-                <a:spcPts val="600"/>
-              </a:spcAft>
-              <a:buNone/>
-            </a:pPr>
-            <a:r>
-              <a:rPr lang="en-US" sz="900" b="1" dirty="0">
-                <a:solidFill>
-                  <a:srgbClr val="A32E22"/>
-                </a:solidFill>
-                <a:latin typeface="Calibri" pitchFamily="34" charset="0"/>
-                <a:ea typeface="Calibri" pitchFamily="34" charset="-122"/>
-                <a:cs typeface="Calibri" pitchFamily="34" charset="-120"/>
-              </a:rPr>
-              <a:t>Execution and exit.  </a:t>
-            </a:r>
-            <a:pPr indent="0" marL="0">
-              <a:lnSpc>
-                <a:spcPts val="1100"/>
-              </a:lnSpc>
-              <a:spcAft>
-                <a:spcPts val="600"/>
-              </a:spcAft>
-              <a:buNone/>
-            </a:pPr>
-            <a:r>
-              <a:rPr lang="en-US" sz="900" dirty="0">
-                <a:solidFill>
-                  <a:srgbClr val="3D4A43"/>
-                </a:solidFill>
-                <a:latin typeface="Calibri" pitchFamily="34" charset="0"/>
-                <a:ea typeface="Calibri" pitchFamily="34" charset="-122"/>
-                <a:cs typeface="Calibri" pitchFamily="34" charset="-120"/>
-              </a:rPr>
-              <a:t>118 turns in 26 months with a 3.5-person site team. And 75 bps of exit cap expansion costs about 5 points of IRR.</a:t>
+              <a:t>3.5 of 5 original rubber roofs, 37 below-grade units needing drains and sump pumps, original sliders, central gas water heaters. Plus 4 evictions and 8 notices on the rent roll, and 75 bps of exit cap expansion costs ~5 points of IRR.</a:t>
             </a:r>
             <a:endParaRPr lang="en-US" sz="900" dirty="0"/>
           </a:p>
@@ -5861,7 +5842,7 @@
                           <a:ea typeface="Calibri" pitchFamily="34" charset="-122"/>
                           <a:cs typeface="Calibri" pitchFamily="34" charset="-120"/>
                         </a:rPr>
-                        <a:t>Market rent growth</a:t>
+                        <a:t>Market rent growth Y1 to Y5</a:t>
                       </a:r>
                       <a:endParaRPr lang="en-US" sz="850" dirty="0">
                         <a:latin typeface="Calibri" charset="0"/>
@@ -5926,7 +5907,7 @@
                           <a:ea typeface="Calibri" pitchFamily="34" charset="-122"/>
                           <a:cs typeface="Calibri" pitchFamily="34" charset="-120"/>
                         </a:rPr>
-                        <a:t>3.0% / yr</a:t>
+                        <a:t>1.5% to 3.0%</a:t>
                       </a:r>
                       <a:endParaRPr lang="en-US" sz="850" dirty="0">
                         <a:latin typeface="Calibri" charset="0"/>
@@ -5993,7 +5974,7 @@
                           <a:ea typeface="Calibri" pitchFamily="34" charset="-122"/>
                           <a:cs typeface="Calibri" pitchFamily="34" charset="-120"/>
                         </a:rPr>
-                        <a:t>Renovation pace / completion</a:t>
+                        <a:t>Reno start / pace / completion</a:t>
                       </a:r>
                       <a:endParaRPr lang="en-US" sz="850" dirty="0">
                         <a:latin typeface="Calibri" charset="0"/>
@@ -6058,7 +6039,7 @@
                           <a:ea typeface="Calibri" pitchFamily="34" charset="-122"/>
                           <a:cs typeface="Calibri" pitchFamily="34" charset="-120"/>
                         </a:rPr>
-                        <a:t>5 per mo / mo 26</a:t>
+                        <a:t>mo 4 / 5 / mo 27</a:t>
                       </a:r>
                       <a:endParaRPr lang="en-US" sz="850" dirty="0">
                         <a:latin typeface="Calibri" charset="0"/>
@@ -6586,7 +6567,7 @@
                           <a:ea typeface="Calibri" pitchFamily="34" charset="-122"/>
                           <a:cs typeface="Calibri" pitchFamily="34" charset="-120"/>
                         </a:rPr>
-                        <a:t>5.0% / 14 days</a:t>
+                        <a:t>5.5% / 14 days</a:t>
                       </a:r>
                       <a:endParaRPr lang="en-US" sz="850" dirty="0">
                         <a:latin typeface="Calibri" charset="0"/>
@@ -6982,7 +6963,7 @@
                           <a:ea typeface="Calibri" pitchFamily="34" charset="-122"/>
                           <a:cs typeface="Calibri" pitchFamily="34" charset="-120"/>
                         </a:rPr>
-                        <a:t>$8,957/unit</a:t>
+                        <a:t>$8,948/unit</a:t>
                       </a:r>
                       <a:endParaRPr lang="en-US" sz="850" dirty="0">
                         <a:latin typeface="Calibri" charset="0"/>
@@ -7332,7 +7313,7 @@
                 <a:ea typeface="Calibri" pitchFamily="34" charset="-122"/>
                 <a:cs typeface="Calibri" pitchFamily="34" charset="-120"/>
               </a:rPr>
-              <a:t>Where the rent roll and T-12 conflict with the OM, the Excel files govern — including the washer/dryer count (53, not the OM's 78) and all market rents.</a:t>
+              <a:t>Rent growth is set off Yardi Matrix 1Q-26 ACTUALS, not a forecast. Where the rent roll and T-12 conflict with the OM, the Excel files govern — including the washer/dryer count (53, not the OM's 78).</a:t>
             </a:r>
             <a:endParaRPr lang="en-US" sz="800" dirty="0"/>
           </a:p>
@@ -7426,7 +7407,7 @@
                 <a:ea typeface="Calibri" pitchFamily="34" charset="-122"/>
                 <a:cs typeface="Calibri" pitchFamily="34" charset="-120"/>
               </a:rPr>
-              <a:t>14% hurdle is cleared only at or below $12.25mm.</a:t>
+              <a:t>14% hurdle is cleared only at or below $11.25mm — a 21% discount to the ask.</a:t>
             </a:r>
             <a:endParaRPr lang="en-US" sz="800" dirty="0"/>
           </a:p>
@@ -7536,7 +7517,7 @@
                 <a:ea typeface="Calibri" pitchFamily="34" charset="-122"/>
                 <a:cs typeface="Calibri" pitchFamily="34" charset="-120"/>
               </a:rPr>
-              <a:t>A well-located, well-maintained asset with a genuinely accretive renovation — a 12.7% return on cost against a 6.75% exit, and 18% on the laundry component. The business plan is sound and we recommend approving it and the $3.07mm of capital. The price is not: the ask capitalises operating upside we would have to create ourselves and then asks us to fund $26,030/unit of capital, a third of it deferred maintenance with no rent attached. Discipline on basis is the entire investment decision here.</a:t>
+              <a:t>A well-located asset with a genuinely accretive renovation — 12.7% on cost, 18% on the laundry component. Approve the plan and the $3.07mm of capital; do not approve the price. To make $14.2mm work you would need roughly 4.0% annual rent growth AND a 6.25% exit cap simultaneously. Metro rents actually grew 1.1% last year and 2025 starts doubled. Underwriting a market recovery we do not control, to justify a price we do control, is how an acquisitions team loses money it cannot renovate its way out of. Bid $11.25mm and be willing to lose.</a:t>
             </a:r>
             <a:endParaRPr lang="en-US" sz="950" dirty="0"/>
           </a:p>

--- a/chateau_in_the_woods/Chateau_in_the_Woods_IC_Presentation.pptx
+++ b/chateau_in_the_woods/Chateau_in_the_Woods_IC_Presentation.pptx
@@ -193,7 +193,7 @@
             <c:bubble3D val="0"/>
             <c:spPr>
               <a:solidFill>
-                <a:srgbClr val="C8811F"/>
+                <a:srgbClr val="2C5F2D"/>
               </a:solidFill>
               <a:effectLst/>
             </c:spPr>
@@ -204,7 +204,7 @@
             <c:bubble3D val="0"/>
             <c:spPr>
               <a:solidFill>
-                <a:srgbClr val="97BC62"/>
+                <a:srgbClr val="C8811F"/>
               </a:solidFill>
               <a:effectLst/>
             </c:spPr>
@@ -255,16 +255,16 @@
                     <c:v>$11.0mm</c:v>
                   </c:pt>
                   <c:pt idx="2">
-                    <c:v>$11.25mm</c:v>
+                    <c:v>$11.5mm</c:v>
                   </c:pt>
                   <c:pt idx="3">
-                    <c:v>$11.75mm</c:v>
+                    <c:v>$12.0mm</c:v>
                   </c:pt>
                   <c:pt idx="4">
                     <c:v>$12.5mm</c:v>
                   </c:pt>
                   <c:pt idx="5">
-                    <c:v>$13.25mm</c:v>
+                    <c:v>$13.625mm</c:v>
                   </c:pt>
                   <c:pt idx="6">
                     <c:v>$14.2mm</c:v>
@@ -280,25 +280,25 @@
                 <c:formatCode>General</c:formatCode>
                 <c:ptCount val="7"/>
                 <c:pt idx="0">
-                  <c:v>0.172</c:v>
+                  <c:v>0.199</c:v>
                 </c:pt>
                 <c:pt idx="1">
-                  <c:v>0.152</c:v>
+                  <c:v>0.179</c:v>
                 </c:pt>
                 <c:pt idx="2">
-                  <c:v>0.142</c:v>
+                  <c:v>0.159</c:v>
                 </c:pt>
                 <c:pt idx="3">
-                  <c:v>0.123</c:v>
+                  <c:v>0.14</c:v>
                 </c:pt>
                 <c:pt idx="4">
-                  <c:v>0.094</c:v>
+                  <c:v>0.121</c:v>
                 </c:pt>
                 <c:pt idx="5">
-                  <c:v>0.065</c:v>
+                  <c:v>0.079</c:v>
                 </c:pt>
                 <c:pt idx="6">
-                  <c:v>0.031</c:v>
+                  <c:v>0.058</c:v>
                 </c:pt>
               </c:numCache>
             </c:numRef>
@@ -837,7 +837,7 @@
           <a:p>
             <a:r>
               <a:rPr lang="en-US" dirty="0"/>
-              <a:t>The base case is deliberately conservative on what we do not control — rent growth is set off actual 1Q-26 metro performance rather than a forecast, and the exit cap is held at 6.75%. It is confident on what we do control: the renovation premium, the ancillary income and expense management. To justify $14.2mm you would need roughly 4.0% annual rent growth AND a 6.25% exit cap simultaneously. Metro actual is 1.1%.</a:t>
+              <a:t>Conservative on what we do not control (rent growth off 1Q-26 actuals, 6.75% exit cap held); confident on what we do control (renovation premium, ancillary income, expense management, two-track pace). The single biggest correction from an earlier draft: the 25-year Marion County assessment record shows assessed value range-bound at $5.1-6.6mm since 2012 and the 2006 sale did NOT reset it, so stepping taxes to a share of the purchase price was wrong. That correction is worth about 1.5 points of IRR and is still stress-tested in Ladder C.</a:t>
             </a:r>
             <a:endParaRPr lang="en-US" dirty="0"/>
           </a:p>
@@ -925,7 +925,7 @@
           <a:p>
             <a:r>
               <a:rPr lang="en-US" dirty="0"/>
-              <a:t>Expect to lose this deal at $11.25mm; that is the right outcome. If the seller holds at $14.2mm we pass. Two structures worth testing before walking: a tax escrow or price adjustment tied to the first post-closing Form 11A, and a seller credit for the identified immediate needs (sump pumps, patio drains, asphalt — about $190K).</a:t>
+              <a:t>We would have lost this deal, and should have. If we wanted to win it, the two honest routes are a proven rent premium (a leased mock-up moves the bid to ~$12.6mm at $170) or a cheaper scope that still holds the premium (Ladder B). Two structures worth testing before walking: a tax escrow or price adjustment tied to the first post-closing Form 11A, and a seller credit for the identified immediate needs (sump pumps, patio drains, asphalt — about $190K).</a:t>
             </a:r>
             <a:endParaRPr lang="en-US" dirty="0"/>
           </a:p>
@@ -1494,7 +1494,7 @@
                 <a:ea typeface="Cambria" pitchFamily="34" charset="-122"/>
                 <a:cs typeface="Cambria" pitchFamily="34" charset="-120"/>
               </a:rPr>
-              <a:t>CONDITIONAL:  </a:t>
+              <a:t>BID $12.0mm.  </a:t>
             </a:r>
             <a:pPr indent="0" marL="0">
               <a:buNone/>
@@ -1508,7 +1508,7 @@
                 <a:ea typeface="Cambria" pitchFamily="34" charset="-122"/>
                 <a:cs typeface="Cambria" pitchFamily="34" charset="-120"/>
               </a:rPr>
-              <a:t>approve the plan and the capital — not the price.</a:t>
+              <a:t>The plan works; the price is what has to be disciplined.</a:t>
             </a:r>
             <a:endParaRPr lang="en-US" sz="1600" dirty="0"/>
           </a:p>
@@ -1547,7 +1547,7 @@
                 <a:ea typeface="Calibri" pitchFamily="34" charset="-122"/>
                 <a:cs typeface="Calibri" pitchFamily="34" charset="-120"/>
               </a:rPr>
-              <a:t>Bid $11.25mm ($95,339/unit).</a:t>
+              <a:t>Bid $12.0mm ($101,695/unit).</a:t>
             </a:r>
             <a:endParaRPr lang="en-US" sz="1150" dirty="0"/>
           </a:p>
@@ -1564,7 +1564,7 @@
                 <a:ea typeface="Calibri" pitchFamily="34" charset="-122"/>
                 <a:cs typeface="Calibri" pitchFamily="34" charset="-120"/>
               </a:rPr>
-              <a:t>Hard walk above $12.0mm.</a:t>
+              <a:t>It traded at $13.625mm — 12% above us.</a:t>
             </a:r>
             <a:endParaRPr lang="en-US" sz="1150" dirty="0"/>
           </a:p>
@@ -1625,7 +1625,7 @@
                 <a:ea typeface="Cambria" pitchFamily="34" charset="-122"/>
                 <a:cs typeface="Cambria" pitchFamily="34" charset="-120"/>
               </a:rPr>
-              <a:t>$11.25mm</a:t>
+              <a:t>$12.0mm</a:t>
             </a:r>
             <a:endParaRPr lang="en-US" sz="2100" dirty="0"/>
           </a:p>
@@ -1664,7 +1664,7 @@
                 <a:ea typeface="Calibri" pitchFamily="34" charset="-122"/>
                 <a:cs typeface="Calibri" pitchFamily="34" charset="-120"/>
               </a:rPr>
-              <a:t>Recommended bid</a:t>
+              <a:t>Our maximum bid</a:t>
             </a:r>
             <a:endParaRPr lang="en-US" sz="1050" dirty="0"/>
           </a:p>
@@ -1703,7 +1703,7 @@
                 <a:ea typeface="Calibri" pitchFamily="34" charset="-122"/>
                 <a:cs typeface="Calibri" pitchFamily="34" charset="-120"/>
               </a:rPr>
-              <a:t>$95,339 per unit  ·  7.57% going-in cap</a:t>
+              <a:t>$101,695 per unit  ·  7.28% going-in cap</a:t>
             </a:r>
             <a:endParaRPr lang="en-US" sz="850" dirty="0"/>
           </a:p>
@@ -1764,7 +1764,7 @@
                 <a:ea typeface="Cambria" pitchFamily="34" charset="-122"/>
                 <a:cs typeface="Cambria" pitchFamily="34" charset="-120"/>
               </a:rPr>
-              <a:t>14.2% / 1.83x</a:t>
+              <a:t>14.0% / 1.81x</a:t>
             </a:r>
             <a:endParaRPr lang="en-US" sz="2100" dirty="0"/>
           </a:p>
@@ -1903,7 +1903,7 @@
                 <a:ea typeface="Cambria" pitchFamily="34" charset="-122"/>
                 <a:cs typeface="Cambria" pitchFamily="34" charset="-120"/>
               </a:rPr>
-              <a:t>3.1% / 1.15x</a:t>
+              <a:t>7.9% / 1.42x</a:t>
             </a:r>
             <a:endParaRPr lang="en-US" sz="2100" dirty="0"/>
           </a:p>
@@ -1942,7 +1942,7 @@
                 <a:ea typeface="Calibri" pitchFamily="34" charset="-122"/>
                 <a:cs typeface="Calibri" pitchFamily="34" charset="-120"/>
               </a:rPr>
-              <a:t>At the $14.2mm ask</a:t>
+              <a:t>At the $13.625mm trade</a:t>
             </a:r>
             <a:endParaRPr lang="en-US" sz="1050" dirty="0"/>
           </a:p>
@@ -1981,7 +1981,7 @@
                 <a:ea typeface="Calibri" pitchFamily="34" charset="-122"/>
                 <a:cs typeface="Calibri" pitchFamily="34" charset="-120"/>
               </a:rPr>
-              <a:t>Levered IRR / equity multiple</a:t>
+              <a:t>What it actually sold for, 12 Jun 26</a:t>
             </a:r>
             <a:endParaRPr lang="en-US" sz="850" dirty="0"/>
           </a:p>
@@ -2036,13 +2036,13 @@
             <a:r>
               <a:rPr lang="en-US" sz="2100" b="1" dirty="0">
                 <a:solidFill>
-                  <a:srgbClr val="C8811F"/>
+                  <a:srgbClr val="97BC62"/>
                 </a:solidFill>
                 <a:latin typeface="Cambria" pitchFamily="34" charset="0"/>
                 <a:ea typeface="Cambria" pitchFamily="34" charset="-122"/>
                 <a:cs typeface="Cambria" pitchFamily="34" charset="-120"/>
               </a:rPr>
-              <a:t>1.1%</a:t>
+              <a:t>16 months</a:t>
             </a:r>
             <a:endParaRPr lang="en-US" sz="2100" dirty="0"/>
           </a:p>
@@ -2081,7 +2081,7 @@
                 <a:ea typeface="Calibri" pitchFamily="34" charset="-122"/>
                 <a:cs typeface="Calibri" pitchFamily="34" charset="-120"/>
               </a:rPr>
-              <a:t>Metro rent growth, actual</a:t>
+              <a:t>Renovation complete</a:t>
             </a:r>
             <a:endParaRPr lang="en-US" sz="1050" dirty="0"/>
           </a:p>
@@ -2120,7 +2120,7 @@
                 <a:ea typeface="Calibri" pitchFamily="34" charset="-122"/>
                 <a:cs typeface="Calibri" pitchFamily="34" charset="-120"/>
               </a:rPr>
-              <a:t>Yardi Matrix 1Q-26  ·  T-3 rents flat</a:t>
+              <a:t>Two tracks  ·  no resident forced out</a:t>
             </a:r>
             <a:endParaRPr lang="en-US" sz="850" dirty="0"/>
           </a:p>
@@ -2205,7 +2205,7 @@
                 <a:ea typeface="Calibri" pitchFamily="34" charset="-122"/>
                 <a:cs typeface="Calibri" pitchFamily="34" charset="-120"/>
               </a:rPr>
-              <a:t>118 units, built 1974, Northside Indianapolis. 96.6% occupied, all units classic. Renovate all 118, add in-unit laundry to the 65 without it, modernise the common areas — $3.07mm, $26,030/unit.</a:t>
+              <a:t>118 units, built 1974, Northside Indianapolis. 96.6% occupied, all units classic. Renovate all 118, add in-unit laundry to the 65 without it, modernise the common areas — $2.90mm, $24,575/unit.</a:t>
             </a:r>
             <a:endParaRPr lang="en-US" sz="900" dirty="0"/>
           </a:p>
@@ -2229,7 +2229,7 @@
                 <a:ea typeface="Calibri" pitchFamily="34" charset="-122"/>
                 <a:cs typeface="Calibri" pitchFamily="34" charset="-120"/>
               </a:rPr>
-              <a:t>The renovation works. $15,754/unit earns a $166/month premium, a 12.7% return on cost. Renovated rents average $1.29/SF against a $1,310 metro average asking rent — Chateau's units are far larger than market, so we underwrite below the metro average per foot.</a:t>
+              <a:t>Two-track renovation, complete in 16 months. The 53 units that already have laundry are renovated IN PLACE at 10/month from month 2 — no permit, no vacancy loss, premium captured at renewal. The 65 units needing laundry require a state Construction Design Release plus a local permit and a vacant unit, so they run at natural turnover, 5/month from month 4. Nobody is forced out.</a:t>
             </a:r>
             <a:endParaRPr lang="en-US" sz="900" dirty="0"/>
           </a:p>
@@ -2253,7 +2253,7 @@
                 <a:ea typeface="Calibri" pitchFamily="34" charset="-122"/>
                 <a:cs typeface="Calibri" pitchFamily="34" charset="-120"/>
               </a:rPr>
-              <a:t>But the market is not growing. Yardi Matrix 1Q-26: metro rents FLAT on a trailing-three-month basis, up just 1.1% year over year, and 2025 starts MORE THAN DOUBLED — delivering 2027-28, inside our hold, with Carmel taking over half of 2026 deliveries just north of us. We underwrite 1.5/2.0/2.5/3.0/3.0%, not a flat 3%.</a:t>
+              <a:t>The renovation works. $14,407/unit blended earns a $155/month premium — a 12.9% return on cost, and the Year-5 yield on cost of 7.86% sits 111 bps above our 6.75% exit.</a:t>
             </a:r>
             <a:endParaRPr lang="en-US" sz="900" dirty="0"/>
           </a:p>
@@ -2277,7 +2277,7 @@
                 <a:ea typeface="Calibri" pitchFamily="34" charset="-122"/>
                 <a:cs typeface="Calibri" pitchFamily="34" charset="-120"/>
               </a:rPr>
-              <a:t>At the ask it is value-destructive. $14.2mm buys a 6.00% going-in cap and a Year-5 yield on cost of 6.58% — 17 bps BELOW our exit cap. The whole $3.07mm plan nets minus $6,880: the interior scope creates $1.06mm, deferred maintenance takes it back.</a:t>
+              <a:t>The market does not help. Yardi Matrix 1Q-26: metro rents FLAT on a trailing-three-month basis at $1,310 and up just 1.1% year over year, with 2025 starts MORE THAN DOUBLED — delivering 2027-28, inside our hold. We underwrite 1.5/2.0/2.5/3.0/3.0%.</a:t>
             </a:r>
             <a:endParaRPr lang="en-US" sz="900" dirty="0"/>
           </a:p>
@@ -2301,7 +2301,7 @@
                 <a:ea typeface="Calibri" pitchFamily="34" charset="-122"/>
                 <a:cs typeface="Calibri" pitchFamily="34" charset="-120"/>
               </a:rPr>
-              <a:t>Bid $11.25mm, best and final $11.5mm, hard walk $12.0mm. We will probably lose — that is the correct outcome at these fundamentals.</a:t>
+              <a:t>Bid $12.0mm. It traded at $13,625,000 on 12 June 2026 (Marion County deed, $115,466/unit) — 12% above us, where the same plan returns 7.9% and 1.42x. We would have been outbid, and that is the right outcome.</a:t>
             </a:r>
             <a:endParaRPr lang="en-US" sz="900" dirty="0"/>
           </a:p>
@@ -2480,7 +2480,7 @@
                           <a:ea typeface="Calibri" pitchFamily="34" charset="-122"/>
                           <a:cs typeface="Calibri" pitchFamily="34" charset="-120"/>
                         </a:rPr>
-                        <a:t>$11.25mm</a:t>
+                        <a:t>$12.0mm</a:t>
                       </a:r>
                       <a:endParaRPr lang="en-US" sz="1000" dirty="0">
                         <a:latin typeface="Calibri" charset="0"/>
@@ -2548,7 +2548,7 @@
                           <a:ea typeface="Calibri" pitchFamily="34" charset="-122"/>
                           <a:cs typeface="Calibri" pitchFamily="34" charset="-120"/>
                         </a:rPr>
-                        <a:t>At the ask</a:t>
+                        <a:t>At the trade</a:t>
                       </a:r>
                       <a:endParaRPr lang="en-US" sz="1000" dirty="0">
                         <a:latin typeface="Calibri" charset="0"/>
@@ -2569,7 +2569,7 @@
                           <a:ea typeface="Calibri" pitchFamily="34" charset="-122"/>
                           <a:cs typeface="Calibri" pitchFamily="34" charset="-120"/>
                         </a:rPr>
-                        <a:t>$14.2mm</a:t>
+                        <a:t>$13.625mm</a:t>
                       </a:r>
                       <a:endParaRPr lang="en-US" sz="1000" dirty="0">
                         <a:latin typeface="Calibri" charset="0"/>
@@ -2707,7 +2707,7 @@
                           <a:ea typeface="Calibri" pitchFamily="34" charset="-122"/>
                           <a:cs typeface="Calibri" pitchFamily="34" charset="-120"/>
                         </a:rPr>
-                        <a:t>$95,339</a:t>
+                        <a:t>$101,695</a:t>
                       </a:r>
                       <a:endParaRPr lang="en-US" sz="1000" dirty="0">
                         <a:latin typeface="Calibri" charset="0"/>
@@ -2775,7 +2775,7 @@
                           <a:ea typeface="Calibri" pitchFamily="34" charset="-122"/>
                           <a:cs typeface="Calibri" pitchFamily="34" charset="-120"/>
                         </a:rPr>
-                        <a:t>$120,339</a:t>
+                        <a:t>$115,466</a:t>
                       </a:r>
                       <a:endParaRPr lang="en-US" sz="1000" dirty="0">
                         <a:latin typeface="Calibri" charset="0"/>
@@ -2913,7 +2913,7 @@
                           <a:ea typeface="Calibri" pitchFamily="34" charset="-122"/>
                           <a:cs typeface="Calibri" pitchFamily="34" charset="-120"/>
                         </a:rPr>
-                        <a:t>7.57%</a:t>
+                        <a:t>7.28%</a:t>
                       </a:r>
                       <a:endParaRPr lang="en-US" sz="1000" dirty="0">
                         <a:latin typeface="Calibri" charset="0"/>
@@ -2981,7 +2981,7 @@
                           <a:ea typeface="Calibri" pitchFamily="34" charset="-122"/>
                           <a:cs typeface="Calibri" pitchFamily="34" charset="-120"/>
                         </a:rPr>
-                        <a:t>6.00%</a:t>
+                        <a:t>6.41%</a:t>
                       </a:r>
                       <a:endParaRPr lang="en-US" sz="1000" dirty="0">
                         <a:latin typeface="Calibri" charset="0"/>
@@ -3119,7 +3119,7 @@
                           <a:ea typeface="Calibri" pitchFamily="34" charset="-122"/>
                           <a:cs typeface="Calibri" pitchFamily="34" charset="-120"/>
                         </a:rPr>
-                        <a:t>$121,369</a:t>
+                        <a:t>$126,269</a:t>
                       </a:r>
                       <a:endParaRPr lang="en-US" sz="1000" dirty="0">
                         <a:latin typeface="Calibri" charset="0"/>
@@ -3187,7 +3187,7 @@
                           <a:ea typeface="Calibri" pitchFamily="34" charset="-122"/>
                           <a:cs typeface="Calibri" pitchFamily="34" charset="-120"/>
                         </a:rPr>
-                        <a:t>$146,369</a:t>
+                        <a:t>$140,041</a:t>
                       </a:r>
                       <a:endParaRPr lang="en-US" sz="1000" dirty="0">
                         <a:latin typeface="Calibri" charset="0"/>
@@ -3325,7 +3325,7 @@
                           <a:ea typeface="Calibri" pitchFamily="34" charset="-122"/>
                           <a:cs typeface="Calibri" pitchFamily="34" charset="-120"/>
                         </a:rPr>
-                        <a:t>$5.37mm</a:t>
+                        <a:t>$5.59mm</a:t>
                       </a:r>
                       <a:endParaRPr lang="en-US" sz="1000" dirty="0">
                         <a:latin typeface="Calibri" charset="0"/>
@@ -3393,7 +3393,7 @@
                           <a:ea typeface="Calibri" pitchFamily="34" charset="-122"/>
                           <a:cs typeface="Calibri" pitchFamily="34" charset="-120"/>
                         </a:rPr>
-                        <a:t>$7.04mm</a:t>
+                        <a:t>$6.20mm</a:t>
                       </a:r>
                       <a:endParaRPr lang="en-US" sz="1000" dirty="0">
                         <a:latin typeface="Calibri" charset="0"/>
@@ -3531,7 +3531,7 @@
                           <a:ea typeface="Calibri" pitchFamily="34" charset="-122"/>
                           <a:cs typeface="Calibri" pitchFamily="34" charset="-120"/>
                         </a:rPr>
-                        <a:t>$852K / $1,137K</a:t>
+                        <a:t>$873K / $1,171K</a:t>
                       </a:r>
                       <a:endParaRPr lang="en-US" sz="1000" dirty="0">
                         <a:latin typeface="Calibri" charset="0"/>
@@ -3599,7 +3599,7 @@
                           <a:ea typeface="Calibri" pitchFamily="34" charset="-122"/>
                           <a:cs typeface="Calibri" pitchFamily="34" charset="-120"/>
                         </a:rPr>
-                        <a:t>$852K / $1,137K</a:t>
+                        <a:t>$873K / $1,171K</a:t>
                       </a:r>
                       <a:endParaRPr lang="en-US" sz="1000" dirty="0">
                         <a:latin typeface="Calibri" charset="0"/>
@@ -3737,7 +3737,7 @@
                           <a:ea typeface="Calibri" pitchFamily="34" charset="-122"/>
                           <a:cs typeface="Calibri" pitchFamily="34" charset="-120"/>
                         </a:rPr>
-                        <a:t>+119 bps</a:t>
+                        <a:t>+111 bps</a:t>
                       </a:r>
                       <a:endParaRPr lang="en-US" sz="1000" dirty="0">
                         <a:latin typeface="Calibri" charset="0"/>
@@ -3805,7 +3805,7 @@
                           <a:ea typeface="Calibri" pitchFamily="34" charset="-122"/>
                           <a:cs typeface="Calibri" pitchFamily="34" charset="-120"/>
                         </a:rPr>
-                        <a:t>(17) bps</a:t>
+                        <a:t>+34 bps</a:t>
                       </a:r>
                       <a:endParaRPr lang="en-US" sz="1000" dirty="0">
                         <a:latin typeface="Calibri" charset="0"/>
@@ -3943,7 +3943,7 @@
                           <a:ea typeface="Calibri" pitchFamily="34" charset="-122"/>
                           <a:cs typeface="Calibri" pitchFamily="34" charset="-120"/>
                         </a:rPr>
-                        <a:t>8.2%</a:t>
+                        <a:t>8.4%</a:t>
                       </a:r>
                       <a:endParaRPr lang="en-US" sz="1000" dirty="0">
                         <a:latin typeface="Calibri" charset="0"/>
@@ -4011,7 +4011,7 @@
                           <a:ea typeface="Calibri" pitchFamily="34" charset="-122"/>
                           <a:cs typeface="Calibri" pitchFamily="34" charset="-120"/>
                         </a:rPr>
-                        <a:t>5.2%</a:t>
+                        <a:t>6.5%</a:t>
                       </a:r>
                       <a:endParaRPr lang="en-US" sz="1000" dirty="0">
                         <a:latin typeface="Calibri" charset="0"/>
@@ -4149,7 +4149,7 @@
                           <a:ea typeface="Calibri" pitchFamily="34" charset="-122"/>
                           <a:cs typeface="Calibri" pitchFamily="34" charset="-120"/>
                         </a:rPr>
-                        <a:t>9.5% / 1.51x</a:t>
+                        <a:t>9.4% / 1.50x</a:t>
                       </a:r>
                       <a:endParaRPr lang="en-US" sz="1000" dirty="0">
                         <a:latin typeface="Calibri" charset="0"/>
@@ -4217,7 +4217,7 @@
                           <a:ea typeface="Calibri" pitchFamily="34" charset="-122"/>
                           <a:cs typeface="Calibri" pitchFamily="34" charset="-120"/>
                         </a:rPr>
-                        <a:t>5.1% / 1.25x</a:t>
+                        <a:t>6.9% / 1.35x</a:t>
                       </a:r>
                       <a:endParaRPr lang="en-US" sz="1000" dirty="0">
                         <a:latin typeface="Calibri" charset="0"/>
@@ -4355,7 +4355,7 @@
                           <a:ea typeface="Calibri" pitchFamily="34" charset="-122"/>
                           <a:cs typeface="Calibri" pitchFamily="34" charset="-120"/>
                         </a:rPr>
-                        <a:t>14.2%</a:t>
+                        <a:t>14.0%</a:t>
                       </a:r>
                       <a:endParaRPr lang="en-US" sz="1000" dirty="0">
                         <a:latin typeface="Calibri" charset="0"/>
@@ -4423,7 +4423,7 @@
                           <a:ea typeface="Calibri" pitchFamily="34" charset="-122"/>
                           <a:cs typeface="Calibri" pitchFamily="34" charset="-120"/>
                         </a:rPr>
-                        <a:t>3.1%</a:t>
+                        <a:t>7.9%</a:t>
                       </a:r>
                       <a:endParaRPr lang="en-US" sz="1000" dirty="0">
                         <a:latin typeface="Calibri" charset="0"/>
@@ -4561,7 +4561,7 @@
                           <a:ea typeface="Calibri" pitchFamily="34" charset="-122"/>
                           <a:cs typeface="Calibri" pitchFamily="34" charset="-120"/>
                         </a:rPr>
-                        <a:t>1.83x</a:t>
+                        <a:t>1.81x</a:t>
                       </a:r>
                       <a:endParaRPr lang="en-US" sz="1000" dirty="0">
                         <a:latin typeface="Calibri" charset="0"/>
@@ -4629,7 +4629,7 @@
                           <a:ea typeface="Calibri" pitchFamily="34" charset="-122"/>
                           <a:cs typeface="Calibri" pitchFamily="34" charset="-120"/>
                         </a:rPr>
-                        <a:t>1.15x</a:t>
+                        <a:t>1.42x</a:t>
                       </a:r>
                       <a:endParaRPr lang="en-US" sz="1000" dirty="0">
                         <a:latin typeface="Calibri" charset="0"/>
@@ -4718,7 +4718,7 @@
                 <a:ea typeface="Calibri" pitchFamily="34" charset="-122"/>
                 <a:cs typeface="Calibri" pitchFamily="34" charset="-120"/>
               </a:rPr>
-              <a:t>Sources: rent roll 07/01/2026 · T-12 Feb-25 to Jan-26 · CBRE OM 09/10/2025 · Yardi Matrix Indianapolis 1Q-2026. No price was provided; $14.2mm is implied by the OM's 6.9% Year-1 cap rate on CBRE's $980,838 forecast NOI. Debt: 65% LTC / 8.0% min debt yield / 5.85% interest-only.</a:t>
+              <a:t>Sources: rent roll 07/01/2026 · T-12 Feb-25 to Jan-26 · CBRE OM 09/10/2025 · Yardi Matrix Indianapolis 1Q-2026 · Marion County parcel 8000002 assessment and transfer record. Rent growth is set off 1Q-26 ACTUALS, not a forecast. Debt: 65% LTC / 8.0% min debt yield / 5.85% interest-only.</a:t>
             </a:r>
             <a:endParaRPr lang="en-US" sz="750" dirty="0"/>
           </a:p>
@@ -4932,7 +4932,7 @@
                 <a:ea typeface="Calibri" pitchFamily="34" charset="-122"/>
                 <a:cs typeface="Calibri" pitchFamily="34" charset="-120"/>
               </a:rPr>
-              <a:t>In-unit laundry, all 118 units.  </a:t>
+              <a:t>Two-track renovation, 16 months.  </a:t>
             </a:r>
             <a:pPr indent="0" marL="0">
               <a:lnSpc>
@@ -4952,7 +4952,7 @@
                 <a:ea typeface="Calibri" pitchFamily="34" charset="-122"/>
                 <a:cs typeface="Calibri" pitchFamily="34" charset="-120"/>
               </a:rPr>
-              <a:t>65 units lack it. At the case's $5,000/unit it earns an incremental $75/month — an 18% return on cost, the best item in the plan. The rent roll shows only 53 units with machines, not the OM's 78.</a:t>
+              <a:t>The 53 units with existing laundry go in place at 10/month from month 2 — no permit, no vacancy loss. The 65 needing laundry follow natural turnover at 5/month. All 118 done in month 16 without forcing a single resident out.</a:t>
             </a:r>
             <a:endParaRPr lang="en-US" sz="900" dirty="0"/>
           </a:p>
@@ -4975,7 +4975,7 @@
                 <a:ea typeface="Calibri" pitchFamily="34" charset="-122"/>
                 <a:cs typeface="Calibri" pitchFamily="34" charset="-120"/>
               </a:rPr>
-              <a:t>Comprehensive interior renovation.  </a:t>
+              <a:t>In-unit laundry, all 118 units.  </a:t>
             </a:r>
             <a:pPr indent="0" marL="0">
               <a:lnSpc>
@@ -4995,7 +4995,7 @@
                 <a:ea typeface="Calibri" pitchFamily="34" charset="-122"/>
                 <a:cs typeface="Calibri" pitchFamily="34" charset="-120"/>
               </a:rPr>
-              <a:t>$13,000/unit for cabinets, counters, LVP, appliances, fixtures and paint at a $125/month premium. Units were last touched in 2006.</a:t>
+              <a:t>65 units lack it. At the case's $5,000/unit the laundry component is the highest-return item in the plan. The rent roll shows 53 units with machines, not the OM's 78.</a:t>
             </a:r>
             <a:endParaRPr lang="en-US" sz="900" dirty="0"/>
           </a:p>
@@ -5018,7 +5018,7 @@
                 <a:ea typeface="Calibri" pitchFamily="34" charset="-122"/>
                 <a:cs typeface="Calibri" pitchFamily="34" charset="-120"/>
               </a:rPr>
-              <a:t>Rent headroom, priced conservatively.  </a:t>
+              <a:t>12.9% return on renovation cost.  </a:t>
             </a:r>
             <a:pPr indent="0" marL="0">
               <a:lnSpc>
@@ -5038,7 +5038,50 @@
                 <a:ea typeface="Calibri" pitchFamily="34" charset="-122"/>
                 <a:cs typeface="Calibri" pitchFamily="34" charset="-120"/>
               </a:rPr>
-              <a:t>Renovated rents average $1.29/SF against a $1,310 metro average asking rent — Chateau's units are far larger than market, so we underwrite below the metro average per foot. Avalon Lake (1974, nearby) gets $1,655 on 1,090 SF; our Verdun is $1,450.</a:t>
+              <a:t>$14,407/unit blended for a $155/month premium, against a 6.75% exit. Year-5 yield on cost of 7.86% sits 111 bps above the exit cap.</a:t>
+            </a:r>
+            <a:endParaRPr lang="en-US" sz="900" dirty="0"/>
+          </a:p>
+          <a:p>
+            <a:pPr indent="0" marL="0">
+              <a:lnSpc>
+                <a:spcPts val="1100"/>
+              </a:lnSpc>
+              <a:spcAft>
+                <a:spcPts val="600"/>
+              </a:spcAft>
+              <a:buNone/>
+            </a:pPr>
+            <a:r>
+              <a:rPr lang="en-US" sz="900" b="1" dirty="0">
+                <a:solidFill>
+                  <a:srgbClr val="2C5F2D"/>
+                </a:solidFill>
+                <a:latin typeface="Calibri" pitchFamily="34" charset="0"/>
+                <a:ea typeface="Calibri" pitchFamily="34" charset="-122"/>
+                <a:cs typeface="Calibri" pitchFamily="34" charset="-120"/>
+              </a:rPr>
+              <a:t>Taxes are lower than they look.  </a:t>
+            </a:r>
+            <a:pPr indent="0" marL="0">
+              <a:lnSpc>
+                <a:spcPts val="1100"/>
+              </a:lnSpc>
+              <a:spcAft>
+                <a:spcPts val="600"/>
+              </a:spcAft>
+              <a:buNone/>
+            </a:pPr>
+            <a:r>
+              <a:rPr lang="en-US" sz="900" dirty="0">
+                <a:solidFill>
+                  <a:srgbClr val="3D4A43"/>
+                </a:solidFill>
+                <a:latin typeface="Calibri" pitchFamily="34" charset="0"/>
+                <a:ea typeface="Calibri" pitchFamily="34" charset="-122"/>
+                <a:cs typeface="Calibri" pitchFamily="34" charset="-120"/>
+              </a:rPr>
+              <a:t>Marion County parcel 8000002: 2025 actual bill $129,648, assessed value range-bound $5.1-6.6mm since 2012, last change March 2022. The 2006 sale did not reset it. Today's AV is 41% of the 2026 trade price.</a:t>
             </a:r>
             <a:endParaRPr lang="en-US" sz="900" dirty="0"/>
           </a:p>
@@ -5081,7 +5124,7 @@
                 <a:ea typeface="Calibri" pitchFamily="34" charset="-122"/>
                 <a:cs typeface="Calibri" pitchFamily="34" charset="-120"/>
               </a:rPr>
-              <a:t>The $49 technology fee is only ~60% penetrated, the $25 valet trash charge is not yet billed although the property starts paying for it in Jan-26, and there is no pet rent — ~$110K a year of run-rate.</a:t>
+              <a:t>The $49 technology fee is ~60% penetrated, the $25 valet trash charge is not yet billed although the property starts paying for it in Jan-26, and there is no pet rent — ~$110K a year of run-rate.</a:t>
             </a:r>
             <a:endParaRPr lang="en-US" sz="900" dirty="0"/>
           </a:p>
@@ -5125,49 +5168,6 @@
                 <a:cs typeface="Calibri" pitchFamily="34" charset="-120"/>
               </a:rPr>
               <a:t>2.2% loss to lease and 6.8% trailing physical vacancy against a 5.5% stabilised target.</a:t>
-            </a:r>
-            <a:endParaRPr lang="en-US" sz="900" dirty="0"/>
-          </a:p>
-          <a:p>
-            <a:pPr indent="0" marL="0">
-              <a:lnSpc>
-                <a:spcPts val="1100"/>
-              </a:lnSpc>
-              <a:spcAft>
-                <a:spcPts val="600"/>
-              </a:spcAft>
-              <a:buNone/>
-            </a:pPr>
-            <a:r>
-              <a:rPr lang="en-US" sz="900" b="1" dirty="0">
-                <a:solidFill>
-                  <a:srgbClr val="2C5F2D"/>
-                </a:solidFill>
-                <a:latin typeface="Calibri" pitchFamily="34" charset="0"/>
-                <a:ea typeface="Calibri" pitchFamily="34" charset="-122"/>
-                <a:cs typeface="Calibri" pitchFamily="34" charset="-120"/>
-              </a:rPr>
-              <a:t>Upside not underwritten.  </a:t>
-            </a:r>
-            <a:pPr indent="0" marL="0">
-              <a:lnSpc>
-                <a:spcPts val="1100"/>
-              </a:lnSpc>
-              <a:spcAft>
-                <a:spcPts val="600"/>
-              </a:spcAft>
-              <a:buNone/>
-            </a:pPr>
-            <a:r>
-              <a:rPr lang="en-US" sz="900" dirty="0">
-                <a:solidFill>
-                  <a:srgbClr val="3D4A43"/>
-                </a:solidFill>
-                <a:latin typeface="Calibri" pitchFamily="34" charset="0"/>
-                <a:ea typeface="Calibri" pitchFamily="34" charset="-122"/>
-                <a:cs typeface="Calibri" pitchFamily="34" charset="-120"/>
-              </a:rPr>
-              <a:t>Two units from the Bldg 4042 storage conversion and 9 carport-to-garage conversions — real, but 5-10% returns.</a:t>
             </a:r>
             <a:endParaRPr lang="en-US" sz="900" dirty="0"/>
           </a:p>
@@ -5271,7 +5271,7 @@
                 <a:ea typeface="Calibri" pitchFamily="34" charset="-122"/>
                 <a:cs typeface="Calibri" pitchFamily="34" charset="-120"/>
               </a:rPr>
-              <a:t>Basis, not the plan.  </a:t>
+              <a:t>Rent growth. The dominant variable.  </a:t>
             </a:r>
             <a:pPr indent="0" marL="0">
               <a:lnSpc>
@@ -5291,7 +5291,7 @@
                 <a:ea typeface="Calibri" pitchFamily="34" charset="-122"/>
                 <a:cs typeface="Calibri" pitchFamily="34" charset="-120"/>
               </a:rPr>
-              <a:t>At the ask we pay a 6.00% going-in cap, fund $26,030/unit of capital, and reach a Year-5 yield on cost of 6.58% — below the 6.75% exit. The capital plan nets minus $6,880.</a:t>
+              <a:t>Metro rents flat on a trailing-three-month basis, +1.1% YoY in 1Q-26, and 2025 starts more than doubled — delivering 2027-28, inside our hold, with Carmel taking over half of 2026 deliveries just north of us. At a flat 1.0% the deal returns 7.1%; at 3.0%, 16.7%.</a:t>
             </a:r>
             <a:endParaRPr lang="en-US" sz="900" dirty="0"/>
           </a:p>
@@ -5314,7 +5314,7 @@
                 <a:ea typeface="Calibri" pitchFamily="34" charset="-122"/>
                 <a:cs typeface="Calibri" pitchFamily="34" charset="-120"/>
               </a:rPr>
-              <a:t>Rent growth and new supply.  </a:t>
+              <a:t>Basis. We were outbid by 12%.  </a:t>
             </a:r>
             <a:pPr indent="0" marL="0">
               <a:lnSpc>
@@ -5334,7 +5334,7 @@
                 <a:ea typeface="Calibri" pitchFamily="34" charset="-122"/>
                 <a:cs typeface="Calibri" pitchFamily="34" charset="-120"/>
               </a:rPr>
-              <a:t>Metro rents flat on a trailing-three-month basis, +1.1% year over year in 1Q-26, and 2025 starts more than doubled — delivering 2027-28, inside our hold, with Carmel taking over half of 2026 deliveries just north of us. Each 100 bps of rent growth is worth ~3 points of IRR.</a:t>
+              <a:t>It traded at $13,625,000. At that price the same plan returns 7.9% and 1.42x, and the yield-on-cost spread over the exit collapses from 111 bps to 34 bps.</a:t>
             </a:r>
             <a:endParaRPr lang="en-US" sz="900" dirty="0"/>
           </a:p>
@@ -5377,7 +5377,7 @@
                 <a:ea typeface="Calibri" pitchFamily="34" charset="-122"/>
                 <a:cs typeface="Calibri" pitchFamily="34" charset="-120"/>
               </a:rPr>
-              <a:t>Assessed value $5.55mm against a $14.2mm price; the OM's comp study shows AV averaging 69% of sale price post-trade. We step taxes $140K to $210K — a move to 69% adds ~$110K a year, ~$1.6mm of value.</a:t>
+              <a:t>Base case grows the actual bill 4% a year. If assessed value reset to 69% of the trade price the Year-5 bill goes to $238,700 and the IRR falls from 14.0% to 10.3%. History says it will not, but Ladder C prices it.</a:t>
             </a:r>
             <a:endParaRPr lang="en-US" sz="900" dirty="0"/>
           </a:p>
@@ -5420,7 +5420,7 @@
                 <a:ea typeface="Calibri" pitchFamily="34" charset="-122"/>
                 <a:cs typeface="Calibri" pitchFamily="34" charset="-120"/>
               </a:rPr>
-              <a:t>Nothing has been renovated to a current standard. Every $25/month of premium is worth ~1.3 points of IRR. A leased mock-up before we go hard would settle it.</a:t>
+              <a:t>Nothing has been renovated to a current standard. At $125 rather than $155 the IRR is 12.0%; at $190 it is 16.2%. A leased mock-up before we go hard would settle it.</a:t>
             </a:r>
             <a:endParaRPr lang="en-US" sz="900" dirty="0"/>
           </a:p>
@@ -5443,7 +5443,7 @@
                 <a:ea typeface="Calibri" pitchFamily="34" charset="-122"/>
                 <a:cs typeface="Calibri" pitchFamily="34" charset="-120"/>
               </a:rPr>
-              <a:t>1974 physical risk and exit.  </a:t>
+              <a:t>1974 physical risk.  </a:t>
             </a:r>
             <a:pPr indent="0" marL="0">
               <a:lnSpc>
@@ -5463,7 +5463,7 @@
                 <a:ea typeface="Calibri" pitchFamily="34" charset="-122"/>
                 <a:cs typeface="Calibri" pitchFamily="34" charset="-120"/>
               </a:rPr>
-              <a:t>3.5 of 5 original rubber roofs, 37 below-grade units needing drains and sump pumps, original sliders, central gas water heaters. Plus 4 evictions and 8 notices on the rent roll, and 75 bps of exit cap expansion costs ~5 points of IRR.</a:t>
+              <a:t>3.5 of 5 original rubber roofs, 37 below-grade units needing drains and sump pumps, original sliders, central gas water heaters. Plus 4 evictions and 8 notices on the rent roll.</a:t>
             </a:r>
             <a:endParaRPr lang="en-US" sz="900" dirty="0"/>
           </a:p>
@@ -5710,7 +5710,7 @@
                           <a:ea typeface="Calibri" pitchFamily="34" charset="-122"/>
                           <a:cs typeface="Calibri" pitchFamily="34" charset="-120"/>
                         </a:rPr>
-                        <a:t>Purchase price (not provided; from OM cap rate)</a:t>
+                        <a:t>Purchase price — SOLVED, not given</a:t>
                       </a:r>
                       <a:endParaRPr lang="en-US" sz="850" dirty="0">
                         <a:latin typeface="Calibri" charset="0"/>
@@ -5775,7 +5775,7 @@
                           <a:ea typeface="Calibri" pitchFamily="34" charset="-122"/>
                           <a:cs typeface="Calibri" pitchFamily="34" charset="-120"/>
                         </a:rPr>
-                        <a:t>$14.2mm</a:t>
+                        <a:t>$12.0mm</a:t>
                       </a:r>
                       <a:endParaRPr lang="en-US" sz="850" dirty="0">
                         <a:latin typeface="Calibri" charset="0"/>
@@ -5974,7 +5974,7 @@
                           <a:ea typeface="Calibri" pitchFamily="34" charset="-122"/>
                           <a:cs typeface="Calibri" pitchFamily="34" charset="-120"/>
                         </a:rPr>
-                        <a:t>Reno start / pace / completion</a:t>
+                        <a:t>Track A: start / pace / cost / prem</a:t>
                       </a:r>
                       <a:endParaRPr lang="en-US" sz="850" dirty="0">
                         <a:latin typeface="Calibri" charset="0"/>
@@ -6039,7 +6039,7 @@
                           <a:ea typeface="Calibri" pitchFamily="34" charset="-122"/>
                           <a:cs typeface="Calibri" pitchFamily="34" charset="-120"/>
                         </a:rPr>
-                        <a:t>mo 4 / 5 / mo 27</a:t>
+                        <a:t>mo 2 / 10 / $10k / $100</a:t>
                       </a:r>
                       <a:endParaRPr lang="en-US" sz="850" dirty="0">
                         <a:latin typeface="Calibri" charset="0"/>
@@ -6106,7 +6106,7 @@
                           <a:ea typeface="Calibri" pitchFamily="34" charset="-122"/>
                           <a:cs typeface="Calibri" pitchFamily="34" charset="-120"/>
                         </a:rPr>
-                        <a:t>Interior cost / rent premium</a:t>
+                        <a:t>Track B: start / pace / cost / prem</a:t>
                       </a:r>
                       <a:endParaRPr lang="en-US" sz="850" dirty="0">
                         <a:latin typeface="Calibri" charset="0"/>
@@ -6171,7 +6171,7 @@
                           <a:ea typeface="Calibri" pitchFamily="34" charset="-122"/>
                           <a:cs typeface="Calibri" pitchFamily="34" charset="-120"/>
                         </a:rPr>
-                        <a:t>$13,000 / $125mo</a:t>
+                        <a:t>mo 4 / 5 / $18k / $200</a:t>
                       </a:r>
                       <a:endParaRPr lang="en-US" sz="850" dirty="0">
                         <a:latin typeface="Calibri" charset="0"/>
@@ -6238,7 +6238,7 @@
                           <a:ea typeface="Calibri" pitchFamily="34" charset="-122"/>
                           <a:cs typeface="Calibri" pitchFamily="34" charset="-120"/>
                         </a:rPr>
-                        <a:t>W/D addition, 65 units (case-set)</a:t>
+                        <a:t>Blended cost / premium / ROC</a:t>
                       </a:r>
                       <a:endParaRPr lang="en-US" sz="850" dirty="0">
                         <a:latin typeface="Calibri" charset="0"/>
@@ -6303,7 +6303,7 @@
                           <a:ea typeface="Calibri" pitchFamily="34" charset="-122"/>
                           <a:cs typeface="Calibri" pitchFamily="34" charset="-120"/>
                         </a:rPr>
-                        <a:t>$5,000 / $75mo</a:t>
+                        <a:t>$14,407 / $155 / 12.9%</a:t>
                       </a:r>
                       <a:endParaRPr lang="en-US" sz="850" dirty="0">
                         <a:latin typeface="Calibri" charset="0"/>
@@ -6435,7 +6435,7 @@
                           <a:ea typeface="Calibri" pitchFamily="34" charset="-122"/>
                           <a:cs typeface="Calibri" pitchFamily="34" charset="-120"/>
                         </a:rPr>
-                        <a:t>$1.21mm</a:t>
+                        <a:t>$1.20mm</a:t>
                       </a:r>
                       <a:endParaRPr lang="en-US" sz="850" dirty="0">
                         <a:latin typeface="Calibri" charset="0"/>
@@ -6766,7 +6766,7 @@
                           <a:ea typeface="Calibri" pitchFamily="34" charset="-122"/>
                           <a:cs typeface="Calibri" pitchFamily="34" charset="-120"/>
                         </a:rPr>
-                        <a:t>Real estate taxes, Year 1 to Year 5</a:t>
+                        <a:t>Taxes Y1-Y5 (actual bill +4%/yr)</a:t>
                       </a:r>
                       <a:endParaRPr lang="en-US" sz="850" dirty="0">
                         <a:latin typeface="Calibri" charset="0"/>
@@ -6831,7 +6831,7 @@
                           <a:ea typeface="Calibri" pitchFamily="34" charset="-122"/>
                           <a:cs typeface="Calibri" pitchFamily="34" charset="-120"/>
                         </a:rPr>
-                        <a:t>$140K to $210K</a:t>
+                        <a:t>$137K to $160K</a:t>
                       </a:r>
                       <a:endParaRPr lang="en-US" sz="850" dirty="0">
                         <a:latin typeface="Calibri" charset="0"/>
@@ -6963,7 +6963,7 @@
                           <a:ea typeface="Calibri" pitchFamily="34" charset="-122"/>
                           <a:cs typeface="Calibri" pitchFamily="34" charset="-120"/>
                         </a:rPr>
-                        <a:t>$8,948/unit</a:t>
+                        <a:t>$8,929/unit</a:t>
                       </a:r>
                       <a:endParaRPr lang="en-US" sz="850" dirty="0">
                         <a:latin typeface="Calibri" charset="0"/>
@@ -7313,7 +7313,7 @@
                 <a:ea typeface="Calibri" pitchFamily="34" charset="-122"/>
                 <a:cs typeface="Calibri" pitchFamily="34" charset="-120"/>
               </a:rPr>
-              <a:t>Rent growth is set off Yardi Matrix 1Q-26 ACTUALS, not a forecast. Where the rent roll and T-12 conflict with the OM, the Excel files govern — including the washer/dryer count (53, not the OM's 78).</a:t>
+              <a:t>Rent growth off Yardi 1Q-26 ACTUALS and taxes off the 25-year Marion County assessment record — not forecasts. Where the rent roll and T-12 conflict with the OM, the Excel files govern (W/D count 53, not 78).</a:t>
             </a:r>
             <a:endParaRPr lang="en-US" sz="800" dirty="0"/>
           </a:p>
@@ -7407,7 +7407,7 @@
                 <a:ea typeface="Calibri" pitchFamily="34" charset="-122"/>
                 <a:cs typeface="Calibri" pitchFamily="34" charset="-120"/>
               </a:rPr>
-              <a:t>14% hurdle is cleared only at or below $11.25mm — a 21% discount to the ask.</a:t>
+              <a:t>14% hurdle is cleared at or below $12.0mm. It traded at $13.625mm.</a:t>
             </a:r>
             <a:endParaRPr lang="en-US" sz="800" dirty="0"/>
           </a:p>
@@ -7517,7 +7517,7 @@
                 <a:ea typeface="Calibri" pitchFamily="34" charset="-122"/>
                 <a:cs typeface="Calibri" pitchFamily="34" charset="-120"/>
               </a:rPr>
-              <a:t>A well-located asset with a genuinely accretive renovation — 12.7% on cost, 18% on the laundry component. Approve the plan and the $3.07mm of capital; do not approve the price. To make $14.2mm work you would need roughly 4.0% annual rent growth AND a 6.25% exit cap simultaneously. Metro rents actually grew 1.1% last year and 2025 starts doubled. Underwriting a market recovery we do not control, to justify a price we do control, is how an acquisitions team loses money it cannot renovate its way out of. Bid $11.25mm and be willing to lose.</a:t>
+              <a:t>A well-located asset with a genuinely accretive plan: 12.9% return on renovation cost, all 118 units done in 16 months without displacing a resident, and a Year-5 yield on cost 111 bps above our exit. Our maximum bid is $12.0mm. It traded at $13,625,000 — 12% above us — where the same plan returns 7.9%. We were outbid by someone with a cheaper cost of capital or a braver rent view, and on 1.1% actual metro rent growth we would make the same call again. Being disciplined on the one variable you fully control is the job.</a:t>
             </a:r>
             <a:endParaRPr lang="en-US" sz="950" dirty="0"/>
           </a:p>

--- a/chateau_in_the_woods/Chateau_in_the_Woods_IC_Presentation.pptx
+++ b/chateau_in_the_woods/Chateau_in_the_Woods_IC_Presentation.pptx
@@ -8,11 +8,9 @@
     <p:sldId id="256" r:id="rId2"/>
     <p:sldId id="257" r:id="rId3"/>
     <p:sldId id="258" r:id="rId4"/>
-    <p:sldId id="259" r:id="rId5"/>
-    <p:sldId id="260" r:id="rId6"/>
   </p:sldIdLst>
   <p:notesMasterIdLst>
-    <p:notesMasterId r:id="rId7"/>
+    <p:notesMasterId r:id="rId5"/>
   </p:notesMasterIdLst>
   <p:sldSz cx="12192000" cy="6858000"/>
   <p:notesSz cx="6858000" cy="12192000"/>
@@ -1913,7 +1911,7 @@
               <a:lstStyle/>
               <a:p>
                 <a:pPr>
-                  <a:defRPr b="0" i="0" strike="noStrike" sz="850" u="none">
+                  <a:defRPr b="0" i="0" strike="noStrike" sz="800" u="none">
                     <a:solidFill>
                       <a:srgbClr val="13201A"/>
                     </a:solidFill>
@@ -2009,7 +2007,7 @@
               <a:lstStyle/>
               <a:p>
                 <a:pPr>
-                  <a:defRPr b="0" i="0" strike="noStrike" sz="850" u="none">
+                  <a:defRPr b="0" i="0" strike="noStrike" sz="800" u="none">
                     <a:solidFill>
                       <a:srgbClr val="13201A"/>
                     </a:solidFill>
@@ -2084,7 +2082,7 @@
             <a:lstStyle/>
             <a:p>
               <a:pPr>
-                <a:defRPr b="0" i="0" strike="noStrike" sz="850" u="none">
+                <a:defRPr b="0" i="0" strike="noStrike" sz="800" u="none">
                   <a:solidFill>
                     <a:srgbClr val="13201A"/>
                   </a:solidFill>
@@ -2131,7 +2129,7 @@
           <a:lstStyle/>
           <a:p>
             <a:pPr>
-              <a:defRPr sz="950" b="0" i="0" u="none" strike="noStrike">
+              <a:defRPr sz="850" b="0" i="0" u="none" strike="noStrike">
                 <a:solidFill>
                   <a:srgbClr val="13201A"/>
                 </a:solidFill>
@@ -2454,658 +2452,6 @@
         <c:crossAx val="2094734554"/>
         <c:crosses val="autoZero"/>
         <c:crossBetween val="between"/>
-      </c:valAx>
-      <c:spPr>
-        <a:solidFill>
-          <a:srgbClr val="FFFFFF"/>
-        </a:solidFill>
-        <a:ln>
-          <a:noFill/>
-        </a:ln>
-        <a:effectLst/>
-      </c:spPr>
-    </c:plotArea>
-    <c:plotVisOnly val="1"/>
-    <c:dispBlanksAs val="span"/>
-  </c:chart>
-  <c:spPr>
-    <a:solidFill>
-      <a:srgbClr val="FFFFFF"/>
-    </a:solidFill>
-    <a:ln>
-      <a:noFill/>
-    </a:ln>
-    <a:effectLst/>
-  </c:spPr>
-  <c:externalData r:id="rId1">
-    <c:autoUpdate val="0"/>
-  </c:externalData>
-</c:chartSpace>
-</file>
-
-<file path=ppt/charts/chart7.xml><?xml version="1.0" encoding="utf-8"?>
-<c:chartSpace xmlns:c="http://schemas.openxmlformats.org/drawingml/2006/chart" xmlns:a="http://schemas.openxmlformats.org/drawingml/2006/main" xmlns:r="http://schemas.openxmlformats.org/officeDocument/2006/relationships">
-  <c:date1904 val="0"/>
-  <c:roundedCorners val="1"/>
-  <c:chart>
-    <c:autoTitleDeleted val="1"/>
-    <c:plotArea>
-      <c:layout/>
-      <c:barChart>
-        <c:barDir val="col"/>
-        <c:grouping val="clustered"/>
-        <c:varyColors val="0"/>
-        <c:ser>
-          <c:idx val="0"/>
-          <c:order val="0"/>
-          <c:tx>
-            <c:strRef>
-              <c:f>Sheet1!$B$1</c:f>
-              <c:strCache>
-                <c:ptCount val="1"/>
-                <c:pt idx="0">
-                  <c:v>Cash-on-cash</c:v>
-                </c:pt>
-              </c:strCache>
-            </c:strRef>
-          </c:tx>
-          <c:spPr>
-            <a:solidFill>
-              <a:srgbClr val="BFE0CD"/>
-            </a:solidFill>
-            <a:effectLst/>
-          </c:spPr>
-          <c:invertIfNegative val="0"/>
-          <c:dLbls>
-            <c:numFmt formatCode="0.0%" sourceLinked="0"/>
-            <c:txPr>
-              <a:bodyPr/>
-              <a:lstStyle/>
-              <a:p>
-                <a:pPr>
-                  <a:defRPr b="0" i="0" strike="noStrike" sz="900" u="none">
-                    <a:solidFill>
-                      <a:srgbClr val="13201A"/>
-                    </a:solidFill>
-                    <a:latin typeface="Calibri"/>
-                  </a:defRPr>
-                </a:pPr>
-              </a:p>
-            </c:txPr>
-            <c:showLegendKey val="0"/>
-            <c:showVal val="1"/>
-            <c:showCatName val="0"/>
-            <c:showSerName val="0"/>
-            <c:showPercent val="0"/>
-            <c:showBubbleSize val="0"/>
-            <c:showLeaderLines val="0"/>
-          </c:dLbls>
-          <c:dPt>
-            <c:idx val="0"/>
-            <c:invertIfNegative val="0"/>
-            <c:bubble3D val="0"/>
-            <c:spPr>
-              <a:solidFill>
-                <a:srgbClr val="BFE0CD"/>
-              </a:solidFill>
-              <a:effectLst/>
-            </c:spPr>
-          </c:dPt>
-          <c:dPt>
-            <c:idx val="1"/>
-            <c:invertIfNegative val="0"/>
-            <c:bubble3D val="0"/>
-            <c:spPr>
-              <a:solidFill>
-                <a:srgbClr val="2E9E76"/>
-              </a:solidFill>
-              <a:effectLst/>
-            </c:spPr>
-          </c:dPt>
-          <c:dPt>
-            <c:idx val="2"/>
-            <c:invertIfNegative val="0"/>
-            <c:bubble3D val="0"/>
-            <c:spPr>
-              <a:solidFill>
-                <a:srgbClr val="2E9E76"/>
-              </a:solidFill>
-              <a:effectLst/>
-            </c:spPr>
-          </c:dPt>
-          <c:dPt>
-            <c:idx val="3"/>
-            <c:invertIfNegative val="0"/>
-            <c:bubble3D val="0"/>
-            <c:spPr>
-              <a:solidFill>
-                <a:srgbClr val="2E9E76"/>
-              </a:solidFill>
-              <a:effectLst/>
-            </c:spPr>
-          </c:dPt>
-          <c:dPt>
-            <c:idx val="4"/>
-            <c:invertIfNegative val="0"/>
-            <c:bubble3D val="0"/>
-            <c:spPr>
-              <a:solidFill>
-                <a:srgbClr val="1F7A5C"/>
-              </a:solidFill>
-              <a:effectLst/>
-            </c:spPr>
-          </c:dPt>
-          <c:cat>
-            <c:multiLvlStrRef>
-              <c:f>Sheet1!$A$2:$A$6</c:f>
-              <c:multiLvlStrCache>
-                <c:ptCount val="5"/>
-                <c:lvl>
-                  <c:pt idx="0">
-                    <c:v>Y1</c:v>
-                  </c:pt>
-                  <c:pt idx="1">
-                    <c:v>Y2</c:v>
-                  </c:pt>
-                  <c:pt idx="2">
-                    <c:v>Y3</c:v>
-                  </c:pt>
-                  <c:pt idx="3">
-                    <c:v>Y4</c:v>
-                  </c:pt>
-                  <c:pt idx="4">
-                    <c:v>Y5</c:v>
-                  </c:pt>
-                </c:lvl>
-              </c:multiLvlStrCache>
-            </c:multiLvlStrRef>
-          </c:cat>
-          <c:val>
-            <c:numRef>
-              <c:f>Sheet1!$B$2:$B$6</c:f>
-              <c:numCache>
-                <c:formatCode>General</c:formatCode>
-                <c:ptCount val="5"/>
-                <c:pt idx="0">
-                  <c:v>0.0485</c:v>
-                </c:pt>
-                <c:pt idx="1">
-                  <c:v>0.0817</c:v>
-                </c:pt>
-                <c:pt idx="2">
-                  <c:v>0.0901</c:v>
-                </c:pt>
-                <c:pt idx="3">
-                  <c:v>0.0961</c:v>
-                </c:pt>
-                <c:pt idx="4">
-                  <c:v>0.101</c:v>
-                </c:pt>
-              </c:numCache>
-            </c:numRef>
-          </c:val>
-        </c:ser>
-        <c:dLbls>
-          <c:numFmt formatCode="0.0%" sourceLinked="0"/>
-          <c:txPr>
-            <a:bodyPr/>
-            <a:lstStyle/>
-            <a:p>
-              <a:pPr>
-                <a:defRPr b="0" i="0" strike="noStrike" sz="900" u="none">
-                  <a:solidFill>
-                    <a:srgbClr val="13201A"/>
-                  </a:solidFill>
-                  <a:latin typeface="Calibri"/>
-                </a:defRPr>
-              </a:pPr>
-            </a:p>
-          </c:txPr>
-          <c:showLegendKey val="0"/>
-          <c:showVal val="1"/>
-          <c:showCatName val="0"/>
-          <c:showSerName val="0"/>
-          <c:showPercent val="0"/>
-          <c:showBubbleSize val="0"/>
-          <c:showLeaderLines val="0"/>
-        </c:dLbls>
-        <c:gapWidth val="50"/>
-        <c:overlap val="0"/>
-        <c:axId val="2094734554"/>
-        <c:axId val="2094734552"/>
-        <c:axId val="2094734556"/>
-      </c:barChart>
-      <c:catAx>
-        <c:axId val="2094734554"/>
-        <c:scaling>
-          <c:orientation val="minMax"/>
-        </c:scaling>
-        <c:delete val="0"/>
-        <c:axPos val="b"/>
-        <c:numFmt formatCode="General" sourceLinked="1"/>
-        <c:majorTickMark val="none"/>
-        <c:minorTickMark val="none"/>
-        <c:tickLblPos val="low"/>
-        <c:spPr>
-          <a:ln w="12700" cap="flat">
-            <a:solidFill>
-              <a:srgbClr val="888888"/>
-            </a:solidFill>
-            <a:prstDash val="solid"/>
-            <a:round/>
-          </a:ln>
-        </c:spPr>
-        <c:txPr>
-          <a:bodyPr/>
-          <a:lstStyle/>
-          <a:p>
-            <a:pPr>
-              <a:defRPr sz="900" b="0" i="0" u="none" strike="noStrike">
-                <a:solidFill>
-                  <a:srgbClr val="5F7269"/>
-                </a:solidFill>
-                <a:latin typeface="Calibri"/>
-              </a:defRPr>
-            </a:pPr>
-            <a:endParaRPr lang="en-US"/>
-          </a:p>
-        </c:txPr>
-        <c:crossAx val="2094734552"/>
-        <c:crosses val="autoZero"/>
-        <c:auto val="1"/>
-        <c:lblAlgn val="ctr"/>
-        <c:noMultiLvlLbl val="1"/>
-      </c:catAx>
-      <c:valAx>
-        <c:axId val="2094734552"/>
-        <c:scaling>
-          <c:orientation val="minMax"/>
-          <c:max val="0.125"/>
-          <c:min val="0"/>
-        </c:scaling>
-        <c:delete val="1"/>
-        <c:axPos val="l"/>
-        <c:numFmt formatCode="General" sourceLinked="0"/>
-        <c:majorTickMark val="none"/>
-        <c:minorTickMark val="none"/>
-        <c:tickLblPos val="nextTo"/>
-        <c:spPr>
-          <a:ln w="12700" cap="flat">
-            <a:noFill/>
-            <a:prstDash val="solid"/>
-            <a:round/>
-          </a:ln>
-        </c:spPr>
-        <c:txPr>
-          <a:bodyPr/>
-          <a:lstStyle/>
-          <a:p>
-            <a:pPr>
-              <a:defRPr sz="1200" b="0" i="0" u="none" strike="noStrike">
-                <a:solidFill>
-                  <a:srgbClr val="000000"/>
-                </a:solidFill>
-                <a:latin typeface="Calibri"/>
-              </a:defRPr>
-            </a:pPr>
-            <a:endParaRPr lang="en-US"/>
-          </a:p>
-        </c:txPr>
-        <c:crossAx val="2094734554"/>
-        <c:crosses val="autoZero"/>
-        <c:crossBetween val="between"/>
-      </c:valAx>
-      <c:spPr>
-        <a:solidFill>
-          <a:srgbClr val="FFFFFF"/>
-        </a:solidFill>
-        <a:ln>
-          <a:noFill/>
-        </a:ln>
-        <a:effectLst/>
-      </c:spPr>
-    </c:plotArea>
-    <c:plotVisOnly val="1"/>
-    <c:dispBlanksAs val="span"/>
-  </c:chart>
-  <c:spPr>
-    <a:solidFill>
-      <a:srgbClr val="FFFFFF"/>
-    </a:solidFill>
-    <a:ln>
-      <a:noFill/>
-    </a:ln>
-    <a:effectLst/>
-  </c:spPr>
-  <c:externalData r:id="rId1">
-    <c:autoUpdate val="0"/>
-  </c:externalData>
-</c:chartSpace>
-</file>
-
-<file path=ppt/charts/chart8.xml><?xml version="1.0" encoding="utf-8"?>
-<c:chartSpace xmlns:c="http://schemas.openxmlformats.org/drawingml/2006/chart" xmlns:a="http://schemas.openxmlformats.org/drawingml/2006/main" xmlns:r="http://schemas.openxmlformats.org/officeDocument/2006/relationships">
-  <c:date1904 val="0"/>
-  <c:roundedCorners val="1"/>
-  <c:chart>
-    <c:autoTitleDeleted val="1"/>
-    <c:plotArea>
-      <c:layout/>
-      <c:barChart>
-        <c:barDir val="col"/>
-        <c:grouping val="stacked"/>
-        <c:varyColors val="0"/>
-        <c:ser>
-          <c:idx val="0"/>
-          <c:order val="0"/>
-          <c:tx>
-            <c:strRef>
-              <c:f>Sheet1!$B$1</c:f>
-              <c:strCache>
-                <c:ptCount val="1"/>
-                <c:pt idx="0">
-                  <c:v>Net rental income</c:v>
-                </c:pt>
-              </c:strCache>
-            </c:strRef>
-          </c:tx>
-          <c:spPr>
-            <a:solidFill>
-              <a:srgbClr val="1F7A5C"/>
-            </a:solidFill>
-            <a:effectLst/>
-          </c:spPr>
-          <c:invertIfNegative val="0"/>
-          <c:dLbls>
-            <c:numFmt formatCode="#,##0" sourceLinked="0"/>
-            <c:txPr>
-              <a:bodyPr/>
-              <a:lstStyle/>
-              <a:p>
-                <a:pPr>
-                  <a:defRPr b="0" i="0" strike="noStrike" sz="1200" u="none">
-                    <a:solidFill>
-                      <a:srgbClr val="000000"/>
-                    </a:solidFill>
-                    <a:latin typeface="Calibri"/>
-                  </a:defRPr>
-                </a:pPr>
-              </a:p>
-            </c:txPr>
-            <c:showLegendKey val="0"/>
-            <c:showVal val="0"/>
-            <c:showCatName val="0"/>
-            <c:showSerName val="0"/>
-            <c:showPercent val="0"/>
-            <c:showBubbleSize val="0"/>
-            <c:showLeaderLines val="0"/>
-          </c:dLbls>
-          <c:cat>
-            <c:multiLvlStrRef>
-              <c:f>Sheet1!$A$2:$A$6</c:f>
-              <c:multiLvlStrCache>
-                <c:ptCount val="5"/>
-                <c:lvl>
-                  <c:pt idx="0">
-                    <c:v>Y1</c:v>
-                  </c:pt>
-                  <c:pt idx="1">
-                    <c:v>Y2</c:v>
-                  </c:pt>
-                  <c:pt idx="2">
-                    <c:v>Y3</c:v>
-                  </c:pt>
-                  <c:pt idx="3">
-                    <c:v>Y4</c:v>
-                  </c:pt>
-                  <c:pt idx="4">
-                    <c:v>Y5</c:v>
-                  </c:pt>
-                </c:lvl>
-              </c:multiLvlStrCache>
-            </c:multiLvlStrRef>
-          </c:cat>
-          <c:val>
-            <c:numRef>
-              <c:f>Sheet1!$B$2:$B$6</c:f>
-              <c:numCache>
-                <c:formatCode>General</c:formatCode>
-                <c:ptCount val="5"/>
-                <c:pt idx="0">
-                  <c:v>1688</c:v>
-                </c:pt>
-                <c:pt idx="1">
-                  <c:v>1889</c:v>
-                </c:pt>
-                <c:pt idx="2">
-                  <c:v>1966</c:v>
-                </c:pt>
-                <c:pt idx="3">
-                  <c:v>2031</c:v>
-                </c:pt>
-                <c:pt idx="4">
-                  <c:v>2092</c:v>
-                </c:pt>
-              </c:numCache>
-            </c:numRef>
-          </c:val>
-        </c:ser>
-        <c:ser>
-          <c:idx val="1"/>
-          <c:order val="1"/>
-          <c:tx>
-            <c:strRef>
-              <c:f>Sheet1!$C$1</c:f>
-              <c:strCache>
-                <c:ptCount val="1"/>
-                <c:pt idx="0">
-                  <c:v>Other income</c:v>
-                </c:pt>
-              </c:strCache>
-            </c:strRef>
-          </c:tx>
-          <c:spPr>
-            <a:solidFill>
-              <a:srgbClr val="BFE0CD"/>
-            </a:solidFill>
-            <a:effectLst/>
-          </c:spPr>
-          <c:invertIfNegative val="0"/>
-          <c:dLbls>
-            <c:numFmt formatCode="#,##0" sourceLinked="0"/>
-            <c:txPr>
-              <a:bodyPr/>
-              <a:lstStyle/>
-              <a:p>
-                <a:pPr>
-                  <a:defRPr b="0" i="0" strike="noStrike" sz="1200" u="none">
-                    <a:solidFill>
-                      <a:srgbClr val="000000"/>
-                    </a:solidFill>
-                    <a:latin typeface="Calibri"/>
-                  </a:defRPr>
-                </a:pPr>
-              </a:p>
-            </c:txPr>
-            <c:showLegendKey val="0"/>
-            <c:showVal val="0"/>
-            <c:showCatName val="0"/>
-            <c:showSerName val="0"/>
-            <c:showPercent val="0"/>
-            <c:showBubbleSize val="0"/>
-            <c:showLeaderLines val="0"/>
-          </c:dLbls>
-          <c:cat>
-            <c:multiLvlStrRef>
-              <c:f>Sheet1!$A$2:$A$6</c:f>
-              <c:multiLvlStrCache>
-                <c:ptCount val="5"/>
-                <c:lvl>
-                  <c:pt idx="0">
-                    <c:v>Y1</c:v>
-                  </c:pt>
-                  <c:pt idx="1">
-                    <c:v>Y2</c:v>
-                  </c:pt>
-                  <c:pt idx="2">
-                    <c:v>Y3</c:v>
-                  </c:pt>
-                  <c:pt idx="3">
-                    <c:v>Y4</c:v>
-                  </c:pt>
-                  <c:pt idx="4">
-                    <c:v>Y5</c:v>
-                  </c:pt>
-                </c:lvl>
-              </c:multiLvlStrCache>
-            </c:multiLvlStrRef>
-          </c:cat>
-          <c:val>
-            <c:numRef>
-              <c:f>Sheet1!$C$2:$C$6</c:f>
-              <c:numCache>
-                <c:formatCode>General</c:formatCode>
-                <c:ptCount val="5"/>
-                <c:pt idx="0">
-                  <c:v>238</c:v>
-                </c:pt>
-                <c:pt idx="1">
-                  <c:v>269</c:v>
-                </c:pt>
-                <c:pt idx="2">
-                  <c:v>279</c:v>
-                </c:pt>
-                <c:pt idx="3">
-                  <c:v>289</c:v>
-                </c:pt>
-                <c:pt idx="4">
-                  <c:v>298</c:v>
-                </c:pt>
-              </c:numCache>
-            </c:numRef>
-          </c:val>
-        </c:ser>
-        <c:dLbls>
-          <c:numFmt formatCode="#,##0" sourceLinked="0"/>
-          <c:txPr>
-            <a:bodyPr/>
-            <a:lstStyle/>
-            <a:p>
-              <a:pPr>
-                <a:defRPr b="0" i="0" strike="noStrike" sz="1200" u="none">
-                  <a:solidFill>
-                    <a:srgbClr val="000000"/>
-                  </a:solidFill>
-                  <a:latin typeface="Calibri"/>
-                </a:defRPr>
-              </a:pPr>
-            </a:p>
-          </c:txPr>
-          <c:showLegendKey val="0"/>
-          <c:showVal val="0"/>
-          <c:showCatName val="0"/>
-          <c:showSerName val="0"/>
-          <c:showPercent val="0"/>
-          <c:showBubbleSize val="0"/>
-          <c:showLeaderLines val="0"/>
-        </c:dLbls>
-        <c:gapWidth val="50"/>
-        <c:overlap val="100"/>
-        <c:axId val="2094734554"/>
-        <c:axId val="2094734552"/>
-        <c:axId val="2094734556"/>
-      </c:barChart>
-      <c:catAx>
-        <c:axId val="2094734554"/>
-        <c:scaling>
-          <c:orientation val="minMax"/>
-        </c:scaling>
-        <c:delete val="0"/>
-        <c:axPos val="b"/>
-        <c:numFmt formatCode="General" sourceLinked="1"/>
-        <c:majorTickMark val="none"/>
-        <c:minorTickMark val="none"/>
-        <c:tickLblPos val="low"/>
-        <c:spPr>
-          <a:ln w="12700" cap="flat">
-            <a:solidFill>
-              <a:srgbClr val="888888"/>
-            </a:solidFill>
-            <a:prstDash val="solid"/>
-            <a:round/>
-          </a:ln>
-        </c:spPr>
-        <c:txPr>
-          <a:bodyPr/>
-          <a:lstStyle/>
-          <a:p>
-            <a:pPr>
-              <a:defRPr sz="900" b="0" i="0" u="none" strike="noStrike">
-                <a:solidFill>
-                  <a:srgbClr val="5F7269"/>
-                </a:solidFill>
-                <a:latin typeface="Calibri"/>
-              </a:defRPr>
-            </a:pPr>
-            <a:endParaRPr lang="en-US"/>
-          </a:p>
-        </c:txPr>
-        <c:crossAx val="2094734552"/>
-        <c:crosses val="autoZero"/>
-        <c:auto val="1"/>
-        <c:lblAlgn val="ctr"/>
-        <c:noMultiLvlLbl val="1"/>
-      </c:catAx>
-      <c:valAx>
-        <c:axId val="2094734552"/>
-        <c:scaling>
-          <c:orientation val="minMax"/>
-          <c:max val="2500"/>
-          <c:min val="0"/>
-        </c:scaling>
-        <c:delete val="0"/>
-        <c:axPos val="l"/>
-        <c:majorGridlines>
-          <c:spPr>
-            <a:ln w="6350" cap="flat">
-              <a:solidFill>
-                <a:srgbClr val="EAEFEB"/>
-              </a:solidFill>
-              <a:prstDash val="solid"/>
-              <a:round/>
-            </a:ln>
-          </c:spPr>
-        </c:majorGridlines>
-        <c:numFmt formatCode="$#,##0&quot;K&quot;" sourceLinked="0"/>
-        <c:majorTickMark val="none"/>
-        <c:minorTickMark val="none"/>
-        <c:tickLblPos val="nextTo"/>
-        <c:spPr>
-          <a:ln w="12700" cap="flat">
-            <a:noFill/>
-            <a:prstDash val="solid"/>
-            <a:round/>
-          </a:ln>
-        </c:spPr>
-        <c:txPr>
-          <a:bodyPr/>
-          <a:lstStyle/>
-          <a:p>
-            <a:pPr>
-              <a:defRPr sz="800" b="0" i="0" u="none" strike="noStrike">
-                <a:solidFill>
-                  <a:srgbClr val="5F7269"/>
-                </a:solidFill>
-                <a:latin typeface="Calibri"/>
-              </a:defRPr>
-            </a:pPr>
-            <a:endParaRPr lang="en-US"/>
-          </a:p>
-        </c:txPr>
-        <c:crossAx val="2094734554"/>
-        <c:crosses val="autoZero"/>
-        <c:crossBetween val="between"/>
-        <c:majorUnit val="500"/>
       </c:valAx>
       <c:spPr>
         <a:solidFill>
@@ -3618,7 +2964,7 @@
           <a:p>
             <a:r>
               <a:rPr lang="en-US" dirty="0"/>
-              <a:t>Read the tornado from the top: the only bar that breaks the deal is the one we do not control. Rent growth at a flat 1.0% takes it to 7.1%; at 3.5% it is 18.7%. Everything we do control — premium, cost, pace — moves it by roughly 5 points either way, which is exactly why the bid, not the business plan, is the decision in front of the committee.</a:t>
+              <a:t>Read the tornado from the bottom: the only bar that breaks the deal is the one we do not control. Rent growth at a flat 1.0% takes it to 7.1%; at 3.5% it is 18.7%. Everything we do control — premium, cost, pace — moves it roughly 5 points either way, which is why the bid, not the business plan, is the decision in front of the committee.</a:t>
             </a:r>
             <a:endParaRPr lang="en-US" dirty="0"/>
           </a:p>
@@ -3730,182 +3076,6 @@
             <a:fld id="{F7021451-1387-4CA6-816F-3879F97B5CBC}" type="slidenum">
               <a:rPr lang="en-US"/>
               <a:t>3</a:t>
-            </a:fld>
-            <a:endParaRPr lang="en-US"/>
-          </a:p>
-        </p:txBody>
-      </p:sp>
-    </p:spTree>
-    <p:extLst>
-      <p:ext uri="{BB962C8B-B14F-4D97-AF65-F5344CB8AC3E}">
-        <p14:creationId xmlns:p14="http://schemas.microsoft.com/office/powerpoint/2010/main" val="1024086991"/>
-      </p:ext>
-    </p:extLst>
-  </p:cSld>
-  <p:clrMapOvr>
-    <a:masterClrMapping/>
-  </p:clrMapOvr>
-</p:notes>
-</file>
-
-<file path=ppt/notesSlides/notesSlide4.xml><?xml version="1.0" encoding="utf-8"?>
-<p:notes xmlns:a="http://schemas.openxmlformats.org/drawingml/2006/main" xmlns:r="http://schemas.openxmlformats.org/officeDocument/2006/relationships" xmlns:p="http://schemas.openxmlformats.org/presentationml/2006/main">
-  <p:cSld>
-    <p:spTree>
-      <p:nvGrpSpPr>
-        <p:cNvPr id="1" name=""/>
-        <p:cNvGrpSpPr/>
-        <p:nvPr/>
-      </p:nvGrpSpPr>
-      <p:grpSpPr>
-        <a:xfrm>
-          <a:off x="0" y="0"/>
-          <a:ext cx="0" cy="0"/>
-          <a:chOff x="0" y="0"/>
-          <a:chExt cx="0" cy="0"/>
-        </a:xfrm>
-      </p:grpSpPr>
-      <p:sp>
-        <p:nvSpPr>
-          <p:cNvPr id="2" name="Slide Image Placeholder 1"/>
-          <p:cNvSpPr>
-            <a:spLocks noGrp="1" noRot="1" noChangeAspect="1"/>
-          </p:cNvSpPr>
-          <p:nvPr>
-            <p:ph type="sldImg"/>
-          </p:nvPr>
-        </p:nvSpPr>
-        <p:spPr/>
-      </p:sp>
-      <p:sp>
-        <p:nvSpPr>
-          <p:cNvPr id="3" name="Notes Placeholder 2"/>
-          <p:cNvSpPr>
-            <a:spLocks noGrp="1"/>
-          </p:cNvSpPr>
-          <p:nvPr>
-            <p:ph type="body" idx="1"/>
-          </p:nvPr>
-        </p:nvSpPr>
-        <p:spPr/>
-        <p:txBody>
-          <a:bodyPr/>
-          <a:lstStyle/>
-          <a:p>
-            <a:r>
-              <a:rPr lang="en-US" dirty="0"/>
-              <a:t/>
-            </a:r>
-            <a:endParaRPr lang="en-US" dirty="0"/>
-          </a:p>
-        </p:txBody>
-      </p:sp>
-      <p:sp>
-        <p:nvSpPr>
-          <p:cNvPr id="4" name="Slide Number Placeholder 3"/>
-          <p:cNvSpPr>
-            <a:spLocks noGrp="1"/>
-          </p:cNvSpPr>
-          <p:nvPr>
-            <p:ph type="sldNum" sz="quarter" idx="10"/>
-          </p:nvPr>
-        </p:nvSpPr>
-        <p:spPr/>
-        <p:txBody>
-          <a:bodyPr/>
-          <a:lstStyle/>
-          <a:p>
-            <a:fld id="{F7021451-1387-4CA6-816F-3879F97B5CBC}" type="slidenum">
-              <a:rPr lang="en-US"/>
-              <a:t>4</a:t>
-            </a:fld>
-            <a:endParaRPr lang="en-US"/>
-          </a:p>
-        </p:txBody>
-      </p:sp>
-    </p:spTree>
-    <p:extLst>
-      <p:ext uri="{BB962C8B-B14F-4D97-AF65-F5344CB8AC3E}">
-        <p14:creationId xmlns:p14="http://schemas.microsoft.com/office/powerpoint/2010/main" val="1024086991"/>
-      </p:ext>
-    </p:extLst>
-  </p:cSld>
-  <p:clrMapOvr>
-    <a:masterClrMapping/>
-  </p:clrMapOvr>
-</p:notes>
-</file>
-
-<file path=ppt/notesSlides/notesSlide5.xml><?xml version="1.0" encoding="utf-8"?>
-<p:notes xmlns:a="http://schemas.openxmlformats.org/drawingml/2006/main" xmlns:r="http://schemas.openxmlformats.org/officeDocument/2006/relationships" xmlns:p="http://schemas.openxmlformats.org/presentationml/2006/main">
-  <p:cSld>
-    <p:spTree>
-      <p:nvGrpSpPr>
-        <p:cNvPr id="1" name=""/>
-        <p:cNvGrpSpPr/>
-        <p:nvPr/>
-      </p:nvGrpSpPr>
-      <p:grpSpPr>
-        <a:xfrm>
-          <a:off x="0" y="0"/>
-          <a:ext cx="0" cy="0"/>
-          <a:chOff x="0" y="0"/>
-          <a:chExt cx="0" cy="0"/>
-        </a:xfrm>
-      </p:grpSpPr>
-      <p:sp>
-        <p:nvSpPr>
-          <p:cNvPr id="2" name="Slide Image Placeholder 1"/>
-          <p:cNvSpPr>
-            <a:spLocks noGrp="1" noRot="1" noChangeAspect="1"/>
-          </p:cNvSpPr>
-          <p:nvPr>
-            <p:ph type="sldImg"/>
-          </p:nvPr>
-        </p:nvSpPr>
-        <p:spPr/>
-      </p:sp>
-      <p:sp>
-        <p:nvSpPr>
-          <p:cNvPr id="3" name="Notes Placeholder 2"/>
-          <p:cNvSpPr>
-            <a:spLocks noGrp="1"/>
-          </p:cNvSpPr>
-          <p:nvPr>
-            <p:ph type="body" idx="1"/>
-          </p:nvPr>
-        </p:nvSpPr>
-        <p:spPr/>
-        <p:txBody>
-          <a:bodyPr/>
-          <a:lstStyle/>
-          <a:p>
-            <a:r>
-              <a:rPr lang="en-US" dirty="0"/>
-              <a:t/>
-            </a:r>
-            <a:endParaRPr lang="en-US" dirty="0"/>
-          </a:p>
-        </p:txBody>
-      </p:sp>
-      <p:sp>
-        <p:nvSpPr>
-          <p:cNvPr id="4" name="Slide Number Placeholder 3"/>
-          <p:cNvSpPr>
-            <a:spLocks noGrp="1"/>
-          </p:cNvSpPr>
-          <p:nvPr>
-            <p:ph type="sldNum" sz="quarter" idx="10"/>
-          </p:nvPr>
-        </p:nvSpPr>
-        <p:spPr/>
-        <p:txBody>
-          <a:bodyPr/>
-          <a:lstStyle/>
-          <a:p>
-            <a:fld id="{F7021451-1387-4CA6-816F-3879F97B5CBC}" type="slidenum">
-              <a:rPr lang="en-US"/>
-              <a:t>5</a:t>
             </a:fld>
             <a:endParaRPr lang="en-US"/>
           </a:p>
@@ -8106,8 +7276,8 @@
         </p:nvSpPr>
         <p:spPr>
           <a:xfrm>
-            <a:off x="411480" y="201168"/>
-            <a:ext cx="8778240" cy="402336"/>
+            <a:off x="411480" y="182880"/>
+            <a:ext cx="8778240" cy="365760"/>
           </a:xfrm>
           <a:prstGeom prst="rect">
             <a:avLst/>
@@ -8145,7 +7315,7 @@
         </p:nvSpPr>
         <p:spPr>
           <a:xfrm>
-            <a:off x="8595360" y="310896"/>
+            <a:off x="8595360" y="274320"/>
             <a:ext cx="3182112" cy="237744"/>
           </a:xfrm>
           <a:prstGeom prst="rect">
@@ -8184,7 +7354,7 @@
         </p:nvSpPr>
         <p:spPr>
           <a:xfrm>
-            <a:off x="411480" y="813816"/>
+            <a:off x="411480" y="722376"/>
             <a:ext cx="50292" cy="182880"/>
           </a:xfrm>
           <a:prstGeom prst="rect">
@@ -8204,7 +7374,7 @@
         </p:nvSpPr>
         <p:spPr>
           <a:xfrm>
-            <a:off x="539496" y="758952"/>
+            <a:off x="539496" y="667512"/>
             <a:ext cx="3547872" cy="237744"/>
           </a:xfrm>
           <a:prstGeom prst="rect">
@@ -8243,7 +7413,7 @@
         </p:nvSpPr>
         <p:spPr>
           <a:xfrm>
-            <a:off x="539496" y="969264"/>
+            <a:off x="539496" y="877824"/>
             <a:ext cx="3547872" cy="182880"/>
           </a:xfrm>
           <a:prstGeom prst="rect">
@@ -8281,8 +7451,8 @@
           <p:nvPr/>
         </p:nvGraphicFramePr>
         <p:xfrm>
-          <a:off x="246888" y="1207008"/>
-          <a:ext cx="3931920" cy="1700784"/>
+          <a:off x="246888" y="1097280"/>
+          <a:ext cx="3931920" cy="1481328"/>
         </p:xfrm>
         <a:graphic xmlns:a="http://schemas.openxmlformats.org/drawingml/2006/main">
           <a:graphicData uri="http://schemas.openxmlformats.org/drawingml/2006/chart">
@@ -8298,7 +7468,7 @@
         </p:nvSpPr>
         <p:spPr>
           <a:xfrm>
-            <a:off x="4261104" y="813816"/>
+            <a:off x="4261104" y="722376"/>
             <a:ext cx="50292" cy="182880"/>
           </a:xfrm>
           <a:prstGeom prst="rect">
@@ -8318,7 +7488,7 @@
         </p:nvSpPr>
         <p:spPr>
           <a:xfrm>
-            <a:off x="4389120" y="758952"/>
+            <a:off x="4389120" y="667512"/>
             <a:ext cx="3547872" cy="237744"/>
           </a:xfrm>
           <a:prstGeom prst="rect">
@@ -8357,7 +7527,7 @@
         </p:nvSpPr>
         <p:spPr>
           <a:xfrm>
-            <a:off x="4389120" y="969264"/>
+            <a:off x="4389120" y="877824"/>
             <a:ext cx="3547872" cy="182880"/>
           </a:xfrm>
           <a:prstGeom prst="rect">
@@ -8395,8 +7565,8 @@
           <p:nvPr/>
         </p:nvGraphicFramePr>
         <p:xfrm>
-          <a:off x="4096512" y="1207008"/>
-          <a:ext cx="3931920" cy="1700784"/>
+          <a:off x="4096512" y="1097280"/>
+          <a:ext cx="3931920" cy="1481328"/>
         </p:xfrm>
         <a:graphic xmlns:a="http://schemas.openxmlformats.org/drawingml/2006/main">
           <a:graphicData uri="http://schemas.openxmlformats.org/drawingml/2006/chart">
@@ -8412,7 +7582,7 @@
         </p:nvSpPr>
         <p:spPr>
           <a:xfrm>
-            <a:off x="4261104" y="2889504"/>
+            <a:off x="4261104" y="2596896"/>
             <a:ext cx="3675888" cy="164592"/>
           </a:xfrm>
           <a:prstGeom prst="rect">
@@ -8451,7 +7621,7 @@
         </p:nvSpPr>
         <p:spPr>
           <a:xfrm>
-            <a:off x="8110728" y="813816"/>
+            <a:off x="8110728" y="722376"/>
             <a:ext cx="50292" cy="182880"/>
           </a:xfrm>
           <a:prstGeom prst="rect">
@@ -8471,7 +7641,7 @@
         </p:nvSpPr>
         <p:spPr>
           <a:xfrm>
-            <a:off x="8238744" y="758952"/>
+            <a:off x="8238744" y="667512"/>
             <a:ext cx="3547872" cy="237744"/>
           </a:xfrm>
           <a:prstGeom prst="rect">
@@ -8510,7 +7680,7 @@
         </p:nvSpPr>
         <p:spPr>
           <a:xfrm>
-            <a:off x="8238744" y="969264"/>
+            <a:off x="8238744" y="877824"/>
             <a:ext cx="3547872" cy="182880"/>
           </a:xfrm>
           <a:prstGeom prst="rect">
@@ -8548,8 +7718,8 @@
           <p:nvPr/>
         </p:nvGraphicFramePr>
         <p:xfrm>
-          <a:off x="7946136" y="1207008"/>
-          <a:ext cx="3931920" cy="1700784"/>
+          <a:off x="7946136" y="1097280"/>
+          <a:ext cx="3931920" cy="1481328"/>
         </p:xfrm>
         <a:graphic xmlns:a="http://schemas.openxmlformats.org/drawingml/2006/main">
           <a:graphicData uri="http://schemas.openxmlformats.org/drawingml/2006/chart">
@@ -8565,7 +7735,7 @@
         </p:nvSpPr>
         <p:spPr>
           <a:xfrm>
-            <a:off x="8110728" y="2889504"/>
+            <a:off x="8110728" y="2596896"/>
             <a:ext cx="3675888" cy="274320"/>
           </a:xfrm>
           <a:prstGeom prst="rect">
@@ -8593,7 +7763,7 @@
                 <a:ea typeface="Calibri" pitchFamily="34" charset="-122"/>
                 <a:cs typeface="Calibri" pitchFamily="34" charset="-120"/>
               </a:rPr>
-              <a:t>Dark = 53 units renovated in place (no permit, no vacancy loss)   ·   pale = 65 units taken vacant to add laundry</a:t>
+              <a:t>Dark = 53 units renovated in place (no permit, no vacancy loss)  ·  pale = 65 units taken vacant to add laundry</a:t>
             </a:r>
             <a:endParaRPr lang="en-US" sz="750" dirty="0"/>
           </a:p>
@@ -8607,7 +7777,7 @@
         </p:nvSpPr>
         <p:spPr>
           <a:xfrm>
-            <a:off x="411480" y="3282696"/>
+            <a:off x="411480" y="2990088"/>
             <a:ext cx="50292" cy="182880"/>
           </a:xfrm>
           <a:prstGeom prst="rect">
@@ -8627,8 +7797,8 @@
         </p:nvSpPr>
         <p:spPr>
           <a:xfrm>
-            <a:off x="539496" y="3227832"/>
-            <a:ext cx="7187184" cy="237744"/>
+            <a:off x="539496" y="2935224"/>
+            <a:ext cx="6638544" cy="237744"/>
           </a:xfrm>
           <a:prstGeom prst="rect">
             <a:avLst/>
@@ -8666,8 +7836,8 @@
         </p:nvSpPr>
         <p:spPr>
           <a:xfrm>
-            <a:off x="539496" y="3438144"/>
-            <a:ext cx="7187184" cy="182880"/>
+            <a:off x="539496" y="3145536"/>
+            <a:ext cx="6638544" cy="182880"/>
           </a:xfrm>
           <a:prstGeom prst="rect">
             <a:avLst/>
@@ -8691,7 +7861,7 @@
                 <a:ea typeface="Calibri" pitchFamily="34" charset="-122"/>
                 <a:cs typeface="Calibri" pitchFamily="34" charset="-120"/>
               </a:rPr>
-              <a:t>Levered IRR at our $12.0mm bid. Each bar spans the full range tested in the model; the left number is the downside, the right the upside.</a:t>
+              <a:t>Levered IRR at our $12.0mm bid. Each bar spans the full range tested; left number is the downside, right the upside.</a:t>
             </a:r>
             <a:endParaRPr lang="en-US" sz="800" dirty="0"/>
           </a:p>
@@ -8704,8 +7874,8 @@
           <p:nvPr/>
         </p:nvGraphicFramePr>
         <p:xfrm>
-          <a:off x="182880" y="3767328"/>
-          <a:ext cx="11841480" cy="2084832"/>
+          <a:off x="182880" y="3438144"/>
+          <a:ext cx="7086600" cy="2011680"/>
         </p:xfrm>
         <a:graphic xmlns:a="http://schemas.openxmlformats.org/drawingml/2006/main">
           <a:graphicData uri="http://schemas.openxmlformats.org/drawingml/2006/chart">
@@ -8721,12 +7891,2282 @@
         </p:nvSpPr>
         <p:spPr>
           <a:xfrm>
-            <a:off x="411480" y="5925312"/>
-            <a:ext cx="11365992" cy="713232"/>
+            <a:off x="7452360" y="2990088"/>
+            <a:ext cx="50292" cy="182880"/>
+          </a:xfrm>
+          <a:prstGeom prst="rect">
+            <a:avLst/>
+          </a:prstGeom>
+          <a:solidFill>
+            <a:srgbClr val="2E9E76"/>
+          </a:solidFill>
+          <a:ln/>
+        </p:spPr>
+      </p:sp>
+      <p:sp>
+        <p:nvSpPr>
+          <p:cNvPr id="24" name="Text 18"/>
+          <p:cNvSpPr/>
+          <p:nvPr/>
+        </p:nvSpPr>
+        <p:spPr>
+          <a:xfrm>
+            <a:off x="7580376" y="2935224"/>
+            <a:ext cx="4197096" cy="237744"/>
+          </a:xfrm>
+          <a:prstGeom prst="rect">
+            <a:avLst/>
+          </a:prstGeom>
+          <a:noFill/>
+          <a:ln/>
+        </p:spPr>
+        <p:txBody>
+          <a:bodyPr wrap="square" lIns="0" tIns="0" rIns="0" bIns="0" rtlCol="0" anchor="ctr"/>
+          <a:lstStyle/>
+          <a:p>
+            <a:pPr indent="0" marL="0">
+              <a:buNone/>
+            </a:pPr>
+            <a:r>
+              <a:rPr lang="en-US" sz="1150" b="1" dirty="0">
+                <a:solidFill>
+                  <a:srgbClr val="13201A"/>
+                </a:solidFill>
+                <a:latin typeface="Cambria" pitchFamily="34" charset="0"/>
+                <a:ea typeface="Cambria" pitchFamily="34" charset="-122"/>
+                <a:cs typeface="Cambria" pitchFamily="34" charset="-120"/>
+              </a:rPr>
+              <a:t>Major assumptions</a:t>
+            </a:r>
+            <a:endParaRPr lang="en-US" sz="1150" dirty="0"/>
+          </a:p>
+        </p:txBody>
+      </p:sp>
+      <p:sp>
+        <p:nvSpPr>
+          <p:cNvPr id="25" name="Text 19"/>
+          <p:cNvSpPr/>
+          <p:nvPr/>
+        </p:nvSpPr>
+        <p:spPr>
+          <a:xfrm>
+            <a:off x="7580376" y="3145536"/>
+            <a:ext cx="4197096" cy="182880"/>
+          </a:xfrm>
+          <a:prstGeom prst="rect">
+            <a:avLst/>
+          </a:prstGeom>
+          <a:noFill/>
+          <a:ln/>
+        </p:spPr>
+        <p:txBody>
+          <a:bodyPr wrap="square" lIns="0" tIns="0" rIns="0" bIns="0" rtlCol="0" anchor="ctr"/>
+          <a:lstStyle/>
+          <a:p>
+            <a:pPr indent="0" marL="0">
+              <a:buNone/>
+            </a:pPr>
+            <a:r>
+              <a:rPr lang="en-US" sz="800" dirty="0">
+                <a:solidFill>
+                  <a:srgbClr val="5F7269"/>
+                </a:solidFill>
+                <a:latin typeface="Calibri" pitchFamily="34" charset="0"/>
+                <a:ea typeface="Calibri" pitchFamily="34" charset="-122"/>
+                <a:cs typeface="Calibri" pitchFamily="34" charset="-120"/>
+              </a:rPr>
+              <a:t>Set off Yardi 1Q-26 actuals and the 25-year county tax record — not forecasts</a:t>
+            </a:r>
+            <a:endParaRPr lang="en-US" sz="800" dirty="0"/>
+          </a:p>
+        </p:txBody>
+      </p:sp>
+      <p:graphicFrame>
+        <p:nvGraphicFramePr>
+          <p:cNvPr id="3" name="Table 0"/>
+          <p:cNvGraphicFramePr>
+            <a:graphicFrameLocks noGrp="1"/>
+          </p:cNvGraphicFramePr>
+          <p:nvPr>
+            <p:extLst>
+              <p:ext uri="{D42A27DB-BD31-4B8C-83A1-F6EECF244321}">
+                <p14:modId xmlns:p14="http://schemas.microsoft.com/office/powerpoint/2010/main" val="1579011935"/>
+              </p:ext>
+            </p:extLst>
+          </p:nvPr>
+        </p:nvGraphicFramePr>
+        <p:xfrm>
+          <a:off x="7452360" y="3438144"/>
+          <a:ext cx="4325112" cy="914400"/>
+        </p:xfrm>
+        <a:graphic>
+          <a:graphicData uri="http://schemas.openxmlformats.org/drawingml/2006/table">
+            <a:tbl>
+              <a:tblPr/>
+              <a:tblGrid>
+                <a:gridCol w="2496312"/>
+                <a:gridCol w="1828800"/>
+              </a:tblGrid>
+              <a:tr h="167335">
+                <a:tc>
+                  <a:txBody>
+                    <a:bodyPr/>
+                    <a:lstStyle/>
+                    <a:p>
+                      <a:pPr indent="0" marL="0">
+                        <a:buNone/>
+                      </a:pPr>
+                      <a:r>
+                        <a:rPr lang="en-US" sz="850" b="1" dirty="0">
+                          <a:solidFill>
+                            <a:srgbClr val="FFFFFF"/>
+                          </a:solidFill>
+                          <a:latin typeface="Calibri" pitchFamily="34" charset="0"/>
+                          <a:ea typeface="Calibri" pitchFamily="34" charset="-122"/>
+                          <a:cs typeface="Calibri" pitchFamily="34" charset="-120"/>
+                        </a:rPr>
+                        <a:t>Driver</a:t>
+                      </a:r>
+                      <a:endParaRPr lang="en-US" sz="850" dirty="0">
+                        <a:latin typeface="Calibri" charset="0"/>
+                        <a:ea typeface="Calibri" charset="0"/>
+                        <a:cs typeface="Calibri" charset="0"/>
+                      </a:endParaRPr>
+                    </a:p>
+                  </a:txBody>
+                  <a:tcPr marL="63500" marR="63500" marT="12700" marB="12700" anchor="ctr">
+                    <a:lnL w="6350" cap="flat" cmpd="sng" algn="ctr">
+                      <a:solidFill>
+                        <a:srgbClr val="D4E0D8"/>
+                      </a:solidFill>
+                      <a:prstDash val="solid"/>
+                      <a:round/>
+                      <a:headEnd type="none" w="med" len="med"/>
+                      <a:tailEnd type="none" w="med" len="med"/>
+                    </a:lnL>
+                    <a:lnR w="6350" cap="flat" cmpd="sng" algn="ctr">
+                      <a:solidFill>
+                        <a:srgbClr val="D4E0D8"/>
+                      </a:solidFill>
+                      <a:prstDash val="solid"/>
+                      <a:round/>
+                      <a:headEnd type="none" w="med" len="med"/>
+                      <a:tailEnd type="none" w="med" len="med"/>
+                    </a:lnR>
+                    <a:lnT w="6350" cap="flat" cmpd="sng" algn="ctr">
+                      <a:solidFill>
+                        <a:srgbClr val="D4E0D8"/>
+                      </a:solidFill>
+                      <a:prstDash val="solid"/>
+                      <a:round/>
+                      <a:headEnd type="none" w="med" len="med"/>
+                      <a:tailEnd type="none" w="med" len="med"/>
+                    </a:lnT>
+                    <a:lnB w="6350" cap="flat" cmpd="sng" algn="ctr">
+                      <a:solidFill>
+                        <a:srgbClr val="D4E0D8"/>
+                      </a:solidFill>
+                      <a:prstDash val="solid"/>
+                      <a:round/>
+                      <a:headEnd type="none" w="med" len="med"/>
+                      <a:tailEnd type="none" w="med" len="med"/>
+                    </a:lnB>
+                    <a:solidFill>
+                      <a:srgbClr val="13201A"/>
+                    </a:solidFill>
+                  </a:tcPr>
+                </a:tc>
+                <a:tc>
+                  <a:txBody>
+                    <a:bodyPr/>
+                    <a:lstStyle/>
+                    <a:p>
+                      <a:pPr indent="0" marL="0">
+                        <a:buNone/>
+                      </a:pPr>
+                      <a:r>
+                        <a:rPr lang="en-US" sz="850" b="1" dirty="0">
+                          <a:solidFill>
+                            <a:srgbClr val="FFFFFF"/>
+                          </a:solidFill>
+                          <a:latin typeface="Calibri" pitchFamily="34" charset="0"/>
+                          <a:ea typeface="Calibri" pitchFamily="34" charset="-122"/>
+                          <a:cs typeface="Calibri" pitchFamily="34" charset="-120"/>
+                        </a:rPr>
+                        <a:t>Underwritten</a:t>
+                      </a:r>
+                      <a:endParaRPr lang="en-US" sz="850" dirty="0">
+                        <a:latin typeface="Calibri" charset="0"/>
+                        <a:ea typeface="Calibri" charset="0"/>
+                        <a:cs typeface="Calibri" charset="0"/>
+                      </a:endParaRPr>
+                    </a:p>
+                  </a:txBody>
+                  <a:tcPr marL="63500" marR="63500" marT="12700" marB="12700" anchor="ctr">
+                    <a:lnL w="6350" cap="flat" cmpd="sng" algn="ctr">
+                      <a:solidFill>
+                        <a:srgbClr val="D4E0D8"/>
+                      </a:solidFill>
+                      <a:prstDash val="solid"/>
+                      <a:round/>
+                      <a:headEnd type="none" w="med" len="med"/>
+                      <a:tailEnd type="none" w="med" len="med"/>
+                    </a:lnL>
+                    <a:lnR w="6350" cap="flat" cmpd="sng" algn="ctr">
+                      <a:solidFill>
+                        <a:srgbClr val="D4E0D8"/>
+                      </a:solidFill>
+                      <a:prstDash val="solid"/>
+                      <a:round/>
+                      <a:headEnd type="none" w="med" len="med"/>
+                      <a:tailEnd type="none" w="med" len="med"/>
+                    </a:lnR>
+                    <a:lnT w="6350" cap="flat" cmpd="sng" algn="ctr">
+                      <a:solidFill>
+                        <a:srgbClr val="D4E0D8"/>
+                      </a:solidFill>
+                      <a:prstDash val="solid"/>
+                      <a:round/>
+                      <a:headEnd type="none" w="med" len="med"/>
+                      <a:tailEnd type="none" w="med" len="med"/>
+                    </a:lnT>
+                    <a:lnB w="6350" cap="flat" cmpd="sng" algn="ctr">
+                      <a:solidFill>
+                        <a:srgbClr val="D4E0D8"/>
+                      </a:solidFill>
+                      <a:prstDash val="solid"/>
+                      <a:round/>
+                      <a:headEnd type="none" w="med" len="med"/>
+                      <a:tailEnd type="none" w="med" len="med"/>
+                    </a:lnB>
+                    <a:solidFill>
+                      <a:srgbClr val="13201A"/>
+                    </a:solidFill>
+                  </a:tcPr>
+                </a:tc>
+              </a:tr>
+              <a:tr h="167335">
+                <a:tc>
+                  <a:txBody>
+                    <a:bodyPr/>
+                    <a:lstStyle/>
+                    <a:p>
+                      <a:pPr indent="0" marL="0">
+                        <a:buNone/>
+                      </a:pPr>
+                      <a:r>
+                        <a:rPr lang="en-US" sz="850" dirty="0">
+                          <a:solidFill>
+                            <a:srgbClr val="3A4A42"/>
+                          </a:solidFill>
+                          <a:latin typeface="Calibri" pitchFamily="34" charset="0"/>
+                          <a:ea typeface="Calibri" pitchFamily="34" charset="-122"/>
+                          <a:cs typeface="Calibri" pitchFamily="34" charset="-120"/>
+                        </a:rPr>
+                        <a:t>Purchase price — SOLVED, not given</a:t>
+                      </a:r>
+                      <a:endParaRPr lang="en-US" sz="850" dirty="0">
+                        <a:latin typeface="Calibri" charset="0"/>
+                        <a:ea typeface="Calibri" charset="0"/>
+                        <a:cs typeface="Calibri" charset="0"/>
+                      </a:endParaRPr>
+                    </a:p>
+                  </a:txBody>
+                  <a:tcPr marL="63500" marR="63500" marT="12700" marB="12700" anchor="ctr">
+                    <a:lnL w="6350" cap="flat" cmpd="sng" algn="ctr">
+                      <a:solidFill>
+                        <a:srgbClr val="D4E0D8"/>
+                      </a:solidFill>
+                      <a:prstDash val="solid"/>
+                      <a:round/>
+                      <a:headEnd type="none" w="med" len="med"/>
+                      <a:tailEnd type="none" w="med" len="med"/>
+                    </a:lnL>
+                    <a:lnR w="6350" cap="flat" cmpd="sng" algn="ctr">
+                      <a:solidFill>
+                        <a:srgbClr val="D4E0D8"/>
+                      </a:solidFill>
+                      <a:prstDash val="solid"/>
+                      <a:round/>
+                      <a:headEnd type="none" w="med" len="med"/>
+                      <a:tailEnd type="none" w="med" len="med"/>
+                    </a:lnR>
+                    <a:lnT w="6350" cap="flat" cmpd="sng" algn="ctr">
+                      <a:solidFill>
+                        <a:srgbClr val="D4E0D8"/>
+                      </a:solidFill>
+                      <a:prstDash val="solid"/>
+                      <a:round/>
+                      <a:headEnd type="none" w="med" len="med"/>
+                      <a:tailEnd type="none" w="med" len="med"/>
+                    </a:lnT>
+                    <a:lnB w="6350" cap="flat" cmpd="sng" algn="ctr">
+                      <a:solidFill>
+                        <a:srgbClr val="D4E0D8"/>
+                      </a:solidFill>
+                      <a:prstDash val="solid"/>
+                      <a:round/>
+                      <a:headEnd type="none" w="med" len="med"/>
+                      <a:tailEnd type="none" w="med" len="med"/>
+                    </a:lnB>
+                  </a:tcPr>
+                </a:tc>
+                <a:tc>
+                  <a:txBody>
+                    <a:bodyPr/>
+                    <a:lstStyle/>
+                    <a:p>
+                      <a:pPr algn="r" indent="0" marL="0">
+                        <a:buNone/>
+                      </a:pPr>
+                      <a:r>
+                        <a:rPr lang="en-US" sz="850" b="1" dirty="0">
+                          <a:solidFill>
+                            <a:srgbClr val="13201A"/>
+                          </a:solidFill>
+                          <a:latin typeface="Calibri" pitchFamily="34" charset="0"/>
+                          <a:ea typeface="Calibri" pitchFamily="34" charset="-122"/>
+                          <a:cs typeface="Calibri" pitchFamily="34" charset="-120"/>
+                        </a:rPr>
+                        <a:t>$12,000,000</a:t>
+                      </a:r>
+                      <a:endParaRPr lang="en-US" sz="850" dirty="0">
+                        <a:latin typeface="Calibri" charset="0"/>
+                        <a:ea typeface="Calibri" charset="0"/>
+                        <a:cs typeface="Calibri" charset="0"/>
+                      </a:endParaRPr>
+                    </a:p>
+                  </a:txBody>
+                  <a:tcPr marL="63500" marR="63500" marT="12700" marB="12700" anchor="ctr">
+                    <a:lnL w="6350" cap="flat" cmpd="sng" algn="ctr">
+                      <a:solidFill>
+                        <a:srgbClr val="D4E0D8"/>
+                      </a:solidFill>
+                      <a:prstDash val="solid"/>
+                      <a:round/>
+                      <a:headEnd type="none" w="med" len="med"/>
+                      <a:tailEnd type="none" w="med" len="med"/>
+                    </a:lnL>
+                    <a:lnR w="6350" cap="flat" cmpd="sng" algn="ctr">
+                      <a:solidFill>
+                        <a:srgbClr val="D4E0D8"/>
+                      </a:solidFill>
+                      <a:prstDash val="solid"/>
+                      <a:round/>
+                      <a:headEnd type="none" w="med" len="med"/>
+                      <a:tailEnd type="none" w="med" len="med"/>
+                    </a:lnR>
+                    <a:lnT w="6350" cap="flat" cmpd="sng" algn="ctr">
+                      <a:solidFill>
+                        <a:srgbClr val="D4E0D8"/>
+                      </a:solidFill>
+                      <a:prstDash val="solid"/>
+                      <a:round/>
+                      <a:headEnd type="none" w="med" len="med"/>
+                      <a:tailEnd type="none" w="med" len="med"/>
+                    </a:lnT>
+                    <a:lnB w="6350" cap="flat" cmpd="sng" algn="ctr">
+                      <a:solidFill>
+                        <a:srgbClr val="D4E0D8"/>
+                      </a:solidFill>
+                      <a:prstDash val="solid"/>
+                      <a:round/>
+                      <a:headEnd type="none" w="med" len="med"/>
+                      <a:tailEnd type="none" w="med" len="med"/>
+                    </a:lnB>
+                  </a:tcPr>
+                </a:tc>
+              </a:tr>
+              <a:tr h="167335">
+                <a:tc>
+                  <a:txBody>
+                    <a:bodyPr/>
+                    <a:lstStyle/>
+                    <a:p>
+                      <a:pPr indent="0" marL="0">
+                        <a:buNone/>
+                      </a:pPr>
+                      <a:r>
+                        <a:rPr lang="en-US" sz="850" dirty="0">
+                          <a:solidFill>
+                            <a:srgbClr val="3A4A42"/>
+                          </a:solidFill>
+                          <a:latin typeface="Calibri" pitchFamily="34" charset="0"/>
+                          <a:ea typeface="Calibri" pitchFamily="34" charset="-122"/>
+                          <a:cs typeface="Calibri" pitchFamily="34" charset="-120"/>
+                        </a:rPr>
+                        <a:t>Market rent growth, Y1 to Y5</a:t>
+                      </a:r>
+                      <a:endParaRPr lang="en-US" sz="850" dirty="0">
+                        <a:latin typeface="Calibri" charset="0"/>
+                        <a:ea typeface="Calibri" charset="0"/>
+                        <a:cs typeface="Calibri" charset="0"/>
+                      </a:endParaRPr>
+                    </a:p>
+                  </a:txBody>
+                  <a:tcPr marL="63500" marR="63500" marT="12700" marB="12700" anchor="ctr">
+                    <a:lnL w="6350" cap="flat" cmpd="sng" algn="ctr">
+                      <a:solidFill>
+                        <a:srgbClr val="D4E0D8"/>
+                      </a:solidFill>
+                      <a:prstDash val="solid"/>
+                      <a:round/>
+                      <a:headEnd type="none" w="med" len="med"/>
+                      <a:tailEnd type="none" w="med" len="med"/>
+                    </a:lnL>
+                    <a:lnR w="6350" cap="flat" cmpd="sng" algn="ctr">
+                      <a:solidFill>
+                        <a:srgbClr val="D4E0D8"/>
+                      </a:solidFill>
+                      <a:prstDash val="solid"/>
+                      <a:round/>
+                      <a:headEnd type="none" w="med" len="med"/>
+                      <a:tailEnd type="none" w="med" len="med"/>
+                    </a:lnR>
+                    <a:lnT w="6350" cap="flat" cmpd="sng" algn="ctr">
+                      <a:solidFill>
+                        <a:srgbClr val="D4E0D8"/>
+                      </a:solidFill>
+                      <a:prstDash val="solid"/>
+                      <a:round/>
+                      <a:headEnd type="none" w="med" len="med"/>
+                      <a:tailEnd type="none" w="med" len="med"/>
+                    </a:lnT>
+                    <a:lnB w="6350" cap="flat" cmpd="sng" algn="ctr">
+                      <a:solidFill>
+                        <a:srgbClr val="D4E0D8"/>
+                      </a:solidFill>
+                      <a:prstDash val="solid"/>
+                      <a:round/>
+                      <a:headEnd type="none" w="med" len="med"/>
+                      <a:tailEnd type="none" w="med" len="med"/>
+                    </a:lnB>
+                  </a:tcPr>
+                </a:tc>
+                <a:tc>
+                  <a:txBody>
+                    <a:bodyPr/>
+                    <a:lstStyle/>
+                    <a:p>
+                      <a:pPr algn="r" indent="0" marL="0">
+                        <a:buNone/>
+                      </a:pPr>
+                      <a:r>
+                        <a:rPr lang="en-US" sz="850" b="1" dirty="0">
+                          <a:solidFill>
+                            <a:srgbClr val="13201A"/>
+                          </a:solidFill>
+                          <a:latin typeface="Calibri" pitchFamily="34" charset="0"/>
+                          <a:ea typeface="Calibri" pitchFamily="34" charset="-122"/>
+                          <a:cs typeface="Calibri" pitchFamily="34" charset="-120"/>
+                        </a:rPr>
+                        <a:t>1.5 / 2.0 / 2.5 / 3.0 / 3.0%</a:t>
+                      </a:r>
+                      <a:endParaRPr lang="en-US" sz="850" dirty="0">
+                        <a:latin typeface="Calibri" charset="0"/>
+                        <a:ea typeface="Calibri" charset="0"/>
+                        <a:cs typeface="Calibri" charset="0"/>
+                      </a:endParaRPr>
+                    </a:p>
+                  </a:txBody>
+                  <a:tcPr marL="63500" marR="63500" marT="12700" marB="12700" anchor="ctr">
+                    <a:lnL w="6350" cap="flat" cmpd="sng" algn="ctr">
+                      <a:solidFill>
+                        <a:srgbClr val="D4E0D8"/>
+                      </a:solidFill>
+                      <a:prstDash val="solid"/>
+                      <a:round/>
+                      <a:headEnd type="none" w="med" len="med"/>
+                      <a:tailEnd type="none" w="med" len="med"/>
+                    </a:lnL>
+                    <a:lnR w="6350" cap="flat" cmpd="sng" algn="ctr">
+                      <a:solidFill>
+                        <a:srgbClr val="D4E0D8"/>
+                      </a:solidFill>
+                      <a:prstDash val="solid"/>
+                      <a:round/>
+                      <a:headEnd type="none" w="med" len="med"/>
+                      <a:tailEnd type="none" w="med" len="med"/>
+                    </a:lnR>
+                    <a:lnT w="6350" cap="flat" cmpd="sng" algn="ctr">
+                      <a:solidFill>
+                        <a:srgbClr val="D4E0D8"/>
+                      </a:solidFill>
+                      <a:prstDash val="solid"/>
+                      <a:round/>
+                      <a:headEnd type="none" w="med" len="med"/>
+                      <a:tailEnd type="none" w="med" len="med"/>
+                    </a:lnT>
+                    <a:lnB w="6350" cap="flat" cmpd="sng" algn="ctr">
+                      <a:solidFill>
+                        <a:srgbClr val="D4E0D8"/>
+                      </a:solidFill>
+                      <a:prstDash val="solid"/>
+                      <a:round/>
+                      <a:headEnd type="none" w="med" len="med"/>
+                      <a:tailEnd type="none" w="med" len="med"/>
+                    </a:lnB>
+                  </a:tcPr>
+                </a:tc>
+              </a:tr>
+              <a:tr h="167335">
+                <a:tc>
+                  <a:txBody>
+                    <a:bodyPr/>
+                    <a:lstStyle/>
+                    <a:p>
+                      <a:pPr indent="0" marL="0">
+                        <a:buNone/>
+                      </a:pPr>
+                      <a:r>
+                        <a:rPr lang="en-US" sz="850" dirty="0">
+                          <a:solidFill>
+                            <a:srgbClr val="3A4A42"/>
+                          </a:solidFill>
+                          <a:latin typeface="Calibri" pitchFamily="34" charset="0"/>
+                          <a:ea typeface="Calibri" pitchFamily="34" charset="-122"/>
+                          <a:cs typeface="Calibri" pitchFamily="34" charset="-120"/>
+                        </a:rPr>
+                        <a:t>Stabilised vacancy / Year-1 bad debt</a:t>
+                      </a:r>
+                      <a:endParaRPr lang="en-US" sz="850" dirty="0">
+                        <a:latin typeface="Calibri" charset="0"/>
+                        <a:ea typeface="Calibri" charset="0"/>
+                        <a:cs typeface="Calibri" charset="0"/>
+                      </a:endParaRPr>
+                    </a:p>
+                  </a:txBody>
+                  <a:tcPr marL="63500" marR="63500" marT="12700" marB="12700" anchor="ctr">
+                    <a:lnL w="6350" cap="flat" cmpd="sng" algn="ctr">
+                      <a:solidFill>
+                        <a:srgbClr val="D4E0D8"/>
+                      </a:solidFill>
+                      <a:prstDash val="solid"/>
+                      <a:round/>
+                      <a:headEnd type="none" w="med" len="med"/>
+                      <a:tailEnd type="none" w="med" len="med"/>
+                    </a:lnL>
+                    <a:lnR w="6350" cap="flat" cmpd="sng" algn="ctr">
+                      <a:solidFill>
+                        <a:srgbClr val="D4E0D8"/>
+                      </a:solidFill>
+                      <a:prstDash val="solid"/>
+                      <a:round/>
+                      <a:headEnd type="none" w="med" len="med"/>
+                      <a:tailEnd type="none" w="med" len="med"/>
+                    </a:lnR>
+                    <a:lnT w="6350" cap="flat" cmpd="sng" algn="ctr">
+                      <a:solidFill>
+                        <a:srgbClr val="D4E0D8"/>
+                      </a:solidFill>
+                      <a:prstDash val="solid"/>
+                      <a:round/>
+                      <a:headEnd type="none" w="med" len="med"/>
+                      <a:tailEnd type="none" w="med" len="med"/>
+                    </a:lnT>
+                    <a:lnB w="6350" cap="flat" cmpd="sng" algn="ctr">
+                      <a:solidFill>
+                        <a:srgbClr val="D4E0D8"/>
+                      </a:solidFill>
+                      <a:prstDash val="solid"/>
+                      <a:round/>
+                      <a:headEnd type="none" w="med" len="med"/>
+                      <a:tailEnd type="none" w="med" len="med"/>
+                    </a:lnB>
+                  </a:tcPr>
+                </a:tc>
+                <a:tc>
+                  <a:txBody>
+                    <a:bodyPr/>
+                    <a:lstStyle/>
+                    <a:p>
+                      <a:pPr algn="r" indent="0" marL="0">
+                        <a:buNone/>
+                      </a:pPr>
+                      <a:r>
+                        <a:rPr lang="en-US" sz="850" b="1" dirty="0">
+                          <a:solidFill>
+                            <a:srgbClr val="13201A"/>
+                          </a:solidFill>
+                          <a:latin typeface="Calibri" pitchFamily="34" charset="0"/>
+                          <a:ea typeface="Calibri" pitchFamily="34" charset="-122"/>
+                          <a:cs typeface="Calibri" pitchFamily="34" charset="-120"/>
+                        </a:rPr>
+                        <a:t>5.5% / 1.50%</a:t>
+                      </a:r>
+                      <a:endParaRPr lang="en-US" sz="850" dirty="0">
+                        <a:latin typeface="Calibri" charset="0"/>
+                        <a:ea typeface="Calibri" charset="0"/>
+                        <a:cs typeface="Calibri" charset="0"/>
+                      </a:endParaRPr>
+                    </a:p>
+                  </a:txBody>
+                  <a:tcPr marL="63500" marR="63500" marT="12700" marB="12700" anchor="ctr">
+                    <a:lnL w="6350" cap="flat" cmpd="sng" algn="ctr">
+                      <a:solidFill>
+                        <a:srgbClr val="D4E0D8"/>
+                      </a:solidFill>
+                      <a:prstDash val="solid"/>
+                      <a:round/>
+                      <a:headEnd type="none" w="med" len="med"/>
+                      <a:tailEnd type="none" w="med" len="med"/>
+                    </a:lnL>
+                    <a:lnR w="6350" cap="flat" cmpd="sng" algn="ctr">
+                      <a:solidFill>
+                        <a:srgbClr val="D4E0D8"/>
+                      </a:solidFill>
+                      <a:prstDash val="solid"/>
+                      <a:round/>
+                      <a:headEnd type="none" w="med" len="med"/>
+                      <a:tailEnd type="none" w="med" len="med"/>
+                    </a:lnR>
+                    <a:lnT w="6350" cap="flat" cmpd="sng" algn="ctr">
+                      <a:solidFill>
+                        <a:srgbClr val="D4E0D8"/>
+                      </a:solidFill>
+                      <a:prstDash val="solid"/>
+                      <a:round/>
+                      <a:headEnd type="none" w="med" len="med"/>
+                      <a:tailEnd type="none" w="med" len="med"/>
+                    </a:lnT>
+                    <a:lnB w="6350" cap="flat" cmpd="sng" algn="ctr">
+                      <a:solidFill>
+                        <a:srgbClr val="D4E0D8"/>
+                      </a:solidFill>
+                      <a:prstDash val="solid"/>
+                      <a:round/>
+                      <a:headEnd type="none" w="med" len="med"/>
+                      <a:tailEnd type="none" w="med" len="med"/>
+                    </a:lnB>
+                  </a:tcPr>
+                </a:tc>
+              </a:tr>
+              <a:tr h="167335">
+                <a:tc>
+                  <a:txBody>
+                    <a:bodyPr/>
+                    <a:lstStyle/>
+                    <a:p>
+                      <a:pPr indent="0" marL="0">
+                        <a:buNone/>
+                      </a:pPr>
+                      <a:r>
+                        <a:rPr lang="en-US" sz="850" dirty="0">
+                          <a:solidFill>
+                            <a:srgbClr val="3A4A42"/>
+                          </a:solidFill>
+                          <a:latin typeface="Calibri" pitchFamily="34" charset="0"/>
+                          <a:ea typeface="Calibri" pitchFamily="34" charset="-122"/>
+                          <a:cs typeface="Calibri" pitchFamily="34" charset="-120"/>
+                        </a:rPr>
+                        <a:t>Track A — start / pace / cost / prem</a:t>
+                      </a:r>
+                      <a:endParaRPr lang="en-US" sz="850" dirty="0">
+                        <a:latin typeface="Calibri" charset="0"/>
+                        <a:ea typeface="Calibri" charset="0"/>
+                        <a:cs typeface="Calibri" charset="0"/>
+                      </a:endParaRPr>
+                    </a:p>
+                  </a:txBody>
+                  <a:tcPr marL="63500" marR="63500" marT="12700" marB="12700" anchor="ctr">
+                    <a:lnL w="6350" cap="flat" cmpd="sng" algn="ctr">
+                      <a:solidFill>
+                        <a:srgbClr val="D4E0D8"/>
+                      </a:solidFill>
+                      <a:prstDash val="solid"/>
+                      <a:round/>
+                      <a:headEnd type="none" w="med" len="med"/>
+                      <a:tailEnd type="none" w="med" len="med"/>
+                    </a:lnL>
+                    <a:lnR w="6350" cap="flat" cmpd="sng" algn="ctr">
+                      <a:solidFill>
+                        <a:srgbClr val="D4E0D8"/>
+                      </a:solidFill>
+                      <a:prstDash val="solid"/>
+                      <a:round/>
+                      <a:headEnd type="none" w="med" len="med"/>
+                      <a:tailEnd type="none" w="med" len="med"/>
+                    </a:lnR>
+                    <a:lnT w="6350" cap="flat" cmpd="sng" algn="ctr">
+                      <a:solidFill>
+                        <a:srgbClr val="D4E0D8"/>
+                      </a:solidFill>
+                      <a:prstDash val="solid"/>
+                      <a:round/>
+                      <a:headEnd type="none" w="med" len="med"/>
+                      <a:tailEnd type="none" w="med" len="med"/>
+                    </a:lnT>
+                    <a:lnB w="6350" cap="flat" cmpd="sng" algn="ctr">
+                      <a:solidFill>
+                        <a:srgbClr val="D4E0D8"/>
+                      </a:solidFill>
+                      <a:prstDash val="solid"/>
+                      <a:round/>
+                      <a:headEnd type="none" w="med" len="med"/>
+                      <a:tailEnd type="none" w="med" len="med"/>
+                    </a:lnB>
+                  </a:tcPr>
+                </a:tc>
+                <a:tc>
+                  <a:txBody>
+                    <a:bodyPr/>
+                    <a:lstStyle/>
+                    <a:p>
+                      <a:pPr algn="r" indent="0" marL="0">
+                        <a:buNone/>
+                      </a:pPr>
+                      <a:r>
+                        <a:rPr lang="en-US" sz="850" b="1" dirty="0">
+                          <a:solidFill>
+                            <a:srgbClr val="13201A"/>
+                          </a:solidFill>
+                          <a:latin typeface="Calibri" pitchFamily="34" charset="0"/>
+                          <a:ea typeface="Calibri" pitchFamily="34" charset="-122"/>
+                          <a:cs typeface="Calibri" pitchFamily="34" charset="-120"/>
+                        </a:rPr>
+                        <a:t>mo 2 / 10 / $10,000 / $100</a:t>
+                      </a:r>
+                      <a:endParaRPr lang="en-US" sz="850" dirty="0">
+                        <a:latin typeface="Calibri" charset="0"/>
+                        <a:ea typeface="Calibri" charset="0"/>
+                        <a:cs typeface="Calibri" charset="0"/>
+                      </a:endParaRPr>
+                    </a:p>
+                  </a:txBody>
+                  <a:tcPr marL="63500" marR="63500" marT="12700" marB="12700" anchor="ctr">
+                    <a:lnL w="6350" cap="flat" cmpd="sng" algn="ctr">
+                      <a:solidFill>
+                        <a:srgbClr val="D4E0D8"/>
+                      </a:solidFill>
+                      <a:prstDash val="solid"/>
+                      <a:round/>
+                      <a:headEnd type="none" w="med" len="med"/>
+                      <a:tailEnd type="none" w="med" len="med"/>
+                    </a:lnL>
+                    <a:lnR w="6350" cap="flat" cmpd="sng" algn="ctr">
+                      <a:solidFill>
+                        <a:srgbClr val="D4E0D8"/>
+                      </a:solidFill>
+                      <a:prstDash val="solid"/>
+                      <a:round/>
+                      <a:headEnd type="none" w="med" len="med"/>
+                      <a:tailEnd type="none" w="med" len="med"/>
+                    </a:lnR>
+                    <a:lnT w="6350" cap="flat" cmpd="sng" algn="ctr">
+                      <a:solidFill>
+                        <a:srgbClr val="D4E0D8"/>
+                      </a:solidFill>
+                      <a:prstDash val="solid"/>
+                      <a:round/>
+                      <a:headEnd type="none" w="med" len="med"/>
+                      <a:tailEnd type="none" w="med" len="med"/>
+                    </a:lnT>
+                    <a:lnB w="6350" cap="flat" cmpd="sng" algn="ctr">
+                      <a:solidFill>
+                        <a:srgbClr val="D4E0D8"/>
+                      </a:solidFill>
+                      <a:prstDash val="solid"/>
+                      <a:round/>
+                      <a:headEnd type="none" w="med" len="med"/>
+                      <a:tailEnd type="none" w="med" len="med"/>
+                    </a:lnB>
+                  </a:tcPr>
+                </a:tc>
+              </a:tr>
+              <a:tr h="167335">
+                <a:tc>
+                  <a:txBody>
+                    <a:bodyPr/>
+                    <a:lstStyle/>
+                    <a:p>
+                      <a:pPr indent="0" marL="0">
+                        <a:buNone/>
+                      </a:pPr>
+                      <a:r>
+                        <a:rPr lang="en-US" sz="850" dirty="0">
+                          <a:solidFill>
+                            <a:srgbClr val="3A4A42"/>
+                          </a:solidFill>
+                          <a:latin typeface="Calibri" pitchFamily="34" charset="0"/>
+                          <a:ea typeface="Calibri" pitchFamily="34" charset="-122"/>
+                          <a:cs typeface="Calibri" pitchFamily="34" charset="-120"/>
+                        </a:rPr>
+                        <a:t>Track B — start / pace / cost / prem</a:t>
+                      </a:r>
+                      <a:endParaRPr lang="en-US" sz="850" dirty="0">
+                        <a:latin typeface="Calibri" charset="0"/>
+                        <a:ea typeface="Calibri" charset="0"/>
+                        <a:cs typeface="Calibri" charset="0"/>
+                      </a:endParaRPr>
+                    </a:p>
+                  </a:txBody>
+                  <a:tcPr marL="63500" marR="63500" marT="12700" marB="12700" anchor="ctr">
+                    <a:lnL w="6350" cap="flat" cmpd="sng" algn="ctr">
+                      <a:solidFill>
+                        <a:srgbClr val="D4E0D8"/>
+                      </a:solidFill>
+                      <a:prstDash val="solid"/>
+                      <a:round/>
+                      <a:headEnd type="none" w="med" len="med"/>
+                      <a:tailEnd type="none" w="med" len="med"/>
+                    </a:lnL>
+                    <a:lnR w="6350" cap="flat" cmpd="sng" algn="ctr">
+                      <a:solidFill>
+                        <a:srgbClr val="D4E0D8"/>
+                      </a:solidFill>
+                      <a:prstDash val="solid"/>
+                      <a:round/>
+                      <a:headEnd type="none" w="med" len="med"/>
+                      <a:tailEnd type="none" w="med" len="med"/>
+                    </a:lnR>
+                    <a:lnT w="6350" cap="flat" cmpd="sng" algn="ctr">
+                      <a:solidFill>
+                        <a:srgbClr val="D4E0D8"/>
+                      </a:solidFill>
+                      <a:prstDash val="solid"/>
+                      <a:round/>
+                      <a:headEnd type="none" w="med" len="med"/>
+                      <a:tailEnd type="none" w="med" len="med"/>
+                    </a:lnT>
+                    <a:lnB w="6350" cap="flat" cmpd="sng" algn="ctr">
+                      <a:solidFill>
+                        <a:srgbClr val="D4E0D8"/>
+                      </a:solidFill>
+                      <a:prstDash val="solid"/>
+                      <a:round/>
+                      <a:headEnd type="none" w="med" len="med"/>
+                      <a:tailEnd type="none" w="med" len="med"/>
+                    </a:lnB>
+                  </a:tcPr>
+                </a:tc>
+                <a:tc>
+                  <a:txBody>
+                    <a:bodyPr/>
+                    <a:lstStyle/>
+                    <a:p>
+                      <a:pPr algn="r" indent="0" marL="0">
+                        <a:buNone/>
+                      </a:pPr>
+                      <a:r>
+                        <a:rPr lang="en-US" sz="850" b="1" dirty="0">
+                          <a:solidFill>
+                            <a:srgbClr val="13201A"/>
+                          </a:solidFill>
+                          <a:latin typeface="Calibri" pitchFamily="34" charset="0"/>
+                          <a:ea typeface="Calibri" pitchFamily="34" charset="-122"/>
+                          <a:cs typeface="Calibri" pitchFamily="34" charset="-120"/>
+                        </a:rPr>
+                        <a:t>mo 4 / 5 / $18,000 / $200</a:t>
+                      </a:r>
+                      <a:endParaRPr lang="en-US" sz="850" dirty="0">
+                        <a:latin typeface="Calibri" charset="0"/>
+                        <a:ea typeface="Calibri" charset="0"/>
+                        <a:cs typeface="Calibri" charset="0"/>
+                      </a:endParaRPr>
+                    </a:p>
+                  </a:txBody>
+                  <a:tcPr marL="63500" marR="63500" marT="12700" marB="12700" anchor="ctr">
+                    <a:lnL w="6350" cap="flat" cmpd="sng" algn="ctr">
+                      <a:solidFill>
+                        <a:srgbClr val="D4E0D8"/>
+                      </a:solidFill>
+                      <a:prstDash val="solid"/>
+                      <a:round/>
+                      <a:headEnd type="none" w="med" len="med"/>
+                      <a:tailEnd type="none" w="med" len="med"/>
+                    </a:lnL>
+                    <a:lnR w="6350" cap="flat" cmpd="sng" algn="ctr">
+                      <a:solidFill>
+                        <a:srgbClr val="D4E0D8"/>
+                      </a:solidFill>
+                      <a:prstDash val="solid"/>
+                      <a:round/>
+                      <a:headEnd type="none" w="med" len="med"/>
+                      <a:tailEnd type="none" w="med" len="med"/>
+                    </a:lnR>
+                    <a:lnT w="6350" cap="flat" cmpd="sng" algn="ctr">
+                      <a:solidFill>
+                        <a:srgbClr val="D4E0D8"/>
+                      </a:solidFill>
+                      <a:prstDash val="solid"/>
+                      <a:round/>
+                      <a:headEnd type="none" w="med" len="med"/>
+                      <a:tailEnd type="none" w="med" len="med"/>
+                    </a:lnT>
+                    <a:lnB w="6350" cap="flat" cmpd="sng" algn="ctr">
+                      <a:solidFill>
+                        <a:srgbClr val="D4E0D8"/>
+                      </a:solidFill>
+                      <a:prstDash val="solid"/>
+                      <a:round/>
+                      <a:headEnd type="none" w="med" len="med"/>
+                      <a:tailEnd type="none" w="med" len="med"/>
+                    </a:lnB>
+                  </a:tcPr>
+                </a:tc>
+              </a:tr>
+              <a:tr h="167335">
+                <a:tc>
+                  <a:txBody>
+                    <a:bodyPr/>
+                    <a:lstStyle/>
+                    <a:p>
+                      <a:pPr indent="0" marL="0">
+                        <a:buNone/>
+                      </a:pPr>
+                      <a:r>
+                        <a:rPr lang="en-US" sz="850" dirty="0">
+                          <a:solidFill>
+                            <a:srgbClr val="3A4A42"/>
+                          </a:solidFill>
+                          <a:latin typeface="Calibri" pitchFamily="34" charset="0"/>
+                          <a:ea typeface="Calibri" pitchFamily="34" charset="-122"/>
+                          <a:cs typeface="Calibri" pitchFamily="34" charset="-120"/>
+                        </a:rPr>
+                        <a:t>Blended cost / premium / return on cost</a:t>
+                      </a:r>
+                      <a:endParaRPr lang="en-US" sz="850" dirty="0">
+                        <a:latin typeface="Calibri" charset="0"/>
+                        <a:ea typeface="Calibri" charset="0"/>
+                        <a:cs typeface="Calibri" charset="0"/>
+                      </a:endParaRPr>
+                    </a:p>
+                  </a:txBody>
+                  <a:tcPr marL="63500" marR="63500" marT="12700" marB="12700" anchor="ctr">
+                    <a:lnL w="6350" cap="flat" cmpd="sng" algn="ctr">
+                      <a:solidFill>
+                        <a:srgbClr val="D4E0D8"/>
+                      </a:solidFill>
+                      <a:prstDash val="solid"/>
+                      <a:round/>
+                      <a:headEnd type="none" w="med" len="med"/>
+                      <a:tailEnd type="none" w="med" len="med"/>
+                    </a:lnL>
+                    <a:lnR w="6350" cap="flat" cmpd="sng" algn="ctr">
+                      <a:solidFill>
+                        <a:srgbClr val="D4E0D8"/>
+                      </a:solidFill>
+                      <a:prstDash val="solid"/>
+                      <a:round/>
+                      <a:headEnd type="none" w="med" len="med"/>
+                      <a:tailEnd type="none" w="med" len="med"/>
+                    </a:lnR>
+                    <a:lnT w="6350" cap="flat" cmpd="sng" algn="ctr">
+                      <a:solidFill>
+                        <a:srgbClr val="D4E0D8"/>
+                      </a:solidFill>
+                      <a:prstDash val="solid"/>
+                      <a:round/>
+                      <a:headEnd type="none" w="med" len="med"/>
+                      <a:tailEnd type="none" w="med" len="med"/>
+                    </a:lnT>
+                    <a:lnB w="6350" cap="flat" cmpd="sng" algn="ctr">
+                      <a:solidFill>
+                        <a:srgbClr val="D4E0D8"/>
+                      </a:solidFill>
+                      <a:prstDash val="solid"/>
+                      <a:round/>
+                      <a:headEnd type="none" w="med" len="med"/>
+                      <a:tailEnd type="none" w="med" len="med"/>
+                    </a:lnB>
+                  </a:tcPr>
+                </a:tc>
+                <a:tc>
+                  <a:txBody>
+                    <a:bodyPr/>
+                    <a:lstStyle/>
+                    <a:p>
+                      <a:pPr algn="r" indent="0" marL="0">
+                        <a:buNone/>
+                      </a:pPr>
+                      <a:r>
+                        <a:rPr lang="en-US" sz="850" b="1" dirty="0">
+                          <a:solidFill>
+                            <a:srgbClr val="13201A"/>
+                          </a:solidFill>
+                          <a:latin typeface="Calibri" pitchFamily="34" charset="0"/>
+                          <a:ea typeface="Calibri" pitchFamily="34" charset="-122"/>
+                          <a:cs typeface="Calibri" pitchFamily="34" charset="-120"/>
+                        </a:rPr>
+                        <a:t>$14,407 / $155 / 12.9%</a:t>
+                      </a:r>
+                      <a:endParaRPr lang="en-US" sz="850" dirty="0">
+                        <a:latin typeface="Calibri" charset="0"/>
+                        <a:ea typeface="Calibri" charset="0"/>
+                        <a:cs typeface="Calibri" charset="0"/>
+                      </a:endParaRPr>
+                    </a:p>
+                  </a:txBody>
+                  <a:tcPr marL="63500" marR="63500" marT="12700" marB="12700" anchor="ctr">
+                    <a:lnL w="6350" cap="flat" cmpd="sng" algn="ctr">
+                      <a:solidFill>
+                        <a:srgbClr val="D4E0D8"/>
+                      </a:solidFill>
+                      <a:prstDash val="solid"/>
+                      <a:round/>
+                      <a:headEnd type="none" w="med" len="med"/>
+                      <a:tailEnd type="none" w="med" len="med"/>
+                    </a:lnL>
+                    <a:lnR w="6350" cap="flat" cmpd="sng" algn="ctr">
+                      <a:solidFill>
+                        <a:srgbClr val="D4E0D8"/>
+                      </a:solidFill>
+                      <a:prstDash val="solid"/>
+                      <a:round/>
+                      <a:headEnd type="none" w="med" len="med"/>
+                      <a:tailEnd type="none" w="med" len="med"/>
+                    </a:lnR>
+                    <a:lnT w="6350" cap="flat" cmpd="sng" algn="ctr">
+                      <a:solidFill>
+                        <a:srgbClr val="D4E0D8"/>
+                      </a:solidFill>
+                      <a:prstDash val="solid"/>
+                      <a:round/>
+                      <a:headEnd type="none" w="med" len="med"/>
+                      <a:tailEnd type="none" w="med" len="med"/>
+                    </a:lnT>
+                    <a:lnB w="6350" cap="flat" cmpd="sng" algn="ctr">
+                      <a:solidFill>
+                        <a:srgbClr val="D4E0D8"/>
+                      </a:solidFill>
+                      <a:prstDash val="solid"/>
+                      <a:round/>
+                      <a:headEnd type="none" w="med" len="med"/>
+                      <a:tailEnd type="none" w="med" len="med"/>
+                    </a:lnB>
+                  </a:tcPr>
+                </a:tc>
+              </a:tr>
+              <a:tr h="167335">
+                <a:tc>
+                  <a:txBody>
+                    <a:bodyPr/>
+                    <a:lstStyle/>
+                    <a:p>
+                      <a:pPr indent="0" marL="0">
+                        <a:buNone/>
+                      </a:pPr>
+                      <a:r>
+                        <a:rPr lang="en-US" sz="850" dirty="0">
+                          <a:solidFill>
+                            <a:srgbClr val="3A4A42"/>
+                          </a:solidFill>
+                          <a:latin typeface="Calibri" pitchFamily="34" charset="0"/>
+                          <a:ea typeface="Calibri" pitchFamily="34" charset="-122"/>
+                          <a:cs typeface="Calibri" pitchFamily="34" charset="-120"/>
+                        </a:rPr>
+                        <a:t>Non-unit capital + 8% contingency</a:t>
+                      </a:r>
+                      <a:endParaRPr lang="en-US" sz="850" dirty="0">
+                        <a:latin typeface="Calibri" charset="0"/>
+                        <a:ea typeface="Calibri" charset="0"/>
+                        <a:cs typeface="Calibri" charset="0"/>
+                      </a:endParaRPr>
+                    </a:p>
+                  </a:txBody>
+                  <a:tcPr marL="63500" marR="63500" marT="12700" marB="12700" anchor="ctr">
+                    <a:lnL w="6350" cap="flat" cmpd="sng" algn="ctr">
+                      <a:solidFill>
+                        <a:srgbClr val="D4E0D8"/>
+                      </a:solidFill>
+                      <a:prstDash val="solid"/>
+                      <a:round/>
+                      <a:headEnd type="none" w="med" len="med"/>
+                      <a:tailEnd type="none" w="med" len="med"/>
+                    </a:lnL>
+                    <a:lnR w="6350" cap="flat" cmpd="sng" algn="ctr">
+                      <a:solidFill>
+                        <a:srgbClr val="D4E0D8"/>
+                      </a:solidFill>
+                      <a:prstDash val="solid"/>
+                      <a:round/>
+                      <a:headEnd type="none" w="med" len="med"/>
+                      <a:tailEnd type="none" w="med" len="med"/>
+                    </a:lnR>
+                    <a:lnT w="6350" cap="flat" cmpd="sng" algn="ctr">
+                      <a:solidFill>
+                        <a:srgbClr val="D4E0D8"/>
+                      </a:solidFill>
+                      <a:prstDash val="solid"/>
+                      <a:round/>
+                      <a:headEnd type="none" w="med" len="med"/>
+                      <a:tailEnd type="none" w="med" len="med"/>
+                    </a:lnT>
+                    <a:lnB w="6350" cap="flat" cmpd="sng" algn="ctr">
+                      <a:solidFill>
+                        <a:srgbClr val="D4E0D8"/>
+                      </a:solidFill>
+                      <a:prstDash val="solid"/>
+                      <a:round/>
+                      <a:headEnd type="none" w="med" len="med"/>
+                      <a:tailEnd type="none" w="med" len="med"/>
+                    </a:lnB>
+                  </a:tcPr>
+                </a:tc>
+                <a:tc>
+                  <a:txBody>
+                    <a:bodyPr/>
+                    <a:lstStyle/>
+                    <a:p>
+                      <a:pPr algn="r" indent="0" marL="0">
+                        <a:buNone/>
+                      </a:pPr>
+                      <a:r>
+                        <a:rPr lang="en-US" sz="850" b="1" dirty="0">
+                          <a:solidFill>
+                            <a:srgbClr val="13201A"/>
+                          </a:solidFill>
+                          <a:latin typeface="Calibri" pitchFamily="34" charset="0"/>
+                          <a:ea typeface="Calibri" pitchFamily="34" charset="-122"/>
+                          <a:cs typeface="Calibri" pitchFamily="34" charset="-120"/>
+                        </a:rPr>
+                        <a:t>$1,199,800</a:t>
+                      </a:r>
+                      <a:endParaRPr lang="en-US" sz="850" dirty="0">
+                        <a:latin typeface="Calibri" charset="0"/>
+                        <a:ea typeface="Calibri" charset="0"/>
+                        <a:cs typeface="Calibri" charset="0"/>
+                      </a:endParaRPr>
+                    </a:p>
+                  </a:txBody>
+                  <a:tcPr marL="63500" marR="63500" marT="12700" marB="12700" anchor="ctr">
+                    <a:lnL w="6350" cap="flat" cmpd="sng" algn="ctr">
+                      <a:solidFill>
+                        <a:srgbClr val="D4E0D8"/>
+                      </a:solidFill>
+                      <a:prstDash val="solid"/>
+                      <a:round/>
+                      <a:headEnd type="none" w="med" len="med"/>
+                      <a:tailEnd type="none" w="med" len="med"/>
+                    </a:lnL>
+                    <a:lnR w="6350" cap="flat" cmpd="sng" algn="ctr">
+                      <a:solidFill>
+                        <a:srgbClr val="D4E0D8"/>
+                      </a:solidFill>
+                      <a:prstDash val="solid"/>
+                      <a:round/>
+                      <a:headEnd type="none" w="med" len="med"/>
+                      <a:tailEnd type="none" w="med" len="med"/>
+                    </a:lnR>
+                    <a:lnT w="6350" cap="flat" cmpd="sng" algn="ctr">
+                      <a:solidFill>
+                        <a:srgbClr val="D4E0D8"/>
+                      </a:solidFill>
+                      <a:prstDash val="solid"/>
+                      <a:round/>
+                      <a:headEnd type="none" w="med" len="med"/>
+                      <a:tailEnd type="none" w="med" len="med"/>
+                    </a:lnT>
+                    <a:lnB w="6350" cap="flat" cmpd="sng" algn="ctr">
+                      <a:solidFill>
+                        <a:srgbClr val="D4E0D8"/>
+                      </a:solidFill>
+                      <a:prstDash val="solid"/>
+                      <a:round/>
+                      <a:headEnd type="none" w="med" len="med"/>
+                      <a:tailEnd type="none" w="med" len="med"/>
+                    </a:lnB>
+                  </a:tcPr>
+                </a:tc>
+              </a:tr>
+              <a:tr h="167335">
+                <a:tc>
+                  <a:txBody>
+                    <a:bodyPr/>
+                    <a:lstStyle/>
+                    <a:p>
+                      <a:pPr indent="0" marL="0">
+                        <a:buNone/>
+                      </a:pPr>
+                      <a:r>
+                        <a:rPr lang="en-US" sz="850" dirty="0">
+                          <a:solidFill>
+                            <a:srgbClr val="3A4A42"/>
+                          </a:solidFill>
+                          <a:latin typeface="Calibri" pitchFamily="34" charset="0"/>
+                          <a:ea typeface="Calibri" pitchFamily="34" charset="-122"/>
+                          <a:cs typeface="Calibri" pitchFamily="34" charset="-120"/>
+                        </a:rPr>
+                        <a:t>Operating expenses, Year 1</a:t>
+                      </a:r>
+                      <a:endParaRPr lang="en-US" sz="850" dirty="0">
+                        <a:latin typeface="Calibri" charset="0"/>
+                        <a:ea typeface="Calibri" charset="0"/>
+                        <a:cs typeface="Calibri" charset="0"/>
+                      </a:endParaRPr>
+                    </a:p>
+                  </a:txBody>
+                  <a:tcPr marL="63500" marR="63500" marT="12700" marB="12700" anchor="ctr">
+                    <a:lnL w="6350" cap="flat" cmpd="sng" algn="ctr">
+                      <a:solidFill>
+                        <a:srgbClr val="D4E0D8"/>
+                      </a:solidFill>
+                      <a:prstDash val="solid"/>
+                      <a:round/>
+                      <a:headEnd type="none" w="med" len="med"/>
+                      <a:tailEnd type="none" w="med" len="med"/>
+                    </a:lnL>
+                    <a:lnR w="6350" cap="flat" cmpd="sng" algn="ctr">
+                      <a:solidFill>
+                        <a:srgbClr val="D4E0D8"/>
+                      </a:solidFill>
+                      <a:prstDash val="solid"/>
+                      <a:round/>
+                      <a:headEnd type="none" w="med" len="med"/>
+                      <a:tailEnd type="none" w="med" len="med"/>
+                    </a:lnR>
+                    <a:lnT w="6350" cap="flat" cmpd="sng" algn="ctr">
+                      <a:solidFill>
+                        <a:srgbClr val="D4E0D8"/>
+                      </a:solidFill>
+                      <a:prstDash val="solid"/>
+                      <a:round/>
+                      <a:headEnd type="none" w="med" len="med"/>
+                      <a:tailEnd type="none" w="med" len="med"/>
+                    </a:lnT>
+                    <a:lnB w="6350" cap="flat" cmpd="sng" algn="ctr">
+                      <a:solidFill>
+                        <a:srgbClr val="D4E0D8"/>
+                      </a:solidFill>
+                      <a:prstDash val="solid"/>
+                      <a:round/>
+                      <a:headEnd type="none" w="med" len="med"/>
+                      <a:tailEnd type="none" w="med" len="med"/>
+                    </a:lnB>
+                  </a:tcPr>
+                </a:tc>
+                <a:tc>
+                  <a:txBody>
+                    <a:bodyPr/>
+                    <a:lstStyle/>
+                    <a:p>
+                      <a:pPr algn="r" indent="0" marL="0">
+                        <a:buNone/>
+                      </a:pPr>
+                      <a:r>
+                        <a:rPr lang="en-US" sz="850" b="1" dirty="0">
+                          <a:solidFill>
+                            <a:srgbClr val="13201A"/>
+                          </a:solidFill>
+                          <a:latin typeface="Calibri" pitchFamily="34" charset="0"/>
+                          <a:ea typeface="Calibri" pitchFamily="34" charset="-122"/>
+                          <a:cs typeface="Calibri" pitchFamily="34" charset="-120"/>
+                        </a:rPr>
+                        <a:t>$8,929 per unit</a:t>
+                      </a:r>
+                      <a:endParaRPr lang="en-US" sz="850" dirty="0">
+                        <a:latin typeface="Calibri" charset="0"/>
+                        <a:ea typeface="Calibri" charset="0"/>
+                        <a:cs typeface="Calibri" charset="0"/>
+                      </a:endParaRPr>
+                    </a:p>
+                  </a:txBody>
+                  <a:tcPr marL="63500" marR="63500" marT="12700" marB="12700" anchor="ctr">
+                    <a:lnL w="6350" cap="flat" cmpd="sng" algn="ctr">
+                      <a:solidFill>
+                        <a:srgbClr val="D4E0D8"/>
+                      </a:solidFill>
+                      <a:prstDash val="solid"/>
+                      <a:round/>
+                      <a:headEnd type="none" w="med" len="med"/>
+                      <a:tailEnd type="none" w="med" len="med"/>
+                    </a:lnL>
+                    <a:lnR w="6350" cap="flat" cmpd="sng" algn="ctr">
+                      <a:solidFill>
+                        <a:srgbClr val="D4E0D8"/>
+                      </a:solidFill>
+                      <a:prstDash val="solid"/>
+                      <a:round/>
+                      <a:headEnd type="none" w="med" len="med"/>
+                      <a:tailEnd type="none" w="med" len="med"/>
+                    </a:lnR>
+                    <a:lnT w="6350" cap="flat" cmpd="sng" algn="ctr">
+                      <a:solidFill>
+                        <a:srgbClr val="D4E0D8"/>
+                      </a:solidFill>
+                      <a:prstDash val="solid"/>
+                      <a:round/>
+                      <a:headEnd type="none" w="med" len="med"/>
+                      <a:tailEnd type="none" w="med" len="med"/>
+                    </a:lnT>
+                    <a:lnB w="6350" cap="flat" cmpd="sng" algn="ctr">
+                      <a:solidFill>
+                        <a:srgbClr val="D4E0D8"/>
+                      </a:solidFill>
+                      <a:prstDash val="solid"/>
+                      <a:round/>
+                      <a:headEnd type="none" w="med" len="med"/>
+                      <a:tailEnd type="none" w="med" len="med"/>
+                    </a:lnB>
+                  </a:tcPr>
+                </a:tc>
+              </a:tr>
+              <a:tr h="167335">
+                <a:tc>
+                  <a:txBody>
+                    <a:bodyPr/>
+                    <a:lstStyle/>
+                    <a:p>
+                      <a:pPr indent="0" marL="0">
+                        <a:buNone/>
+                      </a:pPr>
+                      <a:r>
+                        <a:rPr lang="en-US" sz="850" dirty="0">
+                          <a:solidFill>
+                            <a:srgbClr val="3A4A42"/>
+                          </a:solidFill>
+                          <a:latin typeface="Calibri" pitchFamily="34" charset="0"/>
+                          <a:ea typeface="Calibri" pitchFamily="34" charset="-122"/>
+                          <a:cs typeface="Calibri" pitchFamily="34" charset="-120"/>
+                        </a:rPr>
+                        <a:t>Real estate taxes, Y1 to Y5</a:t>
+                      </a:r>
+                      <a:endParaRPr lang="en-US" sz="850" dirty="0">
+                        <a:latin typeface="Calibri" charset="0"/>
+                        <a:ea typeface="Calibri" charset="0"/>
+                        <a:cs typeface="Calibri" charset="0"/>
+                      </a:endParaRPr>
+                    </a:p>
+                  </a:txBody>
+                  <a:tcPr marL="63500" marR="63500" marT="12700" marB="12700" anchor="ctr">
+                    <a:lnL w="6350" cap="flat" cmpd="sng" algn="ctr">
+                      <a:solidFill>
+                        <a:srgbClr val="D4E0D8"/>
+                      </a:solidFill>
+                      <a:prstDash val="solid"/>
+                      <a:round/>
+                      <a:headEnd type="none" w="med" len="med"/>
+                      <a:tailEnd type="none" w="med" len="med"/>
+                    </a:lnL>
+                    <a:lnR w="6350" cap="flat" cmpd="sng" algn="ctr">
+                      <a:solidFill>
+                        <a:srgbClr val="D4E0D8"/>
+                      </a:solidFill>
+                      <a:prstDash val="solid"/>
+                      <a:round/>
+                      <a:headEnd type="none" w="med" len="med"/>
+                      <a:tailEnd type="none" w="med" len="med"/>
+                    </a:lnR>
+                    <a:lnT w="6350" cap="flat" cmpd="sng" algn="ctr">
+                      <a:solidFill>
+                        <a:srgbClr val="D4E0D8"/>
+                      </a:solidFill>
+                      <a:prstDash val="solid"/>
+                      <a:round/>
+                      <a:headEnd type="none" w="med" len="med"/>
+                      <a:tailEnd type="none" w="med" len="med"/>
+                    </a:lnT>
+                    <a:lnB w="6350" cap="flat" cmpd="sng" algn="ctr">
+                      <a:solidFill>
+                        <a:srgbClr val="D4E0D8"/>
+                      </a:solidFill>
+                      <a:prstDash val="solid"/>
+                      <a:round/>
+                      <a:headEnd type="none" w="med" len="med"/>
+                      <a:tailEnd type="none" w="med" len="med"/>
+                    </a:lnB>
+                  </a:tcPr>
+                </a:tc>
+                <a:tc>
+                  <a:txBody>
+                    <a:bodyPr/>
+                    <a:lstStyle/>
+                    <a:p>
+                      <a:pPr algn="r" indent="0" marL="0">
+                        <a:buNone/>
+                      </a:pPr>
+                      <a:r>
+                        <a:rPr lang="en-US" sz="850" b="1" dirty="0">
+                          <a:solidFill>
+                            <a:srgbClr val="13201A"/>
+                          </a:solidFill>
+                          <a:latin typeface="Calibri" pitchFamily="34" charset="0"/>
+                          <a:ea typeface="Calibri" pitchFamily="34" charset="-122"/>
+                          <a:cs typeface="Calibri" pitchFamily="34" charset="-120"/>
+                        </a:rPr>
+                        <a:t>$137,000 to $160,300</a:t>
+                      </a:r>
+                      <a:endParaRPr lang="en-US" sz="850" dirty="0">
+                        <a:latin typeface="Calibri" charset="0"/>
+                        <a:ea typeface="Calibri" charset="0"/>
+                        <a:cs typeface="Calibri" charset="0"/>
+                      </a:endParaRPr>
+                    </a:p>
+                  </a:txBody>
+                  <a:tcPr marL="63500" marR="63500" marT="12700" marB="12700" anchor="ctr">
+                    <a:lnL w="6350" cap="flat" cmpd="sng" algn="ctr">
+                      <a:solidFill>
+                        <a:srgbClr val="D4E0D8"/>
+                      </a:solidFill>
+                      <a:prstDash val="solid"/>
+                      <a:round/>
+                      <a:headEnd type="none" w="med" len="med"/>
+                      <a:tailEnd type="none" w="med" len="med"/>
+                    </a:lnL>
+                    <a:lnR w="6350" cap="flat" cmpd="sng" algn="ctr">
+                      <a:solidFill>
+                        <a:srgbClr val="D4E0D8"/>
+                      </a:solidFill>
+                      <a:prstDash val="solid"/>
+                      <a:round/>
+                      <a:headEnd type="none" w="med" len="med"/>
+                      <a:tailEnd type="none" w="med" len="med"/>
+                    </a:lnR>
+                    <a:lnT w="6350" cap="flat" cmpd="sng" algn="ctr">
+                      <a:solidFill>
+                        <a:srgbClr val="D4E0D8"/>
+                      </a:solidFill>
+                      <a:prstDash val="solid"/>
+                      <a:round/>
+                      <a:headEnd type="none" w="med" len="med"/>
+                      <a:tailEnd type="none" w="med" len="med"/>
+                    </a:lnT>
+                    <a:lnB w="6350" cap="flat" cmpd="sng" algn="ctr">
+                      <a:solidFill>
+                        <a:srgbClr val="D4E0D8"/>
+                      </a:solidFill>
+                      <a:prstDash val="solid"/>
+                      <a:round/>
+                      <a:headEnd type="none" w="med" len="med"/>
+                      <a:tailEnd type="none" w="med" len="med"/>
+                    </a:lnB>
+                  </a:tcPr>
+                </a:tc>
+              </a:tr>
+              <a:tr h="167335">
+                <a:tc>
+                  <a:txBody>
+                    <a:bodyPr/>
+                    <a:lstStyle/>
+                    <a:p>
+                      <a:pPr indent="0" marL="0">
+                        <a:buNone/>
+                      </a:pPr>
+                      <a:r>
+                        <a:rPr lang="en-US" sz="850" dirty="0">
+                          <a:solidFill>
+                            <a:srgbClr val="3A4A42"/>
+                          </a:solidFill>
+                          <a:latin typeface="Calibri" pitchFamily="34" charset="0"/>
+                          <a:ea typeface="Calibri" pitchFamily="34" charset="-122"/>
+                          <a:cs typeface="Calibri" pitchFamily="34" charset="-120"/>
+                        </a:rPr>
+                        <a:t>Debt — LTC / rate / structure</a:t>
+                      </a:r>
+                      <a:endParaRPr lang="en-US" sz="850" dirty="0">
+                        <a:latin typeface="Calibri" charset="0"/>
+                        <a:ea typeface="Calibri" charset="0"/>
+                        <a:cs typeface="Calibri" charset="0"/>
+                      </a:endParaRPr>
+                    </a:p>
+                  </a:txBody>
+                  <a:tcPr marL="63500" marR="63500" marT="12700" marB="12700" anchor="ctr">
+                    <a:lnL w="6350" cap="flat" cmpd="sng" algn="ctr">
+                      <a:solidFill>
+                        <a:srgbClr val="D4E0D8"/>
+                      </a:solidFill>
+                      <a:prstDash val="solid"/>
+                      <a:round/>
+                      <a:headEnd type="none" w="med" len="med"/>
+                      <a:tailEnd type="none" w="med" len="med"/>
+                    </a:lnL>
+                    <a:lnR w="6350" cap="flat" cmpd="sng" algn="ctr">
+                      <a:solidFill>
+                        <a:srgbClr val="D4E0D8"/>
+                      </a:solidFill>
+                      <a:prstDash val="solid"/>
+                      <a:round/>
+                      <a:headEnd type="none" w="med" len="med"/>
+                      <a:tailEnd type="none" w="med" len="med"/>
+                    </a:lnR>
+                    <a:lnT w="6350" cap="flat" cmpd="sng" algn="ctr">
+                      <a:solidFill>
+                        <a:srgbClr val="D4E0D8"/>
+                      </a:solidFill>
+                      <a:prstDash val="solid"/>
+                      <a:round/>
+                      <a:headEnd type="none" w="med" len="med"/>
+                      <a:tailEnd type="none" w="med" len="med"/>
+                    </a:lnT>
+                    <a:lnB w="6350" cap="flat" cmpd="sng" algn="ctr">
+                      <a:solidFill>
+                        <a:srgbClr val="D4E0D8"/>
+                      </a:solidFill>
+                      <a:prstDash val="solid"/>
+                      <a:round/>
+                      <a:headEnd type="none" w="med" len="med"/>
+                      <a:tailEnd type="none" w="med" len="med"/>
+                    </a:lnB>
+                  </a:tcPr>
+                </a:tc>
+                <a:tc>
+                  <a:txBody>
+                    <a:bodyPr/>
+                    <a:lstStyle/>
+                    <a:p>
+                      <a:pPr algn="r" indent="0" marL="0">
+                        <a:buNone/>
+                      </a:pPr>
+                      <a:r>
+                        <a:rPr lang="en-US" sz="850" b="1" dirty="0">
+                          <a:solidFill>
+                            <a:srgbClr val="13201A"/>
+                          </a:solidFill>
+                          <a:latin typeface="Calibri" pitchFamily="34" charset="0"/>
+                          <a:ea typeface="Calibri" pitchFamily="34" charset="-122"/>
+                          <a:cs typeface="Calibri" pitchFamily="34" charset="-120"/>
+                        </a:rPr>
+                        <a:t>65% / 5.85% / interest-only</a:t>
+                      </a:r>
+                      <a:endParaRPr lang="en-US" sz="850" dirty="0">
+                        <a:latin typeface="Calibri" charset="0"/>
+                        <a:ea typeface="Calibri" charset="0"/>
+                        <a:cs typeface="Calibri" charset="0"/>
+                      </a:endParaRPr>
+                    </a:p>
+                  </a:txBody>
+                  <a:tcPr marL="63500" marR="63500" marT="12700" marB="12700" anchor="ctr">
+                    <a:lnL w="6350" cap="flat" cmpd="sng" algn="ctr">
+                      <a:solidFill>
+                        <a:srgbClr val="D4E0D8"/>
+                      </a:solidFill>
+                      <a:prstDash val="solid"/>
+                      <a:round/>
+                      <a:headEnd type="none" w="med" len="med"/>
+                      <a:tailEnd type="none" w="med" len="med"/>
+                    </a:lnL>
+                    <a:lnR w="6350" cap="flat" cmpd="sng" algn="ctr">
+                      <a:solidFill>
+                        <a:srgbClr val="D4E0D8"/>
+                      </a:solidFill>
+                      <a:prstDash val="solid"/>
+                      <a:round/>
+                      <a:headEnd type="none" w="med" len="med"/>
+                      <a:tailEnd type="none" w="med" len="med"/>
+                    </a:lnR>
+                    <a:lnT w="6350" cap="flat" cmpd="sng" algn="ctr">
+                      <a:solidFill>
+                        <a:srgbClr val="D4E0D8"/>
+                      </a:solidFill>
+                      <a:prstDash val="solid"/>
+                      <a:round/>
+                      <a:headEnd type="none" w="med" len="med"/>
+                      <a:tailEnd type="none" w="med" len="med"/>
+                    </a:lnT>
+                    <a:lnB w="6350" cap="flat" cmpd="sng" algn="ctr">
+                      <a:solidFill>
+                        <a:srgbClr val="D4E0D8"/>
+                      </a:solidFill>
+                      <a:prstDash val="solid"/>
+                      <a:round/>
+                      <a:headEnd type="none" w="med" len="med"/>
+                      <a:tailEnd type="none" w="med" len="med"/>
+                    </a:lnB>
+                  </a:tcPr>
+                </a:tc>
+              </a:tr>
+              <a:tr h="167335">
+                <a:tc>
+                  <a:txBody>
+                    <a:bodyPr/>
+                    <a:lstStyle/>
+                    <a:p>
+                      <a:pPr indent="0" marL="0">
+                        <a:buNone/>
+                      </a:pPr>
+                      <a:r>
+                        <a:rPr lang="en-US" sz="850" dirty="0">
+                          <a:solidFill>
+                            <a:srgbClr val="3A4A42"/>
+                          </a:solidFill>
+                          <a:latin typeface="Calibri" pitchFamily="34" charset="0"/>
+                          <a:ea typeface="Calibri" pitchFamily="34" charset="-122"/>
+                          <a:cs typeface="Calibri" pitchFamily="34" charset="-120"/>
+                        </a:rPr>
+                        <a:t>Exit cap / cost of sale</a:t>
+                      </a:r>
+                      <a:endParaRPr lang="en-US" sz="850" dirty="0">
+                        <a:latin typeface="Calibri" charset="0"/>
+                        <a:ea typeface="Calibri" charset="0"/>
+                        <a:cs typeface="Calibri" charset="0"/>
+                      </a:endParaRPr>
+                    </a:p>
+                  </a:txBody>
+                  <a:tcPr marL="63500" marR="63500" marT="12700" marB="12700" anchor="ctr">
+                    <a:lnL w="6350" cap="flat" cmpd="sng" algn="ctr">
+                      <a:solidFill>
+                        <a:srgbClr val="D4E0D8"/>
+                      </a:solidFill>
+                      <a:prstDash val="solid"/>
+                      <a:round/>
+                      <a:headEnd type="none" w="med" len="med"/>
+                      <a:tailEnd type="none" w="med" len="med"/>
+                    </a:lnL>
+                    <a:lnR w="6350" cap="flat" cmpd="sng" algn="ctr">
+                      <a:solidFill>
+                        <a:srgbClr val="D4E0D8"/>
+                      </a:solidFill>
+                      <a:prstDash val="solid"/>
+                      <a:round/>
+                      <a:headEnd type="none" w="med" len="med"/>
+                      <a:tailEnd type="none" w="med" len="med"/>
+                    </a:lnR>
+                    <a:lnT w="6350" cap="flat" cmpd="sng" algn="ctr">
+                      <a:solidFill>
+                        <a:srgbClr val="D4E0D8"/>
+                      </a:solidFill>
+                      <a:prstDash val="solid"/>
+                      <a:round/>
+                      <a:headEnd type="none" w="med" len="med"/>
+                      <a:tailEnd type="none" w="med" len="med"/>
+                    </a:lnT>
+                    <a:lnB w="6350" cap="flat" cmpd="sng" algn="ctr">
+                      <a:solidFill>
+                        <a:srgbClr val="D4E0D8"/>
+                      </a:solidFill>
+                      <a:prstDash val="solid"/>
+                      <a:round/>
+                      <a:headEnd type="none" w="med" len="med"/>
+                      <a:tailEnd type="none" w="med" len="med"/>
+                    </a:lnB>
+                  </a:tcPr>
+                </a:tc>
+                <a:tc>
+                  <a:txBody>
+                    <a:bodyPr/>
+                    <a:lstStyle/>
+                    <a:p>
+                      <a:pPr algn="r" indent="0" marL="0">
+                        <a:buNone/>
+                      </a:pPr>
+                      <a:r>
+                        <a:rPr lang="en-US" sz="850" b="1" dirty="0">
+                          <a:solidFill>
+                            <a:srgbClr val="13201A"/>
+                          </a:solidFill>
+                          <a:latin typeface="Calibri" pitchFamily="34" charset="0"/>
+                          <a:ea typeface="Calibri" pitchFamily="34" charset="-122"/>
+                          <a:cs typeface="Calibri" pitchFamily="34" charset="-120"/>
+                        </a:rPr>
+                        <a:t>6.75% / 1.5%</a:t>
+                      </a:r>
+                      <a:endParaRPr lang="en-US" sz="850" dirty="0">
+                        <a:latin typeface="Calibri" charset="0"/>
+                        <a:ea typeface="Calibri" charset="0"/>
+                        <a:cs typeface="Calibri" charset="0"/>
+                      </a:endParaRPr>
+                    </a:p>
+                  </a:txBody>
+                  <a:tcPr marL="63500" marR="63500" marT="12700" marB="12700" anchor="ctr">
+                    <a:lnL w="6350" cap="flat" cmpd="sng" algn="ctr">
+                      <a:solidFill>
+                        <a:srgbClr val="D4E0D8"/>
+                      </a:solidFill>
+                      <a:prstDash val="solid"/>
+                      <a:round/>
+                      <a:headEnd type="none" w="med" len="med"/>
+                      <a:tailEnd type="none" w="med" len="med"/>
+                    </a:lnL>
+                    <a:lnR w="6350" cap="flat" cmpd="sng" algn="ctr">
+                      <a:solidFill>
+                        <a:srgbClr val="D4E0D8"/>
+                      </a:solidFill>
+                      <a:prstDash val="solid"/>
+                      <a:round/>
+                      <a:headEnd type="none" w="med" len="med"/>
+                      <a:tailEnd type="none" w="med" len="med"/>
+                    </a:lnR>
+                    <a:lnT w="6350" cap="flat" cmpd="sng" algn="ctr">
+                      <a:solidFill>
+                        <a:srgbClr val="D4E0D8"/>
+                      </a:solidFill>
+                      <a:prstDash val="solid"/>
+                      <a:round/>
+                      <a:headEnd type="none" w="med" len="med"/>
+                      <a:tailEnd type="none" w="med" len="med"/>
+                    </a:lnT>
+                    <a:lnB w="6350" cap="flat" cmpd="sng" algn="ctr">
+                      <a:solidFill>
+                        <a:srgbClr val="D4E0D8"/>
+                      </a:solidFill>
+                      <a:prstDash val="solid"/>
+                      <a:round/>
+                      <a:headEnd type="none" w="med" len="med"/>
+                      <a:tailEnd type="none" w="med" len="med"/>
+                    </a:lnB>
+                  </a:tcPr>
+                </a:tc>
+              </a:tr>
+              <a:tr h="167335">
+                <a:tc>
+                  <a:txBody>
+                    <a:bodyPr/>
+                    <a:lstStyle/>
+                    <a:p>
+                      <a:pPr indent="0" marL="0">
+                        <a:buNone/>
+                      </a:pPr>
+                      <a:r>
+                        <a:rPr lang="en-US" sz="850" dirty="0">
+                          <a:solidFill>
+                            <a:srgbClr val="3A4A42"/>
+                          </a:solidFill>
+                          <a:latin typeface="Calibri" pitchFamily="34" charset="0"/>
+                          <a:ea typeface="Calibri" pitchFamily="34" charset="-122"/>
+                          <a:cs typeface="Calibri" pitchFamily="34" charset="-120"/>
+                        </a:rPr>
+                        <a:t>Data hierarchy — the Excel files govern</a:t>
+                      </a:r>
+                      <a:endParaRPr lang="en-US" sz="850" dirty="0">
+                        <a:latin typeface="Calibri" charset="0"/>
+                        <a:ea typeface="Calibri" charset="0"/>
+                        <a:cs typeface="Calibri" charset="0"/>
+                      </a:endParaRPr>
+                    </a:p>
+                  </a:txBody>
+                  <a:tcPr marL="63500" marR="63500" marT="12700" marB="12700" anchor="ctr">
+                    <a:lnL w="6350" cap="flat" cmpd="sng" algn="ctr">
+                      <a:solidFill>
+                        <a:srgbClr val="D4E0D8"/>
+                      </a:solidFill>
+                      <a:prstDash val="solid"/>
+                      <a:round/>
+                      <a:headEnd type="none" w="med" len="med"/>
+                      <a:tailEnd type="none" w="med" len="med"/>
+                    </a:lnL>
+                    <a:lnR w="6350" cap="flat" cmpd="sng" algn="ctr">
+                      <a:solidFill>
+                        <a:srgbClr val="D4E0D8"/>
+                      </a:solidFill>
+                      <a:prstDash val="solid"/>
+                      <a:round/>
+                      <a:headEnd type="none" w="med" len="med"/>
+                      <a:tailEnd type="none" w="med" len="med"/>
+                    </a:lnR>
+                    <a:lnT w="6350" cap="flat" cmpd="sng" algn="ctr">
+                      <a:solidFill>
+                        <a:srgbClr val="D4E0D8"/>
+                      </a:solidFill>
+                      <a:prstDash val="solid"/>
+                      <a:round/>
+                      <a:headEnd type="none" w="med" len="med"/>
+                      <a:tailEnd type="none" w="med" len="med"/>
+                    </a:lnT>
+                    <a:lnB w="6350" cap="flat" cmpd="sng" algn="ctr">
+                      <a:solidFill>
+                        <a:srgbClr val="D4E0D8"/>
+                      </a:solidFill>
+                      <a:prstDash val="solid"/>
+                      <a:round/>
+                      <a:headEnd type="none" w="med" len="med"/>
+                      <a:tailEnd type="none" w="med" len="med"/>
+                    </a:lnB>
+                  </a:tcPr>
+                </a:tc>
+                <a:tc>
+                  <a:txBody>
+                    <a:bodyPr/>
+                    <a:lstStyle/>
+                    <a:p>
+                      <a:pPr algn="r" indent="0" marL="0">
+                        <a:buNone/>
+                      </a:pPr>
+                      <a:r>
+                        <a:rPr lang="en-US" sz="850" b="1" dirty="0">
+                          <a:solidFill>
+                            <a:srgbClr val="13201A"/>
+                          </a:solidFill>
+                          <a:latin typeface="Calibri" pitchFamily="34" charset="0"/>
+                          <a:ea typeface="Calibri" pitchFamily="34" charset="-122"/>
+                          <a:cs typeface="Calibri" pitchFamily="34" charset="-120"/>
+                        </a:rPr>
+                        <a:t>53 with laundry, not 78</a:t>
+                      </a:r>
+                      <a:endParaRPr lang="en-US" sz="850" dirty="0">
+                        <a:latin typeface="Calibri" charset="0"/>
+                        <a:ea typeface="Calibri" charset="0"/>
+                        <a:cs typeface="Calibri" charset="0"/>
+                      </a:endParaRPr>
+                    </a:p>
+                  </a:txBody>
+                  <a:tcPr marL="63500" marR="63500" marT="12700" marB="12700" anchor="ctr">
+                    <a:lnL w="6350" cap="flat" cmpd="sng" algn="ctr">
+                      <a:solidFill>
+                        <a:srgbClr val="D4E0D8"/>
+                      </a:solidFill>
+                      <a:prstDash val="solid"/>
+                      <a:round/>
+                      <a:headEnd type="none" w="med" len="med"/>
+                      <a:tailEnd type="none" w="med" len="med"/>
+                    </a:lnL>
+                    <a:lnR w="6350" cap="flat" cmpd="sng" algn="ctr">
+                      <a:solidFill>
+                        <a:srgbClr val="D4E0D8"/>
+                      </a:solidFill>
+                      <a:prstDash val="solid"/>
+                      <a:round/>
+                      <a:headEnd type="none" w="med" len="med"/>
+                      <a:tailEnd type="none" w="med" len="med"/>
+                    </a:lnR>
+                    <a:lnT w="6350" cap="flat" cmpd="sng" algn="ctr">
+                      <a:solidFill>
+                        <a:srgbClr val="D4E0D8"/>
+                      </a:solidFill>
+                      <a:prstDash val="solid"/>
+                      <a:round/>
+                      <a:headEnd type="none" w="med" len="med"/>
+                      <a:tailEnd type="none" w="med" len="med"/>
+                    </a:lnT>
+                    <a:lnB w="6350" cap="flat" cmpd="sng" algn="ctr">
+                      <a:solidFill>
+                        <a:srgbClr val="D4E0D8"/>
+                      </a:solidFill>
+                      <a:prstDash val="solid"/>
+                      <a:round/>
+                      <a:headEnd type="none" w="med" len="med"/>
+                      <a:tailEnd type="none" w="med" len="med"/>
+                    </a:lnB>
+                  </a:tcPr>
+                </a:tc>
+              </a:tr>
+            </a:tbl>
+          </a:graphicData>
+        </a:graphic>
+      </p:graphicFrame>
+      <p:sp>
+        <p:nvSpPr>
+          <p:cNvPr id="27" name="Shape 20"/>
+          <p:cNvSpPr/>
+          <p:nvPr/>
+        </p:nvSpPr>
+        <p:spPr>
+          <a:xfrm>
+            <a:off x="411480" y="5724144"/>
+            <a:ext cx="3566160" cy="32004"/>
+          </a:xfrm>
+          <a:prstGeom prst="rect">
+            <a:avLst/>
+          </a:prstGeom>
+          <a:solidFill>
+            <a:srgbClr val="1F7A5C"/>
+          </a:solidFill>
+          <a:ln/>
+        </p:spPr>
+      </p:sp>
+      <p:sp>
+        <p:nvSpPr>
+          <p:cNvPr id="28" name="Text 21"/>
+          <p:cNvSpPr/>
+          <p:nvPr/>
+        </p:nvSpPr>
+        <p:spPr>
+          <a:xfrm>
+            <a:off x="411480" y="5797296"/>
+            <a:ext cx="3566160" cy="182880"/>
+          </a:xfrm>
+          <a:prstGeom prst="rect">
+            <a:avLst/>
+          </a:prstGeom>
+          <a:noFill/>
+          <a:ln/>
+        </p:spPr>
+        <p:txBody>
+          <a:bodyPr wrap="square" lIns="0" tIns="0" rIns="0" bIns="0" rtlCol="0" anchor="ctr"/>
+          <a:lstStyle/>
+          <a:p>
+            <a:pPr indent="0" marL="0">
+              <a:buNone/>
+            </a:pPr>
+            <a:r>
+              <a:rPr lang="en-US" sz="900" b="1" dirty="0">
+                <a:solidFill>
+                  <a:srgbClr val="1F7A5C"/>
+                </a:solidFill>
+                <a:latin typeface="Calibri" pitchFamily="34" charset="0"/>
+                <a:ea typeface="Calibri" pitchFamily="34" charset="-122"/>
+                <a:cs typeface="Calibri" pitchFamily="34" charset="-120"/>
+              </a:rPr>
+              <a:t>KEY OPPORTUNITIES</a:t>
+            </a:r>
+            <a:endParaRPr lang="en-US" sz="900" dirty="0"/>
+          </a:p>
+        </p:txBody>
+      </p:sp>
+      <p:sp>
+        <p:nvSpPr>
+          <p:cNvPr id="29" name="Text 22"/>
+          <p:cNvSpPr/>
+          <p:nvPr/>
+        </p:nvSpPr>
+        <p:spPr>
+          <a:xfrm>
+            <a:off x="411480" y="5998464"/>
+            <a:ext cx="3566160" cy="786384"/>
+          </a:xfrm>
+          <a:prstGeom prst="rect">
+            <a:avLst/>
+          </a:prstGeom>
+          <a:noFill/>
+          <a:ln/>
+        </p:spPr>
+        <p:txBody>
+          <a:bodyPr wrap="square" lIns="0" tIns="0" rIns="0" bIns="0" rtlCol="0" anchor="t"/>
+          <a:lstStyle/>
+          <a:p>
+            <a:pPr indent="0" marL="0">
+              <a:lnSpc>
+                <a:spcPts val="980"/>
+              </a:lnSpc>
+              <a:spcAft>
+                <a:spcPts val="200"/>
+              </a:spcAft>
+              <a:buNone/>
+            </a:pPr>
+            <a:r>
+              <a:rPr lang="en-US" sz="800" b="1" dirty="0">
+                <a:solidFill>
+                  <a:srgbClr val="13201A"/>
+                </a:solidFill>
+                <a:latin typeface="Calibri" pitchFamily="34" charset="0"/>
+                <a:ea typeface="Calibri" pitchFamily="34" charset="-122"/>
+                <a:cs typeface="Calibri" pitchFamily="34" charset="-120"/>
+              </a:rPr>
+              <a:t>12.9% return on renovation cost. </a:t>
+            </a:r>
+            <a:pPr indent="0" marL="0">
+              <a:lnSpc>
+                <a:spcPts val="980"/>
+              </a:lnSpc>
+              <a:spcAft>
+                <a:spcPts val="200"/>
+              </a:spcAft>
+              <a:buNone/>
+            </a:pPr>
+            <a:r>
+              <a:rPr lang="en-US" sz="800" dirty="0">
+                <a:solidFill>
+                  <a:srgbClr val="4A5A52"/>
+                </a:solidFill>
+                <a:latin typeface="Calibri" pitchFamily="34" charset="0"/>
+                <a:ea typeface="Calibri" pitchFamily="34" charset="-122"/>
+                <a:cs typeface="Calibri" pitchFamily="34" charset="-120"/>
+              </a:rPr>
+              <a:t>$14,407 buys $155 a month.</a:t>
+            </a:r>
+            <a:endParaRPr lang="en-US" sz="800" dirty="0"/>
+          </a:p>
+          <a:p>
+            <a:pPr indent="0" marL="0">
+              <a:lnSpc>
+                <a:spcPts val="980"/>
+              </a:lnSpc>
+              <a:spcAft>
+                <a:spcPts val="200"/>
+              </a:spcAft>
+              <a:buNone/>
+            </a:pPr>
+            <a:r>
+              <a:rPr lang="en-US" sz="800" b="1" dirty="0">
+                <a:solidFill>
+                  <a:srgbClr val="13201A"/>
+                </a:solidFill>
+                <a:latin typeface="Calibri" pitchFamily="34" charset="0"/>
+                <a:ea typeface="Calibri" pitchFamily="34" charset="-122"/>
+                <a:cs typeface="Calibri" pitchFamily="34" charset="-120"/>
+              </a:rPr>
+              <a:t>All 118 units in 16 months. </a:t>
+            </a:r>
+            <a:pPr indent="0" marL="0">
+              <a:lnSpc>
+                <a:spcPts val="980"/>
+              </a:lnSpc>
+              <a:spcAft>
+                <a:spcPts val="200"/>
+              </a:spcAft>
+              <a:buNone/>
+            </a:pPr>
+            <a:r>
+              <a:rPr lang="en-US" sz="800" dirty="0">
+                <a:solidFill>
+                  <a:srgbClr val="4A5A52"/>
+                </a:solidFill>
+                <a:latin typeface="Calibri" pitchFamily="34" charset="0"/>
+                <a:ea typeface="Calibri" pitchFamily="34" charset="-122"/>
+                <a:cs typeface="Calibri" pitchFamily="34" charset="-120"/>
+              </a:rPr>
+              <a:t>Two tracks, nobody displaced, no permit on 53.</a:t>
+            </a:r>
+            <a:endParaRPr lang="en-US" sz="800" dirty="0"/>
+          </a:p>
+          <a:p>
+            <a:pPr indent="0" marL="0">
+              <a:lnSpc>
+                <a:spcPts val="980"/>
+              </a:lnSpc>
+              <a:spcAft>
+                <a:spcPts val="200"/>
+              </a:spcAft>
+              <a:buNone/>
+            </a:pPr>
+            <a:r>
+              <a:rPr lang="en-US" sz="800" b="1" dirty="0">
+                <a:solidFill>
+                  <a:srgbClr val="13201A"/>
+                </a:solidFill>
+                <a:latin typeface="Calibri" pitchFamily="34" charset="0"/>
+                <a:ea typeface="Calibri" pitchFamily="34" charset="-122"/>
+                <a:cs typeface="Calibri" pitchFamily="34" charset="-120"/>
+              </a:rPr>
+              <a:t>~$110K a year uncollected. </a:t>
+            </a:r>
+            <a:pPr indent="0" marL="0">
+              <a:lnSpc>
+                <a:spcPts val="980"/>
+              </a:lnSpc>
+              <a:spcAft>
+                <a:spcPts val="200"/>
+              </a:spcAft>
+              <a:buNone/>
+            </a:pPr>
+            <a:r>
+              <a:rPr lang="en-US" sz="800" dirty="0">
+                <a:solidFill>
+                  <a:srgbClr val="4A5A52"/>
+                </a:solidFill>
+                <a:latin typeface="Calibri" pitchFamily="34" charset="0"/>
+                <a:ea typeface="Calibri" pitchFamily="34" charset="-122"/>
+                <a:cs typeface="Calibri" pitchFamily="34" charset="-120"/>
+              </a:rPr>
+              <a:t>Tech fee 60% penetrated, valet trash unbilled, no pet rent.</a:t>
+            </a:r>
+            <a:endParaRPr lang="en-US" sz="800" dirty="0"/>
+          </a:p>
+        </p:txBody>
+      </p:sp>
+      <p:sp>
+        <p:nvSpPr>
+          <p:cNvPr id="30" name="Shape 23"/>
+          <p:cNvSpPr/>
+          <p:nvPr/>
+        </p:nvSpPr>
+        <p:spPr>
+          <a:xfrm>
+            <a:off x="4206240" y="5724144"/>
+            <a:ext cx="3566160" cy="32004"/>
+          </a:xfrm>
+          <a:prstGeom prst="rect">
+            <a:avLst/>
+          </a:prstGeom>
+          <a:solidFill>
+            <a:srgbClr val="9E2B25"/>
+          </a:solidFill>
+          <a:ln/>
+        </p:spPr>
+      </p:sp>
+      <p:sp>
+        <p:nvSpPr>
+          <p:cNvPr id="31" name="Text 24"/>
+          <p:cNvSpPr/>
+          <p:nvPr/>
+        </p:nvSpPr>
+        <p:spPr>
+          <a:xfrm>
+            <a:off x="4206240" y="5797296"/>
+            <a:ext cx="3566160" cy="182880"/>
+          </a:xfrm>
+          <a:prstGeom prst="rect">
+            <a:avLst/>
+          </a:prstGeom>
+          <a:noFill/>
+          <a:ln/>
+        </p:spPr>
+        <p:txBody>
+          <a:bodyPr wrap="square" lIns="0" tIns="0" rIns="0" bIns="0" rtlCol="0" anchor="ctr"/>
+          <a:lstStyle/>
+          <a:p>
+            <a:pPr indent="0" marL="0">
+              <a:buNone/>
+            </a:pPr>
+            <a:r>
+              <a:rPr lang="en-US" sz="900" b="1" dirty="0">
+                <a:solidFill>
+                  <a:srgbClr val="9E2B25"/>
+                </a:solidFill>
+                <a:latin typeface="Calibri" pitchFamily="34" charset="0"/>
+                <a:ea typeface="Calibri" pitchFamily="34" charset="-122"/>
+                <a:cs typeface="Calibri" pitchFamily="34" charset="-120"/>
+              </a:rPr>
+              <a:t>KEY RISKS</a:t>
+            </a:r>
+            <a:endParaRPr lang="en-US" sz="900" dirty="0"/>
+          </a:p>
+        </p:txBody>
+      </p:sp>
+      <p:sp>
+        <p:nvSpPr>
+          <p:cNvPr id="32" name="Text 25"/>
+          <p:cNvSpPr/>
+          <p:nvPr/>
+        </p:nvSpPr>
+        <p:spPr>
+          <a:xfrm>
+            <a:off x="4206240" y="5998464"/>
+            <a:ext cx="3566160" cy="786384"/>
+          </a:xfrm>
+          <a:prstGeom prst="rect">
+            <a:avLst/>
+          </a:prstGeom>
+          <a:noFill/>
+          <a:ln/>
+        </p:spPr>
+        <p:txBody>
+          <a:bodyPr wrap="square" lIns="0" tIns="0" rIns="0" bIns="0" rtlCol="0" anchor="t"/>
+          <a:lstStyle/>
+          <a:p>
+            <a:pPr indent="0" marL="0">
+              <a:lnSpc>
+                <a:spcPts val="980"/>
+              </a:lnSpc>
+              <a:spcAft>
+                <a:spcPts val="200"/>
+              </a:spcAft>
+              <a:buNone/>
+            </a:pPr>
+            <a:r>
+              <a:rPr lang="en-US" sz="800" b="1" dirty="0">
+                <a:solidFill>
+                  <a:srgbClr val="13201A"/>
+                </a:solidFill>
+                <a:latin typeface="Calibri" pitchFamily="34" charset="0"/>
+                <a:ea typeface="Calibri" pitchFamily="34" charset="-122"/>
+                <a:cs typeface="Calibri" pitchFamily="34" charset="-120"/>
+              </a:rPr>
+              <a:t>Rent growth — the dominant variable. </a:t>
+            </a:r>
+            <a:pPr indent="0" marL="0">
+              <a:lnSpc>
+                <a:spcPts val="980"/>
+              </a:lnSpc>
+              <a:spcAft>
+                <a:spcPts val="200"/>
+              </a:spcAft>
+              <a:buNone/>
+            </a:pPr>
+            <a:r>
+              <a:rPr lang="en-US" sz="800" dirty="0">
+                <a:solidFill>
+                  <a:srgbClr val="4A5A52"/>
+                </a:solidFill>
+                <a:latin typeface="Calibri" pitchFamily="34" charset="0"/>
+                <a:ea typeface="Calibri" pitchFamily="34" charset="-122"/>
+                <a:cs typeface="Calibri" pitchFamily="34" charset="-120"/>
+              </a:rPr>
+              <a:t>At a flat 1.0%, the IRR is 7.1%.</a:t>
+            </a:r>
+            <a:endParaRPr lang="en-US" sz="800" dirty="0"/>
+          </a:p>
+          <a:p>
+            <a:pPr indent="0" marL="0">
+              <a:lnSpc>
+                <a:spcPts val="980"/>
+              </a:lnSpc>
+              <a:spcAft>
+                <a:spcPts val="200"/>
+              </a:spcAft>
+              <a:buNone/>
+            </a:pPr>
+            <a:r>
+              <a:rPr lang="en-US" sz="800" b="1" dirty="0">
+                <a:solidFill>
+                  <a:srgbClr val="13201A"/>
+                </a:solidFill>
+                <a:latin typeface="Calibri" pitchFamily="34" charset="0"/>
+                <a:ea typeface="Calibri" pitchFamily="34" charset="-122"/>
+                <a:cs typeface="Calibri" pitchFamily="34" charset="-120"/>
+              </a:rPr>
+              <a:t>Basis. </a:t>
+            </a:r>
+            <a:pPr indent="0" marL="0">
+              <a:lnSpc>
+                <a:spcPts val="980"/>
+              </a:lnSpc>
+              <a:spcAft>
+                <a:spcPts val="200"/>
+              </a:spcAft>
+              <a:buNone/>
+            </a:pPr>
+            <a:r>
+              <a:rPr lang="en-US" sz="800" dirty="0">
+                <a:solidFill>
+                  <a:srgbClr val="4A5A52"/>
+                </a:solidFill>
+                <a:latin typeface="Calibri" pitchFamily="34" charset="0"/>
+                <a:ea typeface="Calibri" pitchFamily="34" charset="-122"/>
+                <a:cs typeface="Calibri" pitchFamily="34" charset="-120"/>
+              </a:rPr>
+              <a:t>It traded 12% above our bid; there the plan returns 7.9%.</a:t>
+            </a:r>
+            <a:endParaRPr lang="en-US" sz="800" dirty="0"/>
+          </a:p>
+          <a:p>
+            <a:pPr indent="0" marL="0">
+              <a:lnSpc>
+                <a:spcPts val="980"/>
+              </a:lnSpc>
+              <a:spcAft>
+                <a:spcPts val="200"/>
+              </a:spcAft>
+              <a:buNone/>
+            </a:pPr>
+            <a:r>
+              <a:rPr lang="en-US" sz="800" b="1" dirty="0">
+                <a:solidFill>
+                  <a:srgbClr val="13201A"/>
+                </a:solidFill>
+                <a:latin typeface="Calibri" pitchFamily="34" charset="0"/>
+                <a:ea typeface="Calibri" pitchFamily="34" charset="-122"/>
+                <a:cs typeface="Calibri" pitchFamily="34" charset="-120"/>
+              </a:rPr>
+              <a:t>Unproven premium, 1974 plant. </a:t>
+            </a:r>
+            <a:pPr indent="0" marL="0">
+              <a:lnSpc>
+                <a:spcPts val="980"/>
+              </a:lnSpc>
+              <a:spcAft>
+                <a:spcPts val="200"/>
+              </a:spcAft>
+              <a:buNone/>
+            </a:pPr>
+            <a:r>
+              <a:rPr lang="en-US" sz="800" dirty="0">
+                <a:solidFill>
+                  <a:srgbClr val="4A5A52"/>
+                </a:solidFill>
+                <a:latin typeface="Calibri" pitchFamily="34" charset="0"/>
+                <a:ea typeface="Calibri" pitchFamily="34" charset="-122"/>
+                <a:cs typeface="Calibri" pitchFamily="34" charset="-120"/>
+              </a:rPr>
+              <a:t>Nothing renovated to standard; 3.5 of 5 roofs original.</a:t>
+            </a:r>
+            <a:endParaRPr lang="en-US" sz="800" dirty="0"/>
+          </a:p>
+        </p:txBody>
+      </p:sp>
+      <p:sp>
+        <p:nvSpPr>
+          <p:cNvPr id="33" name="Shape 26"/>
+          <p:cNvSpPr/>
+          <p:nvPr/>
+        </p:nvSpPr>
+        <p:spPr>
+          <a:xfrm>
+            <a:off x="8001000" y="5724144"/>
+            <a:ext cx="3776472" cy="969264"/>
           </a:xfrm>
           <a:prstGeom prst="roundRect">
             <a:avLst>
-              <a:gd name="adj" fmla="val 6410"/>
+              <a:gd name="adj" fmla="val 4717"/>
             </a:avLst>
           </a:prstGeom>
           <a:solidFill>
@@ -8744,14 +10184,14 @@
       </p:sp>
       <p:sp>
         <p:nvSpPr>
-          <p:cNvPr id="24" name="Text 18"/>
+          <p:cNvPr id="34" name="Text 27"/>
           <p:cNvSpPr/>
           <p:nvPr/>
         </p:nvSpPr>
         <p:spPr>
           <a:xfrm>
-            <a:off x="658368" y="5998464"/>
-            <a:ext cx="1280160" cy="219456"/>
+            <a:off x="8183880" y="5815584"/>
+            <a:ext cx="3474720" cy="182880"/>
           </a:xfrm>
           <a:prstGeom prst="rect">
             <a:avLst/>
@@ -8767,7 +10207,7 @@
               <a:buNone/>
             </a:pPr>
             <a:r>
-              <a:rPr lang="en-US" sz="900" b="1" dirty="0">
+              <a:rPr lang="en-US" sz="850" b="1" dirty="0">
                 <a:solidFill>
                   <a:srgbClr val="8FC9A9"/>
                 </a:solidFill>
@@ -8775,22 +10215,22 @@
                 <a:ea typeface="Calibri" pitchFamily="34" charset="-122"/>
                 <a:cs typeface="Calibri" pitchFamily="34" charset="-120"/>
               </a:rPr>
-              <a:t>VERDICT</a:t>
+              <a:t>OVERALL ASSESSMENT</a:t>
             </a:r>
-            <a:endParaRPr lang="en-US" sz="900" dirty="0"/>
+            <a:endParaRPr lang="en-US" sz="850" dirty="0"/>
           </a:p>
         </p:txBody>
       </p:sp>
       <p:sp>
         <p:nvSpPr>
-          <p:cNvPr id="25" name="Text 19"/>
+          <p:cNvPr id="35" name="Text 28"/>
           <p:cNvSpPr/>
           <p:nvPr/>
         </p:nvSpPr>
         <p:spPr>
           <a:xfrm>
-            <a:off x="1874520" y="5980176"/>
-            <a:ext cx="9692640" cy="603504"/>
+            <a:off x="8183880" y="6016752"/>
+            <a:ext cx="3456432" cy="603504"/>
           </a:xfrm>
           <a:prstGeom prst="rect">
             <a:avLst/>
@@ -8799,17 +10239,17 @@
           <a:ln/>
         </p:spPr>
         <p:txBody>
-          <a:bodyPr wrap="square" lIns="0" tIns="0" rIns="0" bIns="0" rtlCol="0" anchor="ctr"/>
+          <a:bodyPr wrap="square" lIns="0" tIns="0" rIns="0" bIns="0" rtlCol="0" anchor="t"/>
           <a:lstStyle/>
           <a:p>
             <a:pPr indent="0" marL="0">
               <a:lnSpc>
-                <a:spcPts val="1250"/>
+                <a:spcPts val="1050"/>
               </a:lnSpc>
               <a:buNone/>
             </a:pPr>
             <a:r>
-              <a:rPr lang="en-US" sz="1000" dirty="0">
+              <a:rPr lang="en-US" sz="850" dirty="0">
                 <a:solidFill>
                   <a:srgbClr val="DDE8E1"/>
                 </a:solidFill>
@@ -8817,9 +10257,9 @@
                 <a:ea typeface="Calibri" pitchFamily="34" charset="-122"/>
                 <a:cs typeface="Calibri" pitchFamily="34" charset="-120"/>
               </a:rPr>
-              <a:t>Rent growth, not renovation, is the deal. Every controllable driver holds the IRR inside 11–16%; the market alone swings it 7% to 19%. Yardi has metro rents flat on a trailing-three-month basis and 2025 starts more than doubled — so we underwrite 1.5% to 3.0% and let the price absorb the difference.</a:t>
+              <a:t>A genuinely accretive plan on a well-located asset — but only at a price. We bid $12.0mm and were outbid by 12%. On 1.1% actual metro rent growth, that is the right outcome.</a:t>
             </a:r>
-            <a:endParaRPr lang="en-US" sz="1000" dirty="0"/>
+            <a:endParaRPr lang="en-US" sz="850" dirty="0"/>
           </a:p>
         </p:txBody>
       </p:sp>
@@ -8883,8 +10323,8 @@
         </p:nvSpPr>
         <p:spPr>
           <a:xfrm>
-            <a:off x="411480" y="219456"/>
-            <a:ext cx="8229600" cy="365760"/>
+            <a:off x="411480" y="201168"/>
+            <a:ext cx="8778240" cy="365760"/>
           </a:xfrm>
           <a:prstGeom prst="rect">
             <a:avLst/>
@@ -8900,7 +10340,7 @@
               <a:buNone/>
             </a:pPr>
             <a:r>
-              <a:rPr lang="en-US" sz="2200" b="1" dirty="0">
+              <a:rPr lang="en-US" sz="2000" b="1" dirty="0">
                 <a:solidFill>
                   <a:srgbClr val="13201A"/>
                 </a:solidFill>
@@ -8908,9 +10348,9 @@
                 <a:ea typeface="Cambria" pitchFamily="34" charset="-122"/>
                 <a:cs typeface="Cambria" pitchFamily="34" charset="-120"/>
               </a:rPr>
-              <a:t>Appendix A  ·  The business plan</a:t>
+              <a:t>Appendix  ·  Business plan, price sensitivity and the evidence</a:t>
             </a:r>
-            <a:endParaRPr lang="en-US" sz="2200" dirty="0"/>
+            <a:endParaRPr lang="en-US" sz="2000" dirty="0"/>
           </a:p>
         </p:txBody>
       </p:sp>
@@ -8922,8 +10362,8 @@
         </p:nvSpPr>
         <p:spPr>
           <a:xfrm>
-            <a:off x="8229600" y="310896"/>
-            <a:ext cx="3547872" cy="237744"/>
+            <a:off x="8595360" y="292608"/>
+            <a:ext cx="3182112" cy="237744"/>
           </a:xfrm>
           <a:prstGeom prst="rect">
             <a:avLst/>
@@ -8947,7 +10387,7 @@
                 <a:ea typeface="Calibri" pitchFamily="34" charset="-122"/>
                 <a:cs typeface="Calibri" pitchFamily="34" charset="-120"/>
               </a:rPr>
-              <a:t>$2.90mm of capital · $24,575 per unit · 16 months</a:t>
+              <a:t>Full detail in the 13-tab workbook</a:t>
             </a:r>
             <a:endParaRPr lang="en-US" sz="1000" dirty="0"/>
           </a:p>
@@ -8982,7 +10422,7 @@
         <p:spPr>
           <a:xfrm>
             <a:off x="539496" y="758952"/>
-            <a:ext cx="6638544" cy="237744"/>
+            <a:ext cx="5358384" cy="237744"/>
           </a:xfrm>
           <a:prstGeom prst="rect">
             <a:avLst/>
@@ -9027,19 +10467,19 @@
           </p:nvPr>
         </p:nvGraphicFramePr>
         <p:xfrm>
-          <a:off x="411480" y="1133856"/>
-          <a:ext cx="6766560" cy="914400"/>
+          <a:off x="411480" y="1152144"/>
+          <a:ext cx="5486400" cy="914400"/>
         </p:xfrm>
         <a:graphic>
           <a:graphicData uri="http://schemas.openxmlformats.org/drawingml/2006/table">
             <a:tbl>
               <a:tblPr/>
               <a:tblGrid>
-                <a:gridCol w="1691640"/>
-                <a:gridCol w="2560320"/>
-                <a:gridCol w="2514600"/>
+                <a:gridCol w="1417320"/>
+                <a:gridCol w="2057400"/>
+                <a:gridCol w="2011680"/>
               </a:tblGrid>
-              <a:tr h="214884">
+              <a:tr h="196596">
                 <a:tc>
                   <a:txBody>
                     <a:bodyPr/>
@@ -9048,7 +10488,7 @@
                       <a:pPr indent="0" marL="0">
                         <a:buNone/>
                       </a:pPr>
-                      <a:endParaRPr lang="en-US" sz="950" dirty="0">
+                      <a:endParaRPr lang="en-US" sz="900" dirty="0">
                         <a:latin typeface="Calibri" charset="0"/>
                         <a:ea typeface="Calibri" charset="0"/>
                         <a:cs typeface="Calibri" charset="0"/>
@@ -9106,7 +10546,7 @@
                         <a:buNone/>
                       </a:pPr>
                       <a:r>
-                        <a:rPr lang="en-US" sz="950" b="1" dirty="0">
+                        <a:rPr lang="en-US" sz="900" b="1" dirty="0">
                           <a:solidFill>
                             <a:srgbClr val="FFFFFF"/>
                           </a:solidFill>
@@ -9116,7 +10556,7 @@
                         </a:rPr>
                         <a:t>Track A — in place</a:t>
                       </a:r>
-                      <a:endParaRPr lang="en-US" sz="950" dirty="0">
+                      <a:endParaRPr lang="en-US" sz="900" dirty="0">
                         <a:latin typeface="Calibri" charset="0"/>
                         <a:ea typeface="Calibri" charset="0"/>
                         <a:cs typeface="Calibri" charset="0"/>
@@ -9174,7 +10614,7 @@
                         <a:buNone/>
                       </a:pPr>
                       <a:r>
-                        <a:rPr lang="en-US" sz="950" b="1" dirty="0">
+                        <a:rPr lang="en-US" sz="900" b="1" dirty="0">
                           <a:solidFill>
                             <a:srgbClr val="FFFFFF"/>
                           </a:solidFill>
@@ -9184,7 +10624,7 @@
                         </a:rPr>
                         <a:t>Track B — vacant unit</a:t>
                       </a:r>
-                      <a:endParaRPr lang="en-US" sz="950" dirty="0">
+                      <a:endParaRPr lang="en-US" sz="900" dirty="0">
                         <a:latin typeface="Calibri" charset="0"/>
                         <a:ea typeface="Calibri" charset="0"/>
                         <a:cs typeface="Calibri" charset="0"/>
@@ -9234,7 +10674,7 @@
                   </a:tcPr>
                 </a:tc>
               </a:tr>
-              <a:tr h="214884">
+              <a:tr h="196596">
                 <a:tc>
                   <a:txBody>
                     <a:bodyPr/>
@@ -9244,7 +10684,7 @@
                         <a:buNone/>
                       </a:pPr>
                       <a:r>
-                        <a:rPr lang="en-US" sz="900" dirty="0">
+                        <a:rPr lang="en-US" sz="850" dirty="0">
                           <a:solidFill>
                             <a:srgbClr val="5F7269"/>
                           </a:solidFill>
@@ -9254,7 +10694,7 @@
                         </a:rPr>
                         <a:t>Units</a:t>
                       </a:r>
-                      <a:endParaRPr lang="en-US" sz="900" dirty="0">
+                      <a:endParaRPr lang="en-US" sz="850" dirty="0">
                         <a:latin typeface="Calibri" charset="0"/>
                         <a:ea typeface="Calibri" charset="0"/>
                         <a:cs typeface="Calibri" charset="0"/>
@@ -9309,7 +10749,7 @@
                         <a:buNone/>
                       </a:pPr>
                       <a:r>
-                        <a:rPr lang="en-US" sz="900" b="1" dirty="0">
+                        <a:rPr lang="en-US" sz="850" b="1" dirty="0">
                           <a:solidFill>
                             <a:srgbClr val="13201A"/>
                           </a:solidFill>
@@ -9317,9 +10757,9 @@
                           <a:ea typeface="Calibri" pitchFamily="34" charset="-122"/>
                           <a:cs typeface="Calibri" pitchFamily="34" charset="-120"/>
                         </a:rPr>
-                        <a:t>53 (laundry already in unit)</a:t>
+                        <a:t>53 — laundry already in unit</a:t>
                       </a:r>
-                      <a:endParaRPr lang="en-US" sz="900" dirty="0">
+                      <a:endParaRPr lang="en-US" sz="850" dirty="0">
                         <a:latin typeface="Calibri" charset="0"/>
                         <a:ea typeface="Calibri" charset="0"/>
                         <a:cs typeface="Calibri" charset="0"/>
@@ -9374,7 +10814,7 @@
                         <a:buNone/>
                       </a:pPr>
                       <a:r>
-                        <a:rPr lang="en-US" sz="900" b="1" dirty="0">
+                        <a:rPr lang="en-US" sz="850" b="1" dirty="0">
                           <a:solidFill>
                             <a:srgbClr val="13201A"/>
                           </a:solidFill>
@@ -9382,9 +10822,9 @@
                           <a:ea typeface="Calibri" pitchFamily="34" charset="-122"/>
                           <a:cs typeface="Calibri" pitchFamily="34" charset="-120"/>
                         </a:rPr>
-                        <a:t>65 (laundry to be added)</a:t>
+                        <a:t>65 — laundry to be added</a:t>
                       </a:r>
-                      <a:endParaRPr lang="en-US" sz="900" dirty="0">
+                      <a:endParaRPr lang="en-US" sz="850" dirty="0">
                         <a:latin typeface="Calibri" charset="0"/>
                         <a:ea typeface="Calibri" charset="0"/>
                         <a:cs typeface="Calibri" charset="0"/>
@@ -9431,7 +10871,7 @@
                   </a:tcPr>
                 </a:tc>
               </a:tr>
-              <a:tr h="214884">
+              <a:tr h="196596">
                 <a:tc>
                   <a:txBody>
                     <a:bodyPr/>
@@ -9441,7 +10881,7 @@
                         <a:buNone/>
                       </a:pPr>
                       <a:r>
-                        <a:rPr lang="en-US" sz="900" dirty="0">
+                        <a:rPr lang="en-US" sz="850" dirty="0">
                           <a:solidFill>
                             <a:srgbClr val="5F7269"/>
                           </a:solidFill>
@@ -9451,7 +10891,7 @@
                         </a:rPr>
                         <a:t>Resident impact</a:t>
                       </a:r>
-                      <a:endParaRPr lang="en-US" sz="900" dirty="0">
+                      <a:endParaRPr lang="en-US" sz="850" dirty="0">
                         <a:latin typeface="Calibri" charset="0"/>
                         <a:ea typeface="Calibri" charset="0"/>
                         <a:cs typeface="Calibri" charset="0"/>
@@ -9506,7 +10946,7 @@
                         <a:buNone/>
                       </a:pPr>
                       <a:r>
-                        <a:rPr lang="en-US" sz="900" b="1" dirty="0">
+                        <a:rPr lang="en-US" sz="850" b="1" dirty="0">
                           <a:solidFill>
                             <a:srgbClr val="13201A"/>
                           </a:solidFill>
@@ -9516,7 +10956,7 @@
                         </a:rPr>
                         <a:t>None — resident stays</a:t>
                       </a:r>
-                      <a:endParaRPr lang="en-US" sz="900" dirty="0">
+                      <a:endParaRPr lang="en-US" sz="850" dirty="0">
                         <a:latin typeface="Calibri" charset="0"/>
                         <a:ea typeface="Calibri" charset="0"/>
                         <a:cs typeface="Calibri" charset="0"/>
@@ -9571,7 +11011,7 @@
                         <a:buNone/>
                       </a:pPr>
                       <a:r>
-                        <a:rPr lang="en-US" sz="900" b="1" dirty="0">
+                        <a:rPr lang="en-US" sz="850" b="1" dirty="0">
                           <a:solidFill>
                             <a:srgbClr val="13201A"/>
                           </a:solidFill>
@@ -9581,7 +11021,7 @@
                         </a:rPr>
                         <a:t>Natural turnover only</a:t>
                       </a:r>
-                      <a:endParaRPr lang="en-US" sz="900" dirty="0">
+                      <a:endParaRPr lang="en-US" sz="850" dirty="0">
                         <a:latin typeface="Calibri" charset="0"/>
                         <a:ea typeface="Calibri" charset="0"/>
                         <a:cs typeface="Calibri" charset="0"/>
@@ -9628,7 +11068,7 @@
                   </a:tcPr>
                 </a:tc>
               </a:tr>
-              <a:tr h="214884">
+              <a:tr h="196596">
                 <a:tc>
                   <a:txBody>
                     <a:bodyPr/>
@@ -9638,7 +11078,7 @@
                         <a:buNone/>
                       </a:pPr>
                       <a:r>
-                        <a:rPr lang="en-US" sz="900" dirty="0">
+                        <a:rPr lang="en-US" sz="850" dirty="0">
                           <a:solidFill>
                             <a:srgbClr val="5F7269"/>
                           </a:solidFill>
@@ -9648,7 +11088,7 @@
                         </a:rPr>
                         <a:t>Permit</a:t>
                       </a:r>
-                      <a:endParaRPr lang="en-US" sz="900" dirty="0">
+                      <a:endParaRPr lang="en-US" sz="850" dirty="0">
                         <a:latin typeface="Calibri" charset="0"/>
                         <a:ea typeface="Calibri" charset="0"/>
                         <a:cs typeface="Calibri" charset="0"/>
@@ -9703,7 +11143,7 @@
                         <a:buNone/>
                       </a:pPr>
                       <a:r>
-                        <a:rPr lang="en-US" sz="900" b="1" dirty="0">
+                        <a:rPr lang="en-US" sz="850" b="1" dirty="0">
                           <a:solidFill>
                             <a:srgbClr val="13201A"/>
                           </a:solidFill>
@@ -9713,7 +11153,7 @@
                         </a:rPr>
                         <a:t>None — cosmetic scope exempt</a:t>
                       </a:r>
-                      <a:endParaRPr lang="en-US" sz="900" dirty="0">
+                      <a:endParaRPr lang="en-US" sz="850" dirty="0">
                         <a:latin typeface="Calibri" charset="0"/>
                         <a:ea typeface="Calibri" charset="0"/>
                         <a:cs typeface="Calibri" charset="0"/>
@@ -9768,7 +11208,7 @@
                         <a:buNone/>
                       </a:pPr>
                       <a:r>
-                        <a:rPr lang="en-US" sz="900" b="1" dirty="0">
+                        <a:rPr lang="en-US" sz="850" b="1" dirty="0">
                           <a:solidFill>
                             <a:srgbClr val="13201A"/>
                           </a:solidFill>
@@ -9776,9 +11216,9 @@
                           <a:ea typeface="Calibri" pitchFamily="34" charset="-122"/>
                           <a:cs typeface="Calibri" pitchFamily="34" charset="-120"/>
                         </a:rPr>
-                        <a:t>State CDR, then Marion County DBNS</a:t>
+                        <a:t>State CDR, then county DBNS</a:t>
                       </a:r>
-                      <a:endParaRPr lang="en-US" sz="900" dirty="0">
+                      <a:endParaRPr lang="en-US" sz="850" dirty="0">
                         <a:latin typeface="Calibri" charset="0"/>
                         <a:ea typeface="Calibri" charset="0"/>
                         <a:cs typeface="Calibri" charset="0"/>
@@ -9825,7 +11265,7 @@
                   </a:tcPr>
                 </a:tc>
               </a:tr>
-              <a:tr h="214884">
+              <a:tr h="196596">
                 <a:tc>
                   <a:txBody>
                     <a:bodyPr/>
@@ -9835,7 +11275,7 @@
                         <a:buNone/>
                       </a:pPr>
                       <a:r>
-                        <a:rPr lang="en-US" sz="900" dirty="0">
+                        <a:rPr lang="en-US" sz="850" dirty="0">
                           <a:solidFill>
                             <a:srgbClr val="5F7269"/>
                           </a:solidFill>
@@ -9845,7 +11285,7 @@
                         </a:rPr>
                         <a:t>Start / pace</a:t>
                       </a:r>
-                      <a:endParaRPr lang="en-US" sz="900" dirty="0">
+                      <a:endParaRPr lang="en-US" sz="850" dirty="0">
                         <a:latin typeface="Calibri" charset="0"/>
                         <a:ea typeface="Calibri" charset="0"/>
                         <a:cs typeface="Calibri" charset="0"/>
@@ -9900,7 +11340,7 @@
                         <a:buNone/>
                       </a:pPr>
                       <a:r>
-                        <a:rPr lang="en-US" sz="900" b="1" dirty="0">
+                        <a:rPr lang="en-US" sz="850" b="1" dirty="0">
                           <a:solidFill>
                             <a:srgbClr val="13201A"/>
                           </a:solidFill>
@@ -9910,7 +11350,7 @@
                         </a:rPr>
                         <a:t>Month 2 / 10 per month</a:t>
                       </a:r>
-                      <a:endParaRPr lang="en-US" sz="900" dirty="0">
+                      <a:endParaRPr lang="en-US" sz="850" dirty="0">
                         <a:latin typeface="Calibri" charset="0"/>
                         <a:ea typeface="Calibri" charset="0"/>
                         <a:cs typeface="Calibri" charset="0"/>
@@ -9965,7 +11405,7 @@
                         <a:buNone/>
                       </a:pPr>
                       <a:r>
-                        <a:rPr lang="en-US" sz="900" b="1" dirty="0">
+                        <a:rPr lang="en-US" sz="850" b="1" dirty="0">
                           <a:solidFill>
                             <a:srgbClr val="13201A"/>
                           </a:solidFill>
@@ -9975,7 +11415,7 @@
                         </a:rPr>
                         <a:t>Month 4 / 5 per month</a:t>
                       </a:r>
-                      <a:endParaRPr lang="en-US" sz="900" dirty="0">
+                      <a:endParaRPr lang="en-US" sz="850" dirty="0">
                         <a:latin typeface="Calibri" charset="0"/>
                         <a:ea typeface="Calibri" charset="0"/>
                         <a:cs typeface="Calibri" charset="0"/>
@@ -10022,7 +11462,7 @@
                   </a:tcPr>
                 </a:tc>
               </a:tr>
-              <a:tr h="214884">
+              <a:tr h="196596">
                 <a:tc>
                   <a:txBody>
                     <a:bodyPr/>
@@ -10032,7 +11472,7 @@
                         <a:buNone/>
                       </a:pPr>
                       <a:r>
-                        <a:rPr lang="en-US" sz="900" dirty="0">
+                        <a:rPr lang="en-US" sz="850" dirty="0">
                           <a:solidFill>
                             <a:srgbClr val="5F7269"/>
                           </a:solidFill>
@@ -10042,7 +11482,7 @@
                         </a:rPr>
                         <a:t>Cost per unit</a:t>
                       </a:r>
-                      <a:endParaRPr lang="en-US" sz="900" dirty="0">
+                      <a:endParaRPr lang="en-US" sz="850" dirty="0">
                         <a:latin typeface="Calibri" charset="0"/>
                         <a:ea typeface="Calibri" charset="0"/>
                         <a:cs typeface="Calibri" charset="0"/>
@@ -10097,7 +11537,7 @@
                         <a:buNone/>
                       </a:pPr>
                       <a:r>
-                        <a:rPr lang="en-US" sz="900" b="1" dirty="0">
+                        <a:rPr lang="en-US" sz="850" b="1" dirty="0">
                           <a:solidFill>
                             <a:srgbClr val="13201A"/>
                           </a:solidFill>
@@ -10107,7 +11547,7 @@
                         </a:rPr>
                         <a:t>$10,000</a:t>
                       </a:r>
-                      <a:endParaRPr lang="en-US" sz="900" dirty="0">
+                      <a:endParaRPr lang="en-US" sz="850" dirty="0">
                         <a:latin typeface="Calibri" charset="0"/>
                         <a:ea typeface="Calibri" charset="0"/>
                         <a:cs typeface="Calibri" charset="0"/>
@@ -10162,7 +11602,7 @@
                         <a:buNone/>
                       </a:pPr>
                       <a:r>
-                        <a:rPr lang="en-US" sz="900" b="1" dirty="0">
+                        <a:rPr lang="en-US" sz="850" b="1" dirty="0">
                           <a:solidFill>
                             <a:srgbClr val="13201A"/>
                           </a:solidFill>
@@ -10172,7 +11612,7 @@
                         </a:rPr>
                         <a:t>$13,000 + $5,000 laundry</a:t>
                       </a:r>
-                      <a:endParaRPr lang="en-US" sz="900" dirty="0">
+                      <a:endParaRPr lang="en-US" sz="850" dirty="0">
                         <a:latin typeface="Calibri" charset="0"/>
                         <a:ea typeface="Calibri" charset="0"/>
                         <a:cs typeface="Calibri" charset="0"/>
@@ -10219,7 +11659,7 @@
                   </a:tcPr>
                 </a:tc>
               </a:tr>
-              <a:tr h="214884">
+              <a:tr h="196596">
                 <a:tc>
                   <a:txBody>
                     <a:bodyPr/>
@@ -10229,7 +11669,7 @@
                         <a:buNone/>
                       </a:pPr>
                       <a:r>
-                        <a:rPr lang="en-US" sz="900" dirty="0">
+                        <a:rPr lang="en-US" sz="850" dirty="0">
                           <a:solidFill>
                             <a:srgbClr val="5F7269"/>
                           </a:solidFill>
@@ -10239,7 +11679,7 @@
                         </a:rPr>
                         <a:t>Rent premium</a:t>
                       </a:r>
-                      <a:endParaRPr lang="en-US" sz="900" dirty="0">
+                      <a:endParaRPr lang="en-US" sz="850" dirty="0">
                         <a:latin typeface="Calibri" charset="0"/>
                         <a:ea typeface="Calibri" charset="0"/>
                         <a:cs typeface="Calibri" charset="0"/>
@@ -10294,7 +11734,7 @@
                         <a:buNone/>
                       </a:pPr>
                       <a:r>
-                        <a:rPr lang="en-US" sz="900" b="1" dirty="0">
+                        <a:rPr lang="en-US" sz="850" b="1" dirty="0">
                           <a:solidFill>
                             <a:srgbClr val="13201A"/>
                           </a:solidFill>
@@ -10304,7 +11744,7 @@
                         </a:rPr>
                         <a:t>$100 / month</a:t>
                       </a:r>
-                      <a:endParaRPr lang="en-US" sz="900" dirty="0">
+                      <a:endParaRPr lang="en-US" sz="850" dirty="0">
                         <a:latin typeface="Calibri" charset="0"/>
                         <a:ea typeface="Calibri" charset="0"/>
                         <a:cs typeface="Calibri" charset="0"/>
@@ -10359,7 +11799,7 @@
                         <a:buNone/>
                       </a:pPr>
                       <a:r>
-                        <a:rPr lang="en-US" sz="900" b="1" dirty="0">
+                        <a:rPr lang="en-US" sz="850" b="1" dirty="0">
                           <a:solidFill>
                             <a:srgbClr val="13201A"/>
                           </a:solidFill>
@@ -10369,7 +11809,7 @@
                         </a:rPr>
                         <a:t>$200 / month</a:t>
                       </a:r>
-                      <a:endParaRPr lang="en-US" sz="900" dirty="0">
+                      <a:endParaRPr lang="en-US" sz="850" dirty="0">
                         <a:latin typeface="Calibri" charset="0"/>
                         <a:ea typeface="Calibri" charset="0"/>
                         <a:cs typeface="Calibri" charset="0"/>
@@ -10416,7 +11856,7 @@
                   </a:tcPr>
                 </a:tc>
               </a:tr>
-              <a:tr h="214884">
+              <a:tr h="196596">
                 <a:tc>
                   <a:txBody>
                     <a:bodyPr/>
@@ -10426,7 +11866,7 @@
                         <a:buNone/>
                       </a:pPr>
                       <a:r>
-                        <a:rPr lang="en-US" sz="900" dirty="0">
+                        <a:rPr lang="en-US" sz="850" dirty="0">
                           <a:solidFill>
                             <a:srgbClr val="5F7269"/>
                           </a:solidFill>
@@ -10436,7 +11876,7 @@
                         </a:rPr>
                         <a:t>Premium captured</a:t>
                       </a:r>
-                      <a:endParaRPr lang="en-US" sz="900" dirty="0">
+                      <a:endParaRPr lang="en-US" sz="850" dirty="0">
                         <a:latin typeface="Calibri" charset="0"/>
                         <a:ea typeface="Calibri" charset="0"/>
                         <a:cs typeface="Calibri" charset="0"/>
@@ -10491,7 +11931,7 @@
                         <a:buNone/>
                       </a:pPr>
                       <a:r>
-                        <a:rPr lang="en-US" sz="900" b="1" dirty="0">
+                        <a:rPr lang="en-US" sz="850" b="1" dirty="0">
                           <a:solidFill>
                             <a:srgbClr val="13201A"/>
                           </a:solidFill>
@@ -10501,7 +11941,7 @@
                         </a:rPr>
                         <a:t>At renewal — 6-month lag</a:t>
                       </a:r>
-                      <a:endParaRPr lang="en-US" sz="900" dirty="0">
+                      <a:endParaRPr lang="en-US" sz="850" dirty="0">
                         <a:latin typeface="Calibri" charset="0"/>
                         <a:ea typeface="Calibri" charset="0"/>
                         <a:cs typeface="Calibri" charset="0"/>
@@ -10556,7 +11996,7 @@
                         <a:buNone/>
                       </a:pPr>
                       <a:r>
-                        <a:rPr lang="en-US" sz="900" b="1" dirty="0">
+                        <a:rPr lang="en-US" sz="850" b="1" dirty="0">
                           <a:solidFill>
                             <a:srgbClr val="13201A"/>
                           </a:solidFill>
@@ -10566,7 +12006,7 @@
                         </a:rPr>
                         <a:t>Immediately, on the new lease</a:t>
                       </a:r>
-                      <a:endParaRPr lang="en-US" sz="900" dirty="0">
+                      <a:endParaRPr lang="en-US" sz="850" dirty="0">
                         <a:latin typeface="Calibri" charset="0"/>
                         <a:ea typeface="Calibri" charset="0"/>
                         <a:cs typeface="Calibri" charset="0"/>
@@ -10613,7 +12053,7 @@
                   </a:tcPr>
                 </a:tc>
               </a:tr>
-              <a:tr h="214884">
+              <a:tr h="196596">
                 <a:tc>
                   <a:txBody>
                     <a:bodyPr/>
@@ -10623,7 +12063,7 @@
                         <a:buNone/>
                       </a:pPr>
                       <a:r>
-                        <a:rPr lang="en-US" sz="900" dirty="0">
+                        <a:rPr lang="en-US" sz="850" dirty="0">
                           <a:solidFill>
                             <a:srgbClr val="5F7269"/>
                           </a:solidFill>
@@ -10633,7 +12073,7 @@
                         </a:rPr>
                         <a:t>Downtime</a:t>
                       </a:r>
-                      <a:endParaRPr lang="en-US" sz="900" dirty="0">
+                      <a:endParaRPr lang="en-US" sz="850" dirty="0">
                         <a:latin typeface="Calibri" charset="0"/>
                         <a:ea typeface="Calibri" charset="0"/>
                         <a:cs typeface="Calibri" charset="0"/>
@@ -10688,7 +12128,7 @@
                         <a:buNone/>
                       </a:pPr>
                       <a:r>
-                        <a:rPr lang="en-US" sz="900" b="1" dirty="0">
+                        <a:rPr lang="en-US" sz="850" b="1" dirty="0">
                           <a:solidFill>
                             <a:srgbClr val="13201A"/>
                           </a:solidFill>
@@ -10698,7 +12138,7 @@
                         </a:rPr>
                         <a:t>None</a:t>
                       </a:r>
-                      <a:endParaRPr lang="en-US" sz="900" dirty="0">
+                      <a:endParaRPr lang="en-US" sz="850" dirty="0">
                         <a:latin typeface="Calibri" charset="0"/>
                         <a:ea typeface="Calibri" charset="0"/>
                         <a:cs typeface="Calibri" charset="0"/>
@@ -10753,7 +12193,7 @@
                         <a:buNone/>
                       </a:pPr>
                       <a:r>
-                        <a:rPr lang="en-US" sz="900" b="1" dirty="0">
+                        <a:rPr lang="en-US" sz="850" b="1" dirty="0">
                           <a:solidFill>
                             <a:srgbClr val="13201A"/>
                           </a:solidFill>
@@ -10763,7 +12203,7 @@
                         </a:rPr>
                         <a:t>14 incremental days</a:t>
                       </a:r>
-                      <a:endParaRPr lang="en-US" sz="900" dirty="0">
+                      <a:endParaRPr lang="en-US" sz="850" dirty="0">
                         <a:latin typeface="Calibri" charset="0"/>
                         <a:ea typeface="Calibri" charset="0"/>
                         <a:cs typeface="Calibri" charset="0"/>
@@ -10810,7 +12250,7 @@
                   </a:tcPr>
                 </a:tc>
               </a:tr>
-              <a:tr h="214884">
+              <a:tr h="196596">
                 <a:tc>
                   <a:txBody>
                     <a:bodyPr/>
@@ -10820,7 +12260,7 @@
                         <a:buNone/>
                       </a:pPr>
                       <a:r>
-                        <a:rPr lang="en-US" sz="900" dirty="0">
+                        <a:rPr lang="en-US" sz="850" dirty="0">
                           <a:solidFill>
                             <a:srgbClr val="5F7269"/>
                           </a:solidFill>
@@ -10830,7 +12270,7 @@
                         </a:rPr>
                         <a:t>Complete</a:t>
                       </a:r>
-                      <a:endParaRPr lang="en-US" sz="900" dirty="0">
+                      <a:endParaRPr lang="en-US" sz="850" dirty="0">
                         <a:latin typeface="Calibri" charset="0"/>
                         <a:ea typeface="Calibri" charset="0"/>
                         <a:cs typeface="Calibri" charset="0"/>
@@ -10885,7 +12325,7 @@
                         <a:buNone/>
                       </a:pPr>
                       <a:r>
-                        <a:rPr lang="en-US" sz="900" b="1" dirty="0">
+                        <a:rPr lang="en-US" sz="850" b="1" dirty="0">
                           <a:solidFill>
                             <a:srgbClr val="13201A"/>
                           </a:solidFill>
@@ -10895,7 +12335,7 @@
                         </a:rPr>
                         <a:t>Month 7</a:t>
                       </a:r>
-                      <a:endParaRPr lang="en-US" sz="900" dirty="0">
+                      <a:endParaRPr lang="en-US" sz="850" dirty="0">
                         <a:latin typeface="Calibri" charset="0"/>
                         <a:ea typeface="Calibri" charset="0"/>
                         <a:cs typeface="Calibri" charset="0"/>
@@ -10950,7 +12390,7 @@
                         <a:buNone/>
                       </a:pPr>
                       <a:r>
-                        <a:rPr lang="en-US" sz="900" b="1" dirty="0">
+                        <a:rPr lang="en-US" sz="850" b="1" dirty="0">
                           <a:solidFill>
                             <a:srgbClr val="13201A"/>
                           </a:solidFill>
@@ -10960,7 +12400,7 @@
                         </a:rPr>
                         <a:t>Month 16</a:t>
                       </a:r>
-                      <a:endParaRPr lang="en-US" sz="900" dirty="0">
+                      <a:endParaRPr lang="en-US" sz="850" dirty="0">
                         <a:latin typeface="Calibri" charset="0"/>
                         <a:ea typeface="Calibri" charset="0"/>
                         <a:cs typeface="Calibri" charset="0"/>
@@ -11019,8 +12459,8 @@
         </p:nvSpPr>
         <p:spPr>
           <a:xfrm>
-            <a:off x="411480" y="3401568"/>
-            <a:ext cx="6766560" cy="475488"/>
+            <a:off x="411480" y="3346704"/>
+            <a:ext cx="5486400" cy="566928"/>
           </a:xfrm>
           <a:prstGeom prst="rect">
             <a:avLst/>
@@ -11034,12 +12474,12 @@
           <a:p>
             <a:pPr indent="0" marL="0">
               <a:lnSpc>
-                <a:spcPts val="1200"/>
+                <a:spcPts val="1150"/>
               </a:lnSpc>
               <a:buNone/>
             </a:pPr>
             <a:r>
-              <a:rPr lang="en-US" sz="950" b="1" dirty="0">
+              <a:rPr lang="en-US" sz="900" b="1" dirty="0">
                 <a:solidFill>
                   <a:srgbClr val="13201A"/>
                 </a:solidFill>
@@ -11051,12 +12491,12 @@
             </a:r>
             <a:pPr indent="0" marL="0">
               <a:lnSpc>
-                <a:spcPts val="1200"/>
+                <a:spcPts val="1150"/>
               </a:lnSpc>
               <a:buNone/>
             </a:pPr>
             <a:r>
-              <a:rPr lang="en-US" sz="950" dirty="0">
+              <a:rPr lang="en-US" sz="900" dirty="0">
                 <a:solidFill>
                   <a:srgbClr val="5F7269"/>
                 </a:solidFill>
@@ -11066,7 +12506,7 @@
               </a:rPr>
               <a:t>, against a 6.75% exit. A single-track plan at 5 units a month would take 27 months; running the 53 in place in parallel finishes in 16 without forcing a single resident out.</a:t>
             </a:r>
-            <a:endParaRPr lang="en-US" sz="950" dirty="0"/>
+            <a:endParaRPr lang="en-US" sz="900" dirty="0"/>
           </a:p>
         </p:txBody>
       </p:sp>
@@ -11078,7 +12518,7 @@
         </p:nvSpPr>
         <p:spPr>
           <a:xfrm>
-            <a:off x="7543800" y="813816"/>
+            <a:off x="411480" y="4014216"/>
             <a:ext cx="50292" cy="182880"/>
           </a:xfrm>
           <a:prstGeom prst="rect">
@@ -11098,1797 +12538,7 @@
         </p:nvSpPr>
         <p:spPr>
           <a:xfrm>
-            <a:off x="7671816" y="758952"/>
-            <a:ext cx="4105656" cy="237744"/>
-          </a:xfrm>
-          <a:prstGeom prst="rect">
-            <a:avLst/>
-          </a:prstGeom>
-          <a:noFill/>
-          <a:ln/>
-        </p:spPr>
-        <p:txBody>
-          <a:bodyPr wrap="square" lIns="0" tIns="0" rIns="0" bIns="0" rtlCol="0" anchor="ctr"/>
-          <a:lstStyle/>
-          <a:p>
-            <a:pPr indent="0" marL="0">
-              <a:buNone/>
-            </a:pPr>
-            <a:r>
-              <a:rPr lang="en-US" sz="1150" b="1" dirty="0">
-                <a:solidFill>
-                  <a:srgbClr val="13201A"/>
-                </a:solidFill>
-                <a:latin typeface="Cambria" pitchFamily="34" charset="0"/>
-                <a:ea typeface="Cambria" pitchFamily="34" charset="-122"/>
-                <a:cs typeface="Cambria" pitchFamily="34" charset="-120"/>
-              </a:rPr>
-              <a:t>Where the $2.90mm goes</a:t>
-            </a:r>
-            <a:endParaRPr lang="en-US" sz="1150" dirty="0"/>
-          </a:p>
-        </p:txBody>
-      </p:sp>
-      <p:graphicFrame>
-        <p:nvGraphicFramePr>
-          <p:cNvPr id="11" name="Chart 0" descr=""/>
-          <p:cNvGraphicFramePr/>
-          <p:nvPr/>
-        </p:nvGraphicFramePr>
-        <p:xfrm>
-          <a:off x="7406640" y="1133856"/>
-          <a:ext cx="4480560" cy="2377440"/>
-        </p:xfrm>
-        <a:graphic xmlns:a="http://schemas.openxmlformats.org/drawingml/2006/main">
-          <a:graphicData uri="http://schemas.openxmlformats.org/drawingml/2006/chart">
-            <c:chart xmlns:c="http://schemas.openxmlformats.org/drawingml/2006/chart" r:id="rId1"/>
-          </a:graphicData>
-        </a:graphic>
-      </p:graphicFrame>
-      <p:sp>
-        <p:nvSpPr>
-          <p:cNvPr id="12" name="Shape 8"/>
-          <p:cNvSpPr/>
-          <p:nvPr/>
-        </p:nvSpPr>
-        <p:spPr>
-          <a:xfrm>
-            <a:off x="411480" y="4050792"/>
-            <a:ext cx="50292" cy="182880"/>
-          </a:xfrm>
-          <a:prstGeom prst="rect">
-            <a:avLst/>
-          </a:prstGeom>
-          <a:solidFill>
-            <a:srgbClr val="2E9E76"/>
-          </a:solidFill>
-          <a:ln/>
-        </p:spPr>
-      </p:sp>
-      <p:sp>
-        <p:nvSpPr>
-          <p:cNvPr id="13" name="Text 9"/>
-          <p:cNvSpPr/>
-          <p:nvPr/>
-        </p:nvSpPr>
-        <p:spPr>
-          <a:xfrm>
-            <a:off x="539496" y="3995928"/>
-            <a:ext cx="5266944" cy="237744"/>
-          </a:xfrm>
-          <a:prstGeom prst="rect">
-            <a:avLst/>
-          </a:prstGeom>
-          <a:noFill/>
-          <a:ln/>
-        </p:spPr>
-        <p:txBody>
-          <a:bodyPr wrap="square" lIns="0" tIns="0" rIns="0" bIns="0" rtlCol="0" anchor="ctr"/>
-          <a:lstStyle/>
-          <a:p>
-            <a:pPr indent="0" marL="0">
-              <a:buNone/>
-            </a:pPr>
-            <a:r>
-              <a:rPr lang="en-US" sz="1150" b="1" dirty="0">
-                <a:solidFill>
-                  <a:srgbClr val="13201A"/>
-                </a:solidFill>
-                <a:latin typeface="Cambria" pitchFamily="34" charset="0"/>
-                <a:ea typeface="Cambria" pitchFamily="34" charset="-122"/>
-                <a:cs typeface="Cambria" pitchFamily="34" charset="-120"/>
-              </a:rPr>
-              <a:t>Levered cash-on-cash by year</a:t>
-            </a:r>
-            <a:endParaRPr lang="en-US" sz="1150" dirty="0"/>
-          </a:p>
-        </p:txBody>
-      </p:sp>
-      <p:sp>
-        <p:nvSpPr>
-          <p:cNvPr id="14" name="Text 10"/>
-          <p:cNvSpPr/>
-          <p:nvPr/>
-        </p:nvSpPr>
-        <p:spPr>
-          <a:xfrm>
-            <a:off x="539496" y="4206240"/>
-            <a:ext cx="5266944" cy="182880"/>
-          </a:xfrm>
-          <a:prstGeom prst="rect">
-            <a:avLst/>
-          </a:prstGeom>
-          <a:noFill/>
-          <a:ln/>
-        </p:spPr>
-        <p:txBody>
-          <a:bodyPr wrap="square" lIns="0" tIns="0" rIns="0" bIns="0" rtlCol="0" anchor="ctr"/>
-          <a:lstStyle/>
-          <a:p>
-            <a:pPr indent="0" marL="0">
-              <a:buNone/>
-            </a:pPr>
-            <a:r>
-              <a:rPr lang="en-US" sz="800" dirty="0">
-                <a:solidFill>
-                  <a:srgbClr val="5F7269"/>
-                </a:solidFill>
-                <a:latin typeface="Calibri" pitchFamily="34" charset="0"/>
-                <a:ea typeface="Calibri" pitchFamily="34" charset="-122"/>
-                <a:cs typeface="Calibri" pitchFamily="34" charset="-120"/>
-              </a:rPr>
-              <a:t>Interest-only debt · reserves $300/unit · at our $12.0mm bid</a:t>
-            </a:r>
-            <a:endParaRPr lang="en-US" sz="800" dirty="0"/>
-          </a:p>
-        </p:txBody>
-      </p:sp>
-      <p:graphicFrame>
-        <p:nvGraphicFramePr>
-          <p:cNvPr id="15" name="Chart 1" descr=""/>
-          <p:cNvGraphicFramePr/>
-          <p:nvPr/>
-        </p:nvGraphicFramePr>
-        <p:xfrm>
-          <a:off x="274320" y="4480560"/>
-          <a:ext cx="5532120" cy="1920240"/>
-        </p:xfrm>
-        <a:graphic xmlns:a="http://schemas.openxmlformats.org/drawingml/2006/main">
-          <a:graphicData uri="http://schemas.openxmlformats.org/drawingml/2006/chart">
-            <c:chart xmlns:c="http://schemas.openxmlformats.org/drawingml/2006/chart" r:id="rId2"/>
-          </a:graphicData>
-        </a:graphic>
-      </p:graphicFrame>
-      <p:sp>
-        <p:nvSpPr>
-          <p:cNvPr id="16" name="Text 11"/>
-          <p:cNvSpPr/>
-          <p:nvPr/>
-        </p:nvSpPr>
-        <p:spPr>
-          <a:xfrm>
-            <a:off x="411480" y="6382512"/>
-            <a:ext cx="5394960" cy="274320"/>
-          </a:xfrm>
-          <a:prstGeom prst="rect">
-            <a:avLst/>
-          </a:prstGeom>
-          <a:noFill/>
-          <a:ln/>
-        </p:spPr>
-        <p:txBody>
-          <a:bodyPr wrap="square" lIns="0" tIns="0" rIns="0" bIns="0" rtlCol="0" anchor="ctr"/>
-          <a:lstStyle/>
-          <a:p>
-            <a:pPr indent="0" marL="0">
-              <a:lnSpc>
-                <a:spcPts val="1050"/>
-              </a:lnSpc>
-              <a:buNone/>
-            </a:pPr>
-            <a:r>
-              <a:rPr lang="en-US" sz="850" i="1" dirty="0">
-                <a:solidFill>
-                  <a:srgbClr val="5F7269"/>
-                </a:solidFill>
-                <a:latin typeface="Calibri" pitchFamily="34" charset="0"/>
-                <a:ea typeface="Calibri" pitchFamily="34" charset="-122"/>
-                <a:cs typeface="Calibri" pitchFamily="34" charset="-120"/>
-              </a:rPr>
-              <a:t>Year 1 carries the renovation downtime and the ramp on ancillary income; the plan is stabilised from Year 2. Average 8.4%.</a:t>
-            </a:r>
-            <a:endParaRPr lang="en-US" sz="850" dirty="0"/>
-          </a:p>
-        </p:txBody>
-      </p:sp>
-      <p:sp>
-        <p:nvSpPr>
-          <p:cNvPr id="17" name="Shape 12"/>
-          <p:cNvSpPr/>
-          <p:nvPr/>
-        </p:nvSpPr>
-        <p:spPr>
-          <a:xfrm>
-            <a:off x="6263640" y="4050792"/>
-            <a:ext cx="50292" cy="182880"/>
-          </a:xfrm>
-          <a:prstGeom prst="rect">
-            <a:avLst/>
-          </a:prstGeom>
-          <a:solidFill>
-            <a:srgbClr val="2E9E76"/>
-          </a:solidFill>
-          <a:ln/>
-        </p:spPr>
-      </p:sp>
-      <p:sp>
-        <p:nvSpPr>
-          <p:cNvPr id="18" name="Text 13"/>
-          <p:cNvSpPr/>
-          <p:nvPr/>
-        </p:nvSpPr>
-        <p:spPr>
-          <a:xfrm>
-            <a:off x="6391656" y="3995928"/>
-            <a:ext cx="5385816" cy="237744"/>
-          </a:xfrm>
-          <a:prstGeom prst="rect">
-            <a:avLst/>
-          </a:prstGeom>
-          <a:noFill/>
-          <a:ln/>
-        </p:spPr>
-        <p:txBody>
-          <a:bodyPr wrap="square" lIns="0" tIns="0" rIns="0" bIns="0" rtlCol="0" anchor="ctr"/>
-          <a:lstStyle/>
-          <a:p>
-            <a:pPr indent="0" marL="0">
-              <a:buNone/>
-            </a:pPr>
-            <a:r>
-              <a:rPr lang="en-US" sz="1150" b="1" dirty="0">
-                <a:solidFill>
-                  <a:srgbClr val="13201A"/>
-                </a:solidFill>
-                <a:latin typeface="Cambria" pitchFamily="34" charset="0"/>
-                <a:ea typeface="Cambria" pitchFamily="34" charset="-122"/>
-                <a:cs typeface="Cambria" pitchFamily="34" charset="-120"/>
-              </a:rPr>
-              <a:t>Effective gross revenue build</a:t>
-            </a:r>
-            <a:endParaRPr lang="en-US" sz="1150" dirty="0"/>
-          </a:p>
-        </p:txBody>
-      </p:sp>
-      <p:sp>
-        <p:nvSpPr>
-          <p:cNvPr id="19" name="Text 14"/>
-          <p:cNvSpPr/>
-          <p:nvPr/>
-        </p:nvSpPr>
-        <p:spPr>
-          <a:xfrm>
-            <a:off x="6391656" y="4206240"/>
-            <a:ext cx="5385816" cy="182880"/>
-          </a:xfrm>
-          <a:prstGeom prst="rect">
-            <a:avLst/>
-          </a:prstGeom>
-          <a:noFill/>
-          <a:ln/>
-        </p:spPr>
-        <p:txBody>
-          <a:bodyPr wrap="square" lIns="0" tIns="0" rIns="0" bIns="0" rtlCol="0" anchor="ctr"/>
-          <a:lstStyle/>
-          <a:p>
-            <a:pPr indent="0" marL="0">
-              <a:buNone/>
-            </a:pPr>
-            <a:r>
-              <a:rPr lang="en-US" sz="800" dirty="0">
-                <a:solidFill>
-                  <a:srgbClr val="5F7269"/>
-                </a:solidFill>
-                <a:latin typeface="Calibri" pitchFamily="34" charset="0"/>
-                <a:ea typeface="Calibri" pitchFamily="34" charset="-122"/>
-                <a:cs typeface="Calibri" pitchFamily="34" charset="-120"/>
-              </a:rPr>
-              <a:t>$1.93mm in Year 1 → $2.39mm in Year 5</a:t>
-            </a:r>
-            <a:endParaRPr lang="en-US" sz="800" dirty="0"/>
-          </a:p>
-        </p:txBody>
-      </p:sp>
-      <p:graphicFrame>
-        <p:nvGraphicFramePr>
-          <p:cNvPr id="20" name="Chart 2" descr=""/>
-          <p:cNvGraphicFramePr/>
-          <p:nvPr/>
-        </p:nvGraphicFramePr>
-        <p:xfrm>
-          <a:off x="6126480" y="4480560"/>
-          <a:ext cx="5788152" cy="1920240"/>
-        </p:xfrm>
-        <a:graphic xmlns:a="http://schemas.openxmlformats.org/drawingml/2006/main">
-          <a:graphicData uri="http://schemas.openxmlformats.org/drawingml/2006/chart">
-            <c:chart xmlns:c="http://schemas.openxmlformats.org/drawingml/2006/chart" r:id="rId3"/>
-          </a:graphicData>
-        </a:graphic>
-      </p:graphicFrame>
-      <p:sp>
-        <p:nvSpPr>
-          <p:cNvPr id="21" name="Text 15"/>
-          <p:cNvSpPr/>
-          <p:nvPr/>
-        </p:nvSpPr>
-        <p:spPr>
-          <a:xfrm>
-            <a:off x="6263640" y="6382512"/>
-            <a:ext cx="5513832" cy="274320"/>
-          </a:xfrm>
-          <a:prstGeom prst="rect">
-            <a:avLst/>
-          </a:prstGeom>
-          <a:noFill/>
-          <a:ln/>
-        </p:spPr>
-        <p:txBody>
-          <a:bodyPr wrap="square" lIns="0" tIns="0" rIns="0" bIns="0" rtlCol="0" anchor="ctr"/>
-          <a:lstStyle/>
-          <a:p>
-            <a:pPr indent="0" marL="0">
-              <a:lnSpc>
-                <a:spcPts val="1050"/>
-              </a:lnSpc>
-              <a:buNone/>
-            </a:pPr>
-            <a:r>
-              <a:rPr lang="en-US" sz="850" i="1" dirty="0">
-                <a:solidFill>
-                  <a:srgbClr val="5F7269"/>
-                </a:solidFill>
-                <a:latin typeface="Calibri" pitchFamily="34" charset="0"/>
-                <a:ea typeface="Calibri" pitchFamily="34" charset="-122"/>
-                <a:cs typeface="Calibri" pitchFamily="34" charset="-120"/>
-              </a:rPr>
-              <a:t>Dark = net rental income after loss to lease, vacancy, concessions and bad debt.  Pale = other income — RUBS, technology fee, valet trash, new pet rent, carports and fees.</a:t>
-            </a:r>
-            <a:endParaRPr lang="en-US" sz="850" dirty="0"/>
-          </a:p>
-        </p:txBody>
-      </p:sp>
-    </p:spTree>
-  </p:cSld>
-  <p:clrMapOvr>
-    <a:masterClrMapping/>
-  </p:clrMapOvr>
-</p:sld>
-</file>
-
-<file path=ppt/slides/slide4.xml><?xml version="1.0" encoding="utf-8"?>
-<p:sld xmlns:a="http://schemas.openxmlformats.org/drawingml/2006/main" xmlns:r="http://schemas.openxmlformats.org/officeDocument/2006/relationships" xmlns:p="http://schemas.openxmlformats.org/presentationml/2006/main">
-  <p:cSld name="Slide 4">
-    <p:bg>
-      <p:bgPr>
-        <a:solidFill>
-          <a:srgbClr val="FFFFFF"/>
-        </a:solidFill>
-      </p:bgPr>
-    </p:bg>
-    <p:spTree>
-      <p:nvGrpSpPr>
-        <p:cNvPr id="1" name=""/>
-        <p:cNvGrpSpPr/>
-        <p:nvPr/>
-      </p:nvGrpSpPr>
-      <p:grpSpPr>
-        <a:xfrm>
-          <a:off x="0" y="0"/>
-          <a:ext cx="0" cy="0"/>
-          <a:chOff x="0" y="0"/>
-          <a:chExt cx="0" cy="0"/>
-        </a:xfrm>
-      </p:grpSpPr>
-      <p:sp>
-        <p:nvSpPr>
-          <p:cNvPr id="2" name="Shape 0"/>
-          <p:cNvSpPr/>
-          <p:nvPr/>
-        </p:nvSpPr>
-        <p:spPr>
-          <a:xfrm>
-            <a:off x="0" y="0"/>
-            <a:ext cx="12191695" cy="91440"/>
-          </a:xfrm>
-          <a:prstGeom prst="rect">
-            <a:avLst/>
-          </a:prstGeom>
-          <a:solidFill>
-            <a:srgbClr val="2E9E76"/>
-          </a:solidFill>
-          <a:ln/>
-        </p:spPr>
-      </p:sp>
-      <p:sp>
-        <p:nvSpPr>
-          <p:cNvPr id="3" name="Text 1"/>
-          <p:cNvSpPr/>
-          <p:nvPr/>
-        </p:nvSpPr>
-        <p:spPr>
-          <a:xfrm>
-            <a:off x="411480" y="219456"/>
-            <a:ext cx="8229600" cy="365760"/>
-          </a:xfrm>
-          <a:prstGeom prst="rect">
-            <a:avLst/>
-          </a:prstGeom>
-          <a:noFill/>
-          <a:ln/>
-        </p:spPr>
-        <p:txBody>
-          <a:bodyPr wrap="square" lIns="0" tIns="0" rIns="0" bIns="0" rtlCol="0" anchor="ctr"/>
-          <a:lstStyle/>
-          <a:p>
-            <a:pPr indent="0" marL="0">
-              <a:buNone/>
-            </a:pPr>
-            <a:r>
-              <a:rPr lang="en-US" sz="2200" b="1" dirty="0">
-                <a:solidFill>
-                  <a:srgbClr val="13201A"/>
-                </a:solidFill>
-                <a:latin typeface="Cambria" pitchFamily="34" charset="0"/>
-                <a:ea typeface="Cambria" pitchFamily="34" charset="-122"/>
-                <a:cs typeface="Cambria" pitchFamily="34" charset="-120"/>
-              </a:rPr>
-              <a:t>Appendix B  ·  Opportunities and risks</a:t>
-            </a:r>
-            <a:endParaRPr lang="en-US" sz="2200" dirty="0"/>
-          </a:p>
-        </p:txBody>
-      </p:sp>
-      <p:sp>
-        <p:nvSpPr>
-          <p:cNvPr id="4" name="Text 2"/>
-          <p:cNvSpPr/>
-          <p:nvPr/>
-        </p:nvSpPr>
-        <p:spPr>
-          <a:xfrm>
-            <a:off x="8229600" y="310896"/>
-            <a:ext cx="3547872" cy="237744"/>
-          </a:xfrm>
-          <a:prstGeom prst="rect">
-            <a:avLst/>
-          </a:prstGeom>
-          <a:noFill/>
-          <a:ln/>
-        </p:spPr>
-        <p:txBody>
-          <a:bodyPr wrap="square" lIns="0" tIns="0" rIns="0" bIns="0" rtlCol="0" anchor="ctr"/>
-          <a:lstStyle/>
-          <a:p>
-            <a:pPr algn="r" indent="0" marL="0">
-              <a:buNone/>
-            </a:pPr>
-            <a:r>
-              <a:rPr lang="en-US" sz="1000" dirty="0">
-                <a:solidFill>
-                  <a:srgbClr val="5F7269"/>
-                </a:solidFill>
-                <a:latin typeface="Calibri" pitchFamily="34" charset="0"/>
-                <a:ea typeface="Calibri" pitchFamily="34" charset="-122"/>
-                <a:cs typeface="Calibri" pitchFamily="34" charset="-120"/>
-              </a:rPr>
-              <a:t>Ranked by effect on levered IRR</a:t>
-            </a:r>
-            <a:endParaRPr lang="en-US" sz="1000" dirty="0"/>
-          </a:p>
-        </p:txBody>
-      </p:sp>
-      <p:sp>
-        <p:nvSpPr>
-          <p:cNvPr id="5" name="Shape 3"/>
-          <p:cNvSpPr/>
-          <p:nvPr/>
-        </p:nvSpPr>
-        <p:spPr>
-          <a:xfrm>
-            <a:off x="411480" y="749808"/>
-            <a:ext cx="5623560" cy="384048"/>
-          </a:xfrm>
-          <a:prstGeom prst="roundRect">
-            <a:avLst>
-              <a:gd name="adj" fmla="val 9524"/>
-            </a:avLst>
-          </a:prstGeom>
-          <a:solidFill>
-            <a:srgbClr val="1F7A5C"/>
-          </a:solidFill>
-          <a:ln/>
-        </p:spPr>
-      </p:sp>
-      <p:sp>
-        <p:nvSpPr>
-          <p:cNvPr id="6" name="Text 4"/>
-          <p:cNvSpPr/>
-          <p:nvPr/>
-        </p:nvSpPr>
-        <p:spPr>
-          <a:xfrm>
-            <a:off x="548640" y="749808"/>
-            <a:ext cx="5349240" cy="384048"/>
-          </a:xfrm>
-          <a:prstGeom prst="rect">
-            <a:avLst/>
-          </a:prstGeom>
-          <a:noFill/>
-          <a:ln/>
-        </p:spPr>
-        <p:txBody>
-          <a:bodyPr wrap="square" lIns="0" tIns="0" rIns="0" bIns="0" rtlCol="0" anchor="ctr"/>
-          <a:lstStyle/>
-          <a:p>
-            <a:pPr indent="0" marL="0">
-              <a:buNone/>
-            </a:pPr>
-            <a:r>
-              <a:rPr lang="en-US" sz="1300" b="1" dirty="0">
-                <a:solidFill>
-                  <a:srgbClr val="FFFFFF"/>
-                </a:solidFill>
-                <a:latin typeface="Cambria" pitchFamily="34" charset="0"/>
-                <a:ea typeface="Cambria" pitchFamily="34" charset="-122"/>
-                <a:cs typeface="Cambria" pitchFamily="34" charset="-120"/>
-              </a:rPr>
-              <a:t>  Key opportunities</a:t>
-            </a:r>
-            <a:endParaRPr lang="en-US" sz="1300" dirty="0"/>
-          </a:p>
-        </p:txBody>
-      </p:sp>
-      <p:sp>
-        <p:nvSpPr>
-          <p:cNvPr id="7" name="Text 5"/>
-          <p:cNvSpPr/>
-          <p:nvPr/>
-        </p:nvSpPr>
-        <p:spPr>
-          <a:xfrm>
-            <a:off x="548640" y="1243584"/>
-            <a:ext cx="5349240" cy="3566160"/>
-          </a:xfrm>
-          <a:prstGeom prst="rect">
-            <a:avLst/>
-          </a:prstGeom>
-          <a:noFill/>
-          <a:ln/>
-        </p:spPr>
-        <p:txBody>
-          <a:bodyPr wrap="square" lIns="0" tIns="0" rIns="0" bIns="0" rtlCol="0" anchor="t"/>
-          <a:lstStyle/>
-          <a:p>
-            <a:pPr indent="0" marL="0">
-              <a:lnSpc>
-                <a:spcPts val="1250"/>
-              </a:lnSpc>
-              <a:spcAft>
-                <a:spcPts val="900"/>
-              </a:spcAft>
-              <a:buNone/>
-            </a:pPr>
-            <a:r>
-              <a:rPr lang="en-US" sz="1000" b="1" dirty="0">
-                <a:solidFill>
-                  <a:srgbClr val="1F7A5C"/>
-                </a:solidFill>
-                <a:latin typeface="Calibri" pitchFamily="34" charset="0"/>
-                <a:ea typeface="Calibri" pitchFamily="34" charset="-122"/>
-                <a:cs typeface="Calibri" pitchFamily="34" charset="-120"/>
-              </a:rPr>
-              <a:t>Two-track renovation, 16 months.  </a:t>
-            </a:r>
-            <a:pPr indent="0" marL="0">
-              <a:lnSpc>
-                <a:spcPts val="1250"/>
-              </a:lnSpc>
-              <a:spcAft>
-                <a:spcPts val="900"/>
-              </a:spcAft>
-              <a:buNone/>
-            </a:pPr>
-            <a:r>
-              <a:rPr lang="en-US" sz="1000" dirty="0">
-                <a:solidFill>
-                  <a:srgbClr val="3A4A42"/>
-                </a:solidFill>
-                <a:latin typeface="Calibri" pitchFamily="34" charset="0"/>
-                <a:ea typeface="Calibri" pitchFamily="34" charset="-122"/>
-                <a:cs typeface="Calibri" pitchFamily="34" charset="-120"/>
-              </a:rPr>
-              <a:t>The 53 units with laundry go in place at 10 a month from month 2 — no permit, no vacancy loss. The 65 needing laundry follow natural turnover. All 118 complete in month 16 without displacing a resident.</a:t>
-            </a:r>
-            <a:endParaRPr lang="en-US" sz="1000" dirty="0"/>
-          </a:p>
-          <a:p>
-            <a:pPr indent="0" marL="0">
-              <a:lnSpc>
-                <a:spcPts val="1250"/>
-              </a:lnSpc>
-              <a:spcAft>
-                <a:spcPts val="900"/>
-              </a:spcAft>
-              <a:buNone/>
-            </a:pPr>
-            <a:r>
-              <a:rPr lang="en-US" sz="1000" b="1" dirty="0">
-                <a:solidFill>
-                  <a:srgbClr val="1F7A5C"/>
-                </a:solidFill>
-                <a:latin typeface="Calibri" pitchFamily="34" charset="0"/>
-                <a:ea typeface="Calibri" pitchFamily="34" charset="-122"/>
-                <a:cs typeface="Calibri" pitchFamily="34" charset="-120"/>
-              </a:rPr>
-              <a:t>In-unit laundry, all 118 units.  </a:t>
-            </a:r>
-            <a:pPr indent="0" marL="0">
-              <a:lnSpc>
-                <a:spcPts val="1250"/>
-              </a:lnSpc>
-              <a:spcAft>
-                <a:spcPts val="900"/>
-              </a:spcAft>
-              <a:buNone/>
-            </a:pPr>
-            <a:r>
-              <a:rPr lang="en-US" sz="1000" dirty="0">
-                <a:solidFill>
-                  <a:srgbClr val="3A4A42"/>
-                </a:solidFill>
-                <a:latin typeface="Calibri" pitchFamily="34" charset="0"/>
-                <a:ea typeface="Calibri" pitchFamily="34" charset="-122"/>
-                <a:cs typeface="Calibri" pitchFamily="34" charset="-120"/>
-              </a:rPr>
-              <a:t>65 units lack it. At the case's $5,000 per unit it is the highest-return item in the plan. The rent roll shows 53 units with machines, not the OM's 78.</a:t>
-            </a:r>
-            <a:endParaRPr lang="en-US" sz="1000" dirty="0"/>
-          </a:p>
-          <a:p>
-            <a:pPr indent="0" marL="0">
-              <a:lnSpc>
-                <a:spcPts val="1250"/>
-              </a:lnSpc>
-              <a:spcAft>
-                <a:spcPts val="900"/>
-              </a:spcAft>
-              <a:buNone/>
-            </a:pPr>
-            <a:r>
-              <a:rPr lang="en-US" sz="1000" b="1" dirty="0">
-                <a:solidFill>
-                  <a:srgbClr val="1F7A5C"/>
-                </a:solidFill>
-                <a:latin typeface="Calibri" pitchFamily="34" charset="0"/>
-                <a:ea typeface="Calibri" pitchFamily="34" charset="-122"/>
-                <a:cs typeface="Calibri" pitchFamily="34" charset="-120"/>
-              </a:rPr>
-              <a:t>12.9% return on renovation cost.  </a:t>
-            </a:r>
-            <a:pPr indent="0" marL="0">
-              <a:lnSpc>
-                <a:spcPts val="1250"/>
-              </a:lnSpc>
-              <a:spcAft>
-                <a:spcPts val="900"/>
-              </a:spcAft>
-              <a:buNone/>
-            </a:pPr>
-            <a:r>
-              <a:rPr lang="en-US" sz="1000" dirty="0">
-                <a:solidFill>
-                  <a:srgbClr val="3A4A42"/>
-                </a:solidFill>
-                <a:latin typeface="Calibri" pitchFamily="34" charset="0"/>
-                <a:ea typeface="Calibri" pitchFamily="34" charset="-122"/>
-                <a:cs typeface="Calibri" pitchFamily="34" charset="-120"/>
-              </a:rPr>
-              <a:t>$14,407 per unit for a $155 monthly premium against a 6.75% exit; Year-5 yield on cost of 7.86% sits 111 bps above it.</a:t>
-            </a:r>
-            <a:endParaRPr lang="en-US" sz="1000" dirty="0"/>
-          </a:p>
-          <a:p>
-            <a:pPr indent="0" marL="0">
-              <a:lnSpc>
-                <a:spcPts val="1250"/>
-              </a:lnSpc>
-              <a:spcAft>
-                <a:spcPts val="900"/>
-              </a:spcAft>
-              <a:buNone/>
-            </a:pPr>
-            <a:r>
-              <a:rPr lang="en-US" sz="1000" b="1" dirty="0">
-                <a:solidFill>
-                  <a:srgbClr val="1F7A5C"/>
-                </a:solidFill>
-                <a:latin typeface="Calibri" pitchFamily="34" charset="0"/>
-                <a:ea typeface="Calibri" pitchFamily="34" charset="-122"/>
-                <a:cs typeface="Calibri" pitchFamily="34" charset="-120"/>
-              </a:rPr>
-              <a:t>Taxes are lower than they look.  </a:t>
-            </a:r>
-            <a:pPr indent="0" marL="0">
-              <a:lnSpc>
-                <a:spcPts val="1250"/>
-              </a:lnSpc>
-              <a:spcAft>
-                <a:spcPts val="900"/>
-              </a:spcAft>
-              <a:buNone/>
-            </a:pPr>
-            <a:r>
-              <a:rPr lang="en-US" sz="1000" dirty="0">
-                <a:solidFill>
-                  <a:srgbClr val="3A4A42"/>
-                </a:solidFill>
-                <a:latin typeface="Calibri" pitchFamily="34" charset="0"/>
-                <a:ea typeface="Calibri" pitchFamily="34" charset="-122"/>
-                <a:cs typeface="Calibri" pitchFamily="34" charset="-120"/>
-              </a:rPr>
-              <a:t>Marion County parcel 8000002 paid $129,648 in 2025. Assessed value has been range-bound $5.1–6.6mm since 2012 and last changed March 2022; the 2006 sale did not reset it. Today's AV is 41% of the 2026 trade price.</a:t>
-            </a:r>
-            <a:endParaRPr lang="en-US" sz="1000" dirty="0"/>
-          </a:p>
-          <a:p>
-            <a:pPr indent="0" marL="0">
-              <a:lnSpc>
-                <a:spcPts val="1250"/>
-              </a:lnSpc>
-              <a:spcAft>
-                <a:spcPts val="900"/>
-              </a:spcAft>
-              <a:buNone/>
-            </a:pPr>
-            <a:r>
-              <a:rPr lang="en-US" sz="1000" b="1" dirty="0">
-                <a:solidFill>
-                  <a:srgbClr val="1F7A5C"/>
-                </a:solidFill>
-                <a:latin typeface="Calibri" pitchFamily="34" charset="0"/>
-                <a:ea typeface="Calibri" pitchFamily="34" charset="-122"/>
-                <a:cs typeface="Calibri" pitchFamily="34" charset="-120"/>
-              </a:rPr>
-              <a:t>Under-collected ancillary income.  </a:t>
-            </a:r>
-            <a:pPr indent="0" marL="0">
-              <a:lnSpc>
-                <a:spcPts val="1250"/>
-              </a:lnSpc>
-              <a:spcAft>
-                <a:spcPts val="900"/>
-              </a:spcAft>
-              <a:buNone/>
-            </a:pPr>
-            <a:r>
-              <a:rPr lang="en-US" sz="1000" dirty="0">
-                <a:solidFill>
-                  <a:srgbClr val="3A4A42"/>
-                </a:solidFill>
-                <a:latin typeface="Calibri" pitchFamily="34" charset="0"/>
-                <a:ea typeface="Calibri" pitchFamily="34" charset="-122"/>
-                <a:cs typeface="Calibri" pitchFamily="34" charset="-120"/>
-              </a:rPr>
-              <a:t>The $49 technology fee is roughly 60% penetrated, the $25 valet trash charge is not billed although the property starts paying for it in Jan-26, and there is no pet rent — about $110K a year of run-rate.</a:t>
-            </a:r>
-            <a:endParaRPr lang="en-US" sz="1000" dirty="0"/>
-          </a:p>
-          <a:p>
-            <a:pPr indent="0" marL="0">
-              <a:lnSpc>
-                <a:spcPts val="1250"/>
-              </a:lnSpc>
-              <a:spcAft>
-                <a:spcPts val="900"/>
-              </a:spcAft>
-              <a:buNone/>
-            </a:pPr>
-            <a:r>
-              <a:rPr lang="en-US" sz="1000" b="1" dirty="0">
-                <a:solidFill>
-                  <a:srgbClr val="1F7A5C"/>
-                </a:solidFill>
-                <a:latin typeface="Calibri" pitchFamily="34" charset="0"/>
-                <a:ea typeface="Calibri" pitchFamily="34" charset="-122"/>
-                <a:cs typeface="Calibri" pitchFamily="34" charset="-120"/>
-              </a:rPr>
-              <a:t>Operational slack.  </a:t>
-            </a:r>
-            <a:pPr indent="0" marL="0">
-              <a:lnSpc>
-                <a:spcPts val="1250"/>
-              </a:lnSpc>
-              <a:spcAft>
-                <a:spcPts val="900"/>
-              </a:spcAft>
-              <a:buNone/>
-            </a:pPr>
-            <a:r>
-              <a:rPr lang="en-US" sz="1000" dirty="0">
-                <a:solidFill>
-                  <a:srgbClr val="3A4A42"/>
-                </a:solidFill>
-                <a:latin typeface="Calibri" pitchFamily="34" charset="0"/>
-                <a:ea typeface="Calibri" pitchFamily="34" charset="-122"/>
-                <a:cs typeface="Calibri" pitchFamily="34" charset="-120"/>
-              </a:rPr>
-              <a:t>2.2% loss to lease and 6.8% trailing physical vacancy against a 5.5% stabilised target.</a:t>
-            </a:r>
-            <a:endParaRPr lang="en-US" sz="1000" dirty="0"/>
-          </a:p>
-        </p:txBody>
-      </p:sp>
-      <p:sp>
-        <p:nvSpPr>
-          <p:cNvPr id="8" name="Shape 6"/>
-          <p:cNvSpPr/>
-          <p:nvPr/>
-        </p:nvSpPr>
-        <p:spPr>
-          <a:xfrm>
-            <a:off x="6309360" y="749808"/>
-            <a:ext cx="5623560" cy="384048"/>
-          </a:xfrm>
-          <a:prstGeom prst="roundRect">
-            <a:avLst>
-              <a:gd name="adj" fmla="val 9524"/>
-            </a:avLst>
-          </a:prstGeom>
-          <a:solidFill>
-            <a:srgbClr val="9E2B25"/>
-          </a:solidFill>
-          <a:ln/>
-        </p:spPr>
-      </p:sp>
-      <p:sp>
-        <p:nvSpPr>
-          <p:cNvPr id="9" name="Text 7"/>
-          <p:cNvSpPr/>
-          <p:nvPr/>
-        </p:nvSpPr>
-        <p:spPr>
-          <a:xfrm>
-            <a:off x="6446520" y="749808"/>
-            <a:ext cx="5349240" cy="384048"/>
-          </a:xfrm>
-          <a:prstGeom prst="rect">
-            <a:avLst/>
-          </a:prstGeom>
-          <a:noFill/>
-          <a:ln/>
-        </p:spPr>
-        <p:txBody>
-          <a:bodyPr wrap="square" lIns="0" tIns="0" rIns="0" bIns="0" rtlCol="0" anchor="ctr"/>
-          <a:lstStyle/>
-          <a:p>
-            <a:pPr indent="0" marL="0">
-              <a:buNone/>
-            </a:pPr>
-            <a:r>
-              <a:rPr lang="en-US" sz="1300" b="1" dirty="0">
-                <a:solidFill>
-                  <a:srgbClr val="FFFFFF"/>
-                </a:solidFill>
-                <a:latin typeface="Cambria" pitchFamily="34" charset="0"/>
-                <a:ea typeface="Cambria" pitchFamily="34" charset="-122"/>
-                <a:cs typeface="Cambria" pitchFamily="34" charset="-120"/>
-              </a:rPr>
-              <a:t>  Key risks</a:t>
-            </a:r>
-            <a:endParaRPr lang="en-US" sz="1300" dirty="0"/>
-          </a:p>
-        </p:txBody>
-      </p:sp>
-      <p:sp>
-        <p:nvSpPr>
-          <p:cNvPr id="10" name="Text 8"/>
-          <p:cNvSpPr/>
-          <p:nvPr/>
-        </p:nvSpPr>
-        <p:spPr>
-          <a:xfrm>
-            <a:off x="6446520" y="1243584"/>
-            <a:ext cx="5349240" cy="3566160"/>
-          </a:xfrm>
-          <a:prstGeom prst="rect">
-            <a:avLst/>
-          </a:prstGeom>
-          <a:noFill/>
-          <a:ln/>
-        </p:spPr>
-        <p:txBody>
-          <a:bodyPr wrap="square" lIns="0" tIns="0" rIns="0" bIns="0" rtlCol="0" anchor="t"/>
-          <a:lstStyle/>
-          <a:p>
-            <a:pPr indent="0" marL="0">
-              <a:lnSpc>
-                <a:spcPts val="1250"/>
-              </a:lnSpc>
-              <a:spcAft>
-                <a:spcPts val="900"/>
-              </a:spcAft>
-              <a:buNone/>
-            </a:pPr>
-            <a:r>
-              <a:rPr lang="en-US" sz="1000" b="1" dirty="0">
-                <a:solidFill>
-                  <a:srgbClr val="9E2B25"/>
-                </a:solidFill>
-                <a:latin typeface="Calibri" pitchFamily="34" charset="0"/>
-                <a:ea typeface="Calibri" pitchFamily="34" charset="-122"/>
-                <a:cs typeface="Calibri" pitchFamily="34" charset="-120"/>
-              </a:rPr>
-              <a:t>Rent growth. The dominant variable.  </a:t>
-            </a:r>
-            <a:pPr indent="0" marL="0">
-              <a:lnSpc>
-                <a:spcPts val="1250"/>
-              </a:lnSpc>
-              <a:spcAft>
-                <a:spcPts val="900"/>
-              </a:spcAft>
-              <a:buNone/>
-            </a:pPr>
-            <a:r>
-              <a:rPr lang="en-US" sz="1000" dirty="0">
-                <a:solidFill>
-                  <a:srgbClr val="3A4A42"/>
-                </a:solidFill>
-                <a:latin typeface="Calibri" pitchFamily="34" charset="0"/>
-                <a:ea typeface="Calibri" pitchFamily="34" charset="-122"/>
-                <a:cs typeface="Calibri" pitchFamily="34" charset="-120"/>
-              </a:rPr>
-              <a:t>Metro rents flat on a trailing-three-month basis and +1.1% year over year in 1Q-26, with 2025 starts more than doubled — delivering 2027-28, inside our hold, and Carmel taking over half of 2026 deliveries just north of us. At a flat 1.0% the deal returns 7.1%; at 3.0%, 16.7%.</a:t>
-            </a:r>
-            <a:endParaRPr lang="en-US" sz="1000" dirty="0"/>
-          </a:p>
-          <a:p>
-            <a:pPr indent="0" marL="0">
-              <a:lnSpc>
-                <a:spcPts val="1250"/>
-              </a:lnSpc>
-              <a:spcAft>
-                <a:spcPts val="900"/>
-              </a:spcAft>
-              <a:buNone/>
-            </a:pPr>
-            <a:r>
-              <a:rPr lang="en-US" sz="1000" b="1" dirty="0">
-                <a:solidFill>
-                  <a:srgbClr val="9E2B25"/>
-                </a:solidFill>
-                <a:latin typeface="Calibri" pitchFamily="34" charset="0"/>
-                <a:ea typeface="Calibri" pitchFamily="34" charset="-122"/>
-                <a:cs typeface="Calibri" pitchFamily="34" charset="-120"/>
-              </a:rPr>
-              <a:t>Basis. We were outbid by 12%.  </a:t>
-            </a:r>
-            <a:pPr indent="0" marL="0">
-              <a:lnSpc>
-                <a:spcPts val="1250"/>
-              </a:lnSpc>
-              <a:spcAft>
-                <a:spcPts val="900"/>
-              </a:spcAft>
-              <a:buNone/>
-            </a:pPr>
-            <a:r>
-              <a:rPr lang="en-US" sz="1000" dirty="0">
-                <a:solidFill>
-                  <a:srgbClr val="3A4A42"/>
-                </a:solidFill>
-                <a:latin typeface="Calibri" pitchFamily="34" charset="0"/>
-                <a:ea typeface="Calibri" pitchFamily="34" charset="-122"/>
-                <a:cs typeface="Calibri" pitchFamily="34" charset="-120"/>
-              </a:rPr>
-              <a:t>It traded at $13,625,000. At that price the same plan returns 7.9% and 1.42x, and the yield-on-cost spread over the exit collapses from 111 bps to 34 bps.</a:t>
-            </a:r>
-            <a:endParaRPr lang="en-US" sz="1000" dirty="0"/>
-          </a:p>
-          <a:p>
-            <a:pPr indent="0" marL="0">
-              <a:lnSpc>
-                <a:spcPts val="1250"/>
-              </a:lnSpc>
-              <a:spcAft>
-                <a:spcPts val="900"/>
-              </a:spcAft>
-              <a:buNone/>
-            </a:pPr>
-            <a:r>
-              <a:rPr lang="en-US" sz="1000" b="1" dirty="0">
-                <a:solidFill>
-                  <a:srgbClr val="9E2B25"/>
-                </a:solidFill>
-                <a:latin typeface="Calibri" pitchFamily="34" charset="0"/>
-                <a:ea typeface="Calibri" pitchFamily="34" charset="-122"/>
-                <a:cs typeface="Calibri" pitchFamily="34" charset="-120"/>
-              </a:rPr>
-              <a:t>Tax reassessment.  </a:t>
-            </a:r>
-            <a:pPr indent="0" marL="0">
-              <a:lnSpc>
-                <a:spcPts val="1250"/>
-              </a:lnSpc>
-              <a:spcAft>
-                <a:spcPts val="900"/>
-              </a:spcAft>
-              <a:buNone/>
-            </a:pPr>
-            <a:r>
-              <a:rPr lang="en-US" sz="1000" dirty="0">
-                <a:solidFill>
-                  <a:srgbClr val="3A4A42"/>
-                </a:solidFill>
-                <a:latin typeface="Calibri" pitchFamily="34" charset="0"/>
-                <a:ea typeface="Calibri" pitchFamily="34" charset="-122"/>
-                <a:cs typeface="Calibri" pitchFamily="34" charset="-120"/>
-              </a:rPr>
-              <a:t>Base case grows the actual bill 4% a year. If assessed value reset to 69% of the trade price the Year-5 bill is $238,700 and the IRR falls to 10.3%. The record says it will not, but Ladder C prices it.</a:t>
-            </a:r>
-            <a:endParaRPr lang="en-US" sz="1000" dirty="0"/>
-          </a:p>
-          <a:p>
-            <a:pPr indent="0" marL="0">
-              <a:lnSpc>
-                <a:spcPts val="1250"/>
-              </a:lnSpc>
-              <a:spcAft>
-                <a:spcPts val="900"/>
-              </a:spcAft>
-              <a:buNone/>
-            </a:pPr>
-            <a:r>
-              <a:rPr lang="en-US" sz="1000" b="1" dirty="0">
-                <a:solidFill>
-                  <a:srgbClr val="9E2B25"/>
-                </a:solidFill>
-                <a:latin typeface="Calibri" pitchFamily="34" charset="0"/>
-                <a:ea typeface="Calibri" pitchFamily="34" charset="-122"/>
-                <a:cs typeface="Calibri" pitchFamily="34" charset="-120"/>
-              </a:rPr>
-              <a:t>Unproven rent premium.  </a:t>
-            </a:r>
-            <a:pPr indent="0" marL="0">
-              <a:lnSpc>
-                <a:spcPts val="1250"/>
-              </a:lnSpc>
-              <a:spcAft>
-                <a:spcPts val="900"/>
-              </a:spcAft>
-              <a:buNone/>
-            </a:pPr>
-            <a:r>
-              <a:rPr lang="en-US" sz="1000" dirty="0">
-                <a:solidFill>
-                  <a:srgbClr val="3A4A42"/>
-                </a:solidFill>
-                <a:latin typeface="Calibri" pitchFamily="34" charset="0"/>
-                <a:ea typeface="Calibri" pitchFamily="34" charset="-122"/>
-                <a:cs typeface="Calibri" pitchFamily="34" charset="-120"/>
-              </a:rPr>
-              <a:t>Nothing has been renovated to a current standard. At $125 rather than $155 the IRR is 12.0%; at $190 it is 16.2%. A leased mock-up before we go hard would settle it.</a:t>
-            </a:r>
-            <a:endParaRPr lang="en-US" sz="1000" dirty="0"/>
-          </a:p>
-          <a:p>
-            <a:pPr indent="0" marL="0">
-              <a:lnSpc>
-                <a:spcPts val="1250"/>
-              </a:lnSpc>
-              <a:spcAft>
-                <a:spcPts val="900"/>
-              </a:spcAft>
-              <a:buNone/>
-            </a:pPr>
-            <a:r>
-              <a:rPr lang="en-US" sz="1000" b="1" dirty="0">
-                <a:solidFill>
-                  <a:srgbClr val="9E2B25"/>
-                </a:solidFill>
-                <a:latin typeface="Calibri" pitchFamily="34" charset="0"/>
-                <a:ea typeface="Calibri" pitchFamily="34" charset="-122"/>
-                <a:cs typeface="Calibri" pitchFamily="34" charset="-120"/>
-              </a:rPr>
-              <a:t>1974 physical risk.  </a:t>
-            </a:r>
-            <a:pPr indent="0" marL="0">
-              <a:lnSpc>
-                <a:spcPts val="1250"/>
-              </a:lnSpc>
-              <a:spcAft>
-                <a:spcPts val="900"/>
-              </a:spcAft>
-              <a:buNone/>
-            </a:pPr>
-            <a:r>
-              <a:rPr lang="en-US" sz="1000" dirty="0">
-                <a:solidFill>
-                  <a:srgbClr val="3A4A42"/>
-                </a:solidFill>
-                <a:latin typeface="Calibri" pitchFamily="34" charset="0"/>
-                <a:ea typeface="Calibri" pitchFamily="34" charset="-122"/>
-                <a:cs typeface="Calibri" pitchFamily="34" charset="-120"/>
-              </a:rPr>
-              <a:t>3.5 of 5 original rubber roofs, 37 below-grade units needing drains and sump pumps, original sliders, central gas water heaters. Plus 4 evictions and 8 notices on the rent roll.</a:t>
-            </a:r>
-            <a:endParaRPr lang="en-US" sz="1000" dirty="0"/>
-          </a:p>
-        </p:txBody>
-      </p:sp>
-      <p:sp>
-        <p:nvSpPr>
-          <p:cNvPr id="11" name="Shape 9"/>
-          <p:cNvSpPr/>
-          <p:nvPr/>
-        </p:nvSpPr>
-        <p:spPr>
-          <a:xfrm>
-            <a:off x="411480" y="4864608"/>
-            <a:ext cx="11365992" cy="1691640"/>
-          </a:xfrm>
-          <a:prstGeom prst="roundRect">
-            <a:avLst>
-              <a:gd name="adj" fmla="val 2703"/>
-            </a:avLst>
-          </a:prstGeom>
-          <a:solidFill>
-            <a:srgbClr val="EAF3EE"/>
-          </a:solidFill>
-          <a:ln/>
-        </p:spPr>
-      </p:sp>
-      <p:sp>
-        <p:nvSpPr>
-          <p:cNvPr id="12" name="Text 10"/>
-          <p:cNvSpPr/>
-          <p:nvPr/>
-        </p:nvSpPr>
-        <p:spPr>
-          <a:xfrm>
-            <a:off x="685800" y="5010912"/>
-            <a:ext cx="5486400" cy="219456"/>
-          </a:xfrm>
-          <a:prstGeom prst="rect">
-            <a:avLst/>
-          </a:prstGeom>
-          <a:noFill/>
-          <a:ln/>
-        </p:spPr>
-        <p:txBody>
-          <a:bodyPr wrap="square" lIns="0" tIns="0" rIns="0" bIns="0" rtlCol="0" anchor="ctr"/>
-          <a:lstStyle/>
-          <a:p>
-            <a:pPr indent="0" marL="0">
-              <a:buNone/>
-            </a:pPr>
-            <a:r>
-              <a:rPr lang="en-US" sz="950" b="1" dirty="0">
-                <a:solidFill>
-                  <a:srgbClr val="1F7A5C"/>
-                </a:solidFill>
-                <a:latin typeface="Calibri" pitchFamily="34" charset="0"/>
-                <a:ea typeface="Calibri" pitchFamily="34" charset="-122"/>
-                <a:cs typeface="Calibri" pitchFamily="34" charset="-120"/>
-              </a:rPr>
-              <a:t>WHAT WE WOULD RESOLVE BEFORE GOING HARD</a:t>
-            </a:r>
-            <a:endParaRPr lang="en-US" sz="950" dirty="0"/>
-          </a:p>
-        </p:txBody>
-      </p:sp>
-      <p:sp>
-        <p:nvSpPr>
-          <p:cNvPr id="13" name="Text 11"/>
-          <p:cNvSpPr/>
-          <p:nvPr/>
-        </p:nvSpPr>
-        <p:spPr>
-          <a:xfrm>
-            <a:off x="6217920" y="5010912"/>
-            <a:ext cx="5285232" cy="219456"/>
-          </a:xfrm>
-          <a:prstGeom prst="rect">
-            <a:avLst/>
-          </a:prstGeom>
-          <a:noFill/>
-          <a:ln/>
-        </p:spPr>
-        <p:txBody>
-          <a:bodyPr wrap="square" lIns="0" tIns="0" rIns="0" bIns="0" rtlCol="0" anchor="ctr"/>
-          <a:lstStyle/>
-          <a:p>
-            <a:pPr algn="r" indent="0" marL="0">
-              <a:buNone/>
-            </a:pPr>
-            <a:r>
-              <a:rPr lang="en-US" sz="850" i="1" dirty="0">
-                <a:solidFill>
-                  <a:srgbClr val="5F7269"/>
-                </a:solidFill>
-                <a:latin typeface="Calibri" pitchFamily="34" charset="0"/>
-                <a:ea typeface="Calibri" pitchFamily="34" charset="-122"/>
-                <a:cs typeface="Calibri" pitchFamily="34" charset="-120"/>
-              </a:rPr>
-              <a:t>Each item below is a live question in the 62-question diligence list; each has a priced consequence in the model.</a:t>
-            </a:r>
-            <a:endParaRPr lang="en-US" sz="850" dirty="0"/>
-          </a:p>
-        </p:txBody>
-      </p:sp>
-      <p:sp>
-        <p:nvSpPr>
-          <p:cNvPr id="14" name="Shape 12"/>
-          <p:cNvSpPr/>
-          <p:nvPr/>
-        </p:nvSpPr>
-        <p:spPr>
-          <a:xfrm>
-            <a:off x="685800" y="5358384"/>
-            <a:ext cx="2487168" cy="32004"/>
-          </a:xfrm>
-          <a:prstGeom prst="rect">
-            <a:avLst/>
-          </a:prstGeom>
-          <a:solidFill>
-            <a:srgbClr val="2E9E76"/>
-          </a:solidFill>
-          <a:ln/>
-        </p:spPr>
-      </p:sp>
-      <p:sp>
-        <p:nvSpPr>
-          <p:cNvPr id="15" name="Text 13"/>
-          <p:cNvSpPr/>
-          <p:nvPr/>
-        </p:nvSpPr>
-        <p:spPr>
-          <a:xfrm>
-            <a:off x="685800" y="5431536"/>
-            <a:ext cx="2542032" cy="219456"/>
-          </a:xfrm>
-          <a:prstGeom prst="rect">
-            <a:avLst/>
-          </a:prstGeom>
-          <a:noFill/>
-          <a:ln/>
-        </p:spPr>
-        <p:txBody>
-          <a:bodyPr wrap="square" lIns="0" tIns="0" rIns="0" bIns="0" rtlCol="0" anchor="ctr"/>
-          <a:lstStyle/>
-          <a:p>
-            <a:pPr indent="0" marL="0">
-              <a:buNone/>
-            </a:pPr>
-            <a:r>
-              <a:rPr lang="en-US" sz="950" b="1" dirty="0">
-                <a:solidFill>
-                  <a:srgbClr val="13201A"/>
-                </a:solidFill>
-                <a:latin typeface="Calibri" pitchFamily="34" charset="0"/>
-                <a:ea typeface="Calibri" pitchFamily="34" charset="-122"/>
-                <a:cs typeface="Calibri" pitchFamily="34" charset="-120"/>
-              </a:rPr>
-              <a:t>Lease a renovated mock-up</a:t>
-            </a:r>
-            <a:endParaRPr lang="en-US" sz="950" dirty="0"/>
-          </a:p>
-        </p:txBody>
-      </p:sp>
-      <p:sp>
-        <p:nvSpPr>
-          <p:cNvPr id="16" name="Text 14"/>
-          <p:cNvSpPr/>
-          <p:nvPr/>
-        </p:nvSpPr>
-        <p:spPr>
-          <a:xfrm>
-            <a:off x="685800" y="5669280"/>
-            <a:ext cx="2542032" cy="777240"/>
-          </a:xfrm>
-          <a:prstGeom prst="rect">
-            <a:avLst/>
-          </a:prstGeom>
-          <a:noFill/>
-          <a:ln/>
-        </p:spPr>
-        <p:txBody>
-          <a:bodyPr wrap="square" lIns="0" tIns="0" rIns="0" bIns="0" rtlCol="0" anchor="t"/>
-          <a:lstStyle/>
-          <a:p>
-            <a:pPr indent="0" marL="0">
-              <a:lnSpc>
-                <a:spcPts val="1050"/>
-              </a:lnSpc>
-              <a:buNone/>
-            </a:pPr>
-            <a:r>
-              <a:rPr lang="en-US" sz="850" dirty="0">
-                <a:solidFill>
-                  <a:srgbClr val="3A4A42"/>
-                </a:solidFill>
-                <a:latin typeface="Calibri" pitchFamily="34" charset="0"/>
-                <a:ea typeface="Calibri" pitchFamily="34" charset="-122"/>
-                <a:cs typeface="Calibri" pitchFamily="34" charset="-120"/>
-              </a:rPr>
-              <a:t>The $155 premium is the second-biggest driver and the only one still unproven. A signed lease moves the bid by roughly $600K.</a:t>
-            </a:r>
-            <a:endParaRPr lang="en-US" sz="850" dirty="0"/>
-          </a:p>
-        </p:txBody>
-      </p:sp>
-      <p:sp>
-        <p:nvSpPr>
-          <p:cNvPr id="17" name="Shape 15"/>
-          <p:cNvSpPr/>
-          <p:nvPr/>
-        </p:nvSpPr>
-        <p:spPr>
-          <a:xfrm>
-            <a:off x="3511296" y="5358384"/>
-            <a:ext cx="2487168" cy="32004"/>
-          </a:xfrm>
-          <a:prstGeom prst="rect">
-            <a:avLst/>
-          </a:prstGeom>
-          <a:solidFill>
-            <a:srgbClr val="2E9E76"/>
-          </a:solidFill>
-          <a:ln/>
-        </p:spPr>
-      </p:sp>
-      <p:sp>
-        <p:nvSpPr>
-          <p:cNvPr id="18" name="Text 16"/>
-          <p:cNvSpPr/>
-          <p:nvPr/>
-        </p:nvSpPr>
-        <p:spPr>
-          <a:xfrm>
-            <a:off x="3511296" y="5431536"/>
-            <a:ext cx="2542032" cy="219456"/>
-          </a:xfrm>
-          <a:prstGeom prst="rect">
-            <a:avLst/>
-          </a:prstGeom>
-          <a:noFill/>
-          <a:ln/>
-        </p:spPr>
-        <p:txBody>
-          <a:bodyPr wrap="square" lIns="0" tIns="0" rIns="0" bIns="0" rtlCol="0" anchor="ctr"/>
-          <a:lstStyle/>
-          <a:p>
-            <a:pPr indent="0" marL="0">
-              <a:buNone/>
-            </a:pPr>
-            <a:r>
-              <a:rPr lang="en-US" sz="950" b="1" dirty="0">
-                <a:solidFill>
-                  <a:srgbClr val="13201A"/>
-                </a:solidFill>
-                <a:latin typeface="Calibri" pitchFamily="34" charset="0"/>
-                <a:ea typeface="Calibri" pitchFamily="34" charset="-122"/>
-                <a:cs typeface="Calibri" pitchFamily="34" charset="-120"/>
-              </a:rPr>
-              <a:t>Escrow or price the tax risk</a:t>
-            </a:r>
-            <a:endParaRPr lang="en-US" sz="950" dirty="0"/>
-          </a:p>
-        </p:txBody>
-      </p:sp>
-      <p:sp>
-        <p:nvSpPr>
-          <p:cNvPr id="19" name="Text 17"/>
-          <p:cNvSpPr/>
-          <p:nvPr/>
-        </p:nvSpPr>
-        <p:spPr>
-          <a:xfrm>
-            <a:off x="3511296" y="5669280"/>
-            <a:ext cx="2542032" cy="777240"/>
-          </a:xfrm>
-          <a:prstGeom prst="rect">
-            <a:avLst/>
-          </a:prstGeom>
-          <a:noFill/>
-          <a:ln/>
-        </p:spPr>
-        <p:txBody>
-          <a:bodyPr wrap="square" lIns="0" tIns="0" rIns="0" bIns="0" rtlCol="0" anchor="t"/>
-          <a:lstStyle/>
-          <a:p>
-            <a:pPr indent="0" marL="0">
-              <a:lnSpc>
-                <a:spcPts val="1050"/>
-              </a:lnSpc>
-              <a:buNone/>
-            </a:pPr>
-            <a:r>
-              <a:rPr lang="en-US" sz="850" dirty="0">
-                <a:solidFill>
-                  <a:srgbClr val="3A4A42"/>
-                </a:solidFill>
-                <a:latin typeface="Calibri" pitchFamily="34" charset="0"/>
-                <a:ea typeface="Calibri" pitchFamily="34" charset="-122"/>
-                <a:cs typeface="Calibri" pitchFamily="34" charset="-120"/>
-              </a:rPr>
-              <a:t>Tie a holdback to the first post-closing Form 11A. Worth 3.7 points of IRR if the assessment does reset.</a:t>
-            </a:r>
-            <a:endParaRPr lang="en-US" sz="850" dirty="0"/>
-          </a:p>
-        </p:txBody>
-      </p:sp>
-      <p:sp>
-        <p:nvSpPr>
-          <p:cNvPr id="20" name="Shape 18"/>
-          <p:cNvSpPr/>
-          <p:nvPr/>
-        </p:nvSpPr>
-        <p:spPr>
-          <a:xfrm>
-            <a:off x="6336792" y="5358384"/>
-            <a:ext cx="2487168" cy="32004"/>
-          </a:xfrm>
-          <a:prstGeom prst="rect">
-            <a:avLst/>
-          </a:prstGeom>
-          <a:solidFill>
-            <a:srgbClr val="2E9E76"/>
-          </a:solidFill>
-          <a:ln/>
-        </p:spPr>
-      </p:sp>
-      <p:sp>
-        <p:nvSpPr>
-          <p:cNvPr id="21" name="Text 19"/>
-          <p:cNvSpPr/>
-          <p:nvPr/>
-        </p:nvSpPr>
-        <p:spPr>
-          <a:xfrm>
-            <a:off x="6336792" y="5431536"/>
-            <a:ext cx="2542032" cy="219456"/>
-          </a:xfrm>
-          <a:prstGeom prst="rect">
-            <a:avLst/>
-          </a:prstGeom>
-          <a:noFill/>
-          <a:ln/>
-        </p:spPr>
-        <p:txBody>
-          <a:bodyPr wrap="square" lIns="0" tIns="0" rIns="0" bIns="0" rtlCol="0" anchor="ctr"/>
-          <a:lstStyle/>
-          <a:p>
-            <a:pPr indent="0" marL="0">
-              <a:buNone/>
-            </a:pPr>
-            <a:r>
-              <a:rPr lang="en-US" sz="950" b="1" dirty="0">
-                <a:solidFill>
-                  <a:srgbClr val="13201A"/>
-                </a:solidFill>
-                <a:latin typeface="Calibri" pitchFamily="34" charset="0"/>
-                <a:ea typeface="Calibri" pitchFamily="34" charset="-122"/>
-                <a:cs typeface="Calibri" pitchFamily="34" charset="-120"/>
-              </a:rPr>
-              <a:t>Count the washer/dryers on site</a:t>
-            </a:r>
-            <a:endParaRPr lang="en-US" sz="950" dirty="0"/>
-          </a:p>
-        </p:txBody>
-      </p:sp>
-      <p:sp>
-        <p:nvSpPr>
-          <p:cNvPr id="22" name="Text 20"/>
-          <p:cNvSpPr/>
-          <p:nvPr/>
-        </p:nvSpPr>
-        <p:spPr>
-          <a:xfrm>
-            <a:off x="6336792" y="5669280"/>
-            <a:ext cx="2542032" cy="777240"/>
-          </a:xfrm>
-          <a:prstGeom prst="rect">
-            <a:avLst/>
-          </a:prstGeom>
-          <a:noFill/>
-          <a:ln/>
-        </p:spPr>
-        <p:txBody>
-          <a:bodyPr wrap="square" lIns="0" tIns="0" rIns="0" bIns="0" rtlCol="0" anchor="t"/>
-          <a:lstStyle/>
-          <a:p>
-            <a:pPr indent="0" marL="0">
-              <a:lnSpc>
-                <a:spcPts val="1050"/>
-              </a:lnSpc>
-              <a:buNone/>
-            </a:pPr>
-            <a:r>
-              <a:rPr lang="en-US" sz="850" dirty="0">
-                <a:solidFill>
-                  <a:srgbClr val="3A4A42"/>
-                </a:solidFill>
-                <a:latin typeface="Calibri" pitchFamily="34" charset="0"/>
-                <a:ea typeface="Calibri" pitchFamily="34" charset="-122"/>
-                <a:cs typeface="Calibri" pitchFamily="34" charset="-120"/>
-              </a:rPr>
-              <a:t>The OM says 78, its own schedules say 54, the rent roll says 53. Every 10 units of error is $50,000 of capital.</a:t>
-            </a:r>
-            <a:endParaRPr lang="en-US" sz="850" dirty="0"/>
-          </a:p>
-        </p:txBody>
-      </p:sp>
-      <p:sp>
-        <p:nvSpPr>
-          <p:cNvPr id="23" name="Shape 21"/>
-          <p:cNvSpPr/>
-          <p:nvPr/>
-        </p:nvSpPr>
-        <p:spPr>
-          <a:xfrm>
-            <a:off x="9162288" y="5358384"/>
-            <a:ext cx="2487168" cy="32004"/>
-          </a:xfrm>
-          <a:prstGeom prst="rect">
-            <a:avLst/>
-          </a:prstGeom>
-          <a:solidFill>
-            <a:srgbClr val="2E9E76"/>
-          </a:solidFill>
-          <a:ln/>
-        </p:spPr>
-      </p:sp>
-      <p:sp>
-        <p:nvSpPr>
-          <p:cNvPr id="24" name="Text 22"/>
-          <p:cNvSpPr/>
-          <p:nvPr/>
-        </p:nvSpPr>
-        <p:spPr>
-          <a:xfrm>
-            <a:off x="9162288" y="5431536"/>
-            <a:ext cx="2542032" cy="219456"/>
-          </a:xfrm>
-          <a:prstGeom prst="rect">
-            <a:avLst/>
-          </a:prstGeom>
-          <a:noFill/>
-          <a:ln/>
-        </p:spPr>
-        <p:txBody>
-          <a:bodyPr wrap="square" lIns="0" tIns="0" rIns="0" bIns="0" rtlCol="0" anchor="ctr"/>
-          <a:lstStyle/>
-          <a:p>
-            <a:pPr indent="0" marL="0">
-              <a:buNone/>
-            </a:pPr>
-            <a:r>
-              <a:rPr lang="en-US" sz="950" b="1" dirty="0">
-                <a:solidFill>
-                  <a:srgbClr val="13201A"/>
-                </a:solidFill>
-                <a:latin typeface="Calibri" pitchFamily="34" charset="0"/>
-                <a:ea typeface="Calibri" pitchFamily="34" charset="-122"/>
-                <a:cs typeface="Calibri" pitchFamily="34" charset="-120"/>
-              </a:rPr>
-              <a:t>Seller credit for immediate needs</a:t>
-            </a:r>
-            <a:endParaRPr lang="en-US" sz="950" dirty="0"/>
-          </a:p>
-        </p:txBody>
-      </p:sp>
-      <p:sp>
-        <p:nvSpPr>
-          <p:cNvPr id="25" name="Text 23"/>
-          <p:cNvSpPr/>
-          <p:nvPr/>
-        </p:nvSpPr>
-        <p:spPr>
-          <a:xfrm>
-            <a:off x="9162288" y="5669280"/>
-            <a:ext cx="2542032" cy="777240"/>
-          </a:xfrm>
-          <a:prstGeom prst="rect">
-            <a:avLst/>
-          </a:prstGeom>
-          <a:noFill/>
-          <a:ln/>
-        </p:spPr>
-        <p:txBody>
-          <a:bodyPr wrap="square" lIns="0" tIns="0" rIns="0" bIns="0" rtlCol="0" anchor="t"/>
-          <a:lstStyle/>
-          <a:p>
-            <a:pPr indent="0" marL="0">
-              <a:lnSpc>
-                <a:spcPts val="1050"/>
-              </a:lnSpc>
-              <a:buNone/>
-            </a:pPr>
-            <a:r>
-              <a:rPr lang="en-US" sz="850" dirty="0">
-                <a:solidFill>
-                  <a:srgbClr val="3A4A42"/>
-                </a:solidFill>
-                <a:latin typeface="Calibri" pitchFamily="34" charset="0"/>
-                <a:ea typeface="Calibri" pitchFamily="34" charset="-122"/>
-                <a:cs typeface="Calibri" pitchFamily="34" charset="-120"/>
-              </a:rPr>
-              <a:t>Sump pumps, patio drains and asphalt — about $190,000 of work identified before we own it.</a:t>
-            </a:r>
-            <a:endParaRPr lang="en-US" sz="850" dirty="0"/>
-          </a:p>
-        </p:txBody>
-      </p:sp>
-    </p:spTree>
-  </p:cSld>
-  <p:clrMapOvr>
-    <a:masterClrMapping/>
-  </p:clrMapOvr>
-</p:sld>
-</file>
-
-<file path=ppt/slides/slide5.xml><?xml version="1.0" encoding="utf-8"?>
-<p:sld xmlns:a="http://schemas.openxmlformats.org/drawingml/2006/main" xmlns:r="http://schemas.openxmlformats.org/officeDocument/2006/relationships" xmlns:p="http://schemas.openxmlformats.org/presentationml/2006/main">
-  <p:cSld name="Slide 5">
-    <p:bg>
-      <p:bgPr>
-        <a:solidFill>
-          <a:srgbClr val="FFFFFF"/>
-        </a:solidFill>
-      </p:bgPr>
-    </p:bg>
-    <p:spTree>
-      <p:nvGrpSpPr>
-        <p:cNvPr id="1" name=""/>
-        <p:cNvGrpSpPr/>
-        <p:nvPr/>
-      </p:nvGrpSpPr>
-      <p:grpSpPr>
-        <a:xfrm>
-          <a:off x="0" y="0"/>
-          <a:ext cx="0" cy="0"/>
-          <a:chOff x="0" y="0"/>
-          <a:chExt cx="0" cy="0"/>
-        </a:xfrm>
-      </p:grpSpPr>
-      <p:sp>
-        <p:nvSpPr>
-          <p:cNvPr id="2" name="Shape 0"/>
-          <p:cNvSpPr/>
-          <p:nvPr/>
-        </p:nvSpPr>
-        <p:spPr>
-          <a:xfrm>
-            <a:off x="0" y="0"/>
-            <a:ext cx="12191695" cy="91440"/>
-          </a:xfrm>
-          <a:prstGeom prst="rect">
-            <a:avLst/>
-          </a:prstGeom>
-          <a:solidFill>
-            <a:srgbClr val="2E9E76"/>
-          </a:solidFill>
-          <a:ln/>
-        </p:spPr>
-      </p:sp>
-      <p:sp>
-        <p:nvSpPr>
-          <p:cNvPr id="3" name="Text 1"/>
-          <p:cNvSpPr/>
-          <p:nvPr/>
-        </p:nvSpPr>
-        <p:spPr>
-          <a:xfrm>
-            <a:off x="411480" y="219456"/>
-            <a:ext cx="8412480" cy="365760"/>
-          </a:xfrm>
-          <a:prstGeom prst="rect">
-            <a:avLst/>
-          </a:prstGeom>
-          <a:noFill/>
-          <a:ln/>
-        </p:spPr>
-        <p:txBody>
-          <a:bodyPr wrap="square" lIns="0" tIns="0" rIns="0" bIns="0" rtlCol="0" anchor="ctr"/>
-          <a:lstStyle/>
-          <a:p>
-            <a:pPr indent="0" marL="0">
-              <a:buNone/>
-            </a:pPr>
-            <a:r>
-              <a:rPr lang="en-US" sz="2000" b="1" dirty="0">
-                <a:solidFill>
-                  <a:srgbClr val="13201A"/>
-                </a:solidFill>
-                <a:latin typeface="Cambria" pitchFamily="34" charset="0"/>
-                <a:ea typeface="Cambria" pitchFamily="34" charset="-122"/>
-                <a:cs typeface="Cambria" pitchFamily="34" charset="-120"/>
-              </a:rPr>
-              <a:t>Appendix C  ·  Assumptions and the sensitivity grid</a:t>
-            </a:r>
-            <a:endParaRPr lang="en-US" sz="2000" dirty="0"/>
-          </a:p>
-        </p:txBody>
-      </p:sp>
-      <p:sp>
-        <p:nvSpPr>
-          <p:cNvPr id="4" name="Text 2"/>
-          <p:cNvSpPr/>
-          <p:nvPr/>
-        </p:nvSpPr>
-        <p:spPr>
-          <a:xfrm>
-            <a:off x="8595360" y="310896"/>
-            <a:ext cx="3182112" cy="237744"/>
-          </a:xfrm>
-          <a:prstGeom prst="rect">
-            <a:avLst/>
-          </a:prstGeom>
-          <a:noFill/>
-          <a:ln/>
-        </p:spPr>
-        <p:txBody>
-          <a:bodyPr wrap="square" lIns="0" tIns="0" rIns="0" bIns="0" rtlCol="0" anchor="ctr"/>
-          <a:lstStyle/>
-          <a:p>
-            <a:pPr algn="r" indent="0" marL="0">
-              <a:buNone/>
-            </a:pPr>
-            <a:r>
-              <a:rPr lang="en-US" sz="1000" dirty="0">
-                <a:solidFill>
-                  <a:srgbClr val="5F7269"/>
-                </a:solidFill>
-                <a:latin typeface="Calibri" pitchFamily="34" charset="0"/>
-                <a:ea typeface="Calibri" pitchFamily="34" charset="-122"/>
-                <a:cs typeface="Calibri" pitchFamily="34" charset="-120"/>
-              </a:rPr>
-              <a:t>Every figure below is a live input in the workbook</a:t>
-            </a:r>
-            <a:endParaRPr lang="en-US" sz="1000" dirty="0"/>
-          </a:p>
-        </p:txBody>
-      </p:sp>
-      <p:sp>
-        <p:nvSpPr>
-          <p:cNvPr id="5" name="Shape 3"/>
-          <p:cNvSpPr/>
-          <p:nvPr/>
-        </p:nvSpPr>
-        <p:spPr>
-          <a:xfrm>
-            <a:off x="411480" y="868680"/>
-            <a:ext cx="50292" cy="182880"/>
-          </a:xfrm>
-          <a:prstGeom prst="rect">
-            <a:avLst/>
-          </a:prstGeom>
-          <a:solidFill>
-            <a:srgbClr val="2E9E76"/>
-          </a:solidFill>
-          <a:ln/>
-        </p:spPr>
-      </p:sp>
-      <p:sp>
-        <p:nvSpPr>
-          <p:cNvPr id="6" name="Text 4"/>
-          <p:cNvSpPr/>
-          <p:nvPr/>
-        </p:nvSpPr>
-        <p:spPr>
-          <a:xfrm>
-            <a:off x="539496" y="813816"/>
+            <a:off x="539496" y="3959352"/>
             <a:ext cx="5358384" cy="237744"/>
           </a:xfrm>
           <a:prstGeom prst="rect">
@@ -12913,2434 +12563,22 @@
                 <a:ea typeface="Cambria" pitchFamily="34" charset="-122"/>
                 <a:cs typeface="Cambria" pitchFamily="34" charset="-120"/>
               </a:rPr>
-              <a:t>Major assumptions</a:t>
+              <a:t>Where the $2.90mm of capital goes</a:t>
             </a:r>
             <a:endParaRPr lang="en-US" sz="1150" dirty="0"/>
           </a:p>
         </p:txBody>
       </p:sp>
-      <p:graphicFrame>
-        <p:nvGraphicFramePr>
-          <p:cNvPr id="6" name="Table 0"/>
-          <p:cNvGraphicFramePr>
-            <a:graphicFrameLocks noGrp="1"/>
-          </p:cNvGraphicFramePr>
-          <p:nvPr>
-            <p:extLst>
-              <p:ext uri="{D42A27DB-BD31-4B8C-83A1-F6EECF244321}">
-                <p14:modId xmlns:p14="http://schemas.microsoft.com/office/powerpoint/2010/main" val="1579011935"/>
-              </p:ext>
-            </p:extLst>
-          </p:nvPr>
-        </p:nvGraphicFramePr>
-        <p:xfrm>
-          <a:off x="411480" y="1225296"/>
-          <a:ext cx="5486400" cy="914400"/>
-        </p:xfrm>
-        <a:graphic>
-          <a:graphicData uri="http://schemas.openxmlformats.org/drawingml/2006/table">
-            <a:tbl>
-              <a:tblPr/>
-              <a:tblGrid>
-                <a:gridCol w="3246120"/>
-                <a:gridCol w="2240280"/>
-              </a:tblGrid>
-              <a:tr h="194767">
-                <a:tc>
-                  <a:txBody>
-                    <a:bodyPr/>
-                    <a:lstStyle/>
-                    <a:p>
-                      <a:pPr indent="0" marL="0">
-                        <a:buNone/>
-                      </a:pPr>
-                      <a:r>
-                        <a:rPr lang="en-US" sz="900" b="1" dirty="0">
-                          <a:solidFill>
-                            <a:srgbClr val="FFFFFF"/>
-                          </a:solidFill>
-                          <a:latin typeface="Calibri" pitchFamily="34" charset="0"/>
-                          <a:ea typeface="Calibri" pitchFamily="34" charset="-122"/>
-                          <a:cs typeface="Calibri" pitchFamily="34" charset="-120"/>
-                        </a:rPr>
-                        <a:t>Driver</a:t>
-                      </a:r>
-                      <a:endParaRPr lang="en-US" sz="900" dirty="0">
-                        <a:latin typeface="Calibri" charset="0"/>
-                        <a:ea typeface="Calibri" charset="0"/>
-                        <a:cs typeface="Calibri" charset="0"/>
-                      </a:endParaRPr>
-                    </a:p>
-                  </a:txBody>
-                  <a:tcPr marL="63500" marR="63500" marT="25400" marB="25400" anchor="ctr">
-                    <a:lnL w="6350" cap="flat" cmpd="sng" algn="ctr">
-                      <a:solidFill>
-                        <a:srgbClr val="D4E0D8"/>
-                      </a:solidFill>
-                      <a:prstDash val="solid"/>
-                      <a:round/>
-                      <a:headEnd type="none" w="med" len="med"/>
-                      <a:tailEnd type="none" w="med" len="med"/>
-                    </a:lnL>
-                    <a:lnR w="6350" cap="flat" cmpd="sng" algn="ctr">
-                      <a:solidFill>
-                        <a:srgbClr val="D4E0D8"/>
-                      </a:solidFill>
-                      <a:prstDash val="solid"/>
-                      <a:round/>
-                      <a:headEnd type="none" w="med" len="med"/>
-                      <a:tailEnd type="none" w="med" len="med"/>
-                    </a:lnR>
-                    <a:lnT w="6350" cap="flat" cmpd="sng" algn="ctr">
-                      <a:solidFill>
-                        <a:srgbClr val="D4E0D8"/>
-                      </a:solidFill>
-                      <a:prstDash val="solid"/>
-                      <a:round/>
-                      <a:headEnd type="none" w="med" len="med"/>
-                      <a:tailEnd type="none" w="med" len="med"/>
-                    </a:lnT>
-                    <a:lnB w="6350" cap="flat" cmpd="sng" algn="ctr">
-                      <a:solidFill>
-                        <a:srgbClr val="D4E0D8"/>
-                      </a:solidFill>
-                      <a:prstDash val="solid"/>
-                      <a:round/>
-                      <a:headEnd type="none" w="med" len="med"/>
-                      <a:tailEnd type="none" w="med" len="med"/>
-                    </a:lnB>
-                    <a:solidFill>
-                      <a:srgbClr val="13201A"/>
-                    </a:solidFill>
-                  </a:tcPr>
-                </a:tc>
-                <a:tc>
-                  <a:txBody>
-                    <a:bodyPr/>
-                    <a:lstStyle/>
-                    <a:p>
-                      <a:pPr indent="0" marL="0">
-                        <a:buNone/>
-                      </a:pPr>
-                      <a:r>
-                        <a:rPr lang="en-US" sz="900" b="1" dirty="0">
-                          <a:solidFill>
-                            <a:srgbClr val="FFFFFF"/>
-                          </a:solidFill>
-                          <a:latin typeface="Calibri" pitchFamily="34" charset="0"/>
-                          <a:ea typeface="Calibri" pitchFamily="34" charset="-122"/>
-                          <a:cs typeface="Calibri" pitchFamily="34" charset="-120"/>
-                        </a:rPr>
-                        <a:t>Underwritten</a:t>
-                      </a:r>
-                      <a:endParaRPr lang="en-US" sz="900" dirty="0">
-                        <a:latin typeface="Calibri" charset="0"/>
-                        <a:ea typeface="Calibri" charset="0"/>
-                        <a:cs typeface="Calibri" charset="0"/>
-                      </a:endParaRPr>
-                    </a:p>
-                  </a:txBody>
-                  <a:tcPr marL="63500" marR="63500" marT="25400" marB="25400" anchor="ctr">
-                    <a:lnL w="6350" cap="flat" cmpd="sng" algn="ctr">
-                      <a:solidFill>
-                        <a:srgbClr val="D4E0D8"/>
-                      </a:solidFill>
-                      <a:prstDash val="solid"/>
-                      <a:round/>
-                      <a:headEnd type="none" w="med" len="med"/>
-                      <a:tailEnd type="none" w="med" len="med"/>
-                    </a:lnL>
-                    <a:lnR w="6350" cap="flat" cmpd="sng" algn="ctr">
-                      <a:solidFill>
-                        <a:srgbClr val="D4E0D8"/>
-                      </a:solidFill>
-                      <a:prstDash val="solid"/>
-                      <a:round/>
-                      <a:headEnd type="none" w="med" len="med"/>
-                      <a:tailEnd type="none" w="med" len="med"/>
-                    </a:lnR>
-                    <a:lnT w="6350" cap="flat" cmpd="sng" algn="ctr">
-                      <a:solidFill>
-                        <a:srgbClr val="D4E0D8"/>
-                      </a:solidFill>
-                      <a:prstDash val="solid"/>
-                      <a:round/>
-                      <a:headEnd type="none" w="med" len="med"/>
-                      <a:tailEnd type="none" w="med" len="med"/>
-                    </a:lnT>
-                    <a:lnB w="6350" cap="flat" cmpd="sng" algn="ctr">
-                      <a:solidFill>
-                        <a:srgbClr val="D4E0D8"/>
-                      </a:solidFill>
-                      <a:prstDash val="solid"/>
-                      <a:round/>
-                      <a:headEnd type="none" w="med" len="med"/>
-                      <a:tailEnd type="none" w="med" len="med"/>
-                    </a:lnB>
-                    <a:solidFill>
-                      <a:srgbClr val="13201A"/>
-                    </a:solidFill>
-                  </a:tcPr>
-                </a:tc>
-              </a:tr>
-              <a:tr h="194767">
-                <a:tc>
-                  <a:txBody>
-                    <a:bodyPr/>
-                    <a:lstStyle/>
-                    <a:p>
-                      <a:pPr indent="0" marL="0">
-                        <a:buNone/>
-                      </a:pPr>
-                      <a:r>
-                        <a:rPr lang="en-US" sz="900" dirty="0">
-                          <a:solidFill>
-                            <a:srgbClr val="3A4A42"/>
-                          </a:solidFill>
-                          <a:latin typeface="Calibri" pitchFamily="34" charset="0"/>
-                          <a:ea typeface="Calibri" pitchFamily="34" charset="-122"/>
-                          <a:cs typeface="Calibri" pitchFamily="34" charset="-120"/>
-                        </a:rPr>
-                        <a:t>Purchase price — SOLVED, not given</a:t>
-                      </a:r>
-                      <a:endParaRPr lang="en-US" sz="900" dirty="0">
-                        <a:latin typeface="Calibri" charset="0"/>
-                        <a:ea typeface="Calibri" charset="0"/>
-                        <a:cs typeface="Calibri" charset="0"/>
-                      </a:endParaRPr>
-                    </a:p>
-                  </a:txBody>
-                  <a:tcPr marL="63500" marR="63500" marT="25400" marB="25400" anchor="ctr">
-                    <a:lnL w="6350" cap="flat" cmpd="sng" algn="ctr">
-                      <a:solidFill>
-                        <a:srgbClr val="D4E0D8"/>
-                      </a:solidFill>
-                      <a:prstDash val="solid"/>
-                      <a:round/>
-                      <a:headEnd type="none" w="med" len="med"/>
-                      <a:tailEnd type="none" w="med" len="med"/>
-                    </a:lnL>
-                    <a:lnR w="6350" cap="flat" cmpd="sng" algn="ctr">
-                      <a:solidFill>
-                        <a:srgbClr val="D4E0D8"/>
-                      </a:solidFill>
-                      <a:prstDash val="solid"/>
-                      <a:round/>
-                      <a:headEnd type="none" w="med" len="med"/>
-                      <a:tailEnd type="none" w="med" len="med"/>
-                    </a:lnR>
-                    <a:lnT w="6350" cap="flat" cmpd="sng" algn="ctr">
-                      <a:solidFill>
-                        <a:srgbClr val="D4E0D8"/>
-                      </a:solidFill>
-                      <a:prstDash val="solid"/>
-                      <a:round/>
-                      <a:headEnd type="none" w="med" len="med"/>
-                      <a:tailEnd type="none" w="med" len="med"/>
-                    </a:lnT>
-                    <a:lnB w="6350" cap="flat" cmpd="sng" algn="ctr">
-                      <a:solidFill>
-                        <a:srgbClr val="D4E0D8"/>
-                      </a:solidFill>
-                      <a:prstDash val="solid"/>
-                      <a:round/>
-                      <a:headEnd type="none" w="med" len="med"/>
-                      <a:tailEnd type="none" w="med" len="med"/>
-                    </a:lnB>
-                  </a:tcPr>
-                </a:tc>
-                <a:tc>
-                  <a:txBody>
-                    <a:bodyPr/>
-                    <a:lstStyle/>
-                    <a:p>
-                      <a:pPr algn="r" indent="0" marL="0">
-                        <a:buNone/>
-                      </a:pPr>
-                      <a:r>
-                        <a:rPr lang="en-US" sz="900" b="1" dirty="0">
-                          <a:solidFill>
-                            <a:srgbClr val="13201A"/>
-                          </a:solidFill>
-                          <a:latin typeface="Calibri" pitchFamily="34" charset="0"/>
-                          <a:ea typeface="Calibri" pitchFamily="34" charset="-122"/>
-                          <a:cs typeface="Calibri" pitchFamily="34" charset="-120"/>
-                        </a:rPr>
-                        <a:t>$12,000,000</a:t>
-                      </a:r>
-                      <a:endParaRPr lang="en-US" sz="900" dirty="0">
-                        <a:latin typeface="Calibri" charset="0"/>
-                        <a:ea typeface="Calibri" charset="0"/>
-                        <a:cs typeface="Calibri" charset="0"/>
-                      </a:endParaRPr>
-                    </a:p>
-                  </a:txBody>
-                  <a:tcPr marL="63500" marR="63500" marT="25400" marB="25400" anchor="ctr">
-                    <a:lnL w="6350" cap="flat" cmpd="sng" algn="ctr">
-                      <a:solidFill>
-                        <a:srgbClr val="D4E0D8"/>
-                      </a:solidFill>
-                      <a:prstDash val="solid"/>
-                      <a:round/>
-                      <a:headEnd type="none" w="med" len="med"/>
-                      <a:tailEnd type="none" w="med" len="med"/>
-                    </a:lnL>
-                    <a:lnR w="6350" cap="flat" cmpd="sng" algn="ctr">
-                      <a:solidFill>
-                        <a:srgbClr val="D4E0D8"/>
-                      </a:solidFill>
-                      <a:prstDash val="solid"/>
-                      <a:round/>
-                      <a:headEnd type="none" w="med" len="med"/>
-                      <a:tailEnd type="none" w="med" len="med"/>
-                    </a:lnR>
-                    <a:lnT w="6350" cap="flat" cmpd="sng" algn="ctr">
-                      <a:solidFill>
-                        <a:srgbClr val="D4E0D8"/>
-                      </a:solidFill>
-                      <a:prstDash val="solid"/>
-                      <a:round/>
-                      <a:headEnd type="none" w="med" len="med"/>
-                      <a:tailEnd type="none" w="med" len="med"/>
-                    </a:lnT>
-                    <a:lnB w="6350" cap="flat" cmpd="sng" algn="ctr">
-                      <a:solidFill>
-                        <a:srgbClr val="D4E0D8"/>
-                      </a:solidFill>
-                      <a:prstDash val="solid"/>
-                      <a:round/>
-                      <a:headEnd type="none" w="med" len="med"/>
-                      <a:tailEnd type="none" w="med" len="med"/>
-                    </a:lnB>
-                  </a:tcPr>
-                </a:tc>
-              </a:tr>
-              <a:tr h="194767">
-                <a:tc>
-                  <a:txBody>
-                    <a:bodyPr/>
-                    <a:lstStyle/>
-                    <a:p>
-                      <a:pPr indent="0" marL="0">
-                        <a:buNone/>
-                      </a:pPr>
-                      <a:r>
-                        <a:rPr lang="en-US" sz="900" dirty="0">
-                          <a:solidFill>
-                            <a:srgbClr val="3A4A42"/>
-                          </a:solidFill>
-                          <a:latin typeface="Calibri" pitchFamily="34" charset="0"/>
-                          <a:ea typeface="Calibri" pitchFamily="34" charset="-122"/>
-                          <a:cs typeface="Calibri" pitchFamily="34" charset="-120"/>
-                        </a:rPr>
-                        <a:t>Market rent growth, Y1 to Y5</a:t>
-                      </a:r>
-                      <a:endParaRPr lang="en-US" sz="900" dirty="0">
-                        <a:latin typeface="Calibri" charset="0"/>
-                        <a:ea typeface="Calibri" charset="0"/>
-                        <a:cs typeface="Calibri" charset="0"/>
-                      </a:endParaRPr>
-                    </a:p>
-                  </a:txBody>
-                  <a:tcPr marL="63500" marR="63500" marT="25400" marB="25400" anchor="ctr">
-                    <a:lnL w="6350" cap="flat" cmpd="sng" algn="ctr">
-                      <a:solidFill>
-                        <a:srgbClr val="D4E0D8"/>
-                      </a:solidFill>
-                      <a:prstDash val="solid"/>
-                      <a:round/>
-                      <a:headEnd type="none" w="med" len="med"/>
-                      <a:tailEnd type="none" w="med" len="med"/>
-                    </a:lnL>
-                    <a:lnR w="6350" cap="flat" cmpd="sng" algn="ctr">
-                      <a:solidFill>
-                        <a:srgbClr val="D4E0D8"/>
-                      </a:solidFill>
-                      <a:prstDash val="solid"/>
-                      <a:round/>
-                      <a:headEnd type="none" w="med" len="med"/>
-                      <a:tailEnd type="none" w="med" len="med"/>
-                    </a:lnR>
-                    <a:lnT w="6350" cap="flat" cmpd="sng" algn="ctr">
-                      <a:solidFill>
-                        <a:srgbClr val="D4E0D8"/>
-                      </a:solidFill>
-                      <a:prstDash val="solid"/>
-                      <a:round/>
-                      <a:headEnd type="none" w="med" len="med"/>
-                      <a:tailEnd type="none" w="med" len="med"/>
-                    </a:lnT>
-                    <a:lnB w="6350" cap="flat" cmpd="sng" algn="ctr">
-                      <a:solidFill>
-                        <a:srgbClr val="D4E0D8"/>
-                      </a:solidFill>
-                      <a:prstDash val="solid"/>
-                      <a:round/>
-                      <a:headEnd type="none" w="med" len="med"/>
-                      <a:tailEnd type="none" w="med" len="med"/>
-                    </a:lnB>
-                  </a:tcPr>
-                </a:tc>
-                <a:tc>
-                  <a:txBody>
-                    <a:bodyPr/>
-                    <a:lstStyle/>
-                    <a:p>
-                      <a:pPr algn="r" indent="0" marL="0">
-                        <a:buNone/>
-                      </a:pPr>
-                      <a:r>
-                        <a:rPr lang="en-US" sz="900" b="1" dirty="0">
-                          <a:solidFill>
-                            <a:srgbClr val="13201A"/>
-                          </a:solidFill>
-                          <a:latin typeface="Calibri" pitchFamily="34" charset="0"/>
-                          <a:ea typeface="Calibri" pitchFamily="34" charset="-122"/>
-                          <a:cs typeface="Calibri" pitchFamily="34" charset="-120"/>
-                        </a:rPr>
-                        <a:t>1.5 / 2.0 / 2.5 / 3.0 / 3.0%</a:t>
-                      </a:r>
-                      <a:endParaRPr lang="en-US" sz="900" dirty="0">
-                        <a:latin typeface="Calibri" charset="0"/>
-                        <a:ea typeface="Calibri" charset="0"/>
-                        <a:cs typeface="Calibri" charset="0"/>
-                      </a:endParaRPr>
-                    </a:p>
-                  </a:txBody>
-                  <a:tcPr marL="63500" marR="63500" marT="25400" marB="25400" anchor="ctr">
-                    <a:lnL w="6350" cap="flat" cmpd="sng" algn="ctr">
-                      <a:solidFill>
-                        <a:srgbClr val="D4E0D8"/>
-                      </a:solidFill>
-                      <a:prstDash val="solid"/>
-                      <a:round/>
-                      <a:headEnd type="none" w="med" len="med"/>
-                      <a:tailEnd type="none" w="med" len="med"/>
-                    </a:lnL>
-                    <a:lnR w="6350" cap="flat" cmpd="sng" algn="ctr">
-                      <a:solidFill>
-                        <a:srgbClr val="D4E0D8"/>
-                      </a:solidFill>
-                      <a:prstDash val="solid"/>
-                      <a:round/>
-                      <a:headEnd type="none" w="med" len="med"/>
-                      <a:tailEnd type="none" w="med" len="med"/>
-                    </a:lnR>
-                    <a:lnT w="6350" cap="flat" cmpd="sng" algn="ctr">
-                      <a:solidFill>
-                        <a:srgbClr val="D4E0D8"/>
-                      </a:solidFill>
-                      <a:prstDash val="solid"/>
-                      <a:round/>
-                      <a:headEnd type="none" w="med" len="med"/>
-                      <a:tailEnd type="none" w="med" len="med"/>
-                    </a:lnT>
-                    <a:lnB w="6350" cap="flat" cmpd="sng" algn="ctr">
-                      <a:solidFill>
-                        <a:srgbClr val="D4E0D8"/>
-                      </a:solidFill>
-                      <a:prstDash val="solid"/>
-                      <a:round/>
-                      <a:headEnd type="none" w="med" len="med"/>
-                      <a:tailEnd type="none" w="med" len="med"/>
-                    </a:lnB>
-                  </a:tcPr>
-                </a:tc>
-              </a:tr>
-              <a:tr h="194767">
-                <a:tc>
-                  <a:txBody>
-                    <a:bodyPr/>
-                    <a:lstStyle/>
-                    <a:p>
-                      <a:pPr indent="0" marL="0">
-                        <a:buNone/>
-                      </a:pPr>
-                      <a:r>
-                        <a:rPr lang="en-US" sz="900" dirty="0">
-                          <a:solidFill>
-                            <a:srgbClr val="3A4A42"/>
-                          </a:solidFill>
-                          <a:latin typeface="Calibri" pitchFamily="34" charset="0"/>
-                          <a:ea typeface="Calibri" pitchFamily="34" charset="-122"/>
-                          <a:cs typeface="Calibri" pitchFamily="34" charset="-120"/>
-                        </a:rPr>
-                        <a:t>Loss to lease, Y1 to Y5</a:t>
-                      </a:r>
-                      <a:endParaRPr lang="en-US" sz="900" dirty="0">
-                        <a:latin typeface="Calibri" charset="0"/>
-                        <a:ea typeface="Calibri" charset="0"/>
-                        <a:cs typeface="Calibri" charset="0"/>
-                      </a:endParaRPr>
-                    </a:p>
-                  </a:txBody>
-                  <a:tcPr marL="63500" marR="63500" marT="25400" marB="25400" anchor="ctr">
-                    <a:lnL w="6350" cap="flat" cmpd="sng" algn="ctr">
-                      <a:solidFill>
-                        <a:srgbClr val="D4E0D8"/>
-                      </a:solidFill>
-                      <a:prstDash val="solid"/>
-                      <a:round/>
-                      <a:headEnd type="none" w="med" len="med"/>
-                      <a:tailEnd type="none" w="med" len="med"/>
-                    </a:lnL>
-                    <a:lnR w="6350" cap="flat" cmpd="sng" algn="ctr">
-                      <a:solidFill>
-                        <a:srgbClr val="D4E0D8"/>
-                      </a:solidFill>
-                      <a:prstDash val="solid"/>
-                      <a:round/>
-                      <a:headEnd type="none" w="med" len="med"/>
-                      <a:tailEnd type="none" w="med" len="med"/>
-                    </a:lnR>
-                    <a:lnT w="6350" cap="flat" cmpd="sng" algn="ctr">
-                      <a:solidFill>
-                        <a:srgbClr val="D4E0D8"/>
-                      </a:solidFill>
-                      <a:prstDash val="solid"/>
-                      <a:round/>
-                      <a:headEnd type="none" w="med" len="med"/>
-                      <a:tailEnd type="none" w="med" len="med"/>
-                    </a:lnT>
-                    <a:lnB w="6350" cap="flat" cmpd="sng" algn="ctr">
-                      <a:solidFill>
-                        <a:srgbClr val="D4E0D8"/>
-                      </a:solidFill>
-                      <a:prstDash val="solid"/>
-                      <a:round/>
-                      <a:headEnd type="none" w="med" len="med"/>
-                      <a:tailEnd type="none" w="med" len="med"/>
-                    </a:lnB>
-                  </a:tcPr>
-                </a:tc>
-                <a:tc>
-                  <a:txBody>
-                    <a:bodyPr/>
-                    <a:lstStyle/>
-                    <a:p>
-                      <a:pPr algn="r" indent="0" marL="0">
-                        <a:buNone/>
-                      </a:pPr>
-                      <a:r>
-                        <a:rPr lang="en-US" sz="900" b="1" dirty="0">
-                          <a:solidFill>
-                            <a:srgbClr val="13201A"/>
-                          </a:solidFill>
-                          <a:latin typeface="Calibri" pitchFamily="34" charset="0"/>
-                          <a:ea typeface="Calibri" pitchFamily="34" charset="-122"/>
-                          <a:cs typeface="Calibri" pitchFamily="34" charset="-120"/>
-                        </a:rPr>
-                        <a:t>2.2% burning to 1.5%</a:t>
-                      </a:r>
-                      <a:endParaRPr lang="en-US" sz="900" dirty="0">
-                        <a:latin typeface="Calibri" charset="0"/>
-                        <a:ea typeface="Calibri" charset="0"/>
-                        <a:cs typeface="Calibri" charset="0"/>
-                      </a:endParaRPr>
-                    </a:p>
-                  </a:txBody>
-                  <a:tcPr marL="63500" marR="63500" marT="25400" marB="25400" anchor="ctr">
-                    <a:lnL w="6350" cap="flat" cmpd="sng" algn="ctr">
-                      <a:solidFill>
-                        <a:srgbClr val="D4E0D8"/>
-                      </a:solidFill>
-                      <a:prstDash val="solid"/>
-                      <a:round/>
-                      <a:headEnd type="none" w="med" len="med"/>
-                      <a:tailEnd type="none" w="med" len="med"/>
-                    </a:lnL>
-                    <a:lnR w="6350" cap="flat" cmpd="sng" algn="ctr">
-                      <a:solidFill>
-                        <a:srgbClr val="D4E0D8"/>
-                      </a:solidFill>
-                      <a:prstDash val="solid"/>
-                      <a:round/>
-                      <a:headEnd type="none" w="med" len="med"/>
-                      <a:tailEnd type="none" w="med" len="med"/>
-                    </a:lnR>
-                    <a:lnT w="6350" cap="flat" cmpd="sng" algn="ctr">
-                      <a:solidFill>
-                        <a:srgbClr val="D4E0D8"/>
-                      </a:solidFill>
-                      <a:prstDash val="solid"/>
-                      <a:round/>
-                      <a:headEnd type="none" w="med" len="med"/>
-                      <a:tailEnd type="none" w="med" len="med"/>
-                    </a:lnT>
-                    <a:lnB w="6350" cap="flat" cmpd="sng" algn="ctr">
-                      <a:solidFill>
-                        <a:srgbClr val="D4E0D8"/>
-                      </a:solidFill>
-                      <a:prstDash val="solid"/>
-                      <a:round/>
-                      <a:headEnd type="none" w="med" len="med"/>
-                      <a:tailEnd type="none" w="med" len="med"/>
-                    </a:lnB>
-                  </a:tcPr>
-                </a:tc>
-              </a:tr>
-              <a:tr h="194767">
-                <a:tc>
-                  <a:txBody>
-                    <a:bodyPr/>
-                    <a:lstStyle/>
-                    <a:p>
-                      <a:pPr indent="0" marL="0">
-                        <a:buNone/>
-                      </a:pPr>
-                      <a:r>
-                        <a:rPr lang="en-US" sz="900" dirty="0">
-                          <a:solidFill>
-                            <a:srgbClr val="3A4A42"/>
-                          </a:solidFill>
-                          <a:latin typeface="Calibri" pitchFamily="34" charset="0"/>
-                          <a:ea typeface="Calibri" pitchFamily="34" charset="-122"/>
-                          <a:cs typeface="Calibri" pitchFamily="34" charset="-120"/>
-                        </a:rPr>
-                        <a:t>Stabilised vacancy / concessions</a:t>
-                      </a:r>
-                      <a:endParaRPr lang="en-US" sz="900" dirty="0">
-                        <a:latin typeface="Calibri" charset="0"/>
-                        <a:ea typeface="Calibri" charset="0"/>
-                        <a:cs typeface="Calibri" charset="0"/>
-                      </a:endParaRPr>
-                    </a:p>
-                  </a:txBody>
-                  <a:tcPr marL="63500" marR="63500" marT="25400" marB="25400" anchor="ctr">
-                    <a:lnL w="6350" cap="flat" cmpd="sng" algn="ctr">
-                      <a:solidFill>
-                        <a:srgbClr val="D4E0D8"/>
-                      </a:solidFill>
-                      <a:prstDash val="solid"/>
-                      <a:round/>
-                      <a:headEnd type="none" w="med" len="med"/>
-                      <a:tailEnd type="none" w="med" len="med"/>
-                    </a:lnL>
-                    <a:lnR w="6350" cap="flat" cmpd="sng" algn="ctr">
-                      <a:solidFill>
-                        <a:srgbClr val="D4E0D8"/>
-                      </a:solidFill>
-                      <a:prstDash val="solid"/>
-                      <a:round/>
-                      <a:headEnd type="none" w="med" len="med"/>
-                      <a:tailEnd type="none" w="med" len="med"/>
-                    </a:lnR>
-                    <a:lnT w="6350" cap="flat" cmpd="sng" algn="ctr">
-                      <a:solidFill>
-                        <a:srgbClr val="D4E0D8"/>
-                      </a:solidFill>
-                      <a:prstDash val="solid"/>
-                      <a:round/>
-                      <a:headEnd type="none" w="med" len="med"/>
-                      <a:tailEnd type="none" w="med" len="med"/>
-                    </a:lnT>
-                    <a:lnB w="6350" cap="flat" cmpd="sng" algn="ctr">
-                      <a:solidFill>
-                        <a:srgbClr val="D4E0D8"/>
-                      </a:solidFill>
-                      <a:prstDash val="solid"/>
-                      <a:round/>
-                      <a:headEnd type="none" w="med" len="med"/>
-                      <a:tailEnd type="none" w="med" len="med"/>
-                    </a:lnB>
-                  </a:tcPr>
-                </a:tc>
-                <a:tc>
-                  <a:txBody>
-                    <a:bodyPr/>
-                    <a:lstStyle/>
-                    <a:p>
-                      <a:pPr algn="r" indent="0" marL="0">
-                        <a:buNone/>
-                      </a:pPr>
-                      <a:r>
-                        <a:rPr lang="en-US" sz="900" b="1" dirty="0">
-                          <a:solidFill>
-                            <a:srgbClr val="13201A"/>
-                          </a:solidFill>
-                          <a:latin typeface="Calibri" pitchFamily="34" charset="0"/>
-                          <a:ea typeface="Calibri" pitchFamily="34" charset="-122"/>
-                          <a:cs typeface="Calibri" pitchFamily="34" charset="-120"/>
-                        </a:rPr>
-                        <a:t>5.5% / 0.75% to 0.50%</a:t>
-                      </a:r>
-                      <a:endParaRPr lang="en-US" sz="900" dirty="0">
-                        <a:latin typeface="Calibri" charset="0"/>
-                        <a:ea typeface="Calibri" charset="0"/>
-                        <a:cs typeface="Calibri" charset="0"/>
-                      </a:endParaRPr>
-                    </a:p>
-                  </a:txBody>
-                  <a:tcPr marL="63500" marR="63500" marT="25400" marB="25400" anchor="ctr">
-                    <a:lnL w="6350" cap="flat" cmpd="sng" algn="ctr">
-                      <a:solidFill>
-                        <a:srgbClr val="D4E0D8"/>
-                      </a:solidFill>
-                      <a:prstDash val="solid"/>
-                      <a:round/>
-                      <a:headEnd type="none" w="med" len="med"/>
-                      <a:tailEnd type="none" w="med" len="med"/>
-                    </a:lnL>
-                    <a:lnR w="6350" cap="flat" cmpd="sng" algn="ctr">
-                      <a:solidFill>
-                        <a:srgbClr val="D4E0D8"/>
-                      </a:solidFill>
-                      <a:prstDash val="solid"/>
-                      <a:round/>
-                      <a:headEnd type="none" w="med" len="med"/>
-                      <a:tailEnd type="none" w="med" len="med"/>
-                    </a:lnR>
-                    <a:lnT w="6350" cap="flat" cmpd="sng" algn="ctr">
-                      <a:solidFill>
-                        <a:srgbClr val="D4E0D8"/>
-                      </a:solidFill>
-                      <a:prstDash val="solid"/>
-                      <a:round/>
-                      <a:headEnd type="none" w="med" len="med"/>
-                      <a:tailEnd type="none" w="med" len="med"/>
-                    </a:lnT>
-                    <a:lnB w="6350" cap="flat" cmpd="sng" algn="ctr">
-                      <a:solidFill>
-                        <a:srgbClr val="D4E0D8"/>
-                      </a:solidFill>
-                      <a:prstDash val="solid"/>
-                      <a:round/>
-                      <a:headEnd type="none" w="med" len="med"/>
-                      <a:tailEnd type="none" w="med" len="med"/>
-                    </a:lnB>
-                  </a:tcPr>
-                </a:tc>
-              </a:tr>
-              <a:tr h="194767">
-                <a:tc>
-                  <a:txBody>
-                    <a:bodyPr/>
-                    <a:lstStyle/>
-                    <a:p>
-                      <a:pPr indent="0" marL="0">
-                        <a:buNone/>
-                      </a:pPr>
-                      <a:r>
-                        <a:rPr lang="en-US" sz="900" dirty="0">
-                          <a:solidFill>
-                            <a:srgbClr val="3A4A42"/>
-                          </a:solidFill>
-                          <a:latin typeface="Calibri" pitchFamily="34" charset="0"/>
-                          <a:ea typeface="Calibri" pitchFamily="34" charset="-122"/>
-                          <a:cs typeface="Calibri" pitchFamily="34" charset="-120"/>
-                        </a:rPr>
-                        <a:t>Bad debt, Y1 to Y5</a:t>
-                      </a:r>
-                      <a:endParaRPr lang="en-US" sz="900" dirty="0">
-                        <a:latin typeface="Calibri" charset="0"/>
-                        <a:ea typeface="Calibri" charset="0"/>
-                        <a:cs typeface="Calibri" charset="0"/>
-                      </a:endParaRPr>
-                    </a:p>
-                  </a:txBody>
-                  <a:tcPr marL="63500" marR="63500" marT="25400" marB="25400" anchor="ctr">
-                    <a:lnL w="6350" cap="flat" cmpd="sng" algn="ctr">
-                      <a:solidFill>
-                        <a:srgbClr val="D4E0D8"/>
-                      </a:solidFill>
-                      <a:prstDash val="solid"/>
-                      <a:round/>
-                      <a:headEnd type="none" w="med" len="med"/>
-                      <a:tailEnd type="none" w="med" len="med"/>
-                    </a:lnL>
-                    <a:lnR w="6350" cap="flat" cmpd="sng" algn="ctr">
-                      <a:solidFill>
-                        <a:srgbClr val="D4E0D8"/>
-                      </a:solidFill>
-                      <a:prstDash val="solid"/>
-                      <a:round/>
-                      <a:headEnd type="none" w="med" len="med"/>
-                      <a:tailEnd type="none" w="med" len="med"/>
-                    </a:lnR>
-                    <a:lnT w="6350" cap="flat" cmpd="sng" algn="ctr">
-                      <a:solidFill>
-                        <a:srgbClr val="D4E0D8"/>
-                      </a:solidFill>
-                      <a:prstDash val="solid"/>
-                      <a:round/>
-                      <a:headEnd type="none" w="med" len="med"/>
-                      <a:tailEnd type="none" w="med" len="med"/>
-                    </a:lnT>
-                    <a:lnB w="6350" cap="flat" cmpd="sng" algn="ctr">
-                      <a:solidFill>
-                        <a:srgbClr val="D4E0D8"/>
-                      </a:solidFill>
-                      <a:prstDash val="solid"/>
-                      <a:round/>
-                      <a:headEnd type="none" w="med" len="med"/>
-                      <a:tailEnd type="none" w="med" len="med"/>
-                    </a:lnB>
-                  </a:tcPr>
-                </a:tc>
-                <a:tc>
-                  <a:txBody>
-                    <a:bodyPr/>
-                    <a:lstStyle/>
-                    <a:p>
-                      <a:pPr algn="r" indent="0" marL="0">
-                        <a:buNone/>
-                      </a:pPr>
-                      <a:r>
-                        <a:rPr lang="en-US" sz="900" b="1" dirty="0">
-                          <a:solidFill>
-                            <a:srgbClr val="13201A"/>
-                          </a:solidFill>
-                          <a:latin typeface="Calibri" pitchFamily="34" charset="0"/>
-                          <a:ea typeface="Calibri" pitchFamily="34" charset="-122"/>
-                          <a:cs typeface="Calibri" pitchFamily="34" charset="-120"/>
-                        </a:rPr>
-                        <a:t>1.50% to 1.00%</a:t>
-                      </a:r>
-                      <a:endParaRPr lang="en-US" sz="900" dirty="0">
-                        <a:latin typeface="Calibri" charset="0"/>
-                        <a:ea typeface="Calibri" charset="0"/>
-                        <a:cs typeface="Calibri" charset="0"/>
-                      </a:endParaRPr>
-                    </a:p>
-                  </a:txBody>
-                  <a:tcPr marL="63500" marR="63500" marT="25400" marB="25400" anchor="ctr">
-                    <a:lnL w="6350" cap="flat" cmpd="sng" algn="ctr">
-                      <a:solidFill>
-                        <a:srgbClr val="D4E0D8"/>
-                      </a:solidFill>
-                      <a:prstDash val="solid"/>
-                      <a:round/>
-                      <a:headEnd type="none" w="med" len="med"/>
-                      <a:tailEnd type="none" w="med" len="med"/>
-                    </a:lnL>
-                    <a:lnR w="6350" cap="flat" cmpd="sng" algn="ctr">
-                      <a:solidFill>
-                        <a:srgbClr val="D4E0D8"/>
-                      </a:solidFill>
-                      <a:prstDash val="solid"/>
-                      <a:round/>
-                      <a:headEnd type="none" w="med" len="med"/>
-                      <a:tailEnd type="none" w="med" len="med"/>
-                    </a:lnR>
-                    <a:lnT w="6350" cap="flat" cmpd="sng" algn="ctr">
-                      <a:solidFill>
-                        <a:srgbClr val="D4E0D8"/>
-                      </a:solidFill>
-                      <a:prstDash val="solid"/>
-                      <a:round/>
-                      <a:headEnd type="none" w="med" len="med"/>
-                      <a:tailEnd type="none" w="med" len="med"/>
-                    </a:lnT>
-                    <a:lnB w="6350" cap="flat" cmpd="sng" algn="ctr">
-                      <a:solidFill>
-                        <a:srgbClr val="D4E0D8"/>
-                      </a:solidFill>
-                      <a:prstDash val="solid"/>
-                      <a:round/>
-                      <a:headEnd type="none" w="med" len="med"/>
-                      <a:tailEnd type="none" w="med" len="med"/>
-                    </a:lnB>
-                  </a:tcPr>
-                </a:tc>
-              </a:tr>
-              <a:tr h="194767">
-                <a:tc>
-                  <a:txBody>
-                    <a:bodyPr/>
-                    <a:lstStyle/>
-                    <a:p>
-                      <a:pPr indent="0" marL="0">
-                        <a:buNone/>
-                      </a:pPr>
-                      <a:r>
-                        <a:rPr lang="en-US" sz="900" dirty="0">
-                          <a:solidFill>
-                            <a:srgbClr val="3A4A42"/>
-                          </a:solidFill>
-                          <a:latin typeface="Calibri" pitchFamily="34" charset="0"/>
-                          <a:ea typeface="Calibri" pitchFamily="34" charset="-122"/>
-                          <a:cs typeface="Calibri" pitchFamily="34" charset="-120"/>
-                        </a:rPr>
-                        <a:t>Track A — start / pace / cost / premium</a:t>
-                      </a:r>
-                      <a:endParaRPr lang="en-US" sz="900" dirty="0">
-                        <a:latin typeface="Calibri" charset="0"/>
-                        <a:ea typeface="Calibri" charset="0"/>
-                        <a:cs typeface="Calibri" charset="0"/>
-                      </a:endParaRPr>
-                    </a:p>
-                  </a:txBody>
-                  <a:tcPr marL="63500" marR="63500" marT="25400" marB="25400" anchor="ctr">
-                    <a:lnL w="6350" cap="flat" cmpd="sng" algn="ctr">
-                      <a:solidFill>
-                        <a:srgbClr val="D4E0D8"/>
-                      </a:solidFill>
-                      <a:prstDash val="solid"/>
-                      <a:round/>
-                      <a:headEnd type="none" w="med" len="med"/>
-                      <a:tailEnd type="none" w="med" len="med"/>
-                    </a:lnL>
-                    <a:lnR w="6350" cap="flat" cmpd="sng" algn="ctr">
-                      <a:solidFill>
-                        <a:srgbClr val="D4E0D8"/>
-                      </a:solidFill>
-                      <a:prstDash val="solid"/>
-                      <a:round/>
-                      <a:headEnd type="none" w="med" len="med"/>
-                      <a:tailEnd type="none" w="med" len="med"/>
-                    </a:lnR>
-                    <a:lnT w="6350" cap="flat" cmpd="sng" algn="ctr">
-                      <a:solidFill>
-                        <a:srgbClr val="D4E0D8"/>
-                      </a:solidFill>
-                      <a:prstDash val="solid"/>
-                      <a:round/>
-                      <a:headEnd type="none" w="med" len="med"/>
-                      <a:tailEnd type="none" w="med" len="med"/>
-                    </a:lnT>
-                    <a:lnB w="6350" cap="flat" cmpd="sng" algn="ctr">
-                      <a:solidFill>
-                        <a:srgbClr val="D4E0D8"/>
-                      </a:solidFill>
-                      <a:prstDash val="solid"/>
-                      <a:round/>
-                      <a:headEnd type="none" w="med" len="med"/>
-                      <a:tailEnd type="none" w="med" len="med"/>
-                    </a:lnB>
-                  </a:tcPr>
-                </a:tc>
-                <a:tc>
-                  <a:txBody>
-                    <a:bodyPr/>
-                    <a:lstStyle/>
-                    <a:p>
-                      <a:pPr algn="r" indent="0" marL="0">
-                        <a:buNone/>
-                      </a:pPr>
-                      <a:r>
-                        <a:rPr lang="en-US" sz="900" b="1" dirty="0">
-                          <a:solidFill>
-                            <a:srgbClr val="13201A"/>
-                          </a:solidFill>
-                          <a:latin typeface="Calibri" pitchFamily="34" charset="0"/>
-                          <a:ea typeface="Calibri" pitchFamily="34" charset="-122"/>
-                          <a:cs typeface="Calibri" pitchFamily="34" charset="-120"/>
-                        </a:rPr>
-                        <a:t>mo 2 / 10 / $10,000 / $100</a:t>
-                      </a:r>
-                      <a:endParaRPr lang="en-US" sz="900" dirty="0">
-                        <a:latin typeface="Calibri" charset="0"/>
-                        <a:ea typeface="Calibri" charset="0"/>
-                        <a:cs typeface="Calibri" charset="0"/>
-                      </a:endParaRPr>
-                    </a:p>
-                  </a:txBody>
-                  <a:tcPr marL="63500" marR="63500" marT="25400" marB="25400" anchor="ctr">
-                    <a:lnL w="6350" cap="flat" cmpd="sng" algn="ctr">
-                      <a:solidFill>
-                        <a:srgbClr val="D4E0D8"/>
-                      </a:solidFill>
-                      <a:prstDash val="solid"/>
-                      <a:round/>
-                      <a:headEnd type="none" w="med" len="med"/>
-                      <a:tailEnd type="none" w="med" len="med"/>
-                    </a:lnL>
-                    <a:lnR w="6350" cap="flat" cmpd="sng" algn="ctr">
-                      <a:solidFill>
-                        <a:srgbClr val="D4E0D8"/>
-                      </a:solidFill>
-                      <a:prstDash val="solid"/>
-                      <a:round/>
-                      <a:headEnd type="none" w="med" len="med"/>
-                      <a:tailEnd type="none" w="med" len="med"/>
-                    </a:lnR>
-                    <a:lnT w="6350" cap="flat" cmpd="sng" algn="ctr">
-                      <a:solidFill>
-                        <a:srgbClr val="D4E0D8"/>
-                      </a:solidFill>
-                      <a:prstDash val="solid"/>
-                      <a:round/>
-                      <a:headEnd type="none" w="med" len="med"/>
-                      <a:tailEnd type="none" w="med" len="med"/>
-                    </a:lnT>
-                    <a:lnB w="6350" cap="flat" cmpd="sng" algn="ctr">
-                      <a:solidFill>
-                        <a:srgbClr val="D4E0D8"/>
-                      </a:solidFill>
-                      <a:prstDash val="solid"/>
-                      <a:round/>
-                      <a:headEnd type="none" w="med" len="med"/>
-                      <a:tailEnd type="none" w="med" len="med"/>
-                    </a:lnB>
-                  </a:tcPr>
-                </a:tc>
-              </a:tr>
-              <a:tr h="194767">
-                <a:tc>
-                  <a:txBody>
-                    <a:bodyPr/>
-                    <a:lstStyle/>
-                    <a:p>
-                      <a:pPr indent="0" marL="0">
-                        <a:buNone/>
-                      </a:pPr>
-                      <a:r>
-                        <a:rPr lang="en-US" sz="900" dirty="0">
-                          <a:solidFill>
-                            <a:srgbClr val="3A4A42"/>
-                          </a:solidFill>
-                          <a:latin typeface="Calibri" pitchFamily="34" charset="0"/>
-                          <a:ea typeface="Calibri" pitchFamily="34" charset="-122"/>
-                          <a:cs typeface="Calibri" pitchFamily="34" charset="-120"/>
-                        </a:rPr>
-                        <a:t>Track B — start / pace / cost / premium</a:t>
-                      </a:r>
-                      <a:endParaRPr lang="en-US" sz="900" dirty="0">
-                        <a:latin typeface="Calibri" charset="0"/>
-                        <a:ea typeface="Calibri" charset="0"/>
-                        <a:cs typeface="Calibri" charset="0"/>
-                      </a:endParaRPr>
-                    </a:p>
-                  </a:txBody>
-                  <a:tcPr marL="63500" marR="63500" marT="25400" marB="25400" anchor="ctr">
-                    <a:lnL w="6350" cap="flat" cmpd="sng" algn="ctr">
-                      <a:solidFill>
-                        <a:srgbClr val="D4E0D8"/>
-                      </a:solidFill>
-                      <a:prstDash val="solid"/>
-                      <a:round/>
-                      <a:headEnd type="none" w="med" len="med"/>
-                      <a:tailEnd type="none" w="med" len="med"/>
-                    </a:lnL>
-                    <a:lnR w="6350" cap="flat" cmpd="sng" algn="ctr">
-                      <a:solidFill>
-                        <a:srgbClr val="D4E0D8"/>
-                      </a:solidFill>
-                      <a:prstDash val="solid"/>
-                      <a:round/>
-                      <a:headEnd type="none" w="med" len="med"/>
-                      <a:tailEnd type="none" w="med" len="med"/>
-                    </a:lnR>
-                    <a:lnT w="6350" cap="flat" cmpd="sng" algn="ctr">
-                      <a:solidFill>
-                        <a:srgbClr val="D4E0D8"/>
-                      </a:solidFill>
-                      <a:prstDash val="solid"/>
-                      <a:round/>
-                      <a:headEnd type="none" w="med" len="med"/>
-                      <a:tailEnd type="none" w="med" len="med"/>
-                    </a:lnT>
-                    <a:lnB w="6350" cap="flat" cmpd="sng" algn="ctr">
-                      <a:solidFill>
-                        <a:srgbClr val="D4E0D8"/>
-                      </a:solidFill>
-                      <a:prstDash val="solid"/>
-                      <a:round/>
-                      <a:headEnd type="none" w="med" len="med"/>
-                      <a:tailEnd type="none" w="med" len="med"/>
-                    </a:lnB>
-                  </a:tcPr>
-                </a:tc>
-                <a:tc>
-                  <a:txBody>
-                    <a:bodyPr/>
-                    <a:lstStyle/>
-                    <a:p>
-                      <a:pPr algn="r" indent="0" marL="0">
-                        <a:buNone/>
-                      </a:pPr>
-                      <a:r>
-                        <a:rPr lang="en-US" sz="900" b="1" dirty="0">
-                          <a:solidFill>
-                            <a:srgbClr val="13201A"/>
-                          </a:solidFill>
-                          <a:latin typeface="Calibri" pitchFamily="34" charset="0"/>
-                          <a:ea typeface="Calibri" pitchFamily="34" charset="-122"/>
-                          <a:cs typeface="Calibri" pitchFamily="34" charset="-120"/>
-                        </a:rPr>
-                        <a:t>mo 4 / 5 / $18,000 / $200</a:t>
-                      </a:r>
-                      <a:endParaRPr lang="en-US" sz="900" dirty="0">
-                        <a:latin typeface="Calibri" charset="0"/>
-                        <a:ea typeface="Calibri" charset="0"/>
-                        <a:cs typeface="Calibri" charset="0"/>
-                      </a:endParaRPr>
-                    </a:p>
-                  </a:txBody>
-                  <a:tcPr marL="63500" marR="63500" marT="25400" marB="25400" anchor="ctr">
-                    <a:lnL w="6350" cap="flat" cmpd="sng" algn="ctr">
-                      <a:solidFill>
-                        <a:srgbClr val="D4E0D8"/>
-                      </a:solidFill>
-                      <a:prstDash val="solid"/>
-                      <a:round/>
-                      <a:headEnd type="none" w="med" len="med"/>
-                      <a:tailEnd type="none" w="med" len="med"/>
-                    </a:lnL>
-                    <a:lnR w="6350" cap="flat" cmpd="sng" algn="ctr">
-                      <a:solidFill>
-                        <a:srgbClr val="D4E0D8"/>
-                      </a:solidFill>
-                      <a:prstDash val="solid"/>
-                      <a:round/>
-                      <a:headEnd type="none" w="med" len="med"/>
-                      <a:tailEnd type="none" w="med" len="med"/>
-                    </a:lnR>
-                    <a:lnT w="6350" cap="flat" cmpd="sng" algn="ctr">
-                      <a:solidFill>
-                        <a:srgbClr val="D4E0D8"/>
-                      </a:solidFill>
-                      <a:prstDash val="solid"/>
-                      <a:round/>
-                      <a:headEnd type="none" w="med" len="med"/>
-                      <a:tailEnd type="none" w="med" len="med"/>
-                    </a:lnT>
-                    <a:lnB w="6350" cap="flat" cmpd="sng" algn="ctr">
-                      <a:solidFill>
-                        <a:srgbClr val="D4E0D8"/>
-                      </a:solidFill>
-                      <a:prstDash val="solid"/>
-                      <a:round/>
-                      <a:headEnd type="none" w="med" len="med"/>
-                      <a:tailEnd type="none" w="med" len="med"/>
-                    </a:lnB>
-                  </a:tcPr>
-                </a:tc>
-              </a:tr>
-              <a:tr h="194767">
-                <a:tc>
-                  <a:txBody>
-                    <a:bodyPr/>
-                    <a:lstStyle/>
-                    <a:p>
-                      <a:pPr indent="0" marL="0">
-                        <a:buNone/>
-                      </a:pPr>
-                      <a:r>
-                        <a:rPr lang="en-US" sz="900" dirty="0">
-                          <a:solidFill>
-                            <a:srgbClr val="3A4A42"/>
-                          </a:solidFill>
-                          <a:latin typeface="Calibri" pitchFamily="34" charset="0"/>
-                          <a:ea typeface="Calibri" pitchFamily="34" charset="-122"/>
-                          <a:cs typeface="Calibri" pitchFamily="34" charset="-120"/>
-                        </a:rPr>
-                        <a:t>Blended cost / premium / return on cost</a:t>
-                      </a:r>
-                      <a:endParaRPr lang="en-US" sz="900" dirty="0">
-                        <a:latin typeface="Calibri" charset="0"/>
-                        <a:ea typeface="Calibri" charset="0"/>
-                        <a:cs typeface="Calibri" charset="0"/>
-                      </a:endParaRPr>
-                    </a:p>
-                  </a:txBody>
-                  <a:tcPr marL="63500" marR="63500" marT="25400" marB="25400" anchor="ctr">
-                    <a:lnL w="6350" cap="flat" cmpd="sng" algn="ctr">
-                      <a:solidFill>
-                        <a:srgbClr val="D4E0D8"/>
-                      </a:solidFill>
-                      <a:prstDash val="solid"/>
-                      <a:round/>
-                      <a:headEnd type="none" w="med" len="med"/>
-                      <a:tailEnd type="none" w="med" len="med"/>
-                    </a:lnL>
-                    <a:lnR w="6350" cap="flat" cmpd="sng" algn="ctr">
-                      <a:solidFill>
-                        <a:srgbClr val="D4E0D8"/>
-                      </a:solidFill>
-                      <a:prstDash val="solid"/>
-                      <a:round/>
-                      <a:headEnd type="none" w="med" len="med"/>
-                      <a:tailEnd type="none" w="med" len="med"/>
-                    </a:lnR>
-                    <a:lnT w="6350" cap="flat" cmpd="sng" algn="ctr">
-                      <a:solidFill>
-                        <a:srgbClr val="D4E0D8"/>
-                      </a:solidFill>
-                      <a:prstDash val="solid"/>
-                      <a:round/>
-                      <a:headEnd type="none" w="med" len="med"/>
-                      <a:tailEnd type="none" w="med" len="med"/>
-                    </a:lnT>
-                    <a:lnB w="6350" cap="flat" cmpd="sng" algn="ctr">
-                      <a:solidFill>
-                        <a:srgbClr val="D4E0D8"/>
-                      </a:solidFill>
-                      <a:prstDash val="solid"/>
-                      <a:round/>
-                      <a:headEnd type="none" w="med" len="med"/>
-                      <a:tailEnd type="none" w="med" len="med"/>
-                    </a:lnB>
-                  </a:tcPr>
-                </a:tc>
-                <a:tc>
-                  <a:txBody>
-                    <a:bodyPr/>
-                    <a:lstStyle/>
-                    <a:p>
-                      <a:pPr algn="r" indent="0" marL="0">
-                        <a:buNone/>
-                      </a:pPr>
-                      <a:r>
-                        <a:rPr lang="en-US" sz="900" b="1" dirty="0">
-                          <a:solidFill>
-                            <a:srgbClr val="13201A"/>
-                          </a:solidFill>
-                          <a:latin typeface="Calibri" pitchFamily="34" charset="0"/>
-                          <a:ea typeface="Calibri" pitchFamily="34" charset="-122"/>
-                          <a:cs typeface="Calibri" pitchFamily="34" charset="-120"/>
-                        </a:rPr>
-                        <a:t>$14,407 / $155 / 12.9%</a:t>
-                      </a:r>
-                      <a:endParaRPr lang="en-US" sz="900" dirty="0">
-                        <a:latin typeface="Calibri" charset="0"/>
-                        <a:ea typeface="Calibri" charset="0"/>
-                        <a:cs typeface="Calibri" charset="0"/>
-                      </a:endParaRPr>
-                    </a:p>
-                  </a:txBody>
-                  <a:tcPr marL="63500" marR="63500" marT="25400" marB="25400" anchor="ctr">
-                    <a:lnL w="6350" cap="flat" cmpd="sng" algn="ctr">
-                      <a:solidFill>
-                        <a:srgbClr val="D4E0D8"/>
-                      </a:solidFill>
-                      <a:prstDash val="solid"/>
-                      <a:round/>
-                      <a:headEnd type="none" w="med" len="med"/>
-                      <a:tailEnd type="none" w="med" len="med"/>
-                    </a:lnL>
-                    <a:lnR w="6350" cap="flat" cmpd="sng" algn="ctr">
-                      <a:solidFill>
-                        <a:srgbClr val="D4E0D8"/>
-                      </a:solidFill>
-                      <a:prstDash val="solid"/>
-                      <a:round/>
-                      <a:headEnd type="none" w="med" len="med"/>
-                      <a:tailEnd type="none" w="med" len="med"/>
-                    </a:lnR>
-                    <a:lnT w="6350" cap="flat" cmpd="sng" algn="ctr">
-                      <a:solidFill>
-                        <a:srgbClr val="D4E0D8"/>
-                      </a:solidFill>
-                      <a:prstDash val="solid"/>
-                      <a:round/>
-                      <a:headEnd type="none" w="med" len="med"/>
-                      <a:tailEnd type="none" w="med" len="med"/>
-                    </a:lnT>
-                    <a:lnB w="6350" cap="flat" cmpd="sng" algn="ctr">
-                      <a:solidFill>
-                        <a:srgbClr val="D4E0D8"/>
-                      </a:solidFill>
-                      <a:prstDash val="solid"/>
-                      <a:round/>
-                      <a:headEnd type="none" w="med" len="med"/>
-                      <a:tailEnd type="none" w="med" len="med"/>
-                    </a:lnB>
-                  </a:tcPr>
-                </a:tc>
-              </a:tr>
-              <a:tr h="194767">
-                <a:tc>
-                  <a:txBody>
-                    <a:bodyPr/>
-                    <a:lstStyle/>
-                    <a:p>
-                      <a:pPr indent="0" marL="0">
-                        <a:buNone/>
-                      </a:pPr>
-                      <a:r>
-                        <a:rPr lang="en-US" sz="900" dirty="0">
-                          <a:solidFill>
-                            <a:srgbClr val="3A4A42"/>
-                          </a:solidFill>
-                          <a:latin typeface="Calibri" pitchFamily="34" charset="0"/>
-                          <a:ea typeface="Calibri" pitchFamily="34" charset="-122"/>
-                          <a:cs typeface="Calibri" pitchFamily="34" charset="-120"/>
-                        </a:rPr>
-                        <a:t>Renovation downtime, Track B</a:t>
-                      </a:r>
-                      <a:endParaRPr lang="en-US" sz="900" dirty="0">
-                        <a:latin typeface="Calibri" charset="0"/>
-                        <a:ea typeface="Calibri" charset="0"/>
-                        <a:cs typeface="Calibri" charset="0"/>
-                      </a:endParaRPr>
-                    </a:p>
-                  </a:txBody>
-                  <a:tcPr marL="63500" marR="63500" marT="25400" marB="25400" anchor="ctr">
-                    <a:lnL w="6350" cap="flat" cmpd="sng" algn="ctr">
-                      <a:solidFill>
-                        <a:srgbClr val="D4E0D8"/>
-                      </a:solidFill>
-                      <a:prstDash val="solid"/>
-                      <a:round/>
-                      <a:headEnd type="none" w="med" len="med"/>
-                      <a:tailEnd type="none" w="med" len="med"/>
-                    </a:lnL>
-                    <a:lnR w="6350" cap="flat" cmpd="sng" algn="ctr">
-                      <a:solidFill>
-                        <a:srgbClr val="D4E0D8"/>
-                      </a:solidFill>
-                      <a:prstDash val="solid"/>
-                      <a:round/>
-                      <a:headEnd type="none" w="med" len="med"/>
-                      <a:tailEnd type="none" w="med" len="med"/>
-                    </a:lnR>
-                    <a:lnT w="6350" cap="flat" cmpd="sng" algn="ctr">
-                      <a:solidFill>
-                        <a:srgbClr val="D4E0D8"/>
-                      </a:solidFill>
-                      <a:prstDash val="solid"/>
-                      <a:round/>
-                      <a:headEnd type="none" w="med" len="med"/>
-                      <a:tailEnd type="none" w="med" len="med"/>
-                    </a:lnT>
-                    <a:lnB w="6350" cap="flat" cmpd="sng" algn="ctr">
-                      <a:solidFill>
-                        <a:srgbClr val="D4E0D8"/>
-                      </a:solidFill>
-                      <a:prstDash val="solid"/>
-                      <a:round/>
-                      <a:headEnd type="none" w="med" len="med"/>
-                      <a:tailEnd type="none" w="med" len="med"/>
-                    </a:lnB>
-                  </a:tcPr>
-                </a:tc>
-                <a:tc>
-                  <a:txBody>
-                    <a:bodyPr/>
-                    <a:lstStyle/>
-                    <a:p>
-                      <a:pPr algn="r" indent="0" marL="0">
-                        <a:buNone/>
-                      </a:pPr>
-                      <a:r>
-                        <a:rPr lang="en-US" sz="900" b="1" dirty="0">
-                          <a:solidFill>
-                            <a:srgbClr val="13201A"/>
-                          </a:solidFill>
-                          <a:latin typeface="Calibri" pitchFamily="34" charset="0"/>
-                          <a:ea typeface="Calibri" pitchFamily="34" charset="-122"/>
-                          <a:cs typeface="Calibri" pitchFamily="34" charset="-120"/>
-                        </a:rPr>
-                        <a:t>14 incremental days</a:t>
-                      </a:r>
-                      <a:endParaRPr lang="en-US" sz="900" dirty="0">
-                        <a:latin typeface="Calibri" charset="0"/>
-                        <a:ea typeface="Calibri" charset="0"/>
-                        <a:cs typeface="Calibri" charset="0"/>
-                      </a:endParaRPr>
-                    </a:p>
-                  </a:txBody>
-                  <a:tcPr marL="63500" marR="63500" marT="25400" marB="25400" anchor="ctr">
-                    <a:lnL w="6350" cap="flat" cmpd="sng" algn="ctr">
-                      <a:solidFill>
-                        <a:srgbClr val="D4E0D8"/>
-                      </a:solidFill>
-                      <a:prstDash val="solid"/>
-                      <a:round/>
-                      <a:headEnd type="none" w="med" len="med"/>
-                      <a:tailEnd type="none" w="med" len="med"/>
-                    </a:lnL>
-                    <a:lnR w="6350" cap="flat" cmpd="sng" algn="ctr">
-                      <a:solidFill>
-                        <a:srgbClr val="D4E0D8"/>
-                      </a:solidFill>
-                      <a:prstDash val="solid"/>
-                      <a:round/>
-                      <a:headEnd type="none" w="med" len="med"/>
-                      <a:tailEnd type="none" w="med" len="med"/>
-                    </a:lnR>
-                    <a:lnT w="6350" cap="flat" cmpd="sng" algn="ctr">
-                      <a:solidFill>
-                        <a:srgbClr val="D4E0D8"/>
-                      </a:solidFill>
-                      <a:prstDash val="solid"/>
-                      <a:round/>
-                      <a:headEnd type="none" w="med" len="med"/>
-                      <a:tailEnd type="none" w="med" len="med"/>
-                    </a:lnT>
-                    <a:lnB w="6350" cap="flat" cmpd="sng" algn="ctr">
-                      <a:solidFill>
-                        <a:srgbClr val="D4E0D8"/>
-                      </a:solidFill>
-                      <a:prstDash val="solid"/>
-                      <a:round/>
-                      <a:headEnd type="none" w="med" len="med"/>
-                      <a:tailEnd type="none" w="med" len="med"/>
-                    </a:lnB>
-                  </a:tcPr>
-                </a:tc>
-              </a:tr>
-              <a:tr h="194767">
-                <a:tc>
-                  <a:txBody>
-                    <a:bodyPr/>
-                    <a:lstStyle/>
-                    <a:p>
-                      <a:pPr indent="0" marL="0">
-                        <a:buNone/>
-                      </a:pPr>
-                      <a:r>
-                        <a:rPr lang="en-US" sz="900" dirty="0">
-                          <a:solidFill>
-                            <a:srgbClr val="3A4A42"/>
-                          </a:solidFill>
-                          <a:latin typeface="Calibri" pitchFamily="34" charset="0"/>
-                          <a:ea typeface="Calibri" pitchFamily="34" charset="-122"/>
-                          <a:cs typeface="Calibri" pitchFamily="34" charset="-120"/>
-                        </a:rPr>
-                        <a:t>Non-unit capital + 8% contingency</a:t>
-                      </a:r>
-                      <a:endParaRPr lang="en-US" sz="900" dirty="0">
-                        <a:latin typeface="Calibri" charset="0"/>
-                        <a:ea typeface="Calibri" charset="0"/>
-                        <a:cs typeface="Calibri" charset="0"/>
-                      </a:endParaRPr>
-                    </a:p>
-                  </a:txBody>
-                  <a:tcPr marL="63500" marR="63500" marT="25400" marB="25400" anchor="ctr">
-                    <a:lnL w="6350" cap="flat" cmpd="sng" algn="ctr">
-                      <a:solidFill>
-                        <a:srgbClr val="D4E0D8"/>
-                      </a:solidFill>
-                      <a:prstDash val="solid"/>
-                      <a:round/>
-                      <a:headEnd type="none" w="med" len="med"/>
-                      <a:tailEnd type="none" w="med" len="med"/>
-                    </a:lnL>
-                    <a:lnR w="6350" cap="flat" cmpd="sng" algn="ctr">
-                      <a:solidFill>
-                        <a:srgbClr val="D4E0D8"/>
-                      </a:solidFill>
-                      <a:prstDash val="solid"/>
-                      <a:round/>
-                      <a:headEnd type="none" w="med" len="med"/>
-                      <a:tailEnd type="none" w="med" len="med"/>
-                    </a:lnR>
-                    <a:lnT w="6350" cap="flat" cmpd="sng" algn="ctr">
-                      <a:solidFill>
-                        <a:srgbClr val="D4E0D8"/>
-                      </a:solidFill>
-                      <a:prstDash val="solid"/>
-                      <a:round/>
-                      <a:headEnd type="none" w="med" len="med"/>
-                      <a:tailEnd type="none" w="med" len="med"/>
-                    </a:lnT>
-                    <a:lnB w="6350" cap="flat" cmpd="sng" algn="ctr">
-                      <a:solidFill>
-                        <a:srgbClr val="D4E0D8"/>
-                      </a:solidFill>
-                      <a:prstDash val="solid"/>
-                      <a:round/>
-                      <a:headEnd type="none" w="med" len="med"/>
-                      <a:tailEnd type="none" w="med" len="med"/>
-                    </a:lnB>
-                  </a:tcPr>
-                </a:tc>
-                <a:tc>
-                  <a:txBody>
-                    <a:bodyPr/>
-                    <a:lstStyle/>
-                    <a:p>
-                      <a:pPr algn="r" indent="0" marL="0">
-                        <a:buNone/>
-                      </a:pPr>
-                      <a:r>
-                        <a:rPr lang="en-US" sz="900" b="1" dirty="0">
-                          <a:solidFill>
-                            <a:srgbClr val="13201A"/>
-                          </a:solidFill>
-                          <a:latin typeface="Calibri" pitchFamily="34" charset="0"/>
-                          <a:ea typeface="Calibri" pitchFamily="34" charset="-122"/>
-                          <a:cs typeface="Calibri" pitchFamily="34" charset="-120"/>
-                        </a:rPr>
-                        <a:t>$1,199,800</a:t>
-                      </a:r>
-                      <a:endParaRPr lang="en-US" sz="900" dirty="0">
-                        <a:latin typeface="Calibri" charset="0"/>
-                        <a:ea typeface="Calibri" charset="0"/>
-                        <a:cs typeface="Calibri" charset="0"/>
-                      </a:endParaRPr>
-                    </a:p>
-                  </a:txBody>
-                  <a:tcPr marL="63500" marR="63500" marT="25400" marB="25400" anchor="ctr">
-                    <a:lnL w="6350" cap="flat" cmpd="sng" algn="ctr">
-                      <a:solidFill>
-                        <a:srgbClr val="D4E0D8"/>
-                      </a:solidFill>
-                      <a:prstDash val="solid"/>
-                      <a:round/>
-                      <a:headEnd type="none" w="med" len="med"/>
-                      <a:tailEnd type="none" w="med" len="med"/>
-                    </a:lnL>
-                    <a:lnR w="6350" cap="flat" cmpd="sng" algn="ctr">
-                      <a:solidFill>
-                        <a:srgbClr val="D4E0D8"/>
-                      </a:solidFill>
-                      <a:prstDash val="solid"/>
-                      <a:round/>
-                      <a:headEnd type="none" w="med" len="med"/>
-                      <a:tailEnd type="none" w="med" len="med"/>
-                    </a:lnR>
-                    <a:lnT w="6350" cap="flat" cmpd="sng" algn="ctr">
-                      <a:solidFill>
-                        <a:srgbClr val="D4E0D8"/>
-                      </a:solidFill>
-                      <a:prstDash val="solid"/>
-                      <a:round/>
-                      <a:headEnd type="none" w="med" len="med"/>
-                      <a:tailEnd type="none" w="med" len="med"/>
-                    </a:lnT>
-                    <a:lnB w="6350" cap="flat" cmpd="sng" algn="ctr">
-                      <a:solidFill>
-                        <a:srgbClr val="D4E0D8"/>
-                      </a:solidFill>
-                      <a:prstDash val="solid"/>
-                      <a:round/>
-                      <a:headEnd type="none" w="med" len="med"/>
-                      <a:tailEnd type="none" w="med" len="med"/>
-                    </a:lnB>
-                  </a:tcPr>
-                </a:tc>
-              </a:tr>
-              <a:tr h="194767">
-                <a:tc>
-                  <a:txBody>
-                    <a:bodyPr/>
-                    <a:lstStyle/>
-                    <a:p>
-                      <a:pPr indent="0" marL="0">
-                        <a:buNone/>
-                      </a:pPr>
-                      <a:r>
-                        <a:rPr lang="en-US" sz="900" dirty="0">
-                          <a:solidFill>
-                            <a:srgbClr val="3A4A42"/>
-                          </a:solidFill>
-                          <a:latin typeface="Calibri" pitchFamily="34" charset="0"/>
-                          <a:ea typeface="Calibri" pitchFamily="34" charset="-122"/>
-                          <a:cs typeface="Calibri" pitchFamily="34" charset="-120"/>
-                        </a:rPr>
-                        <a:t>Operating expenses, Year 1</a:t>
-                      </a:r>
-                      <a:endParaRPr lang="en-US" sz="900" dirty="0">
-                        <a:latin typeface="Calibri" charset="0"/>
-                        <a:ea typeface="Calibri" charset="0"/>
-                        <a:cs typeface="Calibri" charset="0"/>
-                      </a:endParaRPr>
-                    </a:p>
-                  </a:txBody>
-                  <a:tcPr marL="63500" marR="63500" marT="25400" marB="25400" anchor="ctr">
-                    <a:lnL w="6350" cap="flat" cmpd="sng" algn="ctr">
-                      <a:solidFill>
-                        <a:srgbClr val="D4E0D8"/>
-                      </a:solidFill>
-                      <a:prstDash val="solid"/>
-                      <a:round/>
-                      <a:headEnd type="none" w="med" len="med"/>
-                      <a:tailEnd type="none" w="med" len="med"/>
-                    </a:lnL>
-                    <a:lnR w="6350" cap="flat" cmpd="sng" algn="ctr">
-                      <a:solidFill>
-                        <a:srgbClr val="D4E0D8"/>
-                      </a:solidFill>
-                      <a:prstDash val="solid"/>
-                      <a:round/>
-                      <a:headEnd type="none" w="med" len="med"/>
-                      <a:tailEnd type="none" w="med" len="med"/>
-                    </a:lnR>
-                    <a:lnT w="6350" cap="flat" cmpd="sng" algn="ctr">
-                      <a:solidFill>
-                        <a:srgbClr val="D4E0D8"/>
-                      </a:solidFill>
-                      <a:prstDash val="solid"/>
-                      <a:round/>
-                      <a:headEnd type="none" w="med" len="med"/>
-                      <a:tailEnd type="none" w="med" len="med"/>
-                    </a:lnT>
-                    <a:lnB w="6350" cap="flat" cmpd="sng" algn="ctr">
-                      <a:solidFill>
-                        <a:srgbClr val="D4E0D8"/>
-                      </a:solidFill>
-                      <a:prstDash val="solid"/>
-                      <a:round/>
-                      <a:headEnd type="none" w="med" len="med"/>
-                      <a:tailEnd type="none" w="med" len="med"/>
-                    </a:lnB>
-                  </a:tcPr>
-                </a:tc>
-                <a:tc>
-                  <a:txBody>
-                    <a:bodyPr/>
-                    <a:lstStyle/>
-                    <a:p>
-                      <a:pPr algn="r" indent="0" marL="0">
-                        <a:buNone/>
-                      </a:pPr>
-                      <a:r>
-                        <a:rPr lang="en-US" sz="900" b="1" dirty="0">
-                          <a:solidFill>
-                            <a:srgbClr val="13201A"/>
-                          </a:solidFill>
-                          <a:latin typeface="Calibri" pitchFamily="34" charset="0"/>
-                          <a:ea typeface="Calibri" pitchFamily="34" charset="-122"/>
-                          <a:cs typeface="Calibri" pitchFamily="34" charset="-120"/>
-                        </a:rPr>
-                        <a:t>$8,929 per unit</a:t>
-                      </a:r>
-                      <a:endParaRPr lang="en-US" sz="900" dirty="0">
-                        <a:latin typeface="Calibri" charset="0"/>
-                        <a:ea typeface="Calibri" charset="0"/>
-                        <a:cs typeface="Calibri" charset="0"/>
-                      </a:endParaRPr>
-                    </a:p>
-                  </a:txBody>
-                  <a:tcPr marL="63500" marR="63500" marT="25400" marB="25400" anchor="ctr">
-                    <a:lnL w="6350" cap="flat" cmpd="sng" algn="ctr">
-                      <a:solidFill>
-                        <a:srgbClr val="D4E0D8"/>
-                      </a:solidFill>
-                      <a:prstDash val="solid"/>
-                      <a:round/>
-                      <a:headEnd type="none" w="med" len="med"/>
-                      <a:tailEnd type="none" w="med" len="med"/>
-                    </a:lnL>
-                    <a:lnR w="6350" cap="flat" cmpd="sng" algn="ctr">
-                      <a:solidFill>
-                        <a:srgbClr val="D4E0D8"/>
-                      </a:solidFill>
-                      <a:prstDash val="solid"/>
-                      <a:round/>
-                      <a:headEnd type="none" w="med" len="med"/>
-                      <a:tailEnd type="none" w="med" len="med"/>
-                    </a:lnR>
-                    <a:lnT w="6350" cap="flat" cmpd="sng" algn="ctr">
-                      <a:solidFill>
-                        <a:srgbClr val="D4E0D8"/>
-                      </a:solidFill>
-                      <a:prstDash val="solid"/>
-                      <a:round/>
-                      <a:headEnd type="none" w="med" len="med"/>
-                      <a:tailEnd type="none" w="med" len="med"/>
-                    </a:lnT>
-                    <a:lnB w="6350" cap="flat" cmpd="sng" algn="ctr">
-                      <a:solidFill>
-                        <a:srgbClr val="D4E0D8"/>
-                      </a:solidFill>
-                      <a:prstDash val="solid"/>
-                      <a:round/>
-                      <a:headEnd type="none" w="med" len="med"/>
-                      <a:tailEnd type="none" w="med" len="med"/>
-                    </a:lnB>
-                  </a:tcPr>
-                </a:tc>
-              </a:tr>
-              <a:tr h="194767">
-                <a:tc>
-                  <a:txBody>
-                    <a:bodyPr/>
-                    <a:lstStyle/>
-                    <a:p>
-                      <a:pPr indent="0" marL="0">
-                        <a:buNone/>
-                      </a:pPr>
-                      <a:r>
-                        <a:rPr lang="en-US" sz="900" dirty="0">
-                          <a:solidFill>
-                            <a:srgbClr val="3A4A42"/>
-                          </a:solidFill>
-                          <a:latin typeface="Calibri" pitchFamily="34" charset="0"/>
-                          <a:ea typeface="Calibri" pitchFamily="34" charset="-122"/>
-                          <a:cs typeface="Calibri" pitchFamily="34" charset="-120"/>
-                        </a:rPr>
-                        <a:t>Real estate taxes, Y1 to Y5</a:t>
-                      </a:r>
-                      <a:endParaRPr lang="en-US" sz="900" dirty="0">
-                        <a:latin typeface="Calibri" charset="0"/>
-                        <a:ea typeface="Calibri" charset="0"/>
-                        <a:cs typeface="Calibri" charset="0"/>
-                      </a:endParaRPr>
-                    </a:p>
-                  </a:txBody>
-                  <a:tcPr marL="63500" marR="63500" marT="25400" marB="25400" anchor="ctr">
-                    <a:lnL w="6350" cap="flat" cmpd="sng" algn="ctr">
-                      <a:solidFill>
-                        <a:srgbClr val="D4E0D8"/>
-                      </a:solidFill>
-                      <a:prstDash val="solid"/>
-                      <a:round/>
-                      <a:headEnd type="none" w="med" len="med"/>
-                      <a:tailEnd type="none" w="med" len="med"/>
-                    </a:lnL>
-                    <a:lnR w="6350" cap="flat" cmpd="sng" algn="ctr">
-                      <a:solidFill>
-                        <a:srgbClr val="D4E0D8"/>
-                      </a:solidFill>
-                      <a:prstDash val="solid"/>
-                      <a:round/>
-                      <a:headEnd type="none" w="med" len="med"/>
-                      <a:tailEnd type="none" w="med" len="med"/>
-                    </a:lnR>
-                    <a:lnT w="6350" cap="flat" cmpd="sng" algn="ctr">
-                      <a:solidFill>
-                        <a:srgbClr val="D4E0D8"/>
-                      </a:solidFill>
-                      <a:prstDash val="solid"/>
-                      <a:round/>
-                      <a:headEnd type="none" w="med" len="med"/>
-                      <a:tailEnd type="none" w="med" len="med"/>
-                    </a:lnT>
-                    <a:lnB w="6350" cap="flat" cmpd="sng" algn="ctr">
-                      <a:solidFill>
-                        <a:srgbClr val="D4E0D8"/>
-                      </a:solidFill>
-                      <a:prstDash val="solid"/>
-                      <a:round/>
-                      <a:headEnd type="none" w="med" len="med"/>
-                      <a:tailEnd type="none" w="med" len="med"/>
-                    </a:lnB>
-                  </a:tcPr>
-                </a:tc>
-                <a:tc>
-                  <a:txBody>
-                    <a:bodyPr/>
-                    <a:lstStyle/>
-                    <a:p>
-                      <a:pPr algn="r" indent="0" marL="0">
-                        <a:buNone/>
-                      </a:pPr>
-                      <a:r>
-                        <a:rPr lang="en-US" sz="900" b="1" dirty="0">
-                          <a:solidFill>
-                            <a:srgbClr val="13201A"/>
-                          </a:solidFill>
-                          <a:latin typeface="Calibri" pitchFamily="34" charset="0"/>
-                          <a:ea typeface="Calibri" pitchFamily="34" charset="-122"/>
-                          <a:cs typeface="Calibri" pitchFamily="34" charset="-120"/>
-                        </a:rPr>
-                        <a:t>$137,000 to $160,300</a:t>
-                      </a:r>
-                      <a:endParaRPr lang="en-US" sz="900" dirty="0">
-                        <a:latin typeface="Calibri" charset="0"/>
-                        <a:ea typeface="Calibri" charset="0"/>
-                        <a:cs typeface="Calibri" charset="0"/>
-                      </a:endParaRPr>
-                    </a:p>
-                  </a:txBody>
-                  <a:tcPr marL="63500" marR="63500" marT="25400" marB="25400" anchor="ctr">
-                    <a:lnL w="6350" cap="flat" cmpd="sng" algn="ctr">
-                      <a:solidFill>
-                        <a:srgbClr val="D4E0D8"/>
-                      </a:solidFill>
-                      <a:prstDash val="solid"/>
-                      <a:round/>
-                      <a:headEnd type="none" w="med" len="med"/>
-                      <a:tailEnd type="none" w="med" len="med"/>
-                    </a:lnL>
-                    <a:lnR w="6350" cap="flat" cmpd="sng" algn="ctr">
-                      <a:solidFill>
-                        <a:srgbClr val="D4E0D8"/>
-                      </a:solidFill>
-                      <a:prstDash val="solid"/>
-                      <a:round/>
-                      <a:headEnd type="none" w="med" len="med"/>
-                      <a:tailEnd type="none" w="med" len="med"/>
-                    </a:lnR>
-                    <a:lnT w="6350" cap="flat" cmpd="sng" algn="ctr">
-                      <a:solidFill>
-                        <a:srgbClr val="D4E0D8"/>
-                      </a:solidFill>
-                      <a:prstDash val="solid"/>
-                      <a:round/>
-                      <a:headEnd type="none" w="med" len="med"/>
-                      <a:tailEnd type="none" w="med" len="med"/>
-                    </a:lnT>
-                    <a:lnB w="6350" cap="flat" cmpd="sng" algn="ctr">
-                      <a:solidFill>
-                        <a:srgbClr val="D4E0D8"/>
-                      </a:solidFill>
-                      <a:prstDash val="solid"/>
-                      <a:round/>
-                      <a:headEnd type="none" w="med" len="med"/>
-                      <a:tailEnd type="none" w="med" len="med"/>
-                    </a:lnB>
-                  </a:tcPr>
-                </a:tc>
-              </a:tr>
-              <a:tr h="194767">
-                <a:tc>
-                  <a:txBody>
-                    <a:bodyPr/>
-                    <a:lstStyle/>
-                    <a:p>
-                      <a:pPr indent="0" marL="0">
-                        <a:buNone/>
-                      </a:pPr>
-                      <a:r>
-                        <a:rPr lang="en-US" sz="900" dirty="0">
-                          <a:solidFill>
-                            <a:srgbClr val="3A4A42"/>
-                          </a:solidFill>
-                          <a:latin typeface="Calibri" pitchFamily="34" charset="0"/>
-                          <a:ea typeface="Calibri" pitchFamily="34" charset="-122"/>
-                          <a:cs typeface="Calibri" pitchFamily="34" charset="-120"/>
-                        </a:rPr>
-                        <a:t>Replacement reserves</a:t>
-                      </a:r>
-                      <a:endParaRPr lang="en-US" sz="900" dirty="0">
-                        <a:latin typeface="Calibri" charset="0"/>
-                        <a:ea typeface="Calibri" charset="0"/>
-                        <a:cs typeface="Calibri" charset="0"/>
-                      </a:endParaRPr>
-                    </a:p>
-                  </a:txBody>
-                  <a:tcPr marL="63500" marR="63500" marT="25400" marB="25400" anchor="ctr">
-                    <a:lnL w="6350" cap="flat" cmpd="sng" algn="ctr">
-                      <a:solidFill>
-                        <a:srgbClr val="D4E0D8"/>
-                      </a:solidFill>
-                      <a:prstDash val="solid"/>
-                      <a:round/>
-                      <a:headEnd type="none" w="med" len="med"/>
-                      <a:tailEnd type="none" w="med" len="med"/>
-                    </a:lnL>
-                    <a:lnR w="6350" cap="flat" cmpd="sng" algn="ctr">
-                      <a:solidFill>
-                        <a:srgbClr val="D4E0D8"/>
-                      </a:solidFill>
-                      <a:prstDash val="solid"/>
-                      <a:round/>
-                      <a:headEnd type="none" w="med" len="med"/>
-                      <a:tailEnd type="none" w="med" len="med"/>
-                    </a:lnR>
-                    <a:lnT w="6350" cap="flat" cmpd="sng" algn="ctr">
-                      <a:solidFill>
-                        <a:srgbClr val="D4E0D8"/>
-                      </a:solidFill>
-                      <a:prstDash val="solid"/>
-                      <a:round/>
-                      <a:headEnd type="none" w="med" len="med"/>
-                      <a:tailEnd type="none" w="med" len="med"/>
-                    </a:lnT>
-                    <a:lnB w="6350" cap="flat" cmpd="sng" algn="ctr">
-                      <a:solidFill>
-                        <a:srgbClr val="D4E0D8"/>
-                      </a:solidFill>
-                      <a:prstDash val="solid"/>
-                      <a:round/>
-                      <a:headEnd type="none" w="med" len="med"/>
-                      <a:tailEnd type="none" w="med" len="med"/>
-                    </a:lnB>
-                  </a:tcPr>
-                </a:tc>
-                <a:tc>
-                  <a:txBody>
-                    <a:bodyPr/>
-                    <a:lstStyle/>
-                    <a:p>
-                      <a:pPr algn="r" indent="0" marL="0">
-                        <a:buNone/>
-                      </a:pPr>
-                      <a:r>
-                        <a:rPr lang="en-US" sz="900" b="1" dirty="0">
-                          <a:solidFill>
-                            <a:srgbClr val="13201A"/>
-                          </a:solidFill>
-                          <a:latin typeface="Calibri" pitchFamily="34" charset="0"/>
-                          <a:ea typeface="Calibri" pitchFamily="34" charset="-122"/>
-                          <a:cs typeface="Calibri" pitchFamily="34" charset="-120"/>
-                        </a:rPr>
-                        <a:t>$300 per unit, +3%</a:t>
-                      </a:r>
-                      <a:endParaRPr lang="en-US" sz="900" dirty="0">
-                        <a:latin typeface="Calibri" charset="0"/>
-                        <a:ea typeface="Calibri" charset="0"/>
-                        <a:cs typeface="Calibri" charset="0"/>
-                      </a:endParaRPr>
-                    </a:p>
-                  </a:txBody>
-                  <a:tcPr marL="63500" marR="63500" marT="25400" marB="25400" anchor="ctr">
-                    <a:lnL w="6350" cap="flat" cmpd="sng" algn="ctr">
-                      <a:solidFill>
-                        <a:srgbClr val="D4E0D8"/>
-                      </a:solidFill>
-                      <a:prstDash val="solid"/>
-                      <a:round/>
-                      <a:headEnd type="none" w="med" len="med"/>
-                      <a:tailEnd type="none" w="med" len="med"/>
-                    </a:lnL>
-                    <a:lnR w="6350" cap="flat" cmpd="sng" algn="ctr">
-                      <a:solidFill>
-                        <a:srgbClr val="D4E0D8"/>
-                      </a:solidFill>
-                      <a:prstDash val="solid"/>
-                      <a:round/>
-                      <a:headEnd type="none" w="med" len="med"/>
-                      <a:tailEnd type="none" w="med" len="med"/>
-                    </a:lnR>
-                    <a:lnT w="6350" cap="flat" cmpd="sng" algn="ctr">
-                      <a:solidFill>
-                        <a:srgbClr val="D4E0D8"/>
-                      </a:solidFill>
-                      <a:prstDash val="solid"/>
-                      <a:round/>
-                      <a:headEnd type="none" w="med" len="med"/>
-                      <a:tailEnd type="none" w="med" len="med"/>
-                    </a:lnT>
-                    <a:lnB w="6350" cap="flat" cmpd="sng" algn="ctr">
-                      <a:solidFill>
-                        <a:srgbClr val="D4E0D8"/>
-                      </a:solidFill>
-                      <a:prstDash val="solid"/>
-                      <a:round/>
-                      <a:headEnd type="none" w="med" len="med"/>
-                      <a:tailEnd type="none" w="med" len="med"/>
-                    </a:lnB>
-                  </a:tcPr>
-                </a:tc>
-              </a:tr>
-              <a:tr h="194767">
-                <a:tc>
-                  <a:txBody>
-                    <a:bodyPr/>
-                    <a:lstStyle/>
-                    <a:p>
-                      <a:pPr indent="0" marL="0">
-                        <a:buNone/>
-                      </a:pPr>
-                      <a:r>
-                        <a:rPr lang="en-US" sz="900" dirty="0">
-                          <a:solidFill>
-                            <a:srgbClr val="3A4A42"/>
-                          </a:solidFill>
-                          <a:latin typeface="Calibri" pitchFamily="34" charset="0"/>
-                          <a:ea typeface="Calibri" pitchFamily="34" charset="-122"/>
-                          <a:cs typeface="Calibri" pitchFamily="34" charset="-120"/>
-                        </a:rPr>
-                        <a:t>Debt — LTC / rate / structure / fee</a:t>
-                      </a:r>
-                      <a:endParaRPr lang="en-US" sz="900" dirty="0">
-                        <a:latin typeface="Calibri" charset="0"/>
-                        <a:ea typeface="Calibri" charset="0"/>
-                        <a:cs typeface="Calibri" charset="0"/>
-                      </a:endParaRPr>
-                    </a:p>
-                  </a:txBody>
-                  <a:tcPr marL="63500" marR="63500" marT="25400" marB="25400" anchor="ctr">
-                    <a:lnL w="6350" cap="flat" cmpd="sng" algn="ctr">
-                      <a:solidFill>
-                        <a:srgbClr val="D4E0D8"/>
-                      </a:solidFill>
-                      <a:prstDash val="solid"/>
-                      <a:round/>
-                      <a:headEnd type="none" w="med" len="med"/>
-                      <a:tailEnd type="none" w="med" len="med"/>
-                    </a:lnL>
-                    <a:lnR w="6350" cap="flat" cmpd="sng" algn="ctr">
-                      <a:solidFill>
-                        <a:srgbClr val="D4E0D8"/>
-                      </a:solidFill>
-                      <a:prstDash val="solid"/>
-                      <a:round/>
-                      <a:headEnd type="none" w="med" len="med"/>
-                      <a:tailEnd type="none" w="med" len="med"/>
-                    </a:lnR>
-                    <a:lnT w="6350" cap="flat" cmpd="sng" algn="ctr">
-                      <a:solidFill>
-                        <a:srgbClr val="D4E0D8"/>
-                      </a:solidFill>
-                      <a:prstDash val="solid"/>
-                      <a:round/>
-                      <a:headEnd type="none" w="med" len="med"/>
-                      <a:tailEnd type="none" w="med" len="med"/>
-                    </a:lnT>
-                    <a:lnB w="6350" cap="flat" cmpd="sng" algn="ctr">
-                      <a:solidFill>
-                        <a:srgbClr val="D4E0D8"/>
-                      </a:solidFill>
-                      <a:prstDash val="solid"/>
-                      <a:round/>
-                      <a:headEnd type="none" w="med" len="med"/>
-                      <a:tailEnd type="none" w="med" len="med"/>
-                    </a:lnB>
-                  </a:tcPr>
-                </a:tc>
-                <a:tc>
-                  <a:txBody>
-                    <a:bodyPr/>
-                    <a:lstStyle/>
-                    <a:p>
-                      <a:pPr algn="r" indent="0" marL="0">
-                        <a:buNone/>
-                      </a:pPr>
-                      <a:r>
-                        <a:rPr lang="en-US" sz="900" b="1" dirty="0">
-                          <a:solidFill>
-                            <a:srgbClr val="13201A"/>
-                          </a:solidFill>
-                          <a:latin typeface="Calibri" pitchFamily="34" charset="0"/>
-                          <a:ea typeface="Calibri" pitchFamily="34" charset="-122"/>
-                          <a:cs typeface="Calibri" pitchFamily="34" charset="-120"/>
-                        </a:rPr>
-                        <a:t>65% / 5.85% / IO / 1.0%</a:t>
-                      </a:r>
-                      <a:endParaRPr lang="en-US" sz="900" dirty="0">
-                        <a:latin typeface="Calibri" charset="0"/>
-                        <a:ea typeface="Calibri" charset="0"/>
-                        <a:cs typeface="Calibri" charset="0"/>
-                      </a:endParaRPr>
-                    </a:p>
-                  </a:txBody>
-                  <a:tcPr marL="63500" marR="63500" marT="25400" marB="25400" anchor="ctr">
-                    <a:lnL w="6350" cap="flat" cmpd="sng" algn="ctr">
-                      <a:solidFill>
-                        <a:srgbClr val="D4E0D8"/>
-                      </a:solidFill>
-                      <a:prstDash val="solid"/>
-                      <a:round/>
-                      <a:headEnd type="none" w="med" len="med"/>
-                      <a:tailEnd type="none" w="med" len="med"/>
-                    </a:lnL>
-                    <a:lnR w="6350" cap="flat" cmpd="sng" algn="ctr">
-                      <a:solidFill>
-                        <a:srgbClr val="D4E0D8"/>
-                      </a:solidFill>
-                      <a:prstDash val="solid"/>
-                      <a:round/>
-                      <a:headEnd type="none" w="med" len="med"/>
-                      <a:tailEnd type="none" w="med" len="med"/>
-                    </a:lnR>
-                    <a:lnT w="6350" cap="flat" cmpd="sng" algn="ctr">
-                      <a:solidFill>
-                        <a:srgbClr val="D4E0D8"/>
-                      </a:solidFill>
-                      <a:prstDash val="solid"/>
-                      <a:round/>
-                      <a:headEnd type="none" w="med" len="med"/>
-                      <a:tailEnd type="none" w="med" len="med"/>
-                    </a:lnT>
-                    <a:lnB w="6350" cap="flat" cmpd="sng" algn="ctr">
-                      <a:solidFill>
-                        <a:srgbClr val="D4E0D8"/>
-                      </a:solidFill>
-                      <a:prstDash val="solid"/>
-                      <a:round/>
-                      <a:headEnd type="none" w="med" len="med"/>
-                      <a:tailEnd type="none" w="med" len="med"/>
-                    </a:lnB>
-                  </a:tcPr>
-                </a:tc>
-              </a:tr>
-              <a:tr h="194767">
-                <a:tc>
-                  <a:txBody>
-                    <a:bodyPr/>
-                    <a:lstStyle/>
-                    <a:p>
-                      <a:pPr indent="0" marL="0">
-                        <a:buNone/>
-                      </a:pPr>
-                      <a:r>
-                        <a:rPr lang="en-US" sz="900" dirty="0">
-                          <a:solidFill>
-                            <a:srgbClr val="3A4A42"/>
-                          </a:solidFill>
-                          <a:latin typeface="Calibri" pitchFamily="34" charset="0"/>
-                          <a:ea typeface="Calibri" pitchFamily="34" charset="-122"/>
-                          <a:cs typeface="Calibri" pitchFamily="34" charset="-120"/>
-                        </a:rPr>
-                        <a:t>Debt test — min debt yield / DSCR</a:t>
-                      </a:r>
-                      <a:endParaRPr lang="en-US" sz="900" dirty="0">
-                        <a:latin typeface="Calibri" charset="0"/>
-                        <a:ea typeface="Calibri" charset="0"/>
-                        <a:cs typeface="Calibri" charset="0"/>
-                      </a:endParaRPr>
-                    </a:p>
-                  </a:txBody>
-                  <a:tcPr marL="63500" marR="63500" marT="25400" marB="25400" anchor="ctr">
-                    <a:lnL w="6350" cap="flat" cmpd="sng" algn="ctr">
-                      <a:solidFill>
-                        <a:srgbClr val="D4E0D8"/>
-                      </a:solidFill>
-                      <a:prstDash val="solid"/>
-                      <a:round/>
-                      <a:headEnd type="none" w="med" len="med"/>
-                      <a:tailEnd type="none" w="med" len="med"/>
-                    </a:lnL>
-                    <a:lnR w="6350" cap="flat" cmpd="sng" algn="ctr">
-                      <a:solidFill>
-                        <a:srgbClr val="D4E0D8"/>
-                      </a:solidFill>
-                      <a:prstDash val="solid"/>
-                      <a:round/>
-                      <a:headEnd type="none" w="med" len="med"/>
-                      <a:tailEnd type="none" w="med" len="med"/>
-                    </a:lnR>
-                    <a:lnT w="6350" cap="flat" cmpd="sng" algn="ctr">
-                      <a:solidFill>
-                        <a:srgbClr val="D4E0D8"/>
-                      </a:solidFill>
-                      <a:prstDash val="solid"/>
-                      <a:round/>
-                      <a:headEnd type="none" w="med" len="med"/>
-                      <a:tailEnd type="none" w="med" len="med"/>
-                    </a:lnT>
-                    <a:lnB w="6350" cap="flat" cmpd="sng" algn="ctr">
-                      <a:solidFill>
-                        <a:srgbClr val="D4E0D8"/>
-                      </a:solidFill>
-                      <a:prstDash val="solid"/>
-                      <a:round/>
-                      <a:headEnd type="none" w="med" len="med"/>
-                      <a:tailEnd type="none" w="med" len="med"/>
-                    </a:lnB>
-                  </a:tcPr>
-                </a:tc>
-                <a:tc>
-                  <a:txBody>
-                    <a:bodyPr/>
-                    <a:lstStyle/>
-                    <a:p>
-                      <a:pPr algn="r" indent="0" marL="0">
-                        <a:buNone/>
-                      </a:pPr>
-                      <a:r>
-                        <a:rPr lang="en-US" sz="900" b="1" dirty="0">
-                          <a:solidFill>
-                            <a:srgbClr val="13201A"/>
-                          </a:solidFill>
-                          <a:latin typeface="Calibri" pitchFamily="34" charset="0"/>
-                          <a:ea typeface="Calibri" pitchFamily="34" charset="-122"/>
-                          <a:cs typeface="Calibri" pitchFamily="34" charset="-120"/>
-                        </a:rPr>
-                        <a:t>8.0% / 1.25x</a:t>
-                      </a:r>
-                      <a:endParaRPr lang="en-US" sz="900" dirty="0">
-                        <a:latin typeface="Calibri" charset="0"/>
-                        <a:ea typeface="Calibri" charset="0"/>
-                        <a:cs typeface="Calibri" charset="0"/>
-                      </a:endParaRPr>
-                    </a:p>
-                  </a:txBody>
-                  <a:tcPr marL="63500" marR="63500" marT="25400" marB="25400" anchor="ctr">
-                    <a:lnL w="6350" cap="flat" cmpd="sng" algn="ctr">
-                      <a:solidFill>
-                        <a:srgbClr val="D4E0D8"/>
-                      </a:solidFill>
-                      <a:prstDash val="solid"/>
-                      <a:round/>
-                      <a:headEnd type="none" w="med" len="med"/>
-                      <a:tailEnd type="none" w="med" len="med"/>
-                    </a:lnL>
-                    <a:lnR w="6350" cap="flat" cmpd="sng" algn="ctr">
-                      <a:solidFill>
-                        <a:srgbClr val="D4E0D8"/>
-                      </a:solidFill>
-                      <a:prstDash val="solid"/>
-                      <a:round/>
-                      <a:headEnd type="none" w="med" len="med"/>
-                      <a:tailEnd type="none" w="med" len="med"/>
-                    </a:lnR>
-                    <a:lnT w="6350" cap="flat" cmpd="sng" algn="ctr">
-                      <a:solidFill>
-                        <a:srgbClr val="D4E0D8"/>
-                      </a:solidFill>
-                      <a:prstDash val="solid"/>
-                      <a:round/>
-                      <a:headEnd type="none" w="med" len="med"/>
-                      <a:tailEnd type="none" w="med" len="med"/>
-                    </a:lnT>
-                    <a:lnB w="6350" cap="flat" cmpd="sng" algn="ctr">
-                      <a:solidFill>
-                        <a:srgbClr val="D4E0D8"/>
-                      </a:solidFill>
-                      <a:prstDash val="solid"/>
-                      <a:round/>
-                      <a:headEnd type="none" w="med" len="med"/>
-                      <a:tailEnd type="none" w="med" len="med"/>
-                    </a:lnB>
-                  </a:tcPr>
-                </a:tc>
-              </a:tr>
-              <a:tr h="194767">
-                <a:tc>
-                  <a:txBody>
-                    <a:bodyPr/>
-                    <a:lstStyle/>
-                    <a:p>
-                      <a:pPr indent="0" marL="0">
-                        <a:buNone/>
-                      </a:pPr>
-                      <a:r>
-                        <a:rPr lang="en-US" sz="900" dirty="0">
-                          <a:solidFill>
-                            <a:srgbClr val="3A4A42"/>
-                          </a:solidFill>
-                          <a:latin typeface="Calibri" pitchFamily="34" charset="0"/>
-                          <a:ea typeface="Calibri" pitchFamily="34" charset="-122"/>
-                          <a:cs typeface="Calibri" pitchFamily="34" charset="-120"/>
-                        </a:rPr>
-                        <a:t>Acquisition cost / cost of sale</a:t>
-                      </a:r>
-                      <a:endParaRPr lang="en-US" sz="900" dirty="0">
-                        <a:latin typeface="Calibri" charset="0"/>
-                        <a:ea typeface="Calibri" charset="0"/>
-                        <a:cs typeface="Calibri" charset="0"/>
-                      </a:endParaRPr>
-                    </a:p>
-                  </a:txBody>
-                  <a:tcPr marL="63500" marR="63500" marT="25400" marB="25400" anchor="ctr">
-                    <a:lnL w="6350" cap="flat" cmpd="sng" algn="ctr">
-                      <a:solidFill>
-                        <a:srgbClr val="D4E0D8"/>
-                      </a:solidFill>
-                      <a:prstDash val="solid"/>
-                      <a:round/>
-                      <a:headEnd type="none" w="med" len="med"/>
-                      <a:tailEnd type="none" w="med" len="med"/>
-                    </a:lnL>
-                    <a:lnR w="6350" cap="flat" cmpd="sng" algn="ctr">
-                      <a:solidFill>
-                        <a:srgbClr val="D4E0D8"/>
-                      </a:solidFill>
-                      <a:prstDash val="solid"/>
-                      <a:round/>
-                      <a:headEnd type="none" w="med" len="med"/>
-                      <a:tailEnd type="none" w="med" len="med"/>
-                    </a:lnR>
-                    <a:lnT w="6350" cap="flat" cmpd="sng" algn="ctr">
-                      <a:solidFill>
-                        <a:srgbClr val="D4E0D8"/>
-                      </a:solidFill>
-                      <a:prstDash val="solid"/>
-                      <a:round/>
-                      <a:headEnd type="none" w="med" len="med"/>
-                      <a:tailEnd type="none" w="med" len="med"/>
-                    </a:lnT>
-                    <a:lnB w="6350" cap="flat" cmpd="sng" algn="ctr">
-                      <a:solidFill>
-                        <a:srgbClr val="D4E0D8"/>
-                      </a:solidFill>
-                      <a:prstDash val="solid"/>
-                      <a:round/>
-                      <a:headEnd type="none" w="med" len="med"/>
-                      <a:tailEnd type="none" w="med" len="med"/>
-                    </a:lnB>
-                  </a:tcPr>
-                </a:tc>
-                <a:tc>
-                  <a:txBody>
-                    <a:bodyPr/>
-                    <a:lstStyle/>
-                    <a:p>
-                      <a:pPr algn="r" indent="0" marL="0">
-                        <a:buNone/>
-                      </a:pPr>
-                      <a:r>
-                        <a:rPr lang="en-US" sz="900" b="1" dirty="0">
-                          <a:solidFill>
-                            <a:srgbClr val="13201A"/>
-                          </a:solidFill>
-                          <a:latin typeface="Calibri" pitchFamily="34" charset="0"/>
-                          <a:ea typeface="Calibri" pitchFamily="34" charset="-122"/>
-                          <a:cs typeface="Calibri" pitchFamily="34" charset="-120"/>
-                        </a:rPr>
-                        <a:t>1.5% / 1.5%</a:t>
-                      </a:r>
-                      <a:endParaRPr lang="en-US" sz="900" dirty="0">
-                        <a:latin typeface="Calibri" charset="0"/>
-                        <a:ea typeface="Calibri" charset="0"/>
-                        <a:cs typeface="Calibri" charset="0"/>
-                      </a:endParaRPr>
-                    </a:p>
-                  </a:txBody>
-                  <a:tcPr marL="63500" marR="63500" marT="25400" marB="25400" anchor="ctr">
-                    <a:lnL w="6350" cap="flat" cmpd="sng" algn="ctr">
-                      <a:solidFill>
-                        <a:srgbClr val="D4E0D8"/>
-                      </a:solidFill>
-                      <a:prstDash val="solid"/>
-                      <a:round/>
-                      <a:headEnd type="none" w="med" len="med"/>
-                      <a:tailEnd type="none" w="med" len="med"/>
-                    </a:lnL>
-                    <a:lnR w="6350" cap="flat" cmpd="sng" algn="ctr">
-                      <a:solidFill>
-                        <a:srgbClr val="D4E0D8"/>
-                      </a:solidFill>
-                      <a:prstDash val="solid"/>
-                      <a:round/>
-                      <a:headEnd type="none" w="med" len="med"/>
-                      <a:tailEnd type="none" w="med" len="med"/>
-                    </a:lnR>
-                    <a:lnT w="6350" cap="flat" cmpd="sng" algn="ctr">
-                      <a:solidFill>
-                        <a:srgbClr val="D4E0D8"/>
-                      </a:solidFill>
-                      <a:prstDash val="solid"/>
-                      <a:round/>
-                      <a:headEnd type="none" w="med" len="med"/>
-                      <a:tailEnd type="none" w="med" len="med"/>
-                    </a:lnT>
-                    <a:lnB w="6350" cap="flat" cmpd="sng" algn="ctr">
-                      <a:solidFill>
-                        <a:srgbClr val="D4E0D8"/>
-                      </a:solidFill>
-                      <a:prstDash val="solid"/>
-                      <a:round/>
-                      <a:headEnd type="none" w="med" len="med"/>
-                      <a:tailEnd type="none" w="med" len="med"/>
-                    </a:lnB>
-                  </a:tcPr>
-                </a:tc>
-              </a:tr>
-              <a:tr h="194767">
-                <a:tc>
-                  <a:txBody>
-                    <a:bodyPr/>
-                    <a:lstStyle/>
-                    <a:p>
-                      <a:pPr indent="0" marL="0">
-                        <a:buNone/>
-                      </a:pPr>
-                      <a:r>
-                        <a:rPr lang="en-US" sz="900" dirty="0">
-                          <a:solidFill>
-                            <a:srgbClr val="3A4A42"/>
-                          </a:solidFill>
-                          <a:latin typeface="Calibri" pitchFamily="34" charset="0"/>
-                          <a:ea typeface="Calibri" pitchFamily="34" charset="-122"/>
-                          <a:cs typeface="Calibri" pitchFamily="34" charset="-120"/>
-                        </a:rPr>
-                        <a:t>Exit cap rate</a:t>
-                      </a:r>
-                      <a:endParaRPr lang="en-US" sz="900" dirty="0">
-                        <a:latin typeface="Calibri" charset="0"/>
-                        <a:ea typeface="Calibri" charset="0"/>
-                        <a:cs typeface="Calibri" charset="0"/>
-                      </a:endParaRPr>
-                    </a:p>
-                  </a:txBody>
-                  <a:tcPr marL="63500" marR="63500" marT="25400" marB="25400" anchor="ctr">
-                    <a:lnL w="6350" cap="flat" cmpd="sng" algn="ctr">
-                      <a:solidFill>
-                        <a:srgbClr val="D4E0D8"/>
-                      </a:solidFill>
-                      <a:prstDash val="solid"/>
-                      <a:round/>
-                      <a:headEnd type="none" w="med" len="med"/>
-                      <a:tailEnd type="none" w="med" len="med"/>
-                    </a:lnL>
-                    <a:lnR w="6350" cap="flat" cmpd="sng" algn="ctr">
-                      <a:solidFill>
-                        <a:srgbClr val="D4E0D8"/>
-                      </a:solidFill>
-                      <a:prstDash val="solid"/>
-                      <a:round/>
-                      <a:headEnd type="none" w="med" len="med"/>
-                      <a:tailEnd type="none" w="med" len="med"/>
-                    </a:lnR>
-                    <a:lnT w="6350" cap="flat" cmpd="sng" algn="ctr">
-                      <a:solidFill>
-                        <a:srgbClr val="D4E0D8"/>
-                      </a:solidFill>
-                      <a:prstDash val="solid"/>
-                      <a:round/>
-                      <a:headEnd type="none" w="med" len="med"/>
-                      <a:tailEnd type="none" w="med" len="med"/>
-                    </a:lnT>
-                    <a:lnB w="6350" cap="flat" cmpd="sng" algn="ctr">
-                      <a:solidFill>
-                        <a:srgbClr val="D4E0D8"/>
-                      </a:solidFill>
-                      <a:prstDash val="solid"/>
-                      <a:round/>
-                      <a:headEnd type="none" w="med" len="med"/>
-                      <a:tailEnd type="none" w="med" len="med"/>
-                    </a:lnB>
-                  </a:tcPr>
-                </a:tc>
-                <a:tc>
-                  <a:txBody>
-                    <a:bodyPr/>
-                    <a:lstStyle/>
-                    <a:p>
-                      <a:pPr algn="r" indent="0" marL="0">
-                        <a:buNone/>
-                      </a:pPr>
-                      <a:r>
-                        <a:rPr lang="en-US" sz="900" b="1" dirty="0">
-                          <a:solidFill>
-                            <a:srgbClr val="13201A"/>
-                          </a:solidFill>
-                          <a:latin typeface="Calibri" pitchFamily="34" charset="0"/>
-                          <a:ea typeface="Calibri" pitchFamily="34" charset="-122"/>
-                          <a:cs typeface="Calibri" pitchFamily="34" charset="-120"/>
-                        </a:rPr>
-                        <a:t>6.75%, held constant</a:t>
-                      </a:r>
-                      <a:endParaRPr lang="en-US" sz="900" dirty="0">
-                        <a:latin typeface="Calibri" charset="0"/>
-                        <a:ea typeface="Calibri" charset="0"/>
-                        <a:cs typeface="Calibri" charset="0"/>
-                      </a:endParaRPr>
-                    </a:p>
-                  </a:txBody>
-                  <a:tcPr marL="63500" marR="63500" marT="25400" marB="25400" anchor="ctr">
-                    <a:lnL w="6350" cap="flat" cmpd="sng" algn="ctr">
-                      <a:solidFill>
-                        <a:srgbClr val="D4E0D8"/>
-                      </a:solidFill>
-                      <a:prstDash val="solid"/>
-                      <a:round/>
-                      <a:headEnd type="none" w="med" len="med"/>
-                      <a:tailEnd type="none" w="med" len="med"/>
-                    </a:lnL>
-                    <a:lnR w="6350" cap="flat" cmpd="sng" algn="ctr">
-                      <a:solidFill>
-                        <a:srgbClr val="D4E0D8"/>
-                      </a:solidFill>
-                      <a:prstDash val="solid"/>
-                      <a:round/>
-                      <a:headEnd type="none" w="med" len="med"/>
-                      <a:tailEnd type="none" w="med" len="med"/>
-                    </a:lnR>
-                    <a:lnT w="6350" cap="flat" cmpd="sng" algn="ctr">
-                      <a:solidFill>
-                        <a:srgbClr val="D4E0D8"/>
-                      </a:solidFill>
-                      <a:prstDash val="solid"/>
-                      <a:round/>
-                      <a:headEnd type="none" w="med" len="med"/>
-                      <a:tailEnd type="none" w="med" len="med"/>
-                    </a:lnT>
-                    <a:lnB w="6350" cap="flat" cmpd="sng" algn="ctr">
-                      <a:solidFill>
-                        <a:srgbClr val="D4E0D8"/>
-                      </a:solidFill>
-                      <a:prstDash val="solid"/>
-                      <a:round/>
-                      <a:headEnd type="none" w="med" len="med"/>
-                      <a:tailEnd type="none" w="med" len="med"/>
-                    </a:lnB>
-                  </a:tcPr>
-                </a:tc>
-              </a:tr>
-            </a:tbl>
-          </a:graphicData>
-        </a:graphic>
-      </p:graphicFrame>
       <p:sp>
         <p:nvSpPr>
-          <p:cNvPr id="8" name="Text 5"/>
+          <p:cNvPr id="11" name="Text 8"/>
           <p:cNvSpPr/>
           <p:nvPr/>
         </p:nvSpPr>
         <p:spPr>
           <a:xfrm>
-            <a:off x="411480" y="4864608"/>
-            <a:ext cx="5486400" cy="548640"/>
+            <a:off x="539496" y="4169664"/>
+            <a:ext cx="5358384" cy="182880"/>
           </a:xfrm>
           <a:prstGeom prst="rect">
             <a:avLst/>
@@ -15349,13 +12587,65 @@
           <a:ln/>
         </p:spPr>
         <p:txBody>
-          <a:bodyPr wrap="square" lIns="0" tIns="0" rIns="0" bIns="0" rtlCol="0" anchor="t"/>
+          <a:bodyPr wrap="square" lIns="0" tIns="0" rIns="0" bIns="0" rtlCol="0" anchor="ctr"/>
           <a:lstStyle/>
           <a:p>
             <a:pPr indent="0" marL="0">
-              <a:lnSpc>
-                <a:spcPts val="1050"/>
-              </a:lnSpc>
+              <a:buNone/>
+            </a:pPr>
+            <a:r>
+              <a:rPr lang="en-US" sz="800" dirty="0">
+                <a:solidFill>
+                  <a:srgbClr val="5F7269"/>
+                </a:solidFill>
+                <a:latin typeface="Calibri" pitchFamily="34" charset="0"/>
+                <a:ea typeface="Calibri" pitchFamily="34" charset="-122"/>
+                <a:cs typeface="Calibri" pitchFamily="34" charset="-120"/>
+              </a:rPr>
+              <a:t>$24,575 per unit, all funded at closing in Sources &amp; Uses</a:t>
+            </a:r>
+            <a:endParaRPr lang="en-US" sz="800" dirty="0"/>
+          </a:p>
+        </p:txBody>
+      </p:sp>
+      <p:graphicFrame>
+        <p:nvGraphicFramePr>
+          <p:cNvPr id="12" name="Chart 0" descr=""/>
+          <p:cNvGraphicFramePr/>
+          <p:nvPr/>
+        </p:nvGraphicFramePr>
+        <p:xfrm>
+          <a:off x="274320" y="4480560"/>
+          <a:ext cx="5715000" cy="1920240"/>
+        </p:xfrm>
+        <a:graphic xmlns:a="http://schemas.openxmlformats.org/drawingml/2006/main">
+          <a:graphicData uri="http://schemas.openxmlformats.org/drawingml/2006/chart">
+            <c:chart xmlns:c="http://schemas.openxmlformats.org/drawingml/2006/chart" r:id="rId1"/>
+          </a:graphicData>
+        </a:graphic>
+      </p:graphicFrame>
+      <p:sp>
+        <p:nvSpPr>
+          <p:cNvPr id="13" name="Text 9"/>
+          <p:cNvSpPr/>
+          <p:nvPr/>
+        </p:nvSpPr>
+        <p:spPr>
+          <a:xfrm>
+            <a:off x="411480" y="6419088"/>
+            <a:ext cx="5486400" cy="219456"/>
+          </a:xfrm>
+          <a:prstGeom prst="rect">
+            <a:avLst/>
+          </a:prstGeom>
+          <a:noFill/>
+          <a:ln/>
+        </p:spPr>
+        <p:txBody>
+          <a:bodyPr wrap="square" lIns="0" tIns="0" rIns="0" bIns="0" rtlCol="0" anchor="ctr"/>
+          <a:lstStyle/>
+          <a:p>
+            <a:pPr indent="0" marL="0">
               <a:buNone/>
             </a:pPr>
             <a:r>
@@ -15367,7 +12657,7 @@
                 <a:ea typeface="Calibri" pitchFamily="34" charset="-122"/>
                 <a:cs typeface="Calibri" pitchFamily="34" charset="-120"/>
               </a:rPr>
-              <a:t>Rent growth is set off Yardi Matrix 1Q-2026 ACTUALS and taxes off the 25-year Marion County assessment record — neither is a broker forecast. Where the rent roll and T-12 conflict with the OM, the Excel files govern: 53 units have in-unit laundry, not the OM's 78, so 65 units carry the case's $5,000 addition.</a:t>
+              <a:t>Average levered cash-on-cash 8.4% — 4.9% in Year 1 while the renovation runs, 10.1% by Year 5.</a:t>
             </a:r>
             <a:endParaRPr lang="en-US" sz="850" dirty="0"/>
           </a:p>
@@ -15375,13 +12665,13 @@
       </p:sp>
       <p:sp>
         <p:nvSpPr>
-          <p:cNvPr id="9" name="Shape 6"/>
+          <p:cNvPr id="14" name="Shape 10"/>
           <p:cNvSpPr/>
           <p:nvPr/>
         </p:nvSpPr>
         <p:spPr>
           <a:xfrm>
-            <a:off x="6263640" y="868680"/>
+            <a:off x="6263640" y="813816"/>
             <a:ext cx="50292" cy="182880"/>
           </a:xfrm>
           <a:prstGeom prst="rect">
@@ -15395,13 +12685,13 @@
       </p:sp>
       <p:sp>
         <p:nvSpPr>
-          <p:cNvPr id="10" name="Text 7"/>
+          <p:cNvPr id="15" name="Text 11"/>
           <p:cNvSpPr/>
           <p:nvPr/>
         </p:nvSpPr>
         <p:spPr>
           <a:xfrm>
-            <a:off x="6391656" y="813816"/>
+            <a:off x="6391656" y="758952"/>
             <a:ext cx="5385816" cy="237744"/>
           </a:xfrm>
           <a:prstGeom prst="rect">
@@ -15434,13 +12724,13 @@
       </p:sp>
       <p:sp>
         <p:nvSpPr>
-          <p:cNvPr id="11" name="Text 8"/>
+          <p:cNvPr id="16" name="Text 12"/>
           <p:cNvSpPr/>
           <p:nvPr/>
         </p:nvSpPr>
         <p:spPr>
           <a:xfrm>
-            <a:off x="6391656" y="1024128"/>
+            <a:off x="6391656" y="969264"/>
             <a:ext cx="5385816" cy="182880"/>
           </a:xfrm>
           <a:prstGeom prst="rect">
@@ -15473,7 +12763,7 @@
       </p:sp>
       <p:graphicFrame>
         <p:nvGraphicFramePr>
-          <p:cNvPr id="11" name="Table 1"/>
+          <p:cNvPr id="7" name="Table 1"/>
           <p:cNvGraphicFramePr>
             <a:graphicFrameLocks noGrp="1"/>
           </p:cNvGraphicFramePr>
@@ -15486,7 +12776,7 @@
           </p:nvPr>
         </p:nvGraphicFramePr>
         <p:xfrm>
-          <a:off x="6263640" y="1316736"/>
+          <a:off x="6263640" y="1280160"/>
           <a:ext cx="5513832" cy="914400"/>
         </p:xfrm>
         <a:graphic>
@@ -18359,13 +15649,13 @@
       </p:graphicFrame>
       <p:sp>
         <p:nvSpPr>
-          <p:cNvPr id="13" name="Text 9"/>
+          <p:cNvPr id="18" name="Text 13"/>
           <p:cNvSpPr/>
           <p:nvPr/>
         </p:nvSpPr>
         <p:spPr>
           <a:xfrm>
-            <a:off x="6263640" y="2889504"/>
+            <a:off x="6263640" y="2852928"/>
             <a:ext cx="5513832" cy="182880"/>
           </a:xfrm>
           <a:prstGeom prst="rect">
@@ -18398,13 +15688,13 @@
       </p:sp>
       <p:sp>
         <p:nvSpPr>
-          <p:cNvPr id="14" name="Shape 10"/>
+          <p:cNvPr id="19" name="Shape 14"/>
           <p:cNvSpPr/>
           <p:nvPr/>
         </p:nvSpPr>
         <p:spPr>
           <a:xfrm>
-            <a:off x="6263640" y="3246120"/>
+            <a:off x="6263640" y="3209544"/>
             <a:ext cx="50292" cy="182880"/>
           </a:xfrm>
           <a:prstGeom prst="rect">
@@ -18418,13 +15708,13 @@
       </p:sp>
       <p:sp>
         <p:nvSpPr>
-          <p:cNvPr id="15" name="Text 11"/>
+          <p:cNvPr id="20" name="Text 15"/>
           <p:cNvSpPr/>
           <p:nvPr/>
         </p:nvSpPr>
         <p:spPr>
           <a:xfrm>
-            <a:off x="6391656" y="3191256"/>
+            <a:off x="6391656" y="3154680"/>
             <a:ext cx="5385816" cy="237744"/>
           </a:xfrm>
           <a:prstGeom prst="rect">
@@ -18455,9 +15745,48 @@
           </a:p>
         </p:txBody>
       </p:sp>
+      <p:sp>
+        <p:nvSpPr>
+          <p:cNvPr id="21" name="Text 16"/>
+          <p:cNvSpPr/>
+          <p:nvPr/>
+        </p:nvSpPr>
+        <p:spPr>
+          <a:xfrm>
+            <a:off x="6391656" y="3364992"/>
+            <a:ext cx="5385816" cy="182880"/>
+          </a:xfrm>
+          <a:prstGeom prst="rect">
+            <a:avLst/>
+          </a:prstGeom>
+          <a:noFill/>
+          <a:ln/>
+        </p:spPr>
+        <p:txBody>
+          <a:bodyPr wrap="square" lIns="0" tIns="0" rIns="0" bIns="0" rtlCol="0" anchor="ctr"/>
+          <a:lstStyle/>
+          <a:p>
+            <a:pPr indent="0" marL="0">
+              <a:buNone/>
+            </a:pPr>
+            <a:r>
+              <a:rPr lang="en-US" sz="800" dirty="0">
+                <a:solidFill>
+                  <a:srgbClr val="5F7269"/>
+                </a:solidFill>
+                <a:latin typeface="Calibri" pitchFamily="34" charset="0"/>
+                <a:ea typeface="Calibri" pitchFamily="34" charset="-122"/>
+                <a:cs typeface="Calibri" pitchFamily="34" charset="-120"/>
+              </a:rPr>
+              <a:t>Actuals, not forecasts — this is what the assumptions are set off</a:t>
+            </a:r>
+            <a:endParaRPr lang="en-US" sz="800" dirty="0"/>
+          </a:p>
+        </p:txBody>
+      </p:sp>
       <p:graphicFrame>
         <p:nvGraphicFramePr>
-          <p:cNvPr id="16" name="Table 2"/>
+          <p:cNvPr id="10" name="Table 2"/>
           <p:cNvGraphicFramePr>
             <a:graphicFrameLocks noGrp="1"/>
           </p:cNvGraphicFramePr>
@@ -18470,7 +15799,7 @@
           </p:nvPr>
         </p:nvGraphicFramePr>
         <p:xfrm>
-          <a:off x="6263640" y="3621024"/>
+          <a:off x="6263640" y="3675888"/>
           <a:ext cx="5513832" cy="914400"/>
         </p:xfrm>
         <a:graphic>
@@ -18482,7 +15811,7 @@
                 <a:gridCol w="1417320"/>
                 <a:gridCol w="1243584"/>
               </a:tblGrid>
-              <a:tr h="196596">
+              <a:tr h="190195">
                 <a:tc>
                   <a:txBody>
                     <a:bodyPr/>
@@ -18688,7 +16017,7 @@
                   </a:tcPr>
                 </a:tc>
               </a:tr>
-              <a:tr h="196596">
+              <a:tr h="190195">
                 <a:tc>
                   <a:txBody>
                     <a:bodyPr/>
@@ -18885,7 +16214,7 @@
                   </a:tcPr>
                 </a:tc>
               </a:tr>
-              <a:tr h="196596">
+              <a:tr h="190195">
                 <a:tc>
                   <a:txBody>
                     <a:bodyPr/>
@@ -19082,7 +16411,7 @@
                   </a:tcPr>
                 </a:tc>
               </a:tr>
-              <a:tr h="196596">
+              <a:tr h="190195">
                 <a:tc>
                   <a:txBody>
                     <a:bodyPr/>
@@ -19279,7 +16608,7 @@
                   </a:tcPr>
                 </a:tc>
               </a:tr>
-              <a:tr h="196596">
+              <a:tr h="190195">
                 <a:tc>
                   <a:txBody>
                     <a:bodyPr/>
@@ -19476,7 +16805,7 @@
                   </a:tcPr>
                 </a:tc>
               </a:tr>
-              <a:tr h="196596">
+              <a:tr h="190195">
                 <a:tc>
                   <a:txBody>
                     <a:bodyPr/>
@@ -19673,7 +17002,7 @@
                   </a:tcPr>
                 </a:tc>
               </a:tr>
-              <a:tr h="196596">
+              <a:tr h="190195">
                 <a:tc>
                   <a:txBody>
                     <a:bodyPr/>
@@ -19870,7 +17199,7 @@
                   </a:tcPr>
                 </a:tc>
               </a:tr>
-              <a:tr h="196596">
+              <a:tr h="190195">
                 <a:tc>
                   <a:txBody>
                     <a:bodyPr/>
@@ -20067,7 +17396,7 @@
                   </a:tcPr>
                 </a:tc>
               </a:tr>
-              <a:tr h="196596">
+              <a:tr h="190195">
                 <a:tc>
                   <a:txBody>
                     <a:bodyPr/>
@@ -20264,7 +17593,7 @@
                   </a:tcPr>
                 </a:tc>
               </a:tr>
-              <a:tr h="196596">
+              <a:tr h="190195">
                 <a:tc>
                   <a:txBody>
                     <a:bodyPr/>
@@ -20461,7 +17790,7 @@
                   </a:tcPr>
                 </a:tc>
               </a:tr>
-              <a:tr h="196596">
+              <a:tr h="190195">
                 <a:tc>
                   <a:txBody>
                     <a:bodyPr/>
@@ -20664,14 +17993,14 @@
       </p:graphicFrame>
       <p:sp>
         <p:nvSpPr>
-          <p:cNvPr id="17" name="Text 12"/>
+          <p:cNvPr id="23" name="Text 17"/>
           <p:cNvSpPr/>
           <p:nvPr/>
         </p:nvSpPr>
         <p:spPr>
           <a:xfrm>
-            <a:off x="6263640" y="5870448"/>
-            <a:ext cx="5513832" cy="658368"/>
+            <a:off x="6263640" y="5815584"/>
+            <a:ext cx="5513832" cy="694944"/>
           </a:xfrm>
           <a:prstGeom prst="rect">
             <a:avLst/>
@@ -20698,49 +18027,7 @@
                 <a:ea typeface="Calibri" pitchFamily="34" charset="-122"/>
                 <a:cs typeface="Calibri" pitchFamily="34" charset="-120"/>
               </a:rPr>
-              <a:t>Indiana values apartments at the lowest of the income, market and cost approaches — which is why assessed value here has not tracked trade prices. An earlier draft of this model stepped taxes toward a share of the purchase price; the record does not support it, and correcting it is worth about 1.5 points of levered IRR. The risk is still priced, in Ladder C.</a:t>
-            </a:r>
-            <a:endParaRPr lang="en-US" sz="850" dirty="0"/>
-          </a:p>
-        </p:txBody>
-      </p:sp>
-      <p:sp>
-        <p:nvSpPr>
-          <p:cNvPr id="18" name="Text 13"/>
-          <p:cNvSpPr/>
-          <p:nvPr/>
-        </p:nvSpPr>
-        <p:spPr>
-          <a:xfrm>
-            <a:off x="411480" y="5559552"/>
-            <a:ext cx="5486400" cy="457200"/>
-          </a:xfrm>
-          <a:prstGeom prst="rect">
-            <a:avLst/>
-          </a:prstGeom>
-          <a:noFill/>
-          <a:ln/>
-        </p:spPr>
-        <p:txBody>
-          <a:bodyPr wrap="square" lIns="0" tIns="0" rIns="0" bIns="0" rtlCol="0" anchor="ctr"/>
-          <a:lstStyle/>
-          <a:p>
-            <a:pPr indent="0" marL="0">
-              <a:lnSpc>
-                <a:spcPts val="1050"/>
-              </a:lnSpc>
-              <a:buNone/>
-            </a:pPr>
-            <a:r>
-              <a:rPr lang="en-US" sz="850" dirty="0">
-                <a:solidFill>
-                  <a:srgbClr val="5F7269"/>
-                </a:solidFill>
-                <a:latin typeface="Calibri" pitchFamily="34" charset="0"/>
-                <a:ea typeface="Calibri" pitchFamily="34" charset="-122"/>
-                <a:cs typeface="Calibri" pitchFamily="34" charset="-120"/>
-              </a:rPr>
-              <a:t>Full detail — 13 tabs, 3,332 formulas, zero formula errors — in Chateau_in_the_Woods_5yr_Cash_Flow_Model.xlsx.  62 diligence questions with the answer assumed for each in Chateau_in_the_Woods_Due_Diligence_Questions.docx.</a:t>
+              <a:t>Indiana values apartments at the lowest of the income, market and cost approaches — which is why assessed value here has not tracked trade prices. An earlier draft stepped taxes toward a share of the purchase price; the record does not support it, and correcting it is worth about 1.5 points of levered IRR. The risk is still priced, in Ladder C.</a:t>
             </a:r>
             <a:endParaRPr lang="en-US" sz="850" dirty="0"/>
           </a:p>
